--- a/Avance_1_TFG_Bastian_Darwit_v1.pptx
+++ b/Avance_1_TFG_Bastian_Darwit_v1.pptx
@@ -22,6 +22,12 @@
     <p:sldId id="306" r:id="rId106"/>
     <p:sldId id="307" r:id="rId107"/>
     <p:sldId id="308" r:id="rId108"/>
+    <p:sldId id="309" r:id="rId109"/>
+    <p:sldId id="310" r:id="rId110"/>
+    <p:sldId id="311" r:id="rId111"/>
+    <p:sldId id="312" r:id="rId112"/>
+    <p:sldId id="313" r:id="rId113"/>
+    <p:sldId id="314" r:id="rId114"/>
   </p:sldIdLst>
   <p:sldSz cx="9144000" cy="6858000" type="screen4x3"/>
   <p:notesSz cx="7053263" cy="9309100"/>
@@ -636,6 +642,1314 @@
     </a:lvl9pPr>
   </p:notesStyle>
 </p:notesMaster>
+</file>
+
+<file path=ppt/notesSlides/notesSlide1.xml><?xml version="1.0" encoding="utf-8"?>
+<p:notes xmlns:a="http://schemas.openxmlformats.org/drawingml/2006/main" xmlns:r="http://schemas.openxmlformats.org/officeDocument/2006/relationships" xmlns:p="http://schemas.openxmlformats.org/presentationml/2006/main">
+  <p:cSld>
+    <p:spTree>
+      <p:nvGrpSpPr>
+        <p:cNvPr id="1" name=""/>
+        <p:cNvGrpSpPr/>
+        <p:nvPr/>
+      </p:nvGrpSpPr>
+      <p:grpSpPr>
+        <a:xfrm>
+          <a:off x="0" y="0"/>
+          <a:ext cx="0" cy="0"/>
+          <a:chOff x="0" y="0"/>
+          <a:chExt cx="0" cy="0"/>
+        </a:xfrm>
+      </p:grpSpPr>
+      <p:sp>
+        <p:nvSpPr>
+          <p:cNvPr id="2" name="Marcador de imagen"/>
+          <p:cNvSpPr>
+            <a:spLocks noGrp="1" noRot="1" noChangeAspect="1"/>
+          </p:cNvSpPr>
+          <p:nvPr>
+            <p:ph type="sldImg"/>
+          </p:nvPr>
+        </p:nvSpPr>
+        <p:spPr/>
+      </p:sp>
+      <p:sp>
+        <p:nvSpPr>
+          <p:cNvPr id="3" name="Marcador de notas"/>
+          <p:cNvSpPr>
+            <a:spLocks noGrp="1"/>
+          </p:cNvSpPr>
+          <p:nvPr>
+            <p:ph type="body" idx="1"/>
+          </p:nvPr>
+        </p:nvSpPr>
+        <p:spPr/>
+        <p:txBody>
+          <a:bodyPr/>
+          <a:lstStyle/>
+          <a:p>
+            <a:r>
+              <a:rPr lang="es-CL" sz="1200" dirty="0"/>
+              <a:t>Tiempo sugerido: 0:20 · Acumulado: 0:20</a:t>
+            </a:r>
+          </a:p>
+          <a:p>
+            <a:endParaRPr lang="es-CL" sz="1200"/>
+          </a:p>
+          <a:p>
+            <a:r>
+              <a:rPr lang="es-CL" sz="1200" dirty="0"/>
+              <a:t>Saludo y presentación. Este es el primer avance del TFG; el</a:t>
+            </a:r>
+          </a:p>
+          <a:p>
+            <a:r>
+              <a:rPr lang="es-CL" sz="1200" dirty="0"/>
+              <a:t>anteproyecto fue aprobado y presentado el 8 de agosto.</a:t>
+            </a:r>
+          </a:p>
+        </p:txBody>
+      </p:sp>
+    </p:spTree>
+  </p:cSld>
+  <p:clrMapOvr>
+    <a:masterClrMapping/>
+  </p:clrMapOvr>
+</p:notes>
+</file>
+
+<file path=ppt/notesSlides/notesSlide10.xml><?xml version="1.0" encoding="utf-8"?>
+<p:notes xmlns:a="http://schemas.openxmlformats.org/drawingml/2006/main" xmlns:r="http://schemas.openxmlformats.org/officeDocument/2006/relationships" xmlns:p="http://schemas.openxmlformats.org/presentationml/2006/main">
+  <p:cSld>
+    <p:spTree>
+      <p:nvGrpSpPr>
+        <p:cNvPr id="1" name=""/>
+        <p:cNvGrpSpPr/>
+        <p:nvPr/>
+      </p:nvGrpSpPr>
+      <p:grpSpPr>
+        <a:xfrm>
+          <a:off x="0" y="0"/>
+          <a:ext cx="0" cy="0"/>
+          <a:chOff x="0" y="0"/>
+          <a:chExt cx="0" cy="0"/>
+        </a:xfrm>
+      </p:grpSpPr>
+      <p:sp>
+        <p:nvSpPr>
+          <p:cNvPr id="2" name="Marcador de imagen"/>
+          <p:cNvSpPr>
+            <a:spLocks noGrp="1" noRot="1" noChangeAspect="1"/>
+          </p:cNvSpPr>
+          <p:nvPr>
+            <p:ph type="sldImg"/>
+          </p:nvPr>
+        </p:nvSpPr>
+        <p:spPr/>
+      </p:sp>
+      <p:sp>
+        <p:nvSpPr>
+          <p:cNvPr id="3" name="Marcador de notas"/>
+          <p:cNvSpPr>
+            <a:spLocks noGrp="1"/>
+          </p:cNvSpPr>
+          <p:nvPr>
+            <p:ph type="body" idx="1"/>
+          </p:nvPr>
+        </p:nvSpPr>
+        <p:spPr/>
+        <p:txBody>
+          <a:bodyPr/>
+          <a:lstStyle/>
+          <a:p>
+            <a:r>
+              <a:rPr lang="es-CL" sz="1200" dirty="0"/>
+              <a:t>Tiempo sugerido: 1:00 · Acumulado: 7:30</a:t>
+            </a:r>
+          </a:p>
+          <a:p>
+            <a:endParaRPr lang="es-CL" sz="1200"/>
+          </a:p>
+          <a:p>
+            <a:r>
+              <a:rPr lang="es-CL" sz="1200" dirty="0"/>
+              <a:t>Este es el resultado central del avance. Destacar el cambio de mirada:</a:t>
+            </a:r>
+          </a:p>
+          <a:p>
+            <a:r>
+              <a:rPr lang="es-CL" sz="1200" dirty="0"/>
+              <a:t>antes había ocho silos funcionales, ahora hay una sola cadena de</a:t>
+            </a:r>
+          </a:p>
+          <a:p>
+            <a:r>
+              <a:rPr lang="es-CL" sz="1200" dirty="0"/>
+              <a:t>información de punta a punta.</a:t>
+            </a:r>
+          </a:p>
+          <a:p>
+            <a:r>
+              <a:rPr lang="es-CL" sz="1200" dirty="0"/>
+              <a:t>El dato del arranque, en la necesidad estratégica y no en la vacante,</a:t>
+            </a:r>
+          </a:p>
+          <a:p>
+            <a:r>
+              <a:rPr lang="es-CL" sz="1200" dirty="0"/>
+              <a:t>suele generar preguntas: viene del orden que fija el APQC PCF.</a:t>
+            </a:r>
+          </a:p>
+        </p:txBody>
+      </p:sp>
+    </p:spTree>
+  </p:cSld>
+  <p:clrMapOvr>
+    <a:masterClrMapping/>
+  </p:clrMapOvr>
+</p:notes>
+</file>
+
+<file path=ppt/notesSlides/notesSlide11.xml><?xml version="1.0" encoding="utf-8"?>
+<p:notes xmlns:a="http://schemas.openxmlformats.org/drawingml/2006/main" xmlns:r="http://schemas.openxmlformats.org/officeDocument/2006/relationships" xmlns:p="http://schemas.openxmlformats.org/presentationml/2006/main">
+  <p:cSld>
+    <p:spTree>
+      <p:nvGrpSpPr>
+        <p:cNvPr id="1" name=""/>
+        <p:cNvGrpSpPr/>
+        <p:nvPr/>
+      </p:nvGrpSpPr>
+      <p:grpSpPr>
+        <a:xfrm>
+          <a:off x="0" y="0"/>
+          <a:ext cx="0" cy="0"/>
+          <a:chOff x="0" y="0"/>
+          <a:chExt cx="0" cy="0"/>
+        </a:xfrm>
+      </p:grpSpPr>
+      <p:sp>
+        <p:nvSpPr>
+          <p:cNvPr id="2" name="Marcador de imagen"/>
+          <p:cNvSpPr>
+            <a:spLocks noGrp="1" noRot="1" noChangeAspect="1"/>
+          </p:cNvSpPr>
+          <p:nvPr>
+            <p:ph type="sldImg"/>
+          </p:nvPr>
+        </p:nvSpPr>
+        <p:spPr/>
+      </p:sp>
+      <p:sp>
+        <p:nvSpPr>
+          <p:cNvPr id="3" name="Marcador de notas"/>
+          <p:cNvSpPr>
+            <a:spLocks noGrp="1"/>
+          </p:cNvSpPr>
+          <p:nvPr>
+            <p:ph type="body" idx="1"/>
+          </p:nvPr>
+        </p:nvSpPr>
+        <p:spPr/>
+        <p:txBody>
+          <a:bodyPr/>
+          <a:lstStyle/>
+          <a:p>
+            <a:r>
+              <a:rPr lang="es-CL" sz="1200" dirty="0"/>
+              <a:t>Tiempo sugerido: 0:50 · Acumulado: 8:20</a:t>
+            </a:r>
+          </a:p>
+          <a:p>
+            <a:endParaRPr lang="es-CL" sz="1200"/>
+          </a:p>
+          <a:p>
+            <a:r>
+              <a:rPr lang="es-CL" sz="1200" dirty="0"/>
+              <a:t>No leer la tabla. Señalar el patrón: el centro del ciclo, selección y</a:t>
+            </a:r>
+          </a:p>
+          <a:p>
+            <a:r>
+              <a:rPr lang="es-CL" sz="1200" dirty="0"/>
+              <a:t>formación, está documentado; los extremos no. Las dos fases con</a:t>
+            </a:r>
+          </a:p>
+          <a:p>
+            <a:r>
+              <a:rPr lang="es-CL" sz="1200" dirty="0"/>
+              <a:t>brechas quedan marcadas en rojo y son el puente a la lámina siguiente.</a:t>
+            </a:r>
+          </a:p>
+          <a:p>
+            <a:r>
+              <a:rPr lang="es-CL" sz="1200" dirty="0"/>
+              <a:t>Conclusión: la madurez conviene medirse por fase, no de forma agregada.</a:t>
+            </a:r>
+          </a:p>
+        </p:txBody>
+      </p:sp>
+    </p:spTree>
+  </p:cSld>
+  <p:clrMapOvr>
+    <a:masterClrMapping/>
+  </p:clrMapOvr>
+</p:notes>
+</file>
+
+<file path=ppt/notesSlides/notesSlide12.xml><?xml version="1.0" encoding="utf-8"?>
+<p:notes xmlns:a="http://schemas.openxmlformats.org/drawingml/2006/main" xmlns:r="http://schemas.openxmlformats.org/officeDocument/2006/relationships" xmlns:p="http://schemas.openxmlformats.org/presentationml/2006/main">
+  <p:cSld>
+    <p:spTree>
+      <p:nvGrpSpPr>
+        <p:cNvPr id="1" name=""/>
+        <p:cNvGrpSpPr/>
+        <p:nvPr/>
+      </p:nvGrpSpPr>
+      <p:grpSpPr>
+        <a:xfrm>
+          <a:off x="0" y="0"/>
+          <a:ext cx="0" cy="0"/>
+          <a:chOff x="0" y="0"/>
+          <a:chExt cx="0" cy="0"/>
+        </a:xfrm>
+      </p:grpSpPr>
+      <p:sp>
+        <p:nvSpPr>
+          <p:cNvPr id="2" name="Marcador de imagen"/>
+          <p:cNvSpPr>
+            <a:spLocks noGrp="1" noRot="1" noChangeAspect="1"/>
+          </p:cNvSpPr>
+          <p:nvPr>
+            <p:ph type="sldImg"/>
+          </p:nvPr>
+        </p:nvSpPr>
+        <p:spPr/>
+      </p:sp>
+      <p:sp>
+        <p:nvSpPr>
+          <p:cNvPr id="3" name="Marcador de notas"/>
+          <p:cNvSpPr>
+            <a:spLocks noGrp="1"/>
+          </p:cNvSpPr>
+          <p:nvPr>
+            <p:ph type="body" idx="1"/>
+          </p:nvPr>
+        </p:nvSpPr>
+        <p:spPr/>
+        <p:txBody>
+          <a:bodyPr/>
+          <a:lstStyle/>
+          <a:p>
+            <a:r>
+              <a:rPr lang="es-CL" sz="1200" dirty="0"/>
+              <a:t>Tiempo sugerido: 0:50 · Acumulado: 9:10</a:t>
+            </a:r>
+          </a:p>
+          <a:p>
+            <a:endParaRPr lang="es-CL" sz="1200"/>
+          </a:p>
+          <a:p>
+            <a:r>
+              <a:rPr lang="es-CL" sz="1200" dirty="0"/>
+              <a:t>Presentar las brechas como resultado, no como falta. Son el producto de</a:t>
+            </a:r>
+          </a:p>
+          <a:p>
+            <a:r>
+              <a:rPr lang="es-CL" sz="1200" dirty="0"/>
+              <a:t>la regla de trazabilidad: se declaran en lugar de rellenarse a ojo.</a:t>
+            </a:r>
+          </a:p>
+          <a:p>
+            <a:r>
+              <a:rPr lang="es-CL" sz="1200" dirty="0"/>
+              <a:t>La desvinculación es el espejo del onboarding y está sin documentar.</a:t>
+            </a:r>
+          </a:p>
+          <a:p>
+            <a:r>
+              <a:rPr lang="es-CL" sz="1200" dirty="0"/>
+              <a:t>Consecuencia para OE2: una tarea no descrita no se puede evaluar,</a:t>
+            </a:r>
+          </a:p>
+          <a:p>
+            <a:r>
+              <a:rPr lang="es-CL" sz="1200" dirty="0"/>
+              <a:t>de modo que cerrar estas brechas condiciona la cobertura alcanzable.</a:t>
+            </a:r>
+          </a:p>
+        </p:txBody>
+      </p:sp>
+    </p:spTree>
+  </p:cSld>
+  <p:clrMapOvr>
+    <a:masterClrMapping/>
+  </p:clrMapOvr>
+</p:notes>
+</file>
+
+<file path=ppt/notesSlides/notesSlide13.xml><?xml version="1.0" encoding="utf-8"?>
+<p:notes xmlns:a="http://schemas.openxmlformats.org/drawingml/2006/main" xmlns:r="http://schemas.openxmlformats.org/officeDocument/2006/relationships" xmlns:p="http://schemas.openxmlformats.org/presentationml/2006/main">
+  <p:cSld>
+    <p:spTree>
+      <p:nvGrpSpPr>
+        <p:cNvPr id="1" name=""/>
+        <p:cNvGrpSpPr/>
+        <p:nvPr/>
+      </p:nvGrpSpPr>
+      <p:grpSpPr>
+        <a:xfrm>
+          <a:off x="0" y="0"/>
+          <a:ext cx="0" cy="0"/>
+          <a:chOff x="0" y="0"/>
+          <a:chExt cx="0" cy="0"/>
+        </a:xfrm>
+      </p:grpSpPr>
+      <p:sp>
+        <p:nvSpPr>
+          <p:cNvPr id="2" name="Marcador de imagen"/>
+          <p:cNvSpPr>
+            <a:spLocks noGrp="1" noRot="1" noChangeAspect="1"/>
+          </p:cNvSpPr>
+          <p:nvPr>
+            <p:ph type="sldImg"/>
+          </p:nvPr>
+        </p:nvSpPr>
+        <p:spPr/>
+      </p:sp>
+      <p:sp>
+        <p:nvSpPr>
+          <p:cNvPr id="3" name="Marcador de notas"/>
+          <p:cNvSpPr>
+            <a:spLocks noGrp="1"/>
+          </p:cNvSpPr>
+          <p:nvPr>
+            <p:ph type="body" idx="1"/>
+          </p:nvPr>
+        </p:nvSpPr>
+        <p:spPr/>
+        <p:txBody>
+          <a:bodyPr/>
+          <a:lstStyle/>
+          <a:p>
+            <a:r>
+              <a:rPr lang="es-CL" sz="1200" dirty="0"/>
+              <a:t>Tiempo sugerido: 0:50 · Acumulado: 10:00</a:t>
+            </a:r>
+          </a:p>
+          <a:p>
+            <a:endParaRPr lang="es-CL" sz="1200"/>
+          </a:p>
+          <a:p>
+            <a:r>
+              <a:rPr lang="es-CL" sz="1200" dirty="0"/>
+              <a:t>Los 36 pasos son el argumento de valor para la empresa: se está</a:t>
+            </a:r>
+          </a:p>
+          <a:p>
+            <a:r>
+              <a:rPr lang="es-CL" sz="1200" dirty="0"/>
+              <a:t>documentando lo que se hace y no estaba escrito.</a:t>
+            </a:r>
+          </a:p>
+          <a:p>
+            <a:r>
+              <a:rPr lang="es-CL" sz="1200" dirty="0"/>
+              <a:t>Explicar bien el CAP en 0 %: es una consecuencia de la definición del</a:t>
+            </a:r>
+          </a:p>
+          <a:p>
+            <a:r>
+              <a:rPr lang="es-CL" sz="1200" dirty="0"/>
+              <a:t>indicador, no una falta de avance. Para eso se agregó la cobertura de</a:t>
+            </a:r>
+          </a:p>
+          <a:p>
+            <a:r>
+              <a:rPr lang="es-CL" sz="1200" dirty="0"/>
+              <a:t>trazabilidad, que sí refleja el estado de la primera etapa.</a:t>
+            </a:r>
+          </a:p>
+        </p:txBody>
+      </p:sp>
+    </p:spTree>
+  </p:cSld>
+  <p:clrMapOvr>
+    <a:masterClrMapping/>
+  </p:clrMapOvr>
+</p:notes>
+</file>
+
+<file path=ppt/notesSlides/notesSlide14.xml><?xml version="1.0" encoding="utf-8"?>
+<p:notes xmlns:a="http://schemas.openxmlformats.org/drawingml/2006/main" xmlns:r="http://schemas.openxmlformats.org/officeDocument/2006/relationships" xmlns:p="http://schemas.openxmlformats.org/presentationml/2006/main">
+  <p:cSld>
+    <p:spTree>
+      <p:nvGrpSpPr>
+        <p:cNvPr id="1" name=""/>
+        <p:cNvGrpSpPr/>
+        <p:nvPr/>
+      </p:nvGrpSpPr>
+      <p:grpSpPr>
+        <a:xfrm>
+          <a:off x="0" y="0"/>
+          <a:ext cx="0" cy="0"/>
+          <a:chOff x="0" y="0"/>
+          <a:chExt cx="0" cy="0"/>
+        </a:xfrm>
+      </p:grpSpPr>
+      <p:sp>
+        <p:nvSpPr>
+          <p:cNvPr id="2" name="Marcador de imagen"/>
+          <p:cNvSpPr>
+            <a:spLocks noGrp="1" noRot="1" noChangeAspect="1"/>
+          </p:cNvSpPr>
+          <p:nvPr>
+            <p:ph type="sldImg"/>
+          </p:nvPr>
+        </p:nvSpPr>
+        <p:spPr/>
+      </p:sp>
+      <p:sp>
+        <p:nvSpPr>
+          <p:cNvPr id="3" name="Marcador de notas"/>
+          <p:cNvSpPr>
+            <a:spLocks noGrp="1"/>
+          </p:cNvSpPr>
+          <p:nvPr>
+            <p:ph type="body" idx="1"/>
+          </p:nvPr>
+        </p:nvSpPr>
+        <p:spPr/>
+        <p:txBody>
+          <a:bodyPr/>
+          <a:lstStyle/>
+          <a:p>
+            <a:r>
+              <a:rPr lang="es-CL" sz="1200" dirty="0"/>
+              <a:t>Tiempo sugerido: 0:40 · Acumulado: 10:40</a:t>
+            </a:r>
+          </a:p>
+          <a:p>
+            <a:endParaRPr lang="es-CL" sz="1200"/>
+          </a:p>
+          <a:p>
+            <a:r>
+              <a:rPr lang="es-CL" sz="1200" dirty="0"/>
+              <a:t>Cerrar con compromisos concretos y fechas. Mencionar que el cierre de</a:t>
+            </a:r>
+          </a:p>
+          <a:p>
+            <a:r>
+              <a:rPr lang="es-CL" sz="1200" dirty="0"/>
+              <a:t>brechas corre en paralelo y no bloquea la segmentación de MP8.</a:t>
+            </a:r>
+          </a:p>
+          <a:p>
+            <a:r>
+              <a:rPr lang="es-CL" sz="1200" dirty="0"/>
+              <a:t>Dejar espacio para preguntas.</a:t>
+            </a:r>
+          </a:p>
+        </p:txBody>
+      </p:sp>
+    </p:spTree>
+  </p:cSld>
+  <p:clrMapOvr>
+    <a:masterClrMapping/>
+  </p:clrMapOvr>
+</p:notes>
+</file>
+
+<file path=ppt/notesSlides/notesSlide15.xml><?xml version="1.0" encoding="utf-8"?>
+<p:notes xmlns:a="http://schemas.openxmlformats.org/drawingml/2006/main" xmlns:r="http://schemas.openxmlformats.org/officeDocument/2006/relationships" xmlns:p="http://schemas.openxmlformats.org/presentationml/2006/main">
+  <p:cSld>
+    <p:spTree>
+      <p:nvGrpSpPr>
+        <p:cNvPr id="1" name=""/>
+        <p:cNvGrpSpPr/>
+        <p:nvPr/>
+      </p:nvGrpSpPr>
+      <p:grpSpPr>
+        <a:xfrm>
+          <a:off x="0" y="0"/>
+          <a:ext cx="0" cy="0"/>
+          <a:chOff x="0" y="0"/>
+          <a:chExt cx="0" cy="0"/>
+        </a:xfrm>
+      </p:grpSpPr>
+      <p:sp>
+        <p:nvSpPr>
+          <p:cNvPr id="2" name="Marcador de imagen"/>
+          <p:cNvSpPr>
+            <a:spLocks noGrp="1" noRot="1" noChangeAspect="1"/>
+          </p:cNvSpPr>
+          <p:nvPr>
+            <p:ph type="sldImg"/>
+          </p:nvPr>
+        </p:nvSpPr>
+        <p:spPr/>
+      </p:sp>
+      <p:sp>
+        <p:nvSpPr>
+          <p:cNvPr id="3" name="Marcador de notas"/>
+          <p:cNvSpPr>
+            <a:spLocks noGrp="1"/>
+          </p:cNvSpPr>
+          <p:nvPr>
+            <p:ph type="body" idx="1"/>
+          </p:nvPr>
+        </p:nvSpPr>
+        <p:spPr/>
+        <p:txBody>
+          <a:bodyPr/>
+          <a:lstStyle/>
+          <a:p>
+            <a:r>
+              <a:rPr lang="es-CL" sz="1200" dirty="0"/>
+              <a:t>Tiempo sugerido: 0:10 · Total: 10:50</a:t>
+            </a:r>
+          </a:p>
+          <a:p>
+            <a:endParaRPr lang="es-CL" sz="1200"/>
+          </a:p>
+          <a:p>
+            <a:r>
+              <a:rPr lang="es-CL" sz="1200" dirty="0"/>
+              <a:t>Preguntas probables de la comisión:</a:t>
+            </a:r>
+          </a:p>
+          <a:p>
+            <a:r>
+              <a:rPr lang="es-CL" sz="1200" dirty="0"/>
+              <a:t>1. ¿Por qué el CAP está en 0 %? Ver lámina 13.</a:t>
+            </a:r>
+          </a:p>
+          <a:p>
+            <a:r>
+              <a:rPr lang="es-CL" sz="1200" dirty="0"/>
+              <a:t>2. ¿El cambio de metodología altera el alcance? Ver lámina 7.</a:t>
+            </a:r>
+          </a:p>
+          <a:p>
+            <a:r>
+              <a:rPr lang="es-CL" sz="1200" dirty="0"/>
+              <a:t>3. ¿Cómo se resguarda la confidencialidad? Datos agregados, roles sin</a:t>
+            </a:r>
+          </a:p>
+          <a:p>
+            <a:r>
+              <a:rPr lang="es-CL" sz="1200" dirty="0"/>
+              <a:t>   nombres, e informe final marcado como reservado.</a:t>
+            </a:r>
+          </a:p>
+          <a:p>
+            <a:r>
+              <a:rPr lang="es-CL" sz="1200" dirty="0"/>
+              <a:t>4. ¿Qué pasa si las brechas no se cierran? Acotan la cobertura de OE2;</a:t>
+            </a:r>
+          </a:p>
+          <a:p>
+            <a:r>
+              <a:rPr lang="es-CL" sz="1200" dirty="0"/>
+              <a:t>   se declararían como limitación del estudio.</a:t>
+            </a:r>
+          </a:p>
+        </p:txBody>
+      </p:sp>
+    </p:spTree>
+  </p:cSld>
+  <p:clrMapOvr>
+    <a:masterClrMapping/>
+  </p:clrMapOvr>
+</p:notes>
+</file>
+
+<file path=ppt/notesSlides/notesSlide2.xml><?xml version="1.0" encoding="utf-8"?>
+<p:notes xmlns:a="http://schemas.openxmlformats.org/drawingml/2006/main" xmlns:r="http://schemas.openxmlformats.org/officeDocument/2006/relationships" xmlns:p="http://schemas.openxmlformats.org/presentationml/2006/main">
+  <p:cSld>
+    <p:spTree>
+      <p:nvGrpSpPr>
+        <p:cNvPr id="1" name=""/>
+        <p:cNvGrpSpPr/>
+        <p:nvPr/>
+      </p:nvGrpSpPr>
+      <p:grpSpPr>
+        <a:xfrm>
+          <a:off x="0" y="0"/>
+          <a:ext cx="0" cy="0"/>
+          <a:chOff x="0" y="0"/>
+          <a:chExt cx="0" cy="0"/>
+        </a:xfrm>
+      </p:grpSpPr>
+      <p:sp>
+        <p:nvSpPr>
+          <p:cNvPr id="2" name="Marcador de imagen"/>
+          <p:cNvSpPr>
+            <a:spLocks noGrp="1" noRot="1" noChangeAspect="1"/>
+          </p:cNvSpPr>
+          <p:nvPr>
+            <p:ph type="sldImg"/>
+          </p:nvPr>
+        </p:nvSpPr>
+        <p:spPr/>
+      </p:sp>
+      <p:sp>
+        <p:nvSpPr>
+          <p:cNvPr id="3" name="Marcador de notas"/>
+          <p:cNvSpPr>
+            <a:spLocks noGrp="1"/>
+          </p:cNvSpPr>
+          <p:nvPr>
+            <p:ph type="body" idx="1"/>
+          </p:nvPr>
+        </p:nvSpPr>
+        <p:spPr/>
+        <p:txBody>
+          <a:bodyPr/>
+          <a:lstStyle/>
+          <a:p>
+            <a:r>
+              <a:rPr lang="es-CL" sz="1200" dirty="0"/>
+              <a:t>Tiempo sugerido: 0:40 · Acumulado: 1:00</a:t>
+            </a:r>
+          </a:p>
+          <a:p>
+            <a:endParaRPr lang="es-CL" sz="1200"/>
+          </a:p>
+          <a:p>
+            <a:r>
+              <a:rPr lang="es-CL" sz="1200" dirty="0"/>
+              <a:t>El título no cambió. Dejar claro desde el inicio que es una propuesta:</a:t>
+            </a:r>
+          </a:p>
+          <a:p>
+            <a:r>
+              <a:rPr lang="es-CL" sz="1200" dirty="0"/>
+              <a:t>se diseña el sistema, la implementación es decisión de la compañía.</a:t>
+            </a:r>
+          </a:p>
+          <a:p>
+            <a:r>
+              <a:rPr lang="es-CL" sz="1200" dirty="0"/>
+              <a:t>Mencionar que MP8 es transversal a los tres negocios, no solo celulosa.</a:t>
+            </a:r>
+          </a:p>
+        </p:txBody>
+      </p:sp>
+    </p:spTree>
+  </p:cSld>
+  <p:clrMapOvr>
+    <a:masterClrMapping/>
+  </p:clrMapOvr>
+</p:notes>
+</file>
+
+<file path=ppt/notesSlides/notesSlide3.xml><?xml version="1.0" encoding="utf-8"?>
+<p:notes xmlns:a="http://schemas.openxmlformats.org/drawingml/2006/main" xmlns:r="http://schemas.openxmlformats.org/officeDocument/2006/relationships" xmlns:p="http://schemas.openxmlformats.org/presentationml/2006/main">
+  <p:cSld>
+    <p:spTree>
+      <p:nvGrpSpPr>
+        <p:cNvPr id="1" name=""/>
+        <p:cNvGrpSpPr/>
+        <p:nvPr/>
+      </p:nvGrpSpPr>
+      <p:grpSpPr>
+        <a:xfrm>
+          <a:off x="0" y="0"/>
+          <a:ext cx="0" cy="0"/>
+          <a:chOff x="0" y="0"/>
+          <a:chExt cx="0" cy="0"/>
+        </a:xfrm>
+      </p:grpSpPr>
+      <p:sp>
+        <p:nvSpPr>
+          <p:cNvPr id="2" name="Marcador de imagen"/>
+          <p:cNvSpPr>
+            <a:spLocks noGrp="1" noRot="1" noChangeAspect="1"/>
+          </p:cNvSpPr>
+          <p:nvPr>
+            <p:ph type="sldImg"/>
+          </p:nvPr>
+        </p:nvSpPr>
+        <p:spPr/>
+      </p:sp>
+      <p:sp>
+        <p:nvSpPr>
+          <p:cNvPr id="3" name="Marcador de notas"/>
+          <p:cNvSpPr>
+            <a:spLocks noGrp="1"/>
+          </p:cNvSpPr>
+          <p:nvPr>
+            <p:ph type="body" idx="1"/>
+          </p:nvPr>
+        </p:nvSpPr>
+        <p:spPr/>
+        <p:txBody>
+          <a:bodyPr/>
+          <a:lstStyle/>
+          <a:p>
+            <a:r>
+              <a:rPr lang="es-CL" sz="1200" dirty="0"/>
+              <a:t>Tiempo sugerido: 0:50 · Acumulado: 1:50</a:t>
+            </a:r>
+          </a:p>
+          <a:p>
+            <a:endParaRPr lang="es-CL" sz="1200"/>
+          </a:p>
+          <a:p>
+            <a:r>
+              <a:rPr lang="es-CL" sz="1200" dirty="0"/>
+              <a:t>Los objetivos no cambiaron. Recalcar la secuencia de dependencia:</a:t>
+            </a:r>
+          </a:p>
+          <a:p>
+            <a:r>
+              <a:rPr lang="es-CL" sz="1200" dirty="0"/>
+              <a:t>sin arquitectura modelada no hay universo de tareas que evaluar,</a:t>
+            </a:r>
+          </a:p>
+          <a:p>
+            <a:r>
+              <a:rPr lang="es-CL" sz="1200" dirty="0"/>
+              <a:t>y sin evaluación no hay sistema que integrar.</a:t>
+            </a:r>
+          </a:p>
+          <a:p>
+            <a:r>
+              <a:rPr lang="es-CL" sz="1200" dirty="0"/>
+              <a:t>Anunciar que este avance se concentra en OE1.</a:t>
+            </a:r>
+          </a:p>
+        </p:txBody>
+      </p:sp>
+    </p:spTree>
+  </p:cSld>
+  <p:clrMapOvr>
+    <a:masterClrMapping/>
+  </p:clrMapOvr>
+</p:notes>
+</file>
+
+<file path=ppt/notesSlides/notesSlide4.xml><?xml version="1.0" encoding="utf-8"?>
+<p:notes xmlns:a="http://schemas.openxmlformats.org/drawingml/2006/main" xmlns:r="http://schemas.openxmlformats.org/officeDocument/2006/relationships" xmlns:p="http://schemas.openxmlformats.org/presentationml/2006/main">
+  <p:cSld>
+    <p:spTree>
+      <p:nvGrpSpPr>
+        <p:cNvPr id="1" name=""/>
+        <p:cNvGrpSpPr/>
+        <p:nvPr/>
+      </p:nvGrpSpPr>
+      <p:grpSpPr>
+        <a:xfrm>
+          <a:off x="0" y="0"/>
+          <a:ext cx="0" cy="0"/>
+          <a:chOff x="0" y="0"/>
+          <a:chExt cx="0" cy="0"/>
+        </a:xfrm>
+      </p:grpSpPr>
+      <p:sp>
+        <p:nvSpPr>
+          <p:cNvPr id="2" name="Marcador de imagen"/>
+          <p:cNvSpPr>
+            <a:spLocks noGrp="1" noRot="1" noChangeAspect="1"/>
+          </p:cNvSpPr>
+          <p:nvPr>
+            <p:ph type="sldImg"/>
+          </p:nvPr>
+        </p:nvSpPr>
+        <p:spPr/>
+      </p:sp>
+      <p:sp>
+        <p:nvSpPr>
+          <p:cNvPr id="3" name="Marcador de notas"/>
+          <p:cNvSpPr>
+            <a:spLocks noGrp="1"/>
+          </p:cNvSpPr>
+          <p:nvPr>
+            <p:ph type="body" idx="1"/>
+          </p:nvPr>
+        </p:nvSpPr>
+        <p:spPr/>
+        <p:txBody>
+          <a:bodyPr/>
+          <a:lstStyle/>
+          <a:p>
+            <a:r>
+              <a:rPr lang="es-CL" sz="1200" dirty="0"/>
+              <a:t>Tiempo sugerido: 0:50 · Acumulado: 2:40</a:t>
+            </a:r>
+          </a:p>
+          <a:p>
+            <a:endParaRPr lang="es-CL" sz="1200"/>
+          </a:p>
+          <a:p>
+            <a:r>
+              <a:rPr lang="es-CL" sz="1200" dirty="0"/>
+              <a:t>Esta es la lámina clave de metodología. Explicar por qué dos etapas:</a:t>
+            </a:r>
+          </a:p>
+          <a:p>
+            <a:r>
+              <a:rPr lang="es-CL" sz="1200" dirty="0"/>
+              <a:t>Arauco organiza por áreas funcionales, así que la jerarquía no existe</a:t>
+            </a:r>
+          </a:p>
+          <a:p>
+            <a:r>
+              <a:rPr lang="es-CL" sz="1200" dirty="0"/>
+              <a:t>como punto de partida. Derivarla del flujo evita suponer agrupaciones</a:t>
+            </a:r>
+          </a:p>
+          <a:p>
+            <a:r>
+              <a:rPr lang="es-CL" sz="1200" dirty="0"/>
+              <a:t>que la organización no tiene declaradas.</a:t>
+            </a:r>
+          </a:p>
+          <a:p>
+            <a:r>
+              <a:rPr lang="es-CL" sz="1200" dirty="0"/>
+              <a:t>La regla de trazabilidad es el resguardo metodológico: nada se inventa.</a:t>
+            </a:r>
+          </a:p>
+        </p:txBody>
+      </p:sp>
+    </p:spTree>
+  </p:cSld>
+  <p:clrMapOvr>
+    <a:masterClrMapping/>
+  </p:clrMapOvr>
+</p:notes>
+</file>
+
+<file path=ppt/notesSlides/notesSlide5.xml><?xml version="1.0" encoding="utf-8"?>
+<p:notes xmlns:a="http://schemas.openxmlformats.org/drawingml/2006/main" xmlns:r="http://schemas.openxmlformats.org/officeDocument/2006/relationships" xmlns:p="http://schemas.openxmlformats.org/presentationml/2006/main">
+  <p:cSld>
+    <p:spTree>
+      <p:nvGrpSpPr>
+        <p:cNvPr id="1" name=""/>
+        <p:cNvGrpSpPr/>
+        <p:nvPr/>
+      </p:nvGrpSpPr>
+      <p:grpSpPr>
+        <a:xfrm>
+          <a:off x="0" y="0"/>
+          <a:ext cx="0" cy="0"/>
+          <a:chOff x="0" y="0"/>
+          <a:chExt cx="0" cy="0"/>
+        </a:xfrm>
+      </p:grpSpPr>
+      <p:sp>
+        <p:nvSpPr>
+          <p:cNvPr id="2" name="Marcador de imagen"/>
+          <p:cNvSpPr>
+            <a:spLocks noGrp="1" noRot="1" noChangeAspect="1"/>
+          </p:cNvSpPr>
+          <p:nvPr>
+            <p:ph type="sldImg"/>
+          </p:nvPr>
+        </p:nvSpPr>
+        <p:spPr/>
+      </p:sp>
+      <p:sp>
+        <p:nvSpPr>
+          <p:cNvPr id="3" name="Marcador de notas"/>
+          <p:cNvSpPr>
+            <a:spLocks noGrp="1"/>
+          </p:cNvSpPr>
+          <p:nvPr>
+            <p:ph type="body" idx="1"/>
+          </p:nvPr>
+        </p:nvSpPr>
+        <p:spPr/>
+        <p:txBody>
+          <a:bodyPr/>
+          <a:lstStyle/>
+          <a:p>
+            <a:r>
+              <a:rPr lang="es-CL" sz="1200" dirty="0"/>
+              <a:t>Tiempo sugerido: 0:40 · Acumulado: 3:20</a:t>
+            </a:r>
+          </a:p>
+          <a:p>
+            <a:endParaRPr lang="es-CL" sz="1200"/>
+          </a:p>
+          <a:p>
+            <a:r>
+              <a:rPr lang="es-CL" sz="1200" dirty="0"/>
+              <a:t>No detenerse en cada atributo: mencionar que el riesgo residual es el</a:t>
+            </a:r>
+          </a:p>
+          <a:p>
+            <a:r>
+              <a:rPr lang="es-CL" sz="1200" dirty="0"/>
+              <a:t>que orienta la respuesta y conecta con OE3. Señalar que la evaluación</a:t>
+            </a:r>
+          </a:p>
+          <a:p>
+            <a:r>
+              <a:rPr lang="es-CL" sz="1200" dirty="0"/>
+              <a:t>se hará en talleres con los dueños de proceso.</a:t>
+            </a:r>
+          </a:p>
+        </p:txBody>
+      </p:sp>
+    </p:spTree>
+  </p:cSld>
+  <p:clrMapOvr>
+    <a:masterClrMapping/>
+  </p:clrMapOvr>
+</p:notes>
+</file>
+
+<file path=ppt/notesSlides/notesSlide6.xml><?xml version="1.0" encoding="utf-8"?>
+<p:notes xmlns:a="http://schemas.openxmlformats.org/drawingml/2006/main" xmlns:r="http://schemas.openxmlformats.org/officeDocument/2006/relationships" xmlns:p="http://schemas.openxmlformats.org/presentationml/2006/main">
+  <p:cSld>
+    <p:spTree>
+      <p:nvGrpSpPr>
+        <p:cNvPr id="1" name=""/>
+        <p:cNvGrpSpPr/>
+        <p:nvPr/>
+      </p:nvGrpSpPr>
+      <p:grpSpPr>
+        <a:xfrm>
+          <a:off x="0" y="0"/>
+          <a:ext cx="0" cy="0"/>
+          <a:chOff x="0" y="0"/>
+          <a:chExt cx="0" cy="0"/>
+        </a:xfrm>
+      </p:grpSpPr>
+      <p:sp>
+        <p:nvSpPr>
+          <p:cNvPr id="2" name="Marcador de imagen"/>
+          <p:cNvSpPr>
+            <a:spLocks noGrp="1" noRot="1" noChangeAspect="1"/>
+          </p:cNvSpPr>
+          <p:nvPr>
+            <p:ph type="sldImg"/>
+          </p:nvPr>
+        </p:nvSpPr>
+        <p:spPr/>
+      </p:sp>
+      <p:sp>
+        <p:nvSpPr>
+          <p:cNvPr id="3" name="Marcador de notas"/>
+          <p:cNvSpPr>
+            <a:spLocks noGrp="1"/>
+          </p:cNvSpPr>
+          <p:nvPr>
+            <p:ph type="body" idx="1"/>
+          </p:nvPr>
+        </p:nvSpPr>
+        <p:spPr/>
+        <p:txBody>
+          <a:bodyPr/>
+          <a:lstStyle/>
+          <a:p>
+            <a:r>
+              <a:rPr lang="es-CL" sz="1200" dirty="0"/>
+              <a:t>Tiempo sugerido: 0:40 · Acumulado: 4:00</a:t>
+            </a:r>
+          </a:p>
+          <a:p>
+            <a:endParaRPr lang="es-CL" sz="1200"/>
+          </a:p>
+          <a:p>
+            <a:r>
+              <a:rPr lang="es-CL" sz="1200" dirty="0"/>
+              <a:t>Insistir en la distinción entre catálogo y sistema: el sistema integra</a:t>
+            </a:r>
+          </a:p>
+          <a:p>
+            <a:r>
+              <a:rPr lang="es-CL" sz="1200" dirty="0"/>
+              <a:t>valoración, tratamiento, gobernanza y seguimiento.</a:t>
+            </a:r>
+          </a:p>
+          <a:p>
+            <a:r>
+              <a:rPr lang="es-CL" sz="1200" dirty="0"/>
+              <a:t>La tabla de indicadores sirve para anunciar cómo se medirá el logro,</a:t>
+            </a:r>
+          </a:p>
+          <a:p>
+            <a:r>
+              <a:rPr lang="es-CL" sz="1200" dirty="0"/>
+              <a:t>y se retoma al final con el estado actual de cada uno.</a:t>
+            </a:r>
+          </a:p>
+        </p:txBody>
+      </p:sp>
+    </p:spTree>
+  </p:cSld>
+  <p:clrMapOvr>
+    <a:masterClrMapping/>
+  </p:clrMapOvr>
+</p:notes>
+</file>
+
+<file path=ppt/notesSlides/notesSlide7.xml><?xml version="1.0" encoding="utf-8"?>
+<p:notes xmlns:a="http://schemas.openxmlformats.org/drawingml/2006/main" xmlns:r="http://schemas.openxmlformats.org/officeDocument/2006/relationships" xmlns:p="http://schemas.openxmlformats.org/presentationml/2006/main">
+  <p:cSld>
+    <p:spTree>
+      <p:nvGrpSpPr>
+        <p:cNvPr id="1" name=""/>
+        <p:cNvGrpSpPr/>
+        <p:nvPr/>
+      </p:nvGrpSpPr>
+      <p:grpSpPr>
+        <a:xfrm>
+          <a:off x="0" y="0"/>
+          <a:ext cx="0" cy="0"/>
+          <a:chOff x="0" y="0"/>
+          <a:chExt cx="0" cy="0"/>
+        </a:xfrm>
+      </p:grpSpPr>
+      <p:sp>
+        <p:nvSpPr>
+          <p:cNvPr id="2" name="Marcador de imagen"/>
+          <p:cNvSpPr>
+            <a:spLocks noGrp="1" noRot="1" noChangeAspect="1"/>
+          </p:cNvSpPr>
+          <p:nvPr>
+            <p:ph type="sldImg"/>
+          </p:nvPr>
+        </p:nvSpPr>
+        <p:spPr/>
+      </p:sp>
+      <p:sp>
+        <p:nvSpPr>
+          <p:cNvPr id="3" name="Marcador de notas"/>
+          <p:cNvSpPr>
+            <a:spLocks noGrp="1"/>
+          </p:cNvSpPr>
+          <p:nvPr>
+            <p:ph type="body" idx="1"/>
+          </p:nvPr>
+        </p:nvSpPr>
+        <p:spPr/>
+        <p:txBody>
+          <a:bodyPr/>
+          <a:lstStyle/>
+          <a:p>
+            <a:r>
+              <a:rPr lang="es-CL" sz="1200" dirty="0"/>
+              <a:t>Tiempo sugerido: 0:50 · Acumulado: 4:50</a:t>
+            </a:r>
+          </a:p>
+          <a:p>
+            <a:endParaRPr lang="es-CL" sz="1200"/>
+          </a:p>
+          <a:p>
+            <a:r>
+              <a:rPr lang="es-CL" sz="1200" dirty="0"/>
+              <a:t>Lámina importante ante la comisión. Ser explícito: lo que cambió es el</a:t>
+            </a:r>
+          </a:p>
+          <a:p>
+            <a:r>
+              <a:rPr lang="es-CL" sz="1200" dirty="0"/>
+              <a:t>modo de ejecutar el modelamiento y la programación, no el alcance</a:t>
+            </a:r>
+          </a:p>
+          <a:p>
+            <a:r>
+              <a:rPr lang="es-CL" sz="1200" dirty="0"/>
+              <a:t>comprometido. Cerrar con la frase de la última línea, que es la que</a:t>
+            </a:r>
+          </a:p>
+          <a:p>
+            <a:r>
+              <a:rPr lang="es-CL" sz="1200" dirty="0"/>
+              <a:t>responde la pregunta que probablemente hará la comisión.</a:t>
+            </a:r>
+          </a:p>
+        </p:txBody>
+      </p:sp>
+    </p:spTree>
+  </p:cSld>
+  <p:clrMapOvr>
+    <a:masterClrMapping/>
+  </p:clrMapOvr>
+</p:notes>
+</file>
+
+<file path=ppt/notesSlides/notesSlide8.xml><?xml version="1.0" encoding="utf-8"?>
+<p:notes xmlns:a="http://schemas.openxmlformats.org/drawingml/2006/main" xmlns:r="http://schemas.openxmlformats.org/officeDocument/2006/relationships" xmlns:p="http://schemas.openxmlformats.org/presentationml/2006/main">
+  <p:cSld>
+    <p:spTree>
+      <p:nvGrpSpPr>
+        <p:cNvPr id="1" name=""/>
+        <p:cNvGrpSpPr/>
+        <p:nvPr/>
+      </p:nvGrpSpPr>
+      <p:grpSpPr>
+        <a:xfrm>
+          <a:off x="0" y="0"/>
+          <a:ext cx="0" cy="0"/>
+          <a:chOff x="0" y="0"/>
+          <a:chExt cx="0" cy="0"/>
+        </a:xfrm>
+      </p:grpSpPr>
+      <p:sp>
+        <p:nvSpPr>
+          <p:cNvPr id="2" name="Marcador de imagen"/>
+          <p:cNvSpPr>
+            <a:spLocks noGrp="1" noRot="1" noChangeAspect="1"/>
+          </p:cNvSpPr>
+          <p:nvPr>
+            <p:ph type="sldImg"/>
+          </p:nvPr>
+        </p:nvSpPr>
+        <p:spPr/>
+      </p:sp>
+      <p:sp>
+        <p:nvSpPr>
+          <p:cNvPr id="3" name="Marcador de notas"/>
+          <p:cNvSpPr>
+            <a:spLocks noGrp="1"/>
+          </p:cNvSpPr>
+          <p:nvPr>
+            <p:ph type="body" idx="1"/>
+          </p:nvPr>
+        </p:nvSpPr>
+        <p:spPr/>
+        <p:txBody>
+          <a:bodyPr/>
+          <a:lstStyle/>
+          <a:p>
+            <a:r>
+              <a:rPr lang="es-CL" sz="1200" dirty="0"/>
+              <a:t>Tiempo sugerido: 0:50 · Acumulado: 5:40</a:t>
+            </a:r>
+          </a:p>
+          <a:p>
+            <a:endParaRPr lang="es-CL" sz="1200"/>
+          </a:p>
+          <a:p>
+            <a:r>
+              <a:rPr lang="es-CL" sz="1200" dirty="0"/>
+              <a:t>Recorrer solo las filas oscuras: lo completado. Señalar que MP21</a:t>
+            </a:r>
+          </a:p>
+          <a:p>
+            <a:r>
+              <a:rPr lang="es-CL" sz="1200" dirty="0"/>
+              <a:t>arranca en la semana 6 y que el segundo hito queda en la semana 13.</a:t>
+            </a:r>
+          </a:p>
+          <a:p>
+            <a:r>
+              <a:rPr lang="es-CL" sz="1200" dirty="0"/>
+              <a:t>Si preguntan por el desfase: el hito se adelantó de la semana 10 a la 5,</a:t>
+            </a:r>
+          </a:p>
+          <a:p>
+            <a:r>
+              <a:rPr lang="es-CL" sz="1200" dirty="0"/>
+              <a:t>de modo que se expone menos avance del originalmente previsto para</a:t>
+            </a:r>
+          </a:p>
+          <a:p>
+            <a:r>
+              <a:rPr lang="es-CL" sz="1200" dirty="0"/>
+              <a:t>este punto, y la programación total se mantiene en 20 semanas.</a:t>
+            </a:r>
+          </a:p>
+        </p:txBody>
+      </p:sp>
+    </p:spTree>
+  </p:cSld>
+  <p:clrMapOvr>
+    <a:masterClrMapping/>
+  </p:clrMapOvr>
+</p:notes>
+</file>
+
+<file path=ppt/notesSlides/notesSlide9.xml><?xml version="1.0" encoding="utf-8"?>
+<p:notes xmlns:a="http://schemas.openxmlformats.org/drawingml/2006/main" xmlns:r="http://schemas.openxmlformats.org/officeDocument/2006/relationships" xmlns:p="http://schemas.openxmlformats.org/presentationml/2006/main">
+  <p:cSld>
+    <p:spTree>
+      <p:nvGrpSpPr>
+        <p:cNvPr id="1" name=""/>
+        <p:cNvGrpSpPr/>
+        <p:nvPr/>
+      </p:nvGrpSpPr>
+      <p:grpSpPr>
+        <a:xfrm>
+          <a:off x="0" y="0"/>
+          <a:ext cx="0" cy="0"/>
+          <a:chOff x="0" y="0"/>
+          <a:chExt cx="0" cy="0"/>
+        </a:xfrm>
+      </p:grpSpPr>
+      <p:sp>
+        <p:nvSpPr>
+          <p:cNvPr id="2" name="Marcador de imagen"/>
+          <p:cNvSpPr>
+            <a:spLocks noGrp="1" noRot="1" noChangeAspect="1"/>
+          </p:cNvSpPr>
+          <p:nvPr>
+            <p:ph type="sldImg"/>
+          </p:nvPr>
+        </p:nvSpPr>
+        <p:spPr/>
+      </p:sp>
+      <p:sp>
+        <p:nvSpPr>
+          <p:cNvPr id="3" name="Marcador de notas"/>
+          <p:cNvSpPr>
+            <a:spLocks noGrp="1"/>
+          </p:cNvSpPr>
+          <p:nvPr>
+            <p:ph type="body" idx="1"/>
+          </p:nvPr>
+        </p:nvSpPr>
+        <p:spPr/>
+        <p:txBody>
+          <a:bodyPr/>
+          <a:lstStyle/>
+          <a:p>
+            <a:r>
+              <a:rPr lang="es-CL" sz="1200" dirty="0"/>
+              <a:t>Tiempo sugerido: 0:50 · Acumulado: 6:30</a:t>
+            </a:r>
+          </a:p>
+          <a:p>
+            <a:endParaRPr lang="es-CL" sz="1200"/>
+          </a:p>
+          <a:p>
+            <a:r>
+              <a:rPr lang="es-CL" sz="1200" dirty="0"/>
+              <a:t>Ser claro con los dos niveles de validación: hay revisión técnica con el</a:t>
+            </a:r>
+          </a:p>
+          <a:p>
+            <a:r>
+              <a:rPr lang="es-CL" sz="1200" dirty="0"/>
+              <a:t>líder de mejora continua, pero el acta formal es posterior. No presentar</a:t>
+            </a:r>
+          </a:p>
+          <a:p>
+            <a:r>
+              <a:rPr lang="es-CL" sz="1200" dirty="0"/>
+              <a:t>como validado lo que aún no lo está.</a:t>
+            </a:r>
+          </a:p>
+          <a:p>
+            <a:r>
+              <a:rPr lang="es-CL" sz="1200" dirty="0"/>
+              <a:t>Decir sin rodeos que MP21 no ha comenzado.</a:t>
+            </a:r>
+          </a:p>
+        </p:txBody>
+      </p:sp>
+    </p:spTree>
+  </p:cSld>
+  <p:clrMapOvr>
+    <a:masterClrMapping/>
+  </p:clrMapOvr>
+</p:notes>
 </file>
 
 <file path=ppt/slideLayouts/slideLayout1.xml><?xml version="1.0" encoding="utf-8"?>
@@ -10400,6 +11714,5034 @@
 </p:sld>
 </file>
 
+<file path=ppt/slides/slide10.xml><?xml version="1.0" encoding="utf-8"?>
+<p:sld xmlns:a="http://schemas.openxmlformats.org/drawingml/2006/main" xmlns:r="http://schemas.openxmlformats.org/officeDocument/2006/relationships" xmlns:p="http://schemas.openxmlformats.org/presentationml/2006/main">
+  <p:cSld>
+    <p:spTree>
+      <p:nvGrpSpPr>
+        <p:cNvPr id="1" name=""/>
+        <p:cNvGrpSpPr/>
+        <p:nvPr/>
+      </p:nvGrpSpPr>
+      <p:grpSpPr>
+        <a:xfrm>
+          <a:off x="0" y="0"/>
+          <a:ext cx="0" cy="0"/>
+          <a:chOff x="0" y="0"/>
+          <a:chExt cx="0" cy="0"/>
+        </a:xfrm>
+      </p:grpSpPr>
+      <p:sp>
+        <p:nvSpPr>
+          <p:cNvPr id="5" name="4 CuadroTexto"/>
+          <p:cNvSpPr txBox="1"/>
+          <p:nvPr/>
+        </p:nvSpPr>
+        <p:spPr>
+          <a:xfrm>
+            <a:off x="5675867" y="340990"/>
+            <a:ext cx="2337602" cy="252106"/>
+          </a:xfrm>
+          <a:prstGeom prst="rect">
+            <a:avLst/>
+          </a:prstGeom>
+          <a:noFill/>
+        </p:spPr>
+        <p:txBody>
+          <a:bodyPr wrap="square" lIns="82014" tIns="45697" rIns="82014" bIns="45697" rtlCol="0">
+            <a:spAutoFit/>
+          </a:bodyPr>
+          <a:lstStyle/>
+          <a:p>
+            <a:pPr algn="ctr"/>
+            <a:r>
+              <a:rPr lang="es-CL" sz="1000" b="1" dirty="0">
+                <a:solidFill>
+                  <a:prstClr val="black">
+                    <a:lumMod val="65000"/>
+                    <a:lumOff val="35000"/>
+                  </a:prstClr>
+                </a:solidFill>
+              </a:rPr>
+              <a:t>Sistema de gestión de riesgos MP8 y MP21</a:t>
+            </a:r>
+            <a:endParaRPr lang="es-CL" sz="1000"/>
+          </a:p>
+        </p:txBody>
+      </p:sp>
+      <p:sp>
+        <p:nvSpPr>
+          <p:cNvPr id="4" name="3 CuadroTexto"/>
+          <p:cNvSpPr txBox="1"/>
+          <p:nvPr/>
+        </p:nvSpPr>
+        <p:spPr>
+          <a:xfrm>
+            <a:off x="5740803" y="1034218"/>
+            <a:ext cx="2207735" cy="221341"/>
+          </a:xfrm>
+          <a:prstGeom prst="rect">
+            <a:avLst/>
+          </a:prstGeom>
+          <a:noFill/>
+        </p:spPr>
+        <p:txBody>
+          <a:bodyPr wrap="square" lIns="82014" tIns="45697" rIns="82014" bIns="45697" rtlCol="0">
+            <a:spAutoFit/>
+          </a:bodyPr>
+          <a:lstStyle/>
+          <a:p>
+            <a:pPr algn="ctr"/>
+            <a:r>
+              <a:rPr lang="es-CL" sz="900" dirty="0">
+                <a:solidFill>
+                  <a:prstClr val="white">
+                    <a:lumMod val="50000"/>
+                  </a:prstClr>
+                </a:solidFill>
+              </a:rPr>
+              <a:t>| </a:t>
+            </a:r>
+            <a:r>
+              <a:rPr lang="es-CL" sz="900" b="1" dirty="0">
+                <a:solidFill>
+                  <a:srgbClr val="1F497D">
+                    <a:lumMod val="75000"/>
+                  </a:srgbClr>
+                </a:solidFill>
+              </a:rPr>
+              <a:t>Estudiante: </a:t>
+            </a:r>
+            <a:r>
+              <a:rPr lang="es-CL" sz="900" dirty="0">
+                <a:solidFill>
+                  <a:srgbClr val="1F497D">
+                    <a:lumMod val="75000"/>
+                  </a:srgbClr>
+                </a:solidFill>
+              </a:rPr>
+              <a:t>Bastián Darwit Vera</a:t>
+            </a:r>
+            <a:r>
+              <a:rPr lang="es-CL" sz="900" dirty="0">
+                <a:solidFill>
+                  <a:prstClr val="white">
+                    <a:lumMod val="50000"/>
+                  </a:prstClr>
+                </a:solidFill>
+              </a:rPr>
+              <a:t> |</a:t>
+            </a:r>
+          </a:p>
+        </p:txBody>
+      </p:sp>
+      <p:sp>
+        <p:nvSpPr>
+          <p:cNvPr id="6" name="5 CuadroTexto"/>
+          <p:cNvSpPr txBox="1"/>
+          <p:nvPr/>
+        </p:nvSpPr>
+        <p:spPr>
+          <a:xfrm>
+            <a:off x="805865" y="1538381"/>
+            <a:ext cx="7077739" cy="852256"/>
+          </a:xfrm>
+          <a:prstGeom prst="rect">
+            <a:avLst/>
+          </a:prstGeom>
+          <a:noFill/>
+        </p:spPr>
+        <p:txBody>
+          <a:bodyPr wrap="square" lIns="82014" tIns="45697" rIns="82014" bIns="45697" rtlCol="0">
+            <a:spAutoFit/>
+          </a:bodyPr>
+          <a:lstStyle/>
+          <a:p>
+            <a:r>
+              <a:rPr lang="es-CL" sz="2000" b="1" dirty="0">
+                <a:solidFill>
+                  <a:prstClr val="black">
+                    <a:lumMod val="65000"/>
+                    <a:lumOff val="35000"/>
+                  </a:prstClr>
+                </a:solidFill>
+              </a:rPr>
+              <a:t>Resultados · El flujo único de información de MP8</a:t>
+            </a:r>
+            <a:endParaRPr lang="es-CL" sz="2000"/>
+          </a:p>
+        </p:txBody>
+      </p:sp>
+      <p:sp>
+        <p:nvSpPr>
+          <p:cNvPr id="8" name="7 CuadroTexto"/>
+          <p:cNvSpPr txBox="1"/>
+          <p:nvPr/>
+        </p:nvSpPr>
+        <p:spPr>
+          <a:xfrm>
+            <a:off x="323528" y="2450000"/>
+            <a:ext cx="4000000" cy="2600000"/>
+          </a:xfrm>
+          <a:prstGeom prst="rect">
+            <a:avLst/>
+          </a:prstGeom>
+          <a:noFill/>
+        </p:spPr>
+        <p:txBody>
+          <a:bodyPr wrap="square" lIns="91396" tIns="45697" rIns="91396" bIns="45697" rtlCol="0">
+            <a:spAutoFit/>
+          </a:bodyPr>
+          <a:lstStyle/>
+          <a:p>
+            <a:r>
+              <a:rPr lang="es-CL" sz="1400" b="1" dirty="0">
+                <a:solidFill>
+                  <a:srgbClr val="1F497D">
+                    <a:lumMod val="75000"/>
+                  </a:srgbClr>
+                </a:solidFill>
+              </a:rPr>
+              <a:t>Qué se levantó</a:t>
+            </a:r>
+            <a:endParaRPr lang="es-CL" sz="1400"/>
+          </a:p>
+          <a:p>
+            <a:pPr marL="228600" indent="-228600">
+              <a:spcBef>
+                <a:spcPts val="300"/>
+              </a:spcBef>
+              <a:buFont typeface="Wingdings" pitchFamily="2" charset="2"/>
+              <a:buChar char="q"/>
+            </a:pPr>
+            <a:r>
+              <a:rPr lang="es-CL" sz="1250" dirty="0">
+                <a:solidFill>
+                  <a:schemeClr val="tx2"/>
+                </a:solidFill>
+              </a:rPr>
+              <a:t>Una </a:t>
+            </a:r>
+            <a:r>
+              <a:rPr lang="es-CL" sz="1250" b="1" dirty="0">
+                <a:solidFill>
+                  <a:schemeClr val="tx2"/>
+                </a:solidFill>
+              </a:rPr>
+              <a:t>sola cadena continua</a:t>
+            </a:r>
+            <a:r>
+              <a:rPr lang="es-CL" sz="1250" dirty="0">
+                <a:solidFill>
+                  <a:schemeClr val="tx2"/>
+                </a:solidFill>
+              </a:rPr>
+              <a:t>, de 5 proveedores iniciales a 6 clientes finales, organizada en </a:t>
+            </a:r>
+            <a:r>
+              <a:rPr lang="es-CL" sz="1250" b="1" dirty="0">
+                <a:solidFill>
+                  <a:schemeClr val="tx2"/>
+                </a:solidFill>
+              </a:rPr>
+              <a:t>18 fases</a:t>
+            </a:r>
+            <a:r>
+              <a:rPr lang="es-CL" sz="1250" dirty="0">
+                <a:solidFill>
+                  <a:schemeClr val="tx2"/>
+                </a:solidFill>
+              </a:rPr>
+              <a:t>: 17 del ciclo de vida del trabajador y una banda transversal de datos y gobernanza.</a:t>
+            </a:r>
+            <a:endParaRPr lang="es-CL" sz="1250"/>
+          </a:p>
+          <a:p>
+            <a:pPr marL="228600" indent="-228600">
+              <a:spcBef>
+                <a:spcPts val="300"/>
+              </a:spcBef>
+              <a:buFont typeface="Wingdings" pitchFamily="2" charset="2"/>
+              <a:buChar char="q"/>
+            </a:pPr>
+            <a:r>
+              <a:rPr lang="es-CL" sz="1250" dirty="0">
+                <a:solidFill>
+                  <a:schemeClr val="tx2"/>
+                </a:solidFill>
+              </a:rPr>
+              <a:t>El flujo </a:t>
+            </a:r>
+            <a:r>
+              <a:rPr lang="es-CL" sz="1250" b="1" dirty="0">
+                <a:solidFill>
+                  <a:schemeClr val="tx2"/>
+                </a:solidFill>
+              </a:rPr>
+              <a:t>no arranca en la vacante</a:t>
+            </a:r>
+            <a:r>
+              <a:rPr lang="es-CL" sz="1250" dirty="0">
+                <a:solidFill>
+                  <a:schemeClr val="tx2"/>
+                </a:solidFill>
+              </a:rPr>
+              <a:t>, sino en la necesidad estratégica de dotación, según el orden del APQC PCF.</a:t>
+            </a:r>
+            <a:endParaRPr lang="es-CL" sz="1250"/>
+          </a:p>
+          <a:p>
+            <a:pPr marL="228600" indent="-228600">
+              <a:spcBef>
+                <a:spcPts val="300"/>
+              </a:spcBef>
+              <a:buFont typeface="Wingdings" pitchFamily="2" charset="2"/>
+              <a:buChar char="q"/>
+            </a:pPr>
+            <a:r>
+              <a:rPr lang="es-CL" sz="1250" b="1" dirty="0">
+                <a:solidFill>
+                  <a:schemeClr val="tx2"/>
+                </a:solidFill>
+              </a:rPr>
+              <a:t>198 elementos</a:t>
+            </a:r>
+            <a:r>
+              <a:rPr lang="es-CL" sz="1250" dirty="0">
+                <a:solidFill>
+                  <a:schemeClr val="tx2"/>
+                </a:solidFill>
+              </a:rPr>
+              <a:t> quedaron asociados a </a:t>
+            </a:r>
+            <a:r>
+              <a:rPr lang="es-CL" sz="1250" b="1" dirty="0">
+                <a:solidFill>
+                  <a:schemeClr val="tx2"/>
+                </a:solidFill>
+              </a:rPr>
+              <a:t>86 códigos</a:t>
+            </a:r>
+            <a:r>
+              <a:rPr lang="es-CL" sz="1250" dirty="0">
+                <a:solidFill>
+                  <a:schemeClr val="tx2"/>
+                </a:solidFill>
+              </a:rPr>
+              <a:t> del PCF, y 85 tienen responsable identificado.</a:t>
+            </a:r>
+            <a:endParaRPr lang="es-CL" sz="1250"/>
+          </a:p>
+        </p:txBody>
+      </p:sp>
+      <p:graphicFrame>
+        <p:nvGraphicFramePr>
+          <p:cNvPr id="20" name="Tabla 20"/>
+          <p:cNvGraphicFramePr>
+            <a:graphicFrameLocks noGrp="1"/>
+          </p:cNvGraphicFramePr>
+          <p:nvPr/>
+        </p:nvGraphicFramePr>
+        <p:xfrm>
+          <a:off x="4676456" y="2500000"/>
+          <a:ext cx="4000000" cy="2500000"/>
+        </p:xfrm>
+        <a:graphic>
+          <a:graphicData uri="http://schemas.openxmlformats.org/drawingml/2006/table">
+            <a:tbl>
+              <a:tblPr firstRow="1" bandRow="1"/>
+              <a:tblGrid>
+                <a:gridCol w="2500000"/>
+                <a:gridCol w="800000"/>
+                <a:gridCol w="700000"/>
+              </a:tblGrid>
+              <a:tr h="350">
+                <a:tc>
+                  <a:txBody>
+                    <a:bodyPr/>
+                    <a:lstStyle/>
+                    <a:p>
+                      <a:pPr/>
+                      <a:r>
+                        <a:rPr lang="es-CL" sz="950" b="1" dirty="0">
+                          <a:solidFill>
+                            <a:srgbClr val="FFFFFF"/>
+                          </a:solidFill>
+                        </a:rPr>
+                        <a:t>Procedencia</a:t>
+                      </a:r>
+                    </a:p>
+                  </a:txBody>
+                  <a:tcPr marL="45720" marR="45720" marT="27432" marB="27432" anchor="ctr">
+                    <a:solidFill>
+                      <a:srgbClr val="1F497D"/>
+                    </a:solidFill>
+                  </a:tcPr>
+                </a:tc>
+                <a:tc>
+                  <a:txBody>
+                    <a:bodyPr/>
+                    <a:lstStyle/>
+                    <a:p>
+                      <a:pPr algn="ctr"/>
+                      <a:r>
+                        <a:rPr lang="es-CL" sz="950" b="1" dirty="0">
+                          <a:solidFill>
+                            <a:srgbClr val="FFFFFF"/>
+                          </a:solidFill>
+                        </a:rPr>
+                        <a:t>N.º</a:t>
+                      </a:r>
+                    </a:p>
+                  </a:txBody>
+                  <a:tcPr marL="45720" marR="45720" marT="27432" marB="27432" anchor="ctr">
+                    <a:solidFill>
+                      <a:srgbClr val="1F497D"/>
+                    </a:solidFill>
+                  </a:tcPr>
+                </a:tc>
+                <a:tc>
+                  <a:txBody>
+                    <a:bodyPr/>
+                    <a:lstStyle/>
+                    <a:p>
+                      <a:pPr algn="ctr"/>
+                      <a:r>
+                        <a:rPr lang="es-CL" sz="950" b="1" dirty="0">
+                          <a:solidFill>
+                            <a:srgbClr val="FFFFFF"/>
+                          </a:solidFill>
+                        </a:rPr>
+                        <a:t>%</a:t>
+                      </a:r>
+                    </a:p>
+                  </a:txBody>
+                  <a:tcPr marL="45720" marR="45720" marT="27432" marB="27432" anchor="ctr">
+                    <a:solidFill>
+                      <a:srgbClr val="1F497D"/>
+                    </a:solidFill>
+                  </a:tcPr>
+                </a:tc>
+              </a:tr>
+              <a:tr h="355">
+                <a:tc>
+                  <a:txBody>
+                    <a:bodyPr/>
+                    <a:lstStyle/>
+                    <a:p>
+                      <a:pPr/>
+                      <a:r>
+                        <a:rPr lang="es-CL" sz="1000" dirty="0">
+                          <a:solidFill>
+                            <a:schemeClr val="tx2"/>
+                          </a:solidFill>
+                        </a:rPr>
+                        <a:t>Procedimiento vigente</a:t>
+                      </a:r>
+                    </a:p>
+                  </a:txBody>
+                  <a:tcPr marL="45720" marR="45720" marT="27432" marB="27432" anchor="ctr">
+                    <a:solidFill>
+                      <a:srgbClr val="F2F2F2"/>
+                    </a:solidFill>
+                  </a:tcPr>
+                </a:tc>
+                <a:tc>
+                  <a:txBody>
+                    <a:bodyPr/>
+                    <a:lstStyle/>
+                    <a:p>
+                      <a:pPr algn="ctr"/>
+                      <a:r>
+                        <a:rPr lang="es-CL" sz="1000" dirty="0">
+                          <a:solidFill>
+                            <a:schemeClr val="tx2"/>
+                          </a:solidFill>
+                        </a:rPr>
+                        <a:t>94</a:t>
+                      </a:r>
+                    </a:p>
+                  </a:txBody>
+                  <a:tcPr marL="45720" marR="45720" marT="27432" marB="27432" anchor="ctr">
+                    <a:solidFill>
+                      <a:srgbClr val="F2F2F2"/>
+                    </a:solidFill>
+                  </a:tcPr>
+                </a:tc>
+                <a:tc>
+                  <a:txBody>
+                    <a:bodyPr/>
+                    <a:lstStyle/>
+                    <a:p>
+                      <a:pPr algn="ctr"/>
+                      <a:r>
+                        <a:rPr lang="es-CL" sz="1000" dirty="0">
+                          <a:solidFill>
+                            <a:schemeClr val="tx2"/>
+                          </a:solidFill>
+                        </a:rPr>
+                        <a:t>36,0</a:t>
+                      </a:r>
+                    </a:p>
+                  </a:txBody>
+                  <a:tcPr marL="45720" marR="45720" marT="27432" marB="27432" anchor="ctr">
+                    <a:solidFill>
+                      <a:srgbClr val="F2F2F2"/>
+                    </a:solidFill>
+                  </a:tcPr>
+                </a:tc>
+              </a:tr>
+              <a:tr h="355">
+                <a:tc>
+                  <a:txBody>
+                    <a:bodyPr/>
+                    <a:lstStyle/>
+                    <a:p>
+                      <a:pPr/>
+                      <a:r>
+                        <a:rPr lang="es-CL" sz="1000" dirty="0">
+                          <a:solidFill>
+                            <a:schemeClr val="tx2"/>
+                          </a:solidFill>
+                        </a:rPr>
+                        <a:t>Insumo interno o PCF</a:t>
+                      </a:r>
+                    </a:p>
+                  </a:txBody>
+                  <a:tcPr marL="45720" marR="45720" marT="27432" marB="27432" anchor="ctr"/>
+                </a:tc>
+                <a:tc>
+                  <a:txBody>
+                    <a:bodyPr/>
+                    <a:lstStyle/>
+                    <a:p>
+                      <a:pPr algn="ctr"/>
+                      <a:r>
+                        <a:rPr lang="es-CL" sz="1000" dirty="0">
+                          <a:solidFill>
+                            <a:schemeClr val="tx2"/>
+                          </a:solidFill>
+                        </a:rPr>
+                        <a:t>92</a:t>
+                      </a:r>
+                    </a:p>
+                  </a:txBody>
+                  <a:tcPr marL="45720" marR="45720" marT="27432" marB="27432" anchor="ctr"/>
+                </a:tc>
+                <a:tc>
+                  <a:txBody>
+                    <a:bodyPr/>
+                    <a:lstStyle/>
+                    <a:p>
+                      <a:pPr algn="ctr"/>
+                      <a:r>
+                        <a:rPr lang="es-CL" sz="1000" dirty="0">
+                          <a:solidFill>
+                            <a:schemeClr val="tx2"/>
+                          </a:solidFill>
+                        </a:rPr>
+                        <a:t>35,2</a:t>
+                      </a:r>
+                    </a:p>
+                  </a:txBody>
+                  <a:tcPr marL="45720" marR="45720" marT="27432" marB="27432" anchor="ctr"/>
+                </a:tc>
+              </a:tr>
+              <a:tr h="355">
+                <a:tc>
+                  <a:txBody>
+                    <a:bodyPr/>
+                    <a:lstStyle/>
+                    <a:p>
+                      <a:pPr/>
+                      <a:r>
+                        <a:rPr lang="es-CL" sz="1000" dirty="0">
+                          <a:solidFill>
+                            <a:schemeClr val="tx2"/>
+                          </a:solidFill>
+                        </a:rPr>
+                        <a:t>Entrevista, sin documentar</a:t>
+                      </a:r>
+                    </a:p>
+                  </a:txBody>
+                  <a:tcPr marL="45720" marR="45720" marT="27432" marB="27432" anchor="ctr">
+                    <a:solidFill>
+                      <a:srgbClr val="F2F2F2"/>
+                    </a:solidFill>
+                  </a:tcPr>
+                </a:tc>
+                <a:tc>
+                  <a:txBody>
+                    <a:bodyPr/>
+                    <a:lstStyle/>
+                    <a:p>
+                      <a:pPr algn="ctr"/>
+                      <a:r>
+                        <a:rPr lang="es-CL" sz="1000" dirty="0">
+                          <a:solidFill>
+                            <a:schemeClr val="tx2"/>
+                          </a:solidFill>
+                        </a:rPr>
+                        <a:t>36</a:t>
+                      </a:r>
+                    </a:p>
+                  </a:txBody>
+                  <a:tcPr marL="45720" marR="45720" marT="27432" marB="27432" anchor="ctr">
+                    <a:solidFill>
+                      <a:srgbClr val="F2F2F2"/>
+                    </a:solidFill>
+                  </a:tcPr>
+                </a:tc>
+                <a:tc>
+                  <a:txBody>
+                    <a:bodyPr/>
+                    <a:lstStyle/>
+                    <a:p>
+                      <a:pPr algn="ctr"/>
+                      <a:r>
+                        <a:rPr lang="es-CL" sz="1000" dirty="0">
+                          <a:solidFill>
+                            <a:schemeClr val="tx2"/>
+                          </a:solidFill>
+                        </a:rPr>
+                        <a:t>13,8</a:t>
+                      </a:r>
+                    </a:p>
+                  </a:txBody>
+                  <a:tcPr marL="45720" marR="45720" marT="27432" marB="27432" anchor="ctr">
+                    <a:solidFill>
+                      <a:srgbClr val="F2F2F2"/>
+                    </a:solidFill>
+                  </a:tcPr>
+                </a:tc>
+              </a:tr>
+              <a:tr h="355">
+                <a:tc>
+                  <a:txBody>
+                    <a:bodyPr/>
+                    <a:lstStyle/>
+                    <a:p>
+                      <a:pPr/>
+                      <a:r>
+                        <a:rPr lang="es-CL" sz="1000" dirty="0">
+                          <a:solidFill>
+                            <a:schemeClr val="tx2"/>
+                          </a:solidFill>
+                        </a:rPr>
+                        <a:t>Brecha declarada</a:t>
+                      </a:r>
+                    </a:p>
+                  </a:txBody>
+                  <a:tcPr marL="45720" marR="45720" marT="27432" marB="27432" anchor="ctr"/>
+                </a:tc>
+                <a:tc>
+                  <a:txBody>
+                    <a:bodyPr/>
+                    <a:lstStyle/>
+                    <a:p>
+                      <a:pPr algn="ctr"/>
+                      <a:r>
+                        <a:rPr lang="es-CL" sz="1000" dirty="0">
+                          <a:solidFill>
+                            <a:schemeClr val="tx2"/>
+                          </a:solidFill>
+                        </a:rPr>
+                        <a:t>12</a:t>
+                      </a:r>
+                    </a:p>
+                  </a:txBody>
+                  <a:tcPr marL="45720" marR="45720" marT="27432" marB="27432" anchor="ctr"/>
+                </a:tc>
+                <a:tc>
+                  <a:txBody>
+                    <a:bodyPr/>
+                    <a:lstStyle/>
+                    <a:p>
+                      <a:pPr algn="ctr"/>
+                      <a:r>
+                        <a:rPr lang="es-CL" sz="1000" dirty="0">
+                          <a:solidFill>
+                            <a:schemeClr val="tx2"/>
+                          </a:solidFill>
+                        </a:rPr>
+                        <a:t>4,6</a:t>
+                      </a:r>
+                    </a:p>
+                  </a:txBody>
+                  <a:tcPr marL="45720" marR="45720" marT="27432" marB="27432" anchor="ctr"/>
+                </a:tc>
+              </a:tr>
+              <a:tr h="355">
+                <a:tc>
+                  <a:txBody>
+                    <a:bodyPr/>
+                    <a:lstStyle/>
+                    <a:p>
+                      <a:pPr/>
+                      <a:r>
+                        <a:rPr lang="es-CL" sz="1000" dirty="0">
+                          <a:solidFill>
+                            <a:schemeClr val="tx2"/>
+                          </a:solidFill>
+                        </a:rPr>
+                        <a:t>Auxiliares de notación</a:t>
+                      </a:r>
+                    </a:p>
+                  </a:txBody>
+                  <a:tcPr marL="45720" marR="45720" marT="27432" marB="27432" anchor="ctr">
+                    <a:solidFill>
+                      <a:srgbClr val="F2F2F2"/>
+                    </a:solidFill>
+                  </a:tcPr>
+                </a:tc>
+                <a:tc>
+                  <a:txBody>
+                    <a:bodyPr/>
+                    <a:lstStyle/>
+                    <a:p>
+                      <a:pPr algn="ctr"/>
+                      <a:r>
+                        <a:rPr lang="es-CL" sz="1000" dirty="0">
+                          <a:solidFill>
+                            <a:schemeClr val="tx2"/>
+                          </a:solidFill>
+                        </a:rPr>
+                        <a:t>27</a:t>
+                      </a:r>
+                    </a:p>
+                  </a:txBody>
+                  <a:tcPr marL="45720" marR="45720" marT="27432" marB="27432" anchor="ctr">
+                    <a:solidFill>
+                      <a:srgbClr val="F2F2F2"/>
+                    </a:solidFill>
+                  </a:tcPr>
+                </a:tc>
+                <a:tc>
+                  <a:txBody>
+                    <a:bodyPr/>
+                    <a:lstStyle/>
+                    <a:p>
+                      <a:pPr algn="ctr"/>
+                      <a:r>
+                        <a:rPr lang="es-CL" sz="1000" dirty="0">
+                          <a:solidFill>
+                            <a:schemeClr val="tx2"/>
+                          </a:solidFill>
+                        </a:rPr>
+                        <a:t>10,4</a:t>
+                      </a:r>
+                    </a:p>
+                  </a:txBody>
+                  <a:tcPr marL="45720" marR="45720" marT="27432" marB="27432" anchor="ctr">
+                    <a:solidFill>
+                      <a:srgbClr val="F2F2F2"/>
+                    </a:solidFill>
+                  </a:tcPr>
+                </a:tc>
+              </a:tr>
+              <a:tr h="355">
+                <a:tc>
+                  <a:txBody>
+                    <a:bodyPr/>
+                    <a:lstStyle/>
+                    <a:p>
+                      <a:pPr/>
+                      <a:r>
+                        <a:rPr lang="es-CL" sz="1000" b="1" dirty="0">
+                          <a:solidFill>
+                            <a:schemeClr val="tx2"/>
+                          </a:solidFill>
+                        </a:rPr>
+                        <a:t>Total</a:t>
+                      </a:r>
+                    </a:p>
+                  </a:txBody>
+                  <a:tcPr marL="45720" marR="45720" marT="27432" marB="27432" anchor="ctr">
+                    <a:solidFill>
+                      <a:srgbClr val="D9D9D9"/>
+                    </a:solidFill>
+                  </a:tcPr>
+                </a:tc>
+                <a:tc>
+                  <a:txBody>
+                    <a:bodyPr/>
+                    <a:lstStyle/>
+                    <a:p>
+                      <a:pPr algn="ctr"/>
+                      <a:r>
+                        <a:rPr lang="es-CL" sz="1000" b="1" dirty="0">
+                          <a:solidFill>
+                            <a:schemeClr val="tx2"/>
+                          </a:solidFill>
+                        </a:rPr>
+                        <a:t>261</a:t>
+                      </a:r>
+                    </a:p>
+                  </a:txBody>
+                  <a:tcPr marL="45720" marR="45720" marT="27432" marB="27432" anchor="ctr">
+                    <a:solidFill>
+                      <a:srgbClr val="D9D9D9"/>
+                    </a:solidFill>
+                  </a:tcPr>
+                </a:tc>
+                <a:tc>
+                  <a:txBody>
+                    <a:bodyPr/>
+                    <a:lstStyle/>
+                    <a:p>
+                      <a:pPr algn="ctr"/>
+                      <a:r>
+                        <a:rPr lang="es-CL" sz="1000" b="1" dirty="0">
+                          <a:solidFill>
+                            <a:schemeClr val="tx2"/>
+                          </a:solidFill>
+                        </a:rPr>
+                        <a:t>100</a:t>
+                      </a:r>
+                    </a:p>
+                  </a:txBody>
+                  <a:tcPr marL="45720" marR="45720" marT="27432" marB="27432" anchor="ctr">
+                    <a:solidFill>
+                      <a:srgbClr val="D9D9D9"/>
+                    </a:solidFill>
+                  </a:tcPr>
+                </a:tc>
+              </a:tr>
+            </a:tbl>
+          </a:graphicData>
+        </a:graphic>
+      </p:graphicFrame>
+      <p:sp>
+        <p:nvSpPr>
+          <p:cNvPr id="11" name="10 CuadroTexto"/>
+          <p:cNvSpPr txBox="1"/>
+          <p:nvPr/>
+        </p:nvSpPr>
+        <p:spPr>
+          <a:xfrm>
+            <a:off x="323528" y="6200000"/>
+            <a:ext cx="8352928" cy="450000"/>
+          </a:xfrm>
+          <a:prstGeom prst="rect">
+            <a:avLst/>
+          </a:prstGeom>
+          <a:noFill/>
+        </p:spPr>
+        <p:txBody>
+          <a:bodyPr wrap="square" lIns="91396" tIns="45697" rIns="91396" bIns="45697" rtlCol="0">
+            <a:spAutoFit/>
+          </a:bodyPr>
+          <a:lstStyle/>
+          <a:p>
+            <a:r>
+              <a:rPr lang="es-CL" sz="1000" i="1" dirty="0">
+                <a:solidFill>
+                  <a:prstClr val="black">
+                    <a:lumMod val="65000"/>
+                    <a:lumOff val="35000"/>
+                  </a:prstClr>
+                </a:solidFill>
+              </a:rPr>
+              <a:t>De los 261 elementos, 234 son pasos del proceso y 27 son auxiliares de la notación: decisiones, proveedores, clientes y sistemas.</a:t>
+            </a:r>
+            <a:endParaRPr lang="es-CL" sz="1000"/>
+          </a:p>
+        </p:txBody>
+      </p:sp>
+    </p:spTree>
+  </p:cSld>
+  <p:clrMapOvr>
+    <a:masterClrMapping/>
+  </p:clrMapOvr>
+</p:sld>
+</file>
+
+<file path=ppt/slides/slide11.xml><?xml version="1.0" encoding="utf-8"?>
+<p:sld xmlns:a="http://schemas.openxmlformats.org/drawingml/2006/main" xmlns:r="http://schemas.openxmlformats.org/officeDocument/2006/relationships" xmlns:p="http://schemas.openxmlformats.org/presentationml/2006/main">
+  <p:cSld>
+    <p:spTree>
+      <p:nvGrpSpPr>
+        <p:cNvPr id="1" name=""/>
+        <p:cNvGrpSpPr/>
+        <p:nvPr/>
+      </p:nvGrpSpPr>
+      <p:grpSpPr>
+        <a:xfrm>
+          <a:off x="0" y="0"/>
+          <a:ext cx="0" cy="0"/>
+          <a:chOff x="0" y="0"/>
+          <a:chExt cx="0" cy="0"/>
+        </a:xfrm>
+      </p:grpSpPr>
+      <p:sp>
+        <p:nvSpPr>
+          <p:cNvPr id="5" name="4 CuadroTexto"/>
+          <p:cNvSpPr txBox="1"/>
+          <p:nvPr/>
+        </p:nvSpPr>
+        <p:spPr>
+          <a:xfrm>
+            <a:off x="5675867" y="340990"/>
+            <a:ext cx="2337602" cy="252106"/>
+          </a:xfrm>
+          <a:prstGeom prst="rect">
+            <a:avLst/>
+          </a:prstGeom>
+          <a:noFill/>
+        </p:spPr>
+        <p:txBody>
+          <a:bodyPr wrap="square" lIns="82014" tIns="45697" rIns="82014" bIns="45697" rtlCol="0">
+            <a:spAutoFit/>
+          </a:bodyPr>
+          <a:lstStyle/>
+          <a:p>
+            <a:pPr algn="ctr"/>
+            <a:r>
+              <a:rPr lang="es-CL" sz="1000" b="1" dirty="0">
+                <a:solidFill>
+                  <a:prstClr val="black">
+                    <a:lumMod val="65000"/>
+                    <a:lumOff val="35000"/>
+                  </a:prstClr>
+                </a:solidFill>
+              </a:rPr>
+              <a:t>Sistema de gestión de riesgos MP8 y MP21</a:t>
+            </a:r>
+            <a:endParaRPr lang="es-CL" sz="1000"/>
+          </a:p>
+        </p:txBody>
+      </p:sp>
+      <p:sp>
+        <p:nvSpPr>
+          <p:cNvPr id="4" name="3 CuadroTexto"/>
+          <p:cNvSpPr txBox="1"/>
+          <p:nvPr/>
+        </p:nvSpPr>
+        <p:spPr>
+          <a:xfrm>
+            <a:off x="5740803" y="1034218"/>
+            <a:ext cx="2207735" cy="221341"/>
+          </a:xfrm>
+          <a:prstGeom prst="rect">
+            <a:avLst/>
+          </a:prstGeom>
+          <a:noFill/>
+        </p:spPr>
+        <p:txBody>
+          <a:bodyPr wrap="square" lIns="82014" tIns="45697" rIns="82014" bIns="45697" rtlCol="0">
+            <a:spAutoFit/>
+          </a:bodyPr>
+          <a:lstStyle/>
+          <a:p>
+            <a:pPr algn="ctr"/>
+            <a:r>
+              <a:rPr lang="es-CL" sz="900" dirty="0">
+                <a:solidFill>
+                  <a:prstClr val="white">
+                    <a:lumMod val="50000"/>
+                  </a:prstClr>
+                </a:solidFill>
+              </a:rPr>
+              <a:t>| </a:t>
+            </a:r>
+            <a:r>
+              <a:rPr lang="es-CL" sz="900" b="1" dirty="0">
+                <a:solidFill>
+                  <a:srgbClr val="1F497D">
+                    <a:lumMod val="75000"/>
+                  </a:srgbClr>
+                </a:solidFill>
+              </a:rPr>
+              <a:t>Estudiante: </a:t>
+            </a:r>
+            <a:r>
+              <a:rPr lang="es-CL" sz="900" dirty="0">
+                <a:solidFill>
+                  <a:srgbClr val="1F497D">
+                    <a:lumMod val="75000"/>
+                  </a:srgbClr>
+                </a:solidFill>
+              </a:rPr>
+              <a:t>Bastián Darwit Vera</a:t>
+            </a:r>
+            <a:r>
+              <a:rPr lang="es-CL" sz="900" dirty="0">
+                <a:solidFill>
+                  <a:prstClr val="white">
+                    <a:lumMod val="50000"/>
+                  </a:prstClr>
+                </a:solidFill>
+              </a:rPr>
+              <a:t> |</a:t>
+            </a:r>
+          </a:p>
+        </p:txBody>
+      </p:sp>
+      <p:sp>
+        <p:nvSpPr>
+          <p:cNvPr id="6" name="5 CuadroTexto"/>
+          <p:cNvSpPr txBox="1"/>
+          <p:nvPr/>
+        </p:nvSpPr>
+        <p:spPr>
+          <a:xfrm>
+            <a:off x="805865" y="1538381"/>
+            <a:ext cx="7077739" cy="852256"/>
+          </a:xfrm>
+          <a:prstGeom prst="rect">
+            <a:avLst/>
+          </a:prstGeom>
+          <a:noFill/>
+        </p:spPr>
+        <p:txBody>
+          <a:bodyPr wrap="square" lIns="82014" tIns="45697" rIns="82014" bIns="45697" rtlCol="0">
+            <a:spAutoFit/>
+          </a:bodyPr>
+          <a:lstStyle/>
+          <a:p>
+            <a:r>
+              <a:rPr lang="es-CL" sz="2000" b="1" dirty="0">
+                <a:solidFill>
+                  <a:prstClr val="black">
+                    <a:lumMod val="65000"/>
+                    <a:lumOff val="35000"/>
+                  </a:prstClr>
+                </a:solidFill>
+              </a:rPr>
+              <a:t>Resultados · Cobertura del levantamiento por fase</a:t>
+            </a:r>
+            <a:endParaRPr lang="es-CL" sz="2000"/>
+          </a:p>
+        </p:txBody>
+      </p:sp>
+      <p:graphicFrame>
+        <p:nvGraphicFramePr>
+          <p:cNvPr id="20" name="Tabla 20"/>
+          <p:cNvGraphicFramePr>
+            <a:graphicFrameLocks noGrp="1"/>
+          </p:cNvGraphicFramePr>
+          <p:nvPr/>
+        </p:nvGraphicFramePr>
+        <p:xfrm>
+          <a:off x="323528" y="2450000"/>
+          <a:ext cx="4000000" cy="3300000"/>
+        </p:xfrm>
+        <a:graphic>
+          <a:graphicData uri="http://schemas.openxmlformats.org/drawingml/2006/table">
+            <a:tbl>
+              <a:tblPr firstRow="1" bandRow="1"/>
+              <a:tblGrid>
+                <a:gridCol w="2080000"/>
+                <a:gridCol w="480000"/>
+                <a:gridCol w="480000"/>
+                <a:gridCol w="480000"/>
+                <a:gridCol w="480000"/>
+              </a:tblGrid>
+              <a:tr h="300">
+                <a:tc>
+                  <a:txBody>
+                    <a:bodyPr/>
+                    <a:lstStyle/>
+                    <a:p>
+                      <a:pPr/>
+                      <a:r>
+                        <a:rPr lang="es-CL" sz="950" b="1" dirty="0">
+                          <a:solidFill>
+                            <a:srgbClr val="FFFFFF"/>
+                          </a:solidFill>
+                        </a:rPr>
+                        <a:t>Fase</a:t>
+                      </a:r>
+                    </a:p>
+                  </a:txBody>
+                  <a:tcPr marL="45720" marR="45720" marT="27432" marB="27432" anchor="ctr">
+                    <a:solidFill>
+                      <a:srgbClr val="1F497D"/>
+                    </a:solidFill>
+                  </a:tcPr>
+                </a:tc>
+                <a:tc>
+                  <a:txBody>
+                    <a:bodyPr/>
+                    <a:lstStyle/>
+                    <a:p>
+                      <a:pPr algn="ctr"/>
+                      <a:r>
+                        <a:rPr lang="es-CL" sz="950" b="1" dirty="0">
+                          <a:solidFill>
+                            <a:srgbClr val="FFFFFF"/>
+                          </a:solidFill>
+                        </a:rPr>
+                        <a:t>Doc</a:t>
+                      </a:r>
+                    </a:p>
+                  </a:txBody>
+                  <a:tcPr marL="45720" marR="45720" marT="27432" marB="27432" anchor="ctr">
+                    <a:solidFill>
+                      <a:srgbClr val="1F497D"/>
+                    </a:solidFill>
+                  </a:tcPr>
+                </a:tc>
+                <a:tc>
+                  <a:txBody>
+                    <a:bodyPr/>
+                    <a:lstStyle/>
+                    <a:p>
+                      <a:pPr algn="ctr"/>
+                      <a:r>
+                        <a:rPr lang="es-CL" sz="950" b="1" dirty="0">
+                          <a:solidFill>
+                            <a:srgbClr val="FFFFFF"/>
+                          </a:solidFill>
+                        </a:rPr>
+                        <a:t>Ent</a:t>
+                      </a:r>
+                    </a:p>
+                  </a:txBody>
+                  <a:tcPr marL="45720" marR="45720" marT="27432" marB="27432" anchor="ctr">
+                    <a:solidFill>
+                      <a:srgbClr val="1F497D"/>
+                    </a:solidFill>
+                  </a:tcPr>
+                </a:tc>
+                <a:tc>
+                  <a:txBody>
+                    <a:bodyPr/>
+                    <a:lstStyle/>
+                    <a:p>
+                      <a:pPr algn="ctr"/>
+                      <a:r>
+                        <a:rPr lang="es-CL" sz="950" b="1" dirty="0">
+                          <a:solidFill>
+                            <a:srgbClr val="FFFFFF"/>
+                          </a:solidFill>
+                        </a:rPr>
+                        <a:t>Prop</a:t>
+                      </a:r>
+                    </a:p>
+                  </a:txBody>
+                  <a:tcPr marL="45720" marR="45720" marT="27432" marB="27432" anchor="ctr">
+                    <a:solidFill>
+                      <a:srgbClr val="1F497D"/>
+                    </a:solidFill>
+                  </a:tcPr>
+                </a:tc>
+                <a:tc>
+                  <a:txBody>
+                    <a:bodyPr/>
+                    <a:lstStyle/>
+                    <a:p>
+                      <a:pPr algn="ctr"/>
+                      <a:r>
+                        <a:rPr lang="es-CL" sz="950" b="1" dirty="0">
+                          <a:solidFill>
+                            <a:srgbClr val="FFFFFF"/>
+                          </a:solidFill>
+                        </a:rPr>
+                        <a:t>Bre</a:t>
+                      </a:r>
+                    </a:p>
+                  </a:txBody>
+                  <a:tcPr marL="45720" marR="45720" marT="27432" marB="27432" anchor="ctr">
+                    <a:solidFill>
+                      <a:srgbClr val="1F497D"/>
+                    </a:solidFill>
+                  </a:tcPr>
+                </a:tc>
+              </a:tr>
+              <a:tr h="300">
+                <a:tc>
+                  <a:txBody>
+                    <a:bodyPr/>
+                    <a:lstStyle/>
+                    <a:p>
+                      <a:pPr/>
+                      <a:r>
+                        <a:rPr lang="es-CL" sz="850" dirty="0">
+                          <a:solidFill>
+                            <a:schemeClr val="tx2"/>
+                          </a:solidFill>
+                        </a:rPr>
+                        <a:t>F1 Necesidad y dotación</a:t>
+                      </a:r>
+                    </a:p>
+                  </a:txBody>
+                  <a:tcPr marL="45720" marR="45720" marT="27432" marB="27432" anchor="ctr">
+                    <a:solidFill>
+                      <a:srgbClr val="F2F2F2"/>
+                    </a:solidFill>
+                  </a:tcPr>
+                </a:tc>
+                <a:tc>
+                  <a:txBody>
+                    <a:bodyPr/>
+                    <a:lstStyle/>
+                    <a:p>
+                      <a:pPr algn="ctr"/>
+                      <a:r>
+                        <a:rPr lang="es-CL" sz="850" dirty="0">
+                          <a:solidFill>
+                            <a:schemeClr val="tx2"/>
+                          </a:solidFill>
+                        </a:rPr>
+                        <a:t>·</a:t>
+                      </a:r>
+                    </a:p>
+                  </a:txBody>
+                  <a:tcPr marL="45720" marR="45720" marT="27432" marB="27432" anchor="ctr">
+                    <a:solidFill>
+                      <a:srgbClr val="F2F2F2"/>
+                    </a:solidFill>
+                  </a:tcPr>
+                </a:tc>
+                <a:tc>
+                  <a:txBody>
+                    <a:bodyPr/>
+                    <a:lstStyle/>
+                    <a:p>
+                      <a:pPr algn="ctr"/>
+                      <a:r>
+                        <a:rPr lang="es-CL" sz="850" dirty="0">
+                          <a:solidFill>
+                            <a:schemeClr val="tx2"/>
+                          </a:solidFill>
+                        </a:rPr>
+                        <a:t>·</a:t>
+                      </a:r>
+                    </a:p>
+                  </a:txBody>
+                  <a:tcPr marL="45720" marR="45720" marT="27432" marB="27432" anchor="ctr">
+                    <a:solidFill>
+                      <a:srgbClr val="F2F2F2"/>
+                    </a:solidFill>
+                  </a:tcPr>
+                </a:tc>
+                <a:tc>
+                  <a:txBody>
+                    <a:bodyPr/>
+                    <a:lstStyle/>
+                    <a:p>
+                      <a:pPr algn="ctr"/>
+                      <a:r>
+                        <a:rPr lang="es-CL" sz="850" dirty="0">
+                          <a:solidFill>
+                            <a:schemeClr val="tx2"/>
+                          </a:solidFill>
+                        </a:rPr>
+                        <a:t>11</a:t>
+                      </a:r>
+                    </a:p>
+                  </a:txBody>
+                  <a:tcPr marL="45720" marR="45720" marT="27432" marB="27432" anchor="ctr">
+                    <a:solidFill>
+                      <a:srgbClr val="F2F2F2"/>
+                    </a:solidFill>
+                  </a:tcPr>
+                </a:tc>
+                <a:tc>
+                  <a:txBody>
+                    <a:bodyPr/>
+                    <a:lstStyle/>
+                    <a:p>
+                      <a:pPr algn="ctr"/>
+                      <a:r>
+                        <a:rPr lang="es-CL" sz="850" dirty="0">
+                          <a:solidFill>
+                            <a:schemeClr val="tx2"/>
+                          </a:solidFill>
+                        </a:rPr>
+                        <a:t>·</a:t>
+                      </a:r>
+                    </a:p>
+                  </a:txBody>
+                  <a:tcPr marL="45720" marR="45720" marT="27432" marB="27432" anchor="ctr">
+                    <a:solidFill>
+                      <a:srgbClr val="F2F2F2"/>
+                    </a:solidFill>
+                  </a:tcPr>
+                </a:tc>
+              </a:tr>
+              <a:tr h="300">
+                <a:tc>
+                  <a:txBody>
+                    <a:bodyPr/>
+                    <a:lstStyle/>
+                    <a:p>
+                      <a:pPr/>
+                      <a:r>
+                        <a:rPr lang="es-CL" sz="850" dirty="0">
+                          <a:solidFill>
+                            <a:schemeClr val="tx2"/>
+                          </a:solidFill>
+                        </a:rPr>
+                        <a:t>F2 Valoración de cargo</a:t>
+                      </a:r>
+                    </a:p>
+                  </a:txBody>
+                  <a:tcPr marL="45720" marR="45720" marT="27432" marB="27432" anchor="ctr"/>
+                </a:tc>
+                <a:tc>
+                  <a:txBody>
+                    <a:bodyPr/>
+                    <a:lstStyle/>
+                    <a:p>
+                      <a:pPr algn="ctr"/>
+                      <a:r>
+                        <a:rPr lang="es-CL" sz="850" dirty="0">
+                          <a:solidFill>
+                            <a:schemeClr val="tx2"/>
+                          </a:solidFill>
+                        </a:rPr>
+                        <a:t>·</a:t>
+                      </a:r>
+                    </a:p>
+                  </a:txBody>
+                  <a:tcPr marL="45720" marR="45720" marT="27432" marB="27432" anchor="ctr"/>
+                </a:tc>
+                <a:tc>
+                  <a:txBody>
+                    <a:bodyPr/>
+                    <a:lstStyle/>
+                    <a:p>
+                      <a:pPr algn="ctr"/>
+                      <a:r>
+                        <a:rPr lang="es-CL" sz="850" dirty="0">
+                          <a:solidFill>
+                            <a:schemeClr val="tx2"/>
+                          </a:solidFill>
+                        </a:rPr>
+                        <a:t>6</a:t>
+                      </a:r>
+                    </a:p>
+                  </a:txBody>
+                  <a:tcPr marL="45720" marR="45720" marT="27432" marB="27432" anchor="ctr"/>
+                </a:tc>
+                <a:tc>
+                  <a:txBody>
+                    <a:bodyPr/>
+                    <a:lstStyle/>
+                    <a:p>
+                      <a:pPr algn="ctr"/>
+                      <a:r>
+                        <a:rPr lang="es-CL" sz="850" dirty="0">
+                          <a:solidFill>
+                            <a:schemeClr val="tx2"/>
+                          </a:solidFill>
+                        </a:rPr>
+                        <a:t>7</a:t>
+                      </a:r>
+                    </a:p>
+                  </a:txBody>
+                  <a:tcPr marL="45720" marR="45720" marT="27432" marB="27432" anchor="ctr"/>
+                </a:tc>
+                <a:tc>
+                  <a:txBody>
+                    <a:bodyPr/>
+                    <a:lstStyle/>
+                    <a:p>
+                      <a:pPr algn="ctr"/>
+                      <a:r>
+                        <a:rPr lang="es-CL" sz="850" dirty="0">
+                          <a:solidFill>
+                            <a:schemeClr val="tx2"/>
+                          </a:solidFill>
+                        </a:rPr>
+                        <a:t>·</a:t>
+                      </a:r>
+                    </a:p>
+                  </a:txBody>
+                  <a:tcPr marL="45720" marR="45720" marT="27432" marB="27432" anchor="ctr"/>
+                </a:tc>
+              </a:tr>
+              <a:tr h="300">
+                <a:tc>
+                  <a:txBody>
+                    <a:bodyPr/>
+                    <a:lstStyle/>
+                    <a:p>
+                      <a:pPr/>
+                      <a:r>
+                        <a:rPr lang="es-CL" sz="850" dirty="0">
+                          <a:solidFill>
+                            <a:schemeClr val="tx2"/>
+                          </a:solidFill>
+                        </a:rPr>
+                        <a:t>F3 Requisición y vacante</a:t>
+                      </a:r>
+                    </a:p>
+                  </a:txBody>
+                  <a:tcPr marL="45720" marR="45720" marT="27432" marB="27432" anchor="ctr">
+                    <a:solidFill>
+                      <a:srgbClr val="F2F2F2"/>
+                    </a:solidFill>
+                  </a:tcPr>
+                </a:tc>
+                <a:tc>
+                  <a:txBody>
+                    <a:bodyPr/>
+                    <a:lstStyle/>
+                    <a:p>
+                      <a:pPr algn="ctr"/>
+                      <a:r>
+                        <a:rPr lang="es-CL" sz="850" dirty="0">
+                          <a:solidFill>
+                            <a:schemeClr val="tx2"/>
+                          </a:solidFill>
+                        </a:rPr>
+                        <a:t>12</a:t>
+                      </a:r>
+                    </a:p>
+                  </a:txBody>
+                  <a:tcPr marL="45720" marR="45720" marT="27432" marB="27432" anchor="ctr">
+                    <a:solidFill>
+                      <a:srgbClr val="F2F2F2"/>
+                    </a:solidFill>
+                  </a:tcPr>
+                </a:tc>
+                <a:tc>
+                  <a:txBody>
+                    <a:bodyPr/>
+                    <a:lstStyle/>
+                    <a:p>
+                      <a:pPr algn="ctr"/>
+                      <a:r>
+                        <a:rPr lang="es-CL" sz="850" dirty="0">
+                          <a:solidFill>
+                            <a:schemeClr val="tx2"/>
+                          </a:solidFill>
+                        </a:rPr>
+                        <a:t>3</a:t>
+                      </a:r>
+                    </a:p>
+                  </a:txBody>
+                  <a:tcPr marL="45720" marR="45720" marT="27432" marB="27432" anchor="ctr">
+                    <a:solidFill>
+                      <a:srgbClr val="F2F2F2"/>
+                    </a:solidFill>
+                  </a:tcPr>
+                </a:tc>
+                <a:tc>
+                  <a:txBody>
+                    <a:bodyPr/>
+                    <a:lstStyle/>
+                    <a:p>
+                      <a:pPr algn="ctr"/>
+                      <a:r>
+                        <a:rPr lang="es-CL" sz="850" dirty="0">
+                          <a:solidFill>
+                            <a:schemeClr val="tx2"/>
+                          </a:solidFill>
+                        </a:rPr>
+                        <a:t>·</a:t>
+                      </a:r>
+                    </a:p>
+                  </a:txBody>
+                  <a:tcPr marL="45720" marR="45720" marT="27432" marB="27432" anchor="ctr">
+                    <a:solidFill>
+                      <a:srgbClr val="F2F2F2"/>
+                    </a:solidFill>
+                  </a:tcPr>
+                </a:tc>
+                <a:tc>
+                  <a:txBody>
+                    <a:bodyPr/>
+                    <a:lstStyle/>
+                    <a:p>
+                      <a:pPr algn="ctr"/>
+                      <a:r>
+                        <a:rPr lang="es-CL" sz="850" dirty="0">
+                          <a:solidFill>
+                            <a:schemeClr val="tx2"/>
+                          </a:solidFill>
+                        </a:rPr>
+                        <a:t>·</a:t>
+                      </a:r>
+                    </a:p>
+                  </a:txBody>
+                  <a:tcPr marL="45720" marR="45720" marT="27432" marB="27432" anchor="ctr">
+                    <a:solidFill>
+                      <a:srgbClr val="F2F2F2"/>
+                    </a:solidFill>
+                  </a:tcPr>
+                </a:tc>
+              </a:tr>
+              <a:tr h="300">
+                <a:tc>
+                  <a:txBody>
+                    <a:bodyPr/>
+                    <a:lstStyle/>
+                    <a:p>
+                      <a:pPr/>
+                      <a:r>
+                        <a:rPr lang="es-CL" sz="850" dirty="0">
+                          <a:solidFill>
+                            <a:schemeClr val="tx2"/>
+                          </a:solidFill>
+                        </a:rPr>
+                        <a:t>F4 Reclutamiento y CV</a:t>
+                      </a:r>
+                    </a:p>
+                  </a:txBody>
+                  <a:tcPr marL="45720" marR="45720" marT="27432" marB="27432" anchor="ctr"/>
+                </a:tc>
+                <a:tc>
+                  <a:txBody>
+                    <a:bodyPr/>
+                    <a:lstStyle/>
+                    <a:p>
+                      <a:pPr algn="ctr"/>
+                      <a:r>
+                        <a:rPr lang="es-CL" sz="850" dirty="0">
+                          <a:solidFill>
+                            <a:schemeClr val="tx2"/>
+                          </a:solidFill>
+                        </a:rPr>
+                        <a:t>7</a:t>
+                      </a:r>
+                    </a:p>
+                  </a:txBody>
+                  <a:tcPr marL="45720" marR="45720" marT="27432" marB="27432" anchor="ctr"/>
+                </a:tc>
+                <a:tc>
+                  <a:txBody>
+                    <a:bodyPr/>
+                    <a:lstStyle/>
+                    <a:p>
+                      <a:pPr algn="ctr"/>
+                      <a:r>
+                        <a:rPr lang="es-CL" sz="850" dirty="0">
+                          <a:solidFill>
+                            <a:schemeClr val="tx2"/>
+                          </a:solidFill>
+                        </a:rPr>
+                        <a:t>·</a:t>
+                      </a:r>
+                    </a:p>
+                  </a:txBody>
+                  <a:tcPr marL="45720" marR="45720" marT="27432" marB="27432" anchor="ctr"/>
+                </a:tc>
+                <a:tc>
+                  <a:txBody>
+                    <a:bodyPr/>
+                    <a:lstStyle/>
+                    <a:p>
+                      <a:pPr algn="ctr"/>
+                      <a:r>
+                        <a:rPr lang="es-CL" sz="850" dirty="0">
+                          <a:solidFill>
+                            <a:schemeClr val="tx2"/>
+                          </a:solidFill>
+                        </a:rPr>
+                        <a:t>2</a:t>
+                      </a:r>
+                    </a:p>
+                  </a:txBody>
+                  <a:tcPr marL="45720" marR="45720" marT="27432" marB="27432" anchor="ctr"/>
+                </a:tc>
+                <a:tc>
+                  <a:txBody>
+                    <a:bodyPr/>
+                    <a:lstStyle/>
+                    <a:p>
+                      <a:pPr algn="ctr"/>
+                      <a:r>
+                        <a:rPr lang="es-CL" sz="850" dirty="0">
+                          <a:solidFill>
+                            <a:schemeClr val="tx2"/>
+                          </a:solidFill>
+                        </a:rPr>
+                        <a:t>·</a:t>
+                      </a:r>
+                    </a:p>
+                  </a:txBody>
+                  <a:tcPr marL="45720" marR="45720" marT="27432" marB="27432" anchor="ctr"/>
+                </a:tc>
+              </a:tr>
+              <a:tr h="300">
+                <a:tc>
+                  <a:txBody>
+                    <a:bodyPr/>
+                    <a:lstStyle/>
+                    <a:p>
+                      <a:pPr/>
+                      <a:r>
+                        <a:rPr lang="es-CL" sz="850" dirty="0">
+                          <a:solidFill>
+                            <a:schemeClr val="tx2"/>
+                          </a:solidFill>
+                        </a:rPr>
+                        <a:t>F5 Revisión solicitante</a:t>
+                      </a:r>
+                    </a:p>
+                  </a:txBody>
+                  <a:tcPr marL="45720" marR="45720" marT="27432" marB="27432" anchor="ctr">
+                    <a:solidFill>
+                      <a:srgbClr val="F2F2F2"/>
+                    </a:solidFill>
+                  </a:tcPr>
+                </a:tc>
+                <a:tc>
+                  <a:txBody>
+                    <a:bodyPr/>
+                    <a:lstStyle/>
+                    <a:p>
+                      <a:pPr algn="ctr"/>
+                      <a:r>
+                        <a:rPr lang="es-CL" sz="850" dirty="0">
+                          <a:solidFill>
+                            <a:schemeClr val="tx2"/>
+                          </a:solidFill>
+                        </a:rPr>
+                        <a:t>6</a:t>
+                      </a:r>
+                    </a:p>
+                  </a:txBody>
+                  <a:tcPr marL="45720" marR="45720" marT="27432" marB="27432" anchor="ctr">
+                    <a:solidFill>
+                      <a:srgbClr val="F2F2F2"/>
+                    </a:solidFill>
+                  </a:tcPr>
+                </a:tc>
+                <a:tc>
+                  <a:txBody>
+                    <a:bodyPr/>
+                    <a:lstStyle/>
+                    <a:p>
+                      <a:pPr algn="ctr"/>
+                      <a:r>
+                        <a:rPr lang="es-CL" sz="850" dirty="0">
+                          <a:solidFill>
+                            <a:schemeClr val="tx2"/>
+                          </a:solidFill>
+                        </a:rPr>
+                        <a:t>1</a:t>
+                      </a:r>
+                    </a:p>
+                  </a:txBody>
+                  <a:tcPr marL="45720" marR="45720" marT="27432" marB="27432" anchor="ctr">
+                    <a:solidFill>
+                      <a:srgbClr val="F2F2F2"/>
+                    </a:solidFill>
+                  </a:tcPr>
+                </a:tc>
+                <a:tc>
+                  <a:txBody>
+                    <a:bodyPr/>
+                    <a:lstStyle/>
+                    <a:p>
+                      <a:pPr algn="ctr"/>
+                      <a:r>
+                        <a:rPr lang="es-CL" sz="850" dirty="0">
+                          <a:solidFill>
+                            <a:schemeClr val="tx2"/>
+                          </a:solidFill>
+                        </a:rPr>
+                        <a:t>·</a:t>
+                      </a:r>
+                    </a:p>
+                  </a:txBody>
+                  <a:tcPr marL="45720" marR="45720" marT="27432" marB="27432" anchor="ctr">
+                    <a:solidFill>
+                      <a:srgbClr val="F2F2F2"/>
+                    </a:solidFill>
+                  </a:tcPr>
+                </a:tc>
+                <a:tc>
+                  <a:txBody>
+                    <a:bodyPr/>
+                    <a:lstStyle/>
+                    <a:p>
+                      <a:pPr algn="ctr"/>
+                      <a:r>
+                        <a:rPr lang="es-CL" sz="850" dirty="0">
+                          <a:solidFill>
+                            <a:schemeClr val="tx2"/>
+                          </a:solidFill>
+                        </a:rPr>
+                        <a:t>·</a:t>
+                      </a:r>
+                    </a:p>
+                  </a:txBody>
+                  <a:tcPr marL="45720" marR="45720" marT="27432" marB="27432" anchor="ctr">
+                    <a:solidFill>
+                      <a:srgbClr val="F2F2F2"/>
+                    </a:solidFill>
+                  </a:tcPr>
+                </a:tc>
+              </a:tr>
+              <a:tr h="300">
+                <a:tc>
+                  <a:txBody>
+                    <a:bodyPr/>
+                    <a:lstStyle/>
+                    <a:p>
+                      <a:pPr/>
+                      <a:r>
+                        <a:rPr lang="es-CL" sz="850" dirty="0">
+                          <a:solidFill>
+                            <a:schemeClr val="tx2"/>
+                          </a:solidFill>
+                        </a:rPr>
+                        <a:t>F6 Evaluación psicolaboral</a:t>
+                      </a:r>
+                    </a:p>
+                  </a:txBody>
+                  <a:tcPr marL="45720" marR="45720" marT="27432" marB="27432" anchor="ctr"/>
+                </a:tc>
+                <a:tc>
+                  <a:txBody>
+                    <a:bodyPr/>
+                    <a:lstStyle/>
+                    <a:p>
+                      <a:pPr algn="ctr"/>
+                      <a:r>
+                        <a:rPr lang="es-CL" sz="850" dirty="0">
+                          <a:solidFill>
+                            <a:schemeClr val="tx2"/>
+                          </a:solidFill>
+                        </a:rPr>
+                        <a:t>9</a:t>
+                      </a:r>
+                    </a:p>
+                  </a:txBody>
+                  <a:tcPr marL="45720" marR="45720" marT="27432" marB="27432" anchor="ctr"/>
+                </a:tc>
+                <a:tc>
+                  <a:txBody>
+                    <a:bodyPr/>
+                    <a:lstStyle/>
+                    <a:p>
+                      <a:pPr algn="ctr"/>
+                      <a:r>
+                        <a:rPr lang="es-CL" sz="850" dirty="0">
+                          <a:solidFill>
+                            <a:schemeClr val="tx2"/>
+                          </a:solidFill>
+                        </a:rPr>
+                        <a:t>·</a:t>
+                      </a:r>
+                    </a:p>
+                  </a:txBody>
+                  <a:tcPr marL="45720" marR="45720" marT="27432" marB="27432" anchor="ctr"/>
+                </a:tc>
+                <a:tc>
+                  <a:txBody>
+                    <a:bodyPr/>
+                    <a:lstStyle/>
+                    <a:p>
+                      <a:pPr algn="ctr"/>
+                      <a:r>
+                        <a:rPr lang="es-CL" sz="850" dirty="0">
+                          <a:solidFill>
+                            <a:schemeClr val="tx2"/>
+                          </a:solidFill>
+                        </a:rPr>
+                        <a:t>2</a:t>
+                      </a:r>
+                    </a:p>
+                  </a:txBody>
+                  <a:tcPr marL="45720" marR="45720" marT="27432" marB="27432" anchor="ctr"/>
+                </a:tc>
+                <a:tc>
+                  <a:txBody>
+                    <a:bodyPr/>
+                    <a:lstStyle/>
+                    <a:p>
+                      <a:pPr algn="ctr"/>
+                      <a:r>
+                        <a:rPr lang="es-CL" sz="850" dirty="0">
+                          <a:solidFill>
+                            <a:schemeClr val="tx2"/>
+                          </a:solidFill>
+                        </a:rPr>
+                        <a:t>·</a:t>
+                      </a:r>
+                    </a:p>
+                  </a:txBody>
+                  <a:tcPr marL="45720" marR="45720" marT="27432" marB="27432" anchor="ctr"/>
+                </a:tc>
+              </a:tr>
+              <a:tr h="300">
+                <a:tc>
+                  <a:txBody>
+                    <a:bodyPr/>
+                    <a:lstStyle/>
+                    <a:p>
+                      <a:pPr/>
+                      <a:r>
+                        <a:rPr lang="es-CL" sz="850" dirty="0">
+                          <a:solidFill>
+                            <a:schemeClr val="tx2"/>
+                          </a:solidFill>
+                        </a:rPr>
+                        <a:t>F7 Entrevistas</a:t>
+                      </a:r>
+                    </a:p>
+                  </a:txBody>
+                  <a:tcPr marL="45720" marR="45720" marT="27432" marB="27432" anchor="ctr">
+                    <a:solidFill>
+                      <a:srgbClr val="F2F2F2"/>
+                    </a:solidFill>
+                  </a:tcPr>
+                </a:tc>
+                <a:tc>
+                  <a:txBody>
+                    <a:bodyPr/>
+                    <a:lstStyle/>
+                    <a:p>
+                      <a:pPr algn="ctr"/>
+                      <a:r>
+                        <a:rPr lang="es-CL" sz="850" dirty="0">
+                          <a:solidFill>
+                            <a:schemeClr val="tx2"/>
+                          </a:solidFill>
+                        </a:rPr>
+                        <a:t>6</a:t>
+                      </a:r>
+                    </a:p>
+                  </a:txBody>
+                  <a:tcPr marL="45720" marR="45720" marT="27432" marB="27432" anchor="ctr">
+                    <a:solidFill>
+                      <a:srgbClr val="F2F2F2"/>
+                    </a:solidFill>
+                  </a:tcPr>
+                </a:tc>
+                <a:tc>
+                  <a:txBody>
+                    <a:bodyPr/>
+                    <a:lstStyle/>
+                    <a:p>
+                      <a:pPr algn="ctr"/>
+                      <a:r>
+                        <a:rPr lang="es-CL" sz="850" dirty="0">
+                          <a:solidFill>
+                            <a:schemeClr val="tx2"/>
+                          </a:solidFill>
+                        </a:rPr>
+                        <a:t>2</a:t>
+                      </a:r>
+                    </a:p>
+                  </a:txBody>
+                  <a:tcPr marL="45720" marR="45720" marT="27432" marB="27432" anchor="ctr">
+                    <a:solidFill>
+                      <a:srgbClr val="F2F2F2"/>
+                    </a:solidFill>
+                  </a:tcPr>
+                </a:tc>
+                <a:tc>
+                  <a:txBody>
+                    <a:bodyPr/>
+                    <a:lstStyle/>
+                    <a:p>
+                      <a:pPr algn="ctr"/>
+                      <a:r>
+                        <a:rPr lang="es-CL" sz="850" dirty="0">
+                          <a:solidFill>
+                            <a:schemeClr val="tx2"/>
+                          </a:solidFill>
+                        </a:rPr>
+                        <a:t>2</a:t>
+                      </a:r>
+                    </a:p>
+                  </a:txBody>
+                  <a:tcPr marL="45720" marR="45720" marT="27432" marB="27432" anchor="ctr">
+                    <a:solidFill>
+                      <a:srgbClr val="F2F2F2"/>
+                    </a:solidFill>
+                  </a:tcPr>
+                </a:tc>
+                <a:tc>
+                  <a:txBody>
+                    <a:bodyPr/>
+                    <a:lstStyle/>
+                    <a:p>
+                      <a:pPr algn="ctr"/>
+                      <a:r>
+                        <a:rPr lang="es-CL" sz="850" dirty="0">
+                          <a:solidFill>
+                            <a:schemeClr val="tx2"/>
+                          </a:solidFill>
+                        </a:rPr>
+                        <a:t>·</a:t>
+                      </a:r>
+                    </a:p>
+                  </a:txBody>
+                  <a:tcPr marL="45720" marR="45720" marT="27432" marB="27432" anchor="ctr">
+                    <a:solidFill>
+                      <a:srgbClr val="F2F2F2"/>
+                    </a:solidFill>
+                  </a:tcPr>
+                </a:tc>
+              </a:tr>
+              <a:tr h="300">
+                <a:tc>
+                  <a:txBody>
+                    <a:bodyPr/>
+                    <a:lstStyle/>
+                    <a:p>
+                      <a:pPr/>
+                      <a:r>
+                        <a:rPr lang="es-CL" sz="850" dirty="0">
+                          <a:solidFill>
+                            <a:schemeClr val="tx2"/>
+                          </a:solidFill>
+                        </a:rPr>
+                        <a:t>F8 Examen preocupacional</a:t>
+                      </a:r>
+                    </a:p>
+                  </a:txBody>
+                  <a:tcPr marL="45720" marR="45720" marT="27432" marB="27432" anchor="ctr"/>
+                </a:tc>
+                <a:tc>
+                  <a:txBody>
+                    <a:bodyPr/>
+                    <a:lstStyle/>
+                    <a:p>
+                      <a:pPr algn="ctr"/>
+                      <a:r>
+                        <a:rPr lang="es-CL" sz="850" dirty="0">
+                          <a:solidFill>
+                            <a:schemeClr val="tx2"/>
+                          </a:solidFill>
+                        </a:rPr>
+                        <a:t>5</a:t>
+                      </a:r>
+                    </a:p>
+                  </a:txBody>
+                  <a:tcPr marL="45720" marR="45720" marT="27432" marB="27432" anchor="ctr"/>
+                </a:tc>
+                <a:tc>
+                  <a:txBody>
+                    <a:bodyPr/>
+                    <a:lstStyle/>
+                    <a:p>
+                      <a:pPr algn="ctr"/>
+                      <a:r>
+                        <a:rPr lang="es-CL" sz="850" dirty="0">
+                          <a:solidFill>
+                            <a:schemeClr val="tx2"/>
+                          </a:solidFill>
+                        </a:rPr>
+                        <a:t>5</a:t>
+                      </a:r>
+                    </a:p>
+                  </a:txBody>
+                  <a:tcPr marL="45720" marR="45720" marT="27432" marB="27432" anchor="ctr"/>
+                </a:tc>
+                <a:tc>
+                  <a:txBody>
+                    <a:bodyPr/>
+                    <a:lstStyle/>
+                    <a:p>
+                      <a:pPr algn="ctr"/>
+                      <a:r>
+                        <a:rPr lang="es-CL" sz="850" dirty="0">
+                          <a:solidFill>
+                            <a:schemeClr val="tx2"/>
+                          </a:solidFill>
+                        </a:rPr>
+                        <a:t>·</a:t>
+                      </a:r>
+                    </a:p>
+                  </a:txBody>
+                  <a:tcPr marL="45720" marR="45720" marT="27432" marB="27432" anchor="ctr"/>
+                </a:tc>
+                <a:tc>
+                  <a:txBody>
+                    <a:bodyPr/>
+                    <a:lstStyle/>
+                    <a:p>
+                      <a:pPr algn="ctr"/>
+                      <a:r>
+                        <a:rPr lang="es-CL" sz="850" dirty="0">
+                          <a:solidFill>
+                            <a:schemeClr val="tx2"/>
+                          </a:solidFill>
+                        </a:rPr>
+                        <a:t>·</a:t>
+                      </a:r>
+                    </a:p>
+                  </a:txBody>
+                  <a:tcPr marL="45720" marR="45720" marT="27432" marB="27432" anchor="ctr"/>
+                </a:tc>
+              </a:tr>
+              <a:tr h="300">
+                <a:tc>
+                  <a:txBody>
+                    <a:bodyPr/>
+                    <a:lstStyle/>
+                    <a:p>
+                      <a:pPr/>
+                      <a:r>
+                        <a:rPr lang="es-CL" sz="850" dirty="0">
+                          <a:solidFill>
+                            <a:schemeClr val="tx2"/>
+                          </a:solidFill>
+                        </a:rPr>
+                        <a:t>F9 Contratación</a:t>
+                      </a:r>
+                    </a:p>
+                  </a:txBody>
+                  <a:tcPr marL="45720" marR="45720" marT="27432" marB="27432" anchor="ctr">
+                    <a:solidFill>
+                      <a:srgbClr val="F2F2F2"/>
+                    </a:solidFill>
+                  </a:tcPr>
+                </a:tc>
+                <a:tc>
+                  <a:txBody>
+                    <a:bodyPr/>
+                    <a:lstStyle/>
+                    <a:p>
+                      <a:pPr algn="ctr"/>
+                      <a:r>
+                        <a:rPr lang="es-CL" sz="850" dirty="0">
+                          <a:solidFill>
+                            <a:schemeClr val="tx2"/>
+                          </a:solidFill>
+                        </a:rPr>
+                        <a:t>8</a:t>
+                      </a:r>
+                    </a:p>
+                  </a:txBody>
+                  <a:tcPr marL="45720" marR="45720" marT="27432" marB="27432" anchor="ctr">
+                    <a:solidFill>
+                      <a:srgbClr val="F2F2F2"/>
+                    </a:solidFill>
+                  </a:tcPr>
+                </a:tc>
+                <a:tc>
+                  <a:txBody>
+                    <a:bodyPr/>
+                    <a:lstStyle/>
+                    <a:p>
+                      <a:pPr algn="ctr"/>
+                      <a:r>
+                        <a:rPr lang="es-CL" sz="850" dirty="0">
+                          <a:solidFill>
+                            <a:schemeClr val="tx2"/>
+                          </a:solidFill>
+                        </a:rPr>
+                        <a:t>4</a:t>
+                      </a:r>
+                    </a:p>
+                  </a:txBody>
+                  <a:tcPr marL="45720" marR="45720" marT="27432" marB="27432" anchor="ctr">
+                    <a:solidFill>
+                      <a:srgbClr val="F2F2F2"/>
+                    </a:solidFill>
+                  </a:tcPr>
+                </a:tc>
+                <a:tc>
+                  <a:txBody>
+                    <a:bodyPr/>
+                    <a:lstStyle/>
+                    <a:p>
+                      <a:pPr algn="ctr"/>
+                      <a:r>
+                        <a:rPr lang="es-CL" sz="850" dirty="0">
+                          <a:solidFill>
+                            <a:schemeClr val="tx2"/>
+                          </a:solidFill>
+                        </a:rPr>
+                        <a:t>4</a:t>
+                      </a:r>
+                    </a:p>
+                  </a:txBody>
+                  <a:tcPr marL="45720" marR="45720" marT="27432" marB="27432" anchor="ctr">
+                    <a:solidFill>
+                      <a:srgbClr val="F2F2F2"/>
+                    </a:solidFill>
+                  </a:tcPr>
+                </a:tc>
+                <a:tc>
+                  <a:txBody>
+                    <a:bodyPr/>
+                    <a:lstStyle/>
+                    <a:p>
+                      <a:pPr algn="ctr"/>
+                      <a:r>
+                        <a:rPr lang="es-CL" sz="850" dirty="0">
+                          <a:solidFill>
+                            <a:schemeClr val="tx2"/>
+                          </a:solidFill>
+                        </a:rPr>
+                        <a:t>·</a:t>
+                      </a:r>
+                    </a:p>
+                  </a:txBody>
+                  <a:tcPr marL="45720" marR="45720" marT="27432" marB="27432" anchor="ctr">
+                    <a:solidFill>
+                      <a:srgbClr val="F2F2F2"/>
+                    </a:solidFill>
+                  </a:tcPr>
+                </a:tc>
+              </a:tr>
+            </a:tbl>
+          </a:graphicData>
+        </a:graphic>
+      </p:graphicFrame>
+      <p:graphicFrame>
+        <p:nvGraphicFramePr>
+          <p:cNvPr id="21" name="Tabla 21"/>
+          <p:cNvGraphicFramePr>
+            <a:graphicFrameLocks noGrp="1"/>
+          </p:cNvGraphicFramePr>
+          <p:nvPr/>
+        </p:nvGraphicFramePr>
+        <p:xfrm>
+          <a:off x="4676456" y="2450000"/>
+          <a:ext cx="4000000" cy="3300000"/>
+        </p:xfrm>
+        <a:graphic>
+          <a:graphicData uri="http://schemas.openxmlformats.org/drawingml/2006/table">
+            <a:tbl>
+              <a:tblPr firstRow="1" bandRow="1"/>
+              <a:tblGrid>
+                <a:gridCol w="2080000"/>
+                <a:gridCol w="480000"/>
+                <a:gridCol w="480000"/>
+                <a:gridCol w="480000"/>
+                <a:gridCol w="480000"/>
+              </a:tblGrid>
+              <a:tr h="300">
+                <a:tc>
+                  <a:txBody>
+                    <a:bodyPr/>
+                    <a:lstStyle/>
+                    <a:p>
+                      <a:pPr/>
+                      <a:r>
+                        <a:rPr lang="es-CL" sz="950" b="1" dirty="0">
+                          <a:solidFill>
+                            <a:srgbClr val="FFFFFF"/>
+                          </a:solidFill>
+                        </a:rPr>
+                        <a:t>Fase</a:t>
+                      </a:r>
+                    </a:p>
+                  </a:txBody>
+                  <a:tcPr marL="45720" marR="45720" marT="27432" marB="27432" anchor="ctr">
+                    <a:solidFill>
+                      <a:srgbClr val="1F497D"/>
+                    </a:solidFill>
+                  </a:tcPr>
+                </a:tc>
+                <a:tc>
+                  <a:txBody>
+                    <a:bodyPr/>
+                    <a:lstStyle/>
+                    <a:p>
+                      <a:pPr algn="ctr"/>
+                      <a:r>
+                        <a:rPr lang="es-CL" sz="950" b="1" dirty="0">
+                          <a:solidFill>
+                            <a:srgbClr val="FFFFFF"/>
+                          </a:solidFill>
+                        </a:rPr>
+                        <a:t>Doc</a:t>
+                      </a:r>
+                    </a:p>
+                  </a:txBody>
+                  <a:tcPr marL="45720" marR="45720" marT="27432" marB="27432" anchor="ctr">
+                    <a:solidFill>
+                      <a:srgbClr val="1F497D"/>
+                    </a:solidFill>
+                  </a:tcPr>
+                </a:tc>
+                <a:tc>
+                  <a:txBody>
+                    <a:bodyPr/>
+                    <a:lstStyle/>
+                    <a:p>
+                      <a:pPr algn="ctr"/>
+                      <a:r>
+                        <a:rPr lang="es-CL" sz="950" b="1" dirty="0">
+                          <a:solidFill>
+                            <a:srgbClr val="FFFFFF"/>
+                          </a:solidFill>
+                        </a:rPr>
+                        <a:t>Ent</a:t>
+                      </a:r>
+                    </a:p>
+                  </a:txBody>
+                  <a:tcPr marL="45720" marR="45720" marT="27432" marB="27432" anchor="ctr">
+                    <a:solidFill>
+                      <a:srgbClr val="1F497D"/>
+                    </a:solidFill>
+                  </a:tcPr>
+                </a:tc>
+                <a:tc>
+                  <a:txBody>
+                    <a:bodyPr/>
+                    <a:lstStyle/>
+                    <a:p>
+                      <a:pPr algn="ctr"/>
+                      <a:r>
+                        <a:rPr lang="es-CL" sz="950" b="1" dirty="0">
+                          <a:solidFill>
+                            <a:srgbClr val="FFFFFF"/>
+                          </a:solidFill>
+                        </a:rPr>
+                        <a:t>Prop</a:t>
+                      </a:r>
+                    </a:p>
+                  </a:txBody>
+                  <a:tcPr marL="45720" marR="45720" marT="27432" marB="27432" anchor="ctr">
+                    <a:solidFill>
+                      <a:srgbClr val="1F497D"/>
+                    </a:solidFill>
+                  </a:tcPr>
+                </a:tc>
+                <a:tc>
+                  <a:txBody>
+                    <a:bodyPr/>
+                    <a:lstStyle/>
+                    <a:p>
+                      <a:pPr algn="ctr"/>
+                      <a:r>
+                        <a:rPr lang="es-CL" sz="950" b="1" dirty="0">
+                          <a:solidFill>
+                            <a:srgbClr val="FFFFFF"/>
+                          </a:solidFill>
+                        </a:rPr>
+                        <a:t>Bre</a:t>
+                      </a:r>
+                    </a:p>
+                  </a:txBody>
+                  <a:tcPr marL="45720" marR="45720" marT="27432" marB="27432" anchor="ctr">
+                    <a:solidFill>
+                      <a:srgbClr val="1F497D"/>
+                    </a:solidFill>
+                  </a:tcPr>
+                </a:tc>
+              </a:tr>
+              <a:tr h="300">
+                <a:tc>
+                  <a:txBody>
+                    <a:bodyPr/>
+                    <a:lstStyle/>
+                    <a:p>
+                      <a:pPr/>
+                      <a:r>
+                        <a:rPr lang="es-CL" sz="850" dirty="0">
+                          <a:solidFill>
+                            <a:schemeClr val="tx2"/>
+                          </a:solidFill>
+                        </a:rPr>
+                        <a:t>F10 Onboarding</a:t>
+                      </a:r>
+                    </a:p>
+                  </a:txBody>
+                  <a:tcPr marL="45720" marR="45720" marT="27432" marB="27432" anchor="ctr">
+                    <a:solidFill>
+                      <a:srgbClr val="F2F2F2"/>
+                    </a:solidFill>
+                  </a:tcPr>
+                </a:tc>
+                <a:tc>
+                  <a:txBody>
+                    <a:bodyPr/>
+                    <a:lstStyle/>
+                    <a:p>
+                      <a:pPr algn="ctr"/>
+                      <a:r>
+                        <a:rPr lang="es-CL" sz="850" dirty="0">
+                          <a:solidFill>
+                            <a:schemeClr val="tx2"/>
+                          </a:solidFill>
+                        </a:rPr>
+                        <a:t>2</a:t>
+                      </a:r>
+                    </a:p>
+                  </a:txBody>
+                  <a:tcPr marL="45720" marR="45720" marT="27432" marB="27432" anchor="ctr">
+                    <a:solidFill>
+                      <a:srgbClr val="F2F2F2"/>
+                    </a:solidFill>
+                  </a:tcPr>
+                </a:tc>
+                <a:tc>
+                  <a:txBody>
+                    <a:bodyPr/>
+                    <a:lstStyle/>
+                    <a:p>
+                      <a:pPr algn="ctr"/>
+                      <a:r>
+                        <a:rPr lang="es-CL" sz="850" dirty="0">
+                          <a:solidFill>
+                            <a:schemeClr val="tx2"/>
+                          </a:solidFill>
+                        </a:rPr>
+                        <a:t>·</a:t>
+                      </a:r>
+                    </a:p>
+                  </a:txBody>
+                  <a:tcPr marL="45720" marR="45720" marT="27432" marB="27432" anchor="ctr">
+                    <a:solidFill>
+                      <a:srgbClr val="F2F2F2"/>
+                    </a:solidFill>
+                  </a:tcPr>
+                </a:tc>
+                <a:tc>
+                  <a:txBody>
+                    <a:bodyPr/>
+                    <a:lstStyle/>
+                    <a:p>
+                      <a:pPr algn="ctr"/>
+                      <a:r>
+                        <a:rPr lang="es-CL" sz="850" dirty="0">
+                          <a:solidFill>
+                            <a:schemeClr val="tx2"/>
+                          </a:solidFill>
+                        </a:rPr>
+                        <a:t>6</a:t>
+                      </a:r>
+                    </a:p>
+                  </a:txBody>
+                  <a:tcPr marL="45720" marR="45720" marT="27432" marB="27432" anchor="ctr">
+                    <a:solidFill>
+                      <a:srgbClr val="F2F2F2"/>
+                    </a:solidFill>
+                  </a:tcPr>
+                </a:tc>
+                <a:tc>
+                  <a:txBody>
+                    <a:bodyPr/>
+                    <a:lstStyle/>
+                    <a:p>
+                      <a:pPr algn="ctr"/>
+                      <a:r>
+                        <a:rPr lang="es-CL" sz="850" dirty="0">
+                          <a:solidFill>
+                            <a:schemeClr val="tx2"/>
+                          </a:solidFill>
+                        </a:rPr>
+                        <a:t>·</a:t>
+                      </a:r>
+                    </a:p>
+                  </a:txBody>
+                  <a:tcPr marL="45720" marR="45720" marT="27432" marB="27432" anchor="ctr">
+                    <a:solidFill>
+                      <a:srgbClr val="F2F2F2"/>
+                    </a:solidFill>
+                  </a:tcPr>
+                </a:tc>
+              </a:tr>
+              <a:tr h="300">
+                <a:tc>
+                  <a:txBody>
+                    <a:bodyPr/>
+                    <a:lstStyle/>
+                    <a:p>
+                      <a:pPr/>
+                      <a:r>
+                        <a:rPr lang="es-CL" sz="850" dirty="0">
+                          <a:solidFill>
+                            <a:schemeClr val="tx2"/>
+                          </a:solidFill>
+                        </a:rPr>
+                        <a:t>F11 Formación</a:t>
+                      </a:r>
+                    </a:p>
+                  </a:txBody>
+                  <a:tcPr marL="45720" marR="45720" marT="27432" marB="27432" anchor="ctr"/>
+                </a:tc>
+                <a:tc>
+                  <a:txBody>
+                    <a:bodyPr/>
+                    <a:lstStyle/>
+                    <a:p>
+                      <a:pPr algn="ctr"/>
+                      <a:r>
+                        <a:rPr lang="es-CL" sz="850" dirty="0">
+                          <a:solidFill>
+                            <a:schemeClr val="tx2"/>
+                          </a:solidFill>
+                        </a:rPr>
+                        <a:t>19</a:t>
+                      </a:r>
+                    </a:p>
+                  </a:txBody>
+                  <a:tcPr marL="45720" marR="45720" marT="27432" marB="27432" anchor="ctr"/>
+                </a:tc>
+                <a:tc>
+                  <a:txBody>
+                    <a:bodyPr/>
+                    <a:lstStyle/>
+                    <a:p>
+                      <a:pPr algn="ctr"/>
+                      <a:r>
+                        <a:rPr lang="es-CL" sz="850" dirty="0">
+                          <a:solidFill>
+                            <a:schemeClr val="tx2"/>
+                          </a:solidFill>
+                        </a:rPr>
+                        <a:t>·</a:t>
+                      </a:r>
+                    </a:p>
+                  </a:txBody>
+                  <a:tcPr marL="45720" marR="45720" marT="27432" marB="27432" anchor="ctr"/>
+                </a:tc>
+                <a:tc>
+                  <a:txBody>
+                    <a:bodyPr/>
+                    <a:lstStyle/>
+                    <a:p>
+                      <a:pPr algn="ctr"/>
+                      <a:r>
+                        <a:rPr lang="es-CL" sz="850" dirty="0">
+                          <a:solidFill>
+                            <a:schemeClr val="tx2"/>
+                          </a:solidFill>
+                        </a:rPr>
+                        <a:t>·</a:t>
+                      </a:r>
+                    </a:p>
+                  </a:txBody>
+                  <a:tcPr marL="45720" marR="45720" marT="27432" marB="27432" anchor="ctr"/>
+                </a:tc>
+                <a:tc>
+                  <a:txBody>
+                    <a:bodyPr/>
+                    <a:lstStyle/>
+                    <a:p>
+                      <a:pPr algn="ctr"/>
+                      <a:r>
+                        <a:rPr lang="es-CL" sz="850" dirty="0">
+                          <a:solidFill>
+                            <a:schemeClr val="tx2"/>
+                          </a:solidFill>
+                        </a:rPr>
+                        <a:t>·</a:t>
+                      </a:r>
+                    </a:p>
+                  </a:txBody>
+                  <a:tcPr marL="45720" marR="45720" marT="27432" marB="27432" anchor="ctr"/>
+                </a:tc>
+              </a:tr>
+              <a:tr h="300">
+                <a:tc>
+                  <a:txBody>
+                    <a:bodyPr/>
+                    <a:lstStyle/>
+                    <a:p>
+                      <a:pPr/>
+                      <a:r>
+                        <a:rPr lang="es-CL" sz="850" dirty="0">
+                          <a:solidFill>
+                            <a:schemeClr val="tx2"/>
+                          </a:solidFill>
+                        </a:rPr>
+                        <a:t>F12 Desempeño</a:t>
+                      </a:r>
+                    </a:p>
+                  </a:txBody>
+                  <a:tcPr marL="45720" marR="45720" marT="27432" marB="27432" anchor="ctr">
+                    <a:solidFill>
+                      <a:srgbClr val="F2F2F2"/>
+                    </a:solidFill>
+                  </a:tcPr>
+                </a:tc>
+                <a:tc>
+                  <a:txBody>
+                    <a:bodyPr/>
+                    <a:lstStyle/>
+                    <a:p>
+                      <a:pPr algn="ctr"/>
+                      <a:r>
+                        <a:rPr lang="es-CL" sz="850" dirty="0">
+                          <a:solidFill>
+                            <a:schemeClr val="tx2"/>
+                          </a:solidFill>
+                        </a:rPr>
+                        <a:t>19</a:t>
+                      </a:r>
+                    </a:p>
+                  </a:txBody>
+                  <a:tcPr marL="45720" marR="45720" marT="27432" marB="27432" anchor="ctr">
+                    <a:solidFill>
+                      <a:srgbClr val="F2F2F2"/>
+                    </a:solidFill>
+                  </a:tcPr>
+                </a:tc>
+                <a:tc>
+                  <a:txBody>
+                    <a:bodyPr/>
+                    <a:lstStyle/>
+                    <a:p>
+                      <a:pPr algn="ctr"/>
+                      <a:r>
+                        <a:rPr lang="es-CL" sz="850" dirty="0">
+                          <a:solidFill>
+                            <a:schemeClr val="tx2"/>
+                          </a:solidFill>
+                        </a:rPr>
+                        <a:t>11</a:t>
+                      </a:r>
+                    </a:p>
+                  </a:txBody>
+                  <a:tcPr marL="45720" marR="45720" marT="27432" marB="27432" anchor="ctr">
+                    <a:solidFill>
+                      <a:srgbClr val="F2F2F2"/>
+                    </a:solidFill>
+                  </a:tcPr>
+                </a:tc>
+                <a:tc>
+                  <a:txBody>
+                    <a:bodyPr/>
+                    <a:lstStyle/>
+                    <a:p>
+                      <a:pPr algn="ctr"/>
+                      <a:r>
+                        <a:rPr lang="es-CL" sz="850" dirty="0">
+                          <a:solidFill>
+                            <a:schemeClr val="tx2"/>
+                          </a:solidFill>
+                        </a:rPr>
+                        <a:t>·</a:t>
+                      </a:r>
+                    </a:p>
+                  </a:txBody>
+                  <a:tcPr marL="45720" marR="45720" marT="27432" marB="27432" anchor="ctr">
+                    <a:solidFill>
+                      <a:srgbClr val="F2F2F2"/>
+                    </a:solidFill>
+                  </a:tcPr>
+                </a:tc>
+                <a:tc>
+                  <a:txBody>
+                    <a:bodyPr/>
+                    <a:lstStyle/>
+                    <a:p>
+                      <a:pPr algn="ctr"/>
+                      <a:r>
+                        <a:rPr lang="es-CL" sz="850" dirty="0">
+                          <a:solidFill>
+                            <a:schemeClr val="tx2"/>
+                          </a:solidFill>
+                        </a:rPr>
+                        <a:t>·</a:t>
+                      </a:r>
+                    </a:p>
+                  </a:txBody>
+                  <a:tcPr marL="45720" marR="45720" marT="27432" marB="27432" anchor="ctr">
+                    <a:solidFill>
+                      <a:srgbClr val="F2F2F2"/>
+                    </a:solidFill>
+                  </a:tcPr>
+                </a:tc>
+              </a:tr>
+              <a:tr h="300">
+                <a:tc>
+                  <a:txBody>
+                    <a:bodyPr/>
+                    <a:lstStyle/>
+                    <a:p>
+                      <a:pPr/>
+                      <a:r>
+                        <a:rPr lang="es-CL" sz="850" dirty="0">
+                          <a:solidFill>
+                            <a:schemeClr val="tx2"/>
+                          </a:solidFill>
+                        </a:rPr>
+                        <a:t>F13 Carrera y sucesión</a:t>
+                      </a:r>
+                    </a:p>
+                  </a:txBody>
+                  <a:tcPr marL="45720" marR="45720" marT="27432" marB="27432" anchor="ctr"/>
+                </a:tc>
+                <a:tc>
+                  <a:txBody>
+                    <a:bodyPr/>
+                    <a:lstStyle/>
+                    <a:p>
+                      <a:pPr algn="ctr"/>
+                      <a:r>
+                        <a:rPr lang="es-CL" sz="850" dirty="0">
+                          <a:solidFill>
+                            <a:schemeClr val="tx2"/>
+                          </a:solidFill>
+                        </a:rPr>
+                        <a:t>1</a:t>
+                      </a:r>
+                    </a:p>
+                  </a:txBody>
+                  <a:tcPr marL="45720" marR="45720" marT="27432" marB="27432" anchor="ctr"/>
+                </a:tc>
+                <a:tc>
+                  <a:txBody>
+                    <a:bodyPr/>
+                    <a:lstStyle/>
+                    <a:p>
+                      <a:pPr algn="ctr"/>
+                      <a:r>
+                        <a:rPr lang="es-CL" sz="850" dirty="0">
+                          <a:solidFill>
+                            <a:schemeClr val="tx2"/>
+                          </a:solidFill>
+                        </a:rPr>
+                        <a:t>·</a:t>
+                      </a:r>
+                    </a:p>
+                  </a:txBody>
+                  <a:tcPr marL="45720" marR="45720" marT="27432" marB="27432" anchor="ctr"/>
+                </a:tc>
+                <a:tc>
+                  <a:txBody>
+                    <a:bodyPr/>
+                    <a:lstStyle/>
+                    <a:p>
+                      <a:pPr algn="ctr"/>
+                      <a:r>
+                        <a:rPr lang="es-CL" sz="850" dirty="0">
+                          <a:solidFill>
+                            <a:schemeClr val="tx2"/>
+                          </a:solidFill>
+                        </a:rPr>
+                        <a:t>9</a:t>
+                      </a:r>
+                    </a:p>
+                  </a:txBody>
+                  <a:tcPr marL="45720" marR="45720" marT="27432" marB="27432" anchor="ctr"/>
+                </a:tc>
+                <a:tc>
+                  <a:txBody>
+                    <a:bodyPr/>
+                    <a:lstStyle/>
+                    <a:p>
+                      <a:pPr algn="ctr"/>
+                      <a:r>
+                        <a:rPr lang="es-CL" sz="850" dirty="0">
+                          <a:solidFill>
+                            <a:schemeClr val="tx2"/>
+                          </a:solidFill>
+                        </a:rPr>
+                        <a:t>·</a:t>
+                      </a:r>
+                    </a:p>
+                  </a:txBody>
+                  <a:tcPr marL="45720" marR="45720" marT="27432" marB="27432" anchor="ctr"/>
+                </a:tc>
+              </a:tr>
+              <a:tr h="300">
+                <a:tc>
+                  <a:txBody>
+                    <a:bodyPr/>
+                    <a:lstStyle/>
+                    <a:p>
+                      <a:pPr/>
+                      <a:r>
+                        <a:rPr lang="es-CL" sz="850" dirty="0">
+                          <a:solidFill>
+                            <a:schemeClr val="tx2"/>
+                          </a:solidFill>
+                        </a:rPr>
+                        <a:t>F14 Renta y beneficios</a:t>
+                      </a:r>
+                    </a:p>
+                  </a:txBody>
+                  <a:tcPr marL="45720" marR="45720" marT="27432" marB="27432" anchor="ctr">
+                    <a:solidFill>
+                      <a:srgbClr val="F2F2F2"/>
+                    </a:solidFill>
+                  </a:tcPr>
+                </a:tc>
+                <a:tc>
+                  <a:txBody>
+                    <a:bodyPr/>
+                    <a:lstStyle/>
+                    <a:p>
+                      <a:pPr algn="ctr"/>
+                      <a:r>
+                        <a:rPr lang="es-CL" sz="850" dirty="0">
+                          <a:solidFill>
+                            <a:schemeClr val="tx2"/>
+                          </a:solidFill>
+                        </a:rPr>
+                        <a:t>·</a:t>
+                      </a:r>
+                    </a:p>
+                  </a:txBody>
+                  <a:tcPr marL="45720" marR="45720" marT="27432" marB="27432" anchor="ctr">
+                    <a:solidFill>
+                      <a:srgbClr val="F2F2F2"/>
+                    </a:solidFill>
+                  </a:tcPr>
+                </a:tc>
+                <a:tc>
+                  <a:txBody>
+                    <a:bodyPr/>
+                    <a:lstStyle/>
+                    <a:p>
+                      <a:pPr algn="ctr"/>
+                      <a:r>
+                        <a:rPr lang="es-CL" sz="850" dirty="0">
+                          <a:solidFill>
+                            <a:schemeClr val="tx2"/>
+                          </a:solidFill>
+                        </a:rPr>
+                        <a:t>·</a:t>
+                      </a:r>
+                    </a:p>
+                  </a:txBody>
+                  <a:tcPr marL="45720" marR="45720" marT="27432" marB="27432" anchor="ctr">
+                    <a:solidFill>
+                      <a:srgbClr val="F2F2F2"/>
+                    </a:solidFill>
+                  </a:tcPr>
+                </a:tc>
+                <a:tc>
+                  <a:txBody>
+                    <a:bodyPr/>
+                    <a:lstStyle/>
+                    <a:p>
+                      <a:pPr algn="ctr"/>
+                      <a:r>
+                        <a:rPr lang="es-CL" sz="850" dirty="0">
+                          <a:solidFill>
+                            <a:schemeClr val="tx2"/>
+                          </a:solidFill>
+                        </a:rPr>
+                        <a:t>22</a:t>
+                      </a:r>
+                    </a:p>
+                  </a:txBody>
+                  <a:tcPr marL="45720" marR="45720" marT="27432" marB="27432" anchor="ctr">
+                    <a:solidFill>
+                      <a:srgbClr val="F2F2F2"/>
+                    </a:solidFill>
+                  </a:tcPr>
+                </a:tc>
+                <a:tc>
+                  <a:txBody>
+                    <a:bodyPr/>
+                    <a:lstStyle/>
+                    <a:p>
+                      <a:pPr algn="ctr"/>
+                      <a:r>
+                        <a:rPr lang="es-CL" sz="850" dirty="0">
+                          <a:solidFill>
+                            <a:schemeClr val="tx2"/>
+                          </a:solidFill>
+                        </a:rPr>
+                        <a:t>·</a:t>
+                      </a:r>
+                    </a:p>
+                  </a:txBody>
+                  <a:tcPr marL="45720" marR="45720" marT="27432" marB="27432" anchor="ctr">
+                    <a:solidFill>
+                      <a:srgbClr val="F2F2F2"/>
+                    </a:solidFill>
+                  </a:tcPr>
+                </a:tc>
+              </a:tr>
+              <a:tr h="300">
+                <a:tc>
+                  <a:txBody>
+                    <a:bodyPr/>
+                    <a:lstStyle/>
+                    <a:p>
+                      <a:pPr/>
+                      <a:r>
+                        <a:rPr lang="es-CL" sz="850" dirty="0">
+                          <a:solidFill>
+                            <a:schemeClr val="tx2"/>
+                          </a:solidFill>
+                        </a:rPr>
+                        <a:t>F15 Nómina</a:t>
+                      </a:r>
+                    </a:p>
+                  </a:txBody>
+                  <a:tcPr marL="45720" marR="45720" marT="27432" marB="27432" anchor="ctr"/>
+                </a:tc>
+                <a:tc>
+                  <a:txBody>
+                    <a:bodyPr/>
+                    <a:lstStyle/>
+                    <a:p>
+                      <a:pPr algn="ctr"/>
+                      <a:r>
+                        <a:rPr lang="es-CL" sz="850" dirty="0">
+                          <a:solidFill>
+                            <a:schemeClr val="tx2"/>
+                          </a:solidFill>
+                        </a:rPr>
+                        <a:t>·</a:t>
+                      </a:r>
+                    </a:p>
+                  </a:txBody>
+                  <a:tcPr marL="45720" marR="45720" marT="27432" marB="27432" anchor="ctr"/>
+                </a:tc>
+                <a:tc>
+                  <a:txBody>
+                    <a:bodyPr/>
+                    <a:lstStyle/>
+                    <a:p>
+                      <a:pPr algn="ctr"/>
+                      <a:r>
+                        <a:rPr lang="es-CL" sz="850" dirty="0">
+                          <a:solidFill>
+                            <a:schemeClr val="tx2"/>
+                          </a:solidFill>
+                        </a:rPr>
+                        <a:t>·</a:t>
+                      </a:r>
+                    </a:p>
+                  </a:txBody>
+                  <a:tcPr marL="45720" marR="45720" marT="27432" marB="27432" anchor="ctr"/>
+                </a:tc>
+                <a:tc>
+                  <a:txBody>
+                    <a:bodyPr/>
+                    <a:lstStyle/>
+                    <a:p>
+                      <a:pPr algn="ctr"/>
+                      <a:r>
+                        <a:rPr lang="es-CL" sz="850" dirty="0">
+                          <a:solidFill>
+                            <a:schemeClr val="tx2"/>
+                          </a:solidFill>
+                        </a:rPr>
+                        <a:t>·</a:t>
+                      </a:r>
+                    </a:p>
+                  </a:txBody>
+                  <a:tcPr marL="45720" marR="45720" marT="27432" marB="27432" anchor="ctr"/>
+                </a:tc>
+                <a:tc>
+                  <a:txBody>
+                    <a:bodyPr/>
+                    <a:lstStyle/>
+                    <a:p>
+                      <a:pPr algn="ctr"/>
+                      <a:r>
+                        <a:rPr lang="es-CL" sz="850" b="1" dirty="0">
+                          <a:solidFill>
+                            <a:schemeClr val="tx2"/>
+                          </a:solidFill>
+                        </a:rPr>
+                        <a:t>2</a:t>
+                      </a:r>
+                    </a:p>
+                  </a:txBody>
+                  <a:tcPr marL="45720" marR="45720" marT="27432" marB="27432" anchor="ctr">
+                    <a:solidFill>
+                      <a:srgbClr val="FFD7D7"/>
+                    </a:solidFill>
+                  </a:tcPr>
+                </a:tc>
+              </a:tr>
+              <a:tr h="300">
+                <a:tc>
+                  <a:txBody>
+                    <a:bodyPr/>
+                    <a:lstStyle/>
+                    <a:p>
+                      <a:pPr/>
+                      <a:r>
+                        <a:rPr lang="es-CL" sz="850" dirty="0">
+                          <a:solidFill>
+                            <a:schemeClr val="tx2"/>
+                          </a:solidFill>
+                        </a:rPr>
+                        <a:t>F16 Clima y retención</a:t>
+                      </a:r>
+                    </a:p>
+                  </a:txBody>
+                  <a:tcPr marL="45720" marR="45720" marT="27432" marB="27432" anchor="ctr">
+                    <a:solidFill>
+                      <a:srgbClr val="F2F2F2"/>
+                    </a:solidFill>
+                  </a:tcPr>
+                </a:tc>
+                <a:tc>
+                  <a:txBody>
+                    <a:bodyPr/>
+                    <a:lstStyle/>
+                    <a:p>
+                      <a:pPr algn="ctr"/>
+                      <a:r>
+                        <a:rPr lang="es-CL" sz="850" dirty="0">
+                          <a:solidFill>
+                            <a:schemeClr val="tx2"/>
+                          </a:solidFill>
+                        </a:rPr>
+                        <a:t>·</a:t>
+                      </a:r>
+                    </a:p>
+                  </a:txBody>
+                  <a:tcPr marL="45720" marR="45720" marT="27432" marB="27432" anchor="ctr">
+                    <a:solidFill>
+                      <a:srgbClr val="F2F2F2"/>
+                    </a:solidFill>
+                  </a:tcPr>
+                </a:tc>
+                <a:tc>
+                  <a:txBody>
+                    <a:bodyPr/>
+                    <a:lstStyle/>
+                    <a:p>
+                      <a:pPr algn="ctr"/>
+                      <a:r>
+                        <a:rPr lang="es-CL" sz="850" dirty="0">
+                          <a:solidFill>
+                            <a:schemeClr val="tx2"/>
+                          </a:solidFill>
+                        </a:rPr>
+                        <a:t>·</a:t>
+                      </a:r>
+                    </a:p>
+                  </a:txBody>
+                  <a:tcPr marL="45720" marR="45720" marT="27432" marB="27432" anchor="ctr">
+                    <a:solidFill>
+                      <a:srgbClr val="F2F2F2"/>
+                    </a:solidFill>
+                  </a:tcPr>
+                </a:tc>
+                <a:tc>
+                  <a:txBody>
+                    <a:bodyPr/>
+                    <a:lstStyle/>
+                    <a:p>
+                      <a:pPr algn="ctr"/>
+                      <a:r>
+                        <a:rPr lang="es-CL" sz="850" dirty="0">
+                          <a:solidFill>
+                            <a:schemeClr val="tx2"/>
+                          </a:solidFill>
+                        </a:rPr>
+                        <a:t>12</a:t>
+                      </a:r>
+                    </a:p>
+                  </a:txBody>
+                  <a:tcPr marL="45720" marR="45720" marT="27432" marB="27432" anchor="ctr">
+                    <a:solidFill>
+                      <a:srgbClr val="F2F2F2"/>
+                    </a:solidFill>
+                  </a:tcPr>
+                </a:tc>
+                <a:tc>
+                  <a:txBody>
+                    <a:bodyPr/>
+                    <a:lstStyle/>
+                    <a:p>
+                      <a:pPr algn="ctr"/>
+                      <a:r>
+                        <a:rPr lang="es-CL" sz="850" dirty="0">
+                          <a:solidFill>
+                            <a:schemeClr val="tx2"/>
+                          </a:solidFill>
+                        </a:rPr>
+                        <a:t>·</a:t>
+                      </a:r>
+                    </a:p>
+                  </a:txBody>
+                  <a:tcPr marL="45720" marR="45720" marT="27432" marB="27432" anchor="ctr">
+                    <a:solidFill>
+                      <a:srgbClr val="F2F2F2"/>
+                    </a:solidFill>
+                  </a:tcPr>
+                </a:tc>
+              </a:tr>
+              <a:tr h="300">
+                <a:tc>
+                  <a:txBody>
+                    <a:bodyPr/>
+                    <a:lstStyle/>
+                    <a:p>
+                      <a:pPr/>
+                      <a:r>
+                        <a:rPr lang="es-CL" sz="850" dirty="0">
+                          <a:solidFill>
+                            <a:schemeClr val="tx2"/>
+                          </a:solidFill>
+                        </a:rPr>
+                        <a:t>F17 Desvinculación</a:t>
+                      </a:r>
+                    </a:p>
+                  </a:txBody>
+                  <a:tcPr marL="45720" marR="45720" marT="27432" marB="27432" anchor="ctr"/>
+                </a:tc>
+                <a:tc>
+                  <a:txBody>
+                    <a:bodyPr/>
+                    <a:lstStyle/>
+                    <a:p>
+                      <a:pPr algn="ctr"/>
+                      <a:r>
+                        <a:rPr lang="es-CL" sz="850" dirty="0">
+                          <a:solidFill>
+                            <a:schemeClr val="tx2"/>
+                          </a:solidFill>
+                        </a:rPr>
+                        <a:t>·</a:t>
+                      </a:r>
+                    </a:p>
+                  </a:txBody>
+                  <a:tcPr marL="45720" marR="45720" marT="27432" marB="27432" anchor="ctr"/>
+                </a:tc>
+                <a:tc>
+                  <a:txBody>
+                    <a:bodyPr/>
+                    <a:lstStyle/>
+                    <a:p>
+                      <a:pPr algn="ctr"/>
+                      <a:r>
+                        <a:rPr lang="es-CL" sz="850" dirty="0">
+                          <a:solidFill>
+                            <a:schemeClr val="tx2"/>
+                          </a:solidFill>
+                        </a:rPr>
+                        <a:t>1</a:t>
+                      </a:r>
+                    </a:p>
+                  </a:txBody>
+                  <a:tcPr marL="45720" marR="45720" marT="27432" marB="27432" anchor="ctr"/>
+                </a:tc>
+                <a:tc>
+                  <a:txBody>
+                    <a:bodyPr/>
+                    <a:lstStyle/>
+                    <a:p>
+                      <a:pPr algn="ctr"/>
+                      <a:r>
+                        <a:rPr lang="es-CL" sz="850" dirty="0">
+                          <a:solidFill>
+                            <a:schemeClr val="tx2"/>
+                          </a:solidFill>
+                        </a:rPr>
+                        <a:t>1</a:t>
+                      </a:r>
+                    </a:p>
+                  </a:txBody>
+                  <a:tcPr marL="45720" marR="45720" marT="27432" marB="27432" anchor="ctr"/>
+                </a:tc>
+                <a:tc>
+                  <a:txBody>
+                    <a:bodyPr/>
+                    <a:lstStyle/>
+                    <a:p>
+                      <a:pPr algn="ctr"/>
+                      <a:r>
+                        <a:rPr lang="es-CL" sz="850" b="1" dirty="0">
+                          <a:solidFill>
+                            <a:schemeClr val="tx2"/>
+                          </a:solidFill>
+                        </a:rPr>
+                        <a:t>8</a:t>
+                      </a:r>
+                    </a:p>
+                  </a:txBody>
+                  <a:tcPr marL="45720" marR="45720" marT="27432" marB="27432" anchor="ctr">
+                    <a:solidFill>
+                      <a:srgbClr val="FFD7D7"/>
+                    </a:solidFill>
+                  </a:tcPr>
+                </a:tc>
+              </a:tr>
+              <a:tr h="300">
+                <a:tc>
+                  <a:txBody>
+                    <a:bodyPr/>
+                    <a:lstStyle/>
+                    <a:p>
+                      <a:pPr/>
+                      <a:r>
+                        <a:rPr lang="es-CL" sz="850" dirty="0">
+                          <a:solidFill>
+                            <a:schemeClr val="tx2"/>
+                          </a:solidFill>
+                        </a:rPr>
+                        <a:t>F18 Datos y gobernanza</a:t>
+                      </a:r>
+                    </a:p>
+                  </a:txBody>
+                  <a:tcPr marL="45720" marR="45720" marT="27432" marB="27432" anchor="ctr">
+                    <a:solidFill>
+                      <a:srgbClr val="F2F2F2"/>
+                    </a:solidFill>
+                  </a:tcPr>
+                </a:tc>
+                <a:tc>
+                  <a:txBody>
+                    <a:bodyPr/>
+                    <a:lstStyle/>
+                    <a:p>
+                      <a:pPr algn="ctr"/>
+                      <a:r>
+                        <a:rPr lang="es-CL" sz="850" dirty="0">
+                          <a:solidFill>
+                            <a:schemeClr val="tx2"/>
+                          </a:solidFill>
+                        </a:rPr>
+                        <a:t>·</a:t>
+                      </a:r>
+                    </a:p>
+                  </a:txBody>
+                  <a:tcPr marL="45720" marR="45720" marT="27432" marB="27432" anchor="ctr">
+                    <a:solidFill>
+                      <a:srgbClr val="F2F2F2"/>
+                    </a:solidFill>
+                  </a:tcPr>
+                </a:tc>
+                <a:tc>
+                  <a:txBody>
+                    <a:bodyPr/>
+                    <a:lstStyle/>
+                    <a:p>
+                      <a:pPr algn="ctr"/>
+                      <a:r>
+                        <a:rPr lang="es-CL" sz="850" dirty="0">
+                          <a:solidFill>
+                            <a:schemeClr val="tx2"/>
+                          </a:solidFill>
+                        </a:rPr>
+                        <a:t>3</a:t>
+                      </a:r>
+                    </a:p>
+                  </a:txBody>
+                  <a:tcPr marL="45720" marR="45720" marT="27432" marB="27432" anchor="ctr">
+                    <a:solidFill>
+                      <a:srgbClr val="F2F2F2"/>
+                    </a:solidFill>
+                  </a:tcPr>
+                </a:tc>
+                <a:tc>
+                  <a:txBody>
+                    <a:bodyPr/>
+                    <a:lstStyle/>
+                    <a:p>
+                      <a:pPr algn="ctr"/>
+                      <a:r>
+                        <a:rPr lang="es-CL" sz="850" dirty="0">
+                          <a:solidFill>
+                            <a:schemeClr val="tx2"/>
+                          </a:solidFill>
+                        </a:rPr>
+                        <a:t>14</a:t>
+                      </a:r>
+                    </a:p>
+                  </a:txBody>
+                  <a:tcPr marL="45720" marR="45720" marT="27432" marB="27432" anchor="ctr">
+                    <a:solidFill>
+                      <a:srgbClr val="F2F2F2"/>
+                    </a:solidFill>
+                  </a:tcPr>
+                </a:tc>
+                <a:tc>
+                  <a:txBody>
+                    <a:bodyPr/>
+                    <a:lstStyle/>
+                    <a:p>
+                      <a:pPr algn="ctr"/>
+                      <a:r>
+                        <a:rPr lang="es-CL" sz="850" b="1" dirty="0">
+                          <a:solidFill>
+                            <a:schemeClr val="tx2"/>
+                          </a:solidFill>
+                        </a:rPr>
+                        <a:t>2</a:t>
+                      </a:r>
+                    </a:p>
+                  </a:txBody>
+                  <a:tcPr marL="45720" marR="45720" marT="27432" marB="27432" anchor="ctr">
+                    <a:solidFill>
+                      <a:srgbClr val="FFD7D7"/>
+                    </a:solidFill>
+                  </a:tcPr>
+                </a:tc>
+              </a:tr>
+            </a:tbl>
+          </a:graphicData>
+        </a:graphic>
+      </p:graphicFrame>
+      <p:sp>
+        <p:nvSpPr>
+          <p:cNvPr id="9" name="8 CuadroTexto"/>
+          <p:cNvSpPr txBox="1"/>
+          <p:nvPr/>
+        </p:nvSpPr>
+        <p:spPr>
+          <a:xfrm>
+            <a:off x="323528" y="5850000"/>
+            <a:ext cx="8352928" cy="800000"/>
+          </a:xfrm>
+          <a:prstGeom prst="rect">
+            <a:avLst/>
+          </a:prstGeom>
+          <a:noFill/>
+        </p:spPr>
+        <p:txBody>
+          <a:bodyPr wrap="square" lIns="91396" tIns="45697" rIns="91396" bIns="45697" rtlCol="0">
+            <a:spAutoFit/>
+          </a:bodyPr>
+          <a:lstStyle/>
+          <a:p>
+            <a:r>
+              <a:rPr lang="es-CL" sz="1150" dirty="0">
+                <a:solidFill>
+                  <a:prstClr val="black">
+                    <a:lumMod val="65000"/>
+                    <a:lumOff val="35000"/>
+                  </a:prstClr>
+                </a:solidFill>
+              </a:rPr>
+              <a:t>La madurez es </a:t>
+            </a:r>
+            <a:r>
+              <a:rPr lang="es-CL" sz="1150" b="1" dirty="0">
+                <a:solidFill>
+                  <a:prstClr val="black">
+                    <a:lumMod val="65000"/>
+                    <a:lumOff val="35000"/>
+                  </a:prstClr>
+                </a:solidFill>
+              </a:rPr>
+              <a:t>heterogénea por fase</a:t>
+            </a:r>
+            <a:r>
+              <a:rPr lang="es-CL" sz="1150" dirty="0">
+                <a:solidFill>
+                  <a:prstClr val="black">
+                    <a:lumMod val="65000"/>
+                    <a:lumOff val="35000"/>
+                  </a:prstClr>
+                </a:solidFill>
+              </a:rPr>
+              <a:t>: la selección y la formación están respaldadas en procedimientos vigentes, mientras que la valoración de cargos, los beneficios y el clima se sostienen en propuestas por validar. </a:t>
+            </a:r>
+            <a:r>
+              <a:rPr lang="es-CL" sz="1150" b="1" dirty="0">
+                <a:solidFill>
+                  <a:prstClr val="black">
+                    <a:lumMod val="65000"/>
+                    <a:lumOff val="35000"/>
+                  </a:prstClr>
+                </a:solidFill>
+              </a:rPr>
+              <a:t>Doc</a:t>
+            </a:r>
+            <a:r>
+              <a:rPr lang="es-CL" sz="1150" dirty="0">
+                <a:solidFill>
+                  <a:prstClr val="black">
+                    <a:lumMod val="65000"/>
+                    <a:lumOff val="35000"/>
+                  </a:prstClr>
+                </a:solidFill>
+              </a:rPr>
+              <a:t> documentado · </a:t>
+            </a:r>
+            <a:r>
+              <a:rPr lang="es-CL" sz="1150" b="1" dirty="0">
+                <a:solidFill>
+                  <a:prstClr val="black">
+                    <a:lumMod val="65000"/>
+                    <a:lumOff val="35000"/>
+                  </a:prstClr>
+                </a:solidFill>
+              </a:rPr>
+              <a:t>Ent</a:t>
+            </a:r>
+            <a:r>
+              <a:rPr lang="es-CL" sz="1150" dirty="0">
+                <a:solidFill>
+                  <a:prstClr val="black">
+                    <a:lumMod val="65000"/>
+                    <a:lumOff val="35000"/>
+                  </a:prstClr>
+                </a:solidFill>
+              </a:rPr>
+              <a:t> entrevista · </a:t>
+            </a:r>
+            <a:r>
+              <a:rPr lang="es-CL" sz="1150" b="1" dirty="0">
+                <a:solidFill>
+                  <a:prstClr val="black">
+                    <a:lumMod val="65000"/>
+                    <a:lumOff val="35000"/>
+                  </a:prstClr>
+                </a:solidFill>
+              </a:rPr>
+              <a:t>Prop</a:t>
+            </a:r>
+            <a:r>
+              <a:rPr lang="es-CL" sz="1150" dirty="0">
+                <a:solidFill>
+                  <a:prstClr val="black">
+                    <a:lumMod val="65000"/>
+                    <a:lumOff val="35000"/>
+                  </a:prstClr>
+                </a:solidFill>
+              </a:rPr>
+              <a:t> propuesto · </a:t>
+            </a:r>
+            <a:r>
+              <a:rPr lang="es-CL" sz="1150" b="1" dirty="0">
+                <a:solidFill>
+                  <a:prstClr val="black">
+                    <a:lumMod val="65000"/>
+                    <a:lumOff val="35000"/>
+                  </a:prstClr>
+                </a:solidFill>
+              </a:rPr>
+              <a:t>Bre</a:t>
+            </a:r>
+            <a:r>
+              <a:rPr lang="es-CL" sz="1150" dirty="0">
+                <a:solidFill>
+                  <a:prstClr val="black">
+                    <a:lumMod val="65000"/>
+                    <a:lumOff val="35000"/>
+                  </a:prstClr>
+                </a:solidFill>
+              </a:rPr>
+              <a:t> brecha.</a:t>
+            </a:r>
+            <a:endParaRPr lang="es-CL" sz="1150"/>
+          </a:p>
+        </p:txBody>
+      </p:sp>
+    </p:spTree>
+  </p:cSld>
+  <p:clrMapOvr>
+    <a:masterClrMapping/>
+  </p:clrMapOvr>
+</p:sld>
+</file>
+
+<file path=ppt/slides/slide12.xml><?xml version="1.0" encoding="utf-8"?>
+<p:sld xmlns:a="http://schemas.openxmlformats.org/drawingml/2006/main" xmlns:r="http://schemas.openxmlformats.org/officeDocument/2006/relationships" xmlns:p="http://schemas.openxmlformats.org/presentationml/2006/main">
+  <p:cSld>
+    <p:spTree>
+      <p:nvGrpSpPr>
+        <p:cNvPr id="1" name=""/>
+        <p:cNvGrpSpPr/>
+        <p:nvPr/>
+      </p:nvGrpSpPr>
+      <p:grpSpPr>
+        <a:xfrm>
+          <a:off x="0" y="0"/>
+          <a:ext cx="0" cy="0"/>
+          <a:chOff x="0" y="0"/>
+          <a:chExt cx="0" cy="0"/>
+        </a:xfrm>
+      </p:grpSpPr>
+      <p:sp>
+        <p:nvSpPr>
+          <p:cNvPr id="5" name="4 CuadroTexto"/>
+          <p:cNvSpPr txBox="1"/>
+          <p:nvPr/>
+        </p:nvSpPr>
+        <p:spPr>
+          <a:xfrm>
+            <a:off x="5675867" y="340990"/>
+            <a:ext cx="2337602" cy="252106"/>
+          </a:xfrm>
+          <a:prstGeom prst="rect">
+            <a:avLst/>
+          </a:prstGeom>
+          <a:noFill/>
+        </p:spPr>
+        <p:txBody>
+          <a:bodyPr wrap="square" lIns="82014" tIns="45697" rIns="82014" bIns="45697" rtlCol="0">
+            <a:spAutoFit/>
+          </a:bodyPr>
+          <a:lstStyle/>
+          <a:p>
+            <a:pPr algn="ctr"/>
+            <a:r>
+              <a:rPr lang="es-CL" sz="1000" b="1" dirty="0">
+                <a:solidFill>
+                  <a:prstClr val="black">
+                    <a:lumMod val="65000"/>
+                    <a:lumOff val="35000"/>
+                  </a:prstClr>
+                </a:solidFill>
+              </a:rPr>
+              <a:t>Sistema de gestión de riesgos MP8 y MP21</a:t>
+            </a:r>
+            <a:endParaRPr lang="es-CL" sz="1000"/>
+          </a:p>
+        </p:txBody>
+      </p:sp>
+      <p:sp>
+        <p:nvSpPr>
+          <p:cNvPr id="4" name="3 CuadroTexto"/>
+          <p:cNvSpPr txBox="1"/>
+          <p:nvPr/>
+        </p:nvSpPr>
+        <p:spPr>
+          <a:xfrm>
+            <a:off x="5740803" y="1034218"/>
+            <a:ext cx="2207735" cy="221341"/>
+          </a:xfrm>
+          <a:prstGeom prst="rect">
+            <a:avLst/>
+          </a:prstGeom>
+          <a:noFill/>
+        </p:spPr>
+        <p:txBody>
+          <a:bodyPr wrap="square" lIns="82014" tIns="45697" rIns="82014" bIns="45697" rtlCol="0">
+            <a:spAutoFit/>
+          </a:bodyPr>
+          <a:lstStyle/>
+          <a:p>
+            <a:pPr algn="ctr"/>
+            <a:r>
+              <a:rPr lang="es-CL" sz="900" dirty="0">
+                <a:solidFill>
+                  <a:prstClr val="white">
+                    <a:lumMod val="50000"/>
+                  </a:prstClr>
+                </a:solidFill>
+              </a:rPr>
+              <a:t>| </a:t>
+            </a:r>
+            <a:r>
+              <a:rPr lang="es-CL" sz="900" b="1" dirty="0">
+                <a:solidFill>
+                  <a:srgbClr val="1F497D">
+                    <a:lumMod val="75000"/>
+                  </a:srgbClr>
+                </a:solidFill>
+              </a:rPr>
+              <a:t>Estudiante: </a:t>
+            </a:r>
+            <a:r>
+              <a:rPr lang="es-CL" sz="900" dirty="0">
+                <a:solidFill>
+                  <a:srgbClr val="1F497D">
+                    <a:lumMod val="75000"/>
+                  </a:srgbClr>
+                </a:solidFill>
+              </a:rPr>
+              <a:t>Bastián Darwit Vera</a:t>
+            </a:r>
+            <a:r>
+              <a:rPr lang="es-CL" sz="900" dirty="0">
+                <a:solidFill>
+                  <a:prstClr val="white">
+                    <a:lumMod val="50000"/>
+                  </a:prstClr>
+                </a:solidFill>
+              </a:rPr>
+              <a:t> |</a:t>
+            </a:r>
+          </a:p>
+        </p:txBody>
+      </p:sp>
+      <p:sp>
+        <p:nvSpPr>
+          <p:cNvPr id="6" name="5 CuadroTexto"/>
+          <p:cNvSpPr txBox="1"/>
+          <p:nvPr/>
+        </p:nvSpPr>
+        <p:spPr>
+          <a:xfrm>
+            <a:off x="805865" y="1538381"/>
+            <a:ext cx="7077739" cy="852256"/>
+          </a:xfrm>
+          <a:prstGeom prst="rect">
+            <a:avLst/>
+          </a:prstGeom>
+          <a:noFill/>
+        </p:spPr>
+        <p:txBody>
+          <a:bodyPr wrap="square" lIns="82014" tIns="45697" rIns="82014" bIns="45697" rtlCol="0">
+            <a:spAutoFit/>
+          </a:bodyPr>
+          <a:lstStyle/>
+          <a:p>
+            <a:r>
+              <a:rPr lang="es-CL" sz="2000" b="1" dirty="0">
+                <a:solidFill>
+                  <a:prstClr val="black">
+                    <a:lumMod val="65000"/>
+                    <a:lumOff val="35000"/>
+                  </a:prstClr>
+                </a:solidFill>
+              </a:rPr>
+              <a:t>Resultados · Brechas de levantamiento declaradas</a:t>
+            </a:r>
+            <a:endParaRPr lang="es-CL" sz="2000"/>
+          </a:p>
+        </p:txBody>
+      </p:sp>
+      <p:sp>
+        <p:nvSpPr>
+          <p:cNvPr id="8" name="7 CuadroTexto"/>
+          <p:cNvSpPr txBox="1"/>
+          <p:nvPr/>
+        </p:nvSpPr>
+        <p:spPr>
+          <a:xfrm>
+            <a:off x="323528" y="2400000"/>
+            <a:ext cx="8352928" cy="500000"/>
+          </a:xfrm>
+          <a:prstGeom prst="rect">
+            <a:avLst/>
+          </a:prstGeom>
+          <a:noFill/>
+        </p:spPr>
+        <p:txBody>
+          <a:bodyPr wrap="square" lIns="91396" tIns="45697" rIns="91396" bIns="45697" rtlCol="0">
+            <a:spAutoFit/>
+          </a:bodyPr>
+          <a:lstStyle/>
+          <a:p>
+            <a:r>
+              <a:rPr lang="es-CL" sz="1250" dirty="0">
+                <a:solidFill>
+                  <a:schemeClr val="tx2"/>
+                </a:solidFill>
+              </a:rPr>
+              <a:t>12 brechas sobre 234 pasos, equivalentes al 5,1 %. </a:t>
+            </a:r>
+            <a:r>
+              <a:rPr lang="es-CL" sz="1250" b="1" dirty="0">
+                <a:solidFill>
+                  <a:schemeClr val="tx2"/>
+                </a:solidFill>
+              </a:rPr>
+              <a:t>10 de las 12 se concentran en el cierre del ciclo de vida del trabajador.</a:t>
+            </a:r>
+            <a:endParaRPr lang="es-CL" sz="1250"/>
+          </a:p>
+        </p:txBody>
+      </p:sp>
+      <p:graphicFrame>
+        <p:nvGraphicFramePr>
+          <p:cNvPr id="20" name="Tabla 20"/>
+          <p:cNvGraphicFramePr>
+            <a:graphicFrameLocks noGrp="1"/>
+          </p:cNvGraphicFramePr>
+          <p:nvPr/>
+        </p:nvGraphicFramePr>
+        <p:xfrm>
+          <a:off x="323528" y="2900000"/>
+          <a:ext cx="8352928" cy="2300000"/>
+        </p:xfrm>
+        <a:graphic>
+          <a:graphicData uri="http://schemas.openxmlformats.org/drawingml/2006/table">
+            <a:tbl>
+              <a:tblPr firstRow="1" bandRow="1"/>
+              <a:tblGrid>
+                <a:gridCol w="1900000"/>
+                <a:gridCol w="500000"/>
+                <a:gridCol w="2600000"/>
+                <a:gridCol w="3352928"/>
+              </a:tblGrid>
+              <a:tr h="380">
+                <a:tc>
+                  <a:txBody>
+                    <a:bodyPr/>
+                    <a:lstStyle/>
+                    <a:p>
+                      <a:pPr/>
+                      <a:r>
+                        <a:rPr lang="es-CL" sz="950" b="1" dirty="0">
+                          <a:solidFill>
+                            <a:srgbClr val="FFFFFF"/>
+                          </a:solidFill>
+                        </a:rPr>
+                        <a:t>Fase</a:t>
+                      </a:r>
+                    </a:p>
+                  </a:txBody>
+                  <a:tcPr marL="45720" marR="45720" marT="27432" marB="27432" anchor="ctr">
+                    <a:solidFill>
+                      <a:srgbClr val="1F497D"/>
+                    </a:solidFill>
+                  </a:tcPr>
+                </a:tc>
+                <a:tc>
+                  <a:txBody>
+                    <a:bodyPr/>
+                    <a:lstStyle/>
+                    <a:p>
+                      <a:pPr algn="ctr"/>
+                      <a:r>
+                        <a:rPr lang="es-CL" sz="950" b="1" dirty="0">
+                          <a:solidFill>
+                            <a:srgbClr val="FFFFFF"/>
+                          </a:solidFill>
+                        </a:rPr>
+                        <a:t>N.º</a:t>
+                      </a:r>
+                    </a:p>
+                  </a:txBody>
+                  <a:tcPr marL="45720" marR="45720" marT="27432" marB="27432" anchor="ctr">
+                    <a:solidFill>
+                      <a:srgbClr val="1F497D"/>
+                    </a:solidFill>
+                  </a:tcPr>
+                </a:tc>
+                <a:tc>
+                  <a:txBody>
+                    <a:bodyPr/>
+                    <a:lstStyle/>
+                    <a:p>
+                      <a:pPr/>
+                      <a:r>
+                        <a:rPr lang="es-CL" sz="950" b="1" dirty="0">
+                          <a:solidFill>
+                            <a:srgbClr val="FFFFFF"/>
+                          </a:solidFill>
+                        </a:rPr>
+                        <a:t>Códigos APQC</a:t>
+                      </a:r>
+                    </a:p>
+                  </a:txBody>
+                  <a:tcPr marL="45720" marR="45720" marT="27432" marB="27432" anchor="ctr">
+                    <a:solidFill>
+                      <a:srgbClr val="1F497D"/>
+                    </a:solidFill>
+                  </a:tcPr>
+                </a:tc>
+                <a:tc>
+                  <a:txBody>
+                    <a:bodyPr/>
+                    <a:lstStyle/>
+                    <a:p>
+                      <a:pPr/>
+                      <a:r>
+                        <a:rPr lang="es-CL" sz="950" b="1" dirty="0">
+                          <a:solidFill>
+                            <a:srgbClr val="FFFFFF"/>
+                          </a:solidFill>
+                        </a:rPr>
+                        <a:t>Rol con quien se cierra</a:t>
+                      </a:r>
+                    </a:p>
+                  </a:txBody>
+                  <a:tcPr marL="45720" marR="45720" marT="27432" marB="27432" anchor="ctr">
+                    <a:solidFill>
+                      <a:srgbClr val="1F497D"/>
+                    </a:solidFill>
+                  </a:tcPr>
+                </a:tc>
+              </a:tr>
+              <a:tr h="620">
+                <a:tc>
+                  <a:txBody>
+                    <a:bodyPr/>
+                    <a:lstStyle/>
+                    <a:p>
+                      <a:pPr/>
+                      <a:r>
+                        <a:rPr lang="es-CL" sz="1050" b="1" dirty="0">
+                          <a:solidFill>
+                            <a:schemeClr val="tx2"/>
+                          </a:solidFill>
+                        </a:rPr>
+                        <a:t>F15 Administración de nómina</a:t>
+                      </a:r>
+                    </a:p>
+                  </a:txBody>
+                  <a:tcPr marL="45720" marR="45720" marT="27432" marB="27432" anchor="ctr">
+                    <a:solidFill>
+                      <a:srgbClr val="F2F2F2"/>
+                    </a:solidFill>
+                  </a:tcPr>
+                </a:tc>
+                <a:tc>
+                  <a:txBody>
+                    <a:bodyPr/>
+                    <a:lstStyle/>
+                    <a:p>
+                      <a:pPr algn="ctr"/>
+                      <a:r>
+                        <a:rPr lang="es-CL" sz="1050" b="1" dirty="0">
+                          <a:solidFill>
+                            <a:schemeClr val="tx2"/>
+                          </a:solidFill>
+                        </a:rPr>
+                        <a:t>2</a:t>
+                      </a:r>
+                    </a:p>
+                  </a:txBody>
+                  <a:tcPr marL="45720" marR="45720" marT="27432" marB="27432" anchor="ctr">
+                    <a:solidFill>
+                      <a:srgbClr val="F2F2F2"/>
+                    </a:solidFill>
+                  </a:tcPr>
+                </a:tc>
+                <a:tc>
+                  <a:txBody>
+                    <a:bodyPr/>
+                    <a:lstStyle/>
+                    <a:p>
+                      <a:pPr/>
+                      <a:r>
+                        <a:rPr lang="es-CL" sz="1050" dirty="0">
+                          <a:solidFill>
+                            <a:schemeClr val="tx2"/>
+                          </a:solidFill>
+                        </a:rPr>
+                        <a:t>7.5.4 · 7.7.6</a:t>
+                      </a:r>
+                    </a:p>
+                  </a:txBody>
+                  <a:tcPr marL="45720" marR="45720" marT="27432" marB="27432" anchor="ctr">
+                    <a:solidFill>
+                      <a:srgbClr val="F2F2F2"/>
+                    </a:solidFill>
+                  </a:tcPr>
+                </a:tc>
+                <a:tc>
+                  <a:txBody>
+                    <a:bodyPr/>
+                    <a:lstStyle/>
+                    <a:p>
+                      <a:pPr/>
+                      <a:r>
+                        <a:rPr lang="es-CL" sz="1050" dirty="0">
+                          <a:solidFill>
+                            <a:schemeClr val="tx2"/>
+                          </a:solidFill>
+                        </a:rPr>
+                        <a:t>Remuneraciones · especialista en tecnología de compensaciones</a:t>
+                      </a:r>
+                    </a:p>
+                  </a:txBody>
+                  <a:tcPr marL="45720" marR="45720" marT="27432" marB="27432" anchor="ctr">
+                    <a:solidFill>
+                      <a:srgbClr val="F2F2F2"/>
+                    </a:solidFill>
+                  </a:tcPr>
+                </a:tc>
+              </a:tr>
+              <a:tr h="660">
+                <a:tc>
+                  <a:txBody>
+                    <a:bodyPr/>
+                    <a:lstStyle/>
+                    <a:p>
+                      <a:pPr/>
+                      <a:r>
+                        <a:rPr lang="es-CL" sz="1050" b="1" dirty="0">
+                          <a:solidFill>
+                            <a:schemeClr val="tx2"/>
+                          </a:solidFill>
+                        </a:rPr>
+                        <a:t>F17 Desvinculación y salida</a:t>
+                      </a:r>
+                    </a:p>
+                  </a:txBody>
+                  <a:tcPr marL="45720" marR="45720" marT="27432" marB="27432" anchor="ctr"/>
+                </a:tc>
+                <a:tc>
+                  <a:txBody>
+                    <a:bodyPr/>
+                    <a:lstStyle/>
+                    <a:p>
+                      <a:pPr algn="ctr"/>
+                      <a:r>
+                        <a:rPr lang="es-CL" sz="1050" b="1" dirty="0">
+                          <a:solidFill>
+                            <a:schemeClr val="tx2"/>
+                          </a:solidFill>
+                        </a:rPr>
+                        <a:t>8</a:t>
+                      </a:r>
+                    </a:p>
+                  </a:txBody>
+                  <a:tcPr marL="45720" marR="45720" marT="27432" marB="27432" anchor="ctr"/>
+                </a:tc>
+                <a:tc>
+                  <a:txBody>
+                    <a:bodyPr/>
+                    <a:lstStyle/>
+                    <a:p>
+                      <a:pPr/>
+                      <a:r>
+                        <a:rPr lang="es-CL" sz="1050" dirty="0">
+                          <a:solidFill>
+                            <a:schemeClr val="tx2"/>
+                          </a:solidFill>
+                        </a:rPr>
+                        <a:t>7.6.2 · 7.6.2.1 · 7.6.2.2 · 7.6.2.3 · 7.6.2.4 · 7.6.3 · 7.6.3.1 · 7.7.3</a:t>
+                      </a:r>
+                    </a:p>
+                  </a:txBody>
+                  <a:tcPr marL="45720" marR="45720" marT="27432" marB="27432" anchor="ctr"/>
+                </a:tc>
+                <a:tc>
+                  <a:txBody>
+                    <a:bodyPr/>
+                    <a:lstStyle/>
+                    <a:p>
+                      <a:pPr/>
+                      <a:r>
+                        <a:rPr lang="es-CL" sz="1050" dirty="0">
+                          <a:solidFill>
+                            <a:schemeClr val="tx2"/>
+                          </a:solidFill>
+                        </a:rPr>
+                        <a:t>Generalista de Personas y relaciones laborales · prevención de riesgos y tecnología · Gerencia de Personas</a:t>
+                      </a:r>
+                    </a:p>
+                  </a:txBody>
+                  <a:tcPr marL="45720" marR="45720" marT="27432" marB="27432" anchor="ctr"/>
+                </a:tc>
+              </a:tr>
+              <a:tr h="620">
+                <a:tc>
+                  <a:txBody>
+                    <a:bodyPr/>
+                    <a:lstStyle/>
+                    <a:p>
+                      <a:pPr/>
+                      <a:r>
+                        <a:rPr lang="es-CL" sz="1050" b="1" dirty="0">
+                          <a:solidFill>
+                            <a:schemeClr val="tx2"/>
+                          </a:solidFill>
+                        </a:rPr>
+                        <a:t>F18 Datos y gobernanza</a:t>
+                      </a:r>
+                    </a:p>
+                  </a:txBody>
+                  <a:tcPr marL="45720" marR="45720" marT="27432" marB="27432" anchor="ctr">
+                    <a:solidFill>
+                      <a:srgbClr val="F2F2F2"/>
+                    </a:solidFill>
+                  </a:tcPr>
+                </a:tc>
+                <a:tc>
+                  <a:txBody>
+                    <a:bodyPr/>
+                    <a:lstStyle/>
+                    <a:p>
+                      <a:pPr algn="ctr"/>
+                      <a:r>
+                        <a:rPr lang="es-CL" sz="1050" b="1" dirty="0">
+                          <a:solidFill>
+                            <a:schemeClr val="tx2"/>
+                          </a:solidFill>
+                        </a:rPr>
+                        <a:t>2</a:t>
+                      </a:r>
+                    </a:p>
+                  </a:txBody>
+                  <a:tcPr marL="45720" marR="45720" marT="27432" marB="27432" anchor="ctr">
+                    <a:solidFill>
+                      <a:srgbClr val="F2F2F2"/>
+                    </a:solidFill>
+                  </a:tcPr>
+                </a:tc>
+                <a:tc>
+                  <a:txBody>
+                    <a:bodyPr/>
+                    <a:lstStyle/>
+                    <a:p>
+                      <a:pPr/>
+                      <a:r>
+                        <a:rPr lang="es-CL" sz="1050" dirty="0">
+                          <a:solidFill>
+                            <a:schemeClr val="tx2"/>
+                          </a:solidFill>
+                        </a:rPr>
+                        <a:t>7.7.2 · 7.7.9</a:t>
+                      </a:r>
+                    </a:p>
+                  </a:txBody>
+                  <a:tcPr marL="45720" marR="45720" marT="27432" marB="27432" anchor="ctr">
+                    <a:solidFill>
+                      <a:srgbClr val="F2F2F2"/>
+                    </a:solidFill>
+                  </a:tcPr>
+                </a:tc>
+                <a:tc>
+                  <a:txBody>
+                    <a:bodyPr/>
+                    <a:lstStyle/>
+                    <a:p>
+                      <a:pPr/>
+                      <a:r>
+                        <a:rPr lang="es-CL" sz="1050" dirty="0">
+                          <a:solidFill>
+                            <a:schemeClr val="tx2"/>
+                          </a:solidFill>
+                        </a:rPr>
+                        <a:t>Por definir</a:t>
+                      </a:r>
+                    </a:p>
+                  </a:txBody>
+                  <a:tcPr marL="45720" marR="45720" marT="27432" marB="27432" anchor="ctr">
+                    <a:solidFill>
+                      <a:srgbClr val="F2F2F2"/>
+                    </a:solidFill>
+                  </a:tcPr>
+                </a:tc>
+              </a:tr>
+            </a:tbl>
+          </a:graphicData>
+        </a:graphic>
+      </p:graphicFrame>
+      <p:sp>
+        <p:nvSpPr>
+          <p:cNvPr id="9" name="8 CuadroTexto"/>
+          <p:cNvSpPr txBox="1"/>
+          <p:nvPr/>
+        </p:nvSpPr>
+        <p:spPr>
+          <a:xfrm>
+            <a:off x="323528" y="5300000"/>
+            <a:ext cx="8352928" cy="1000000"/>
+          </a:xfrm>
+          <a:prstGeom prst="rect">
+            <a:avLst/>
+          </a:prstGeom>
+          <a:noFill/>
+        </p:spPr>
+        <p:txBody>
+          <a:bodyPr wrap="square" lIns="91396" tIns="45697" rIns="91396" bIns="45697" rtlCol="0">
+            <a:spAutoFit/>
+          </a:bodyPr>
+          <a:lstStyle/>
+          <a:p>
+            <a:pPr marL="228600" indent="-228600">
+              <a:buFont typeface="Wingdings" pitchFamily="2" charset="2"/>
+              <a:buChar char="q"/>
+            </a:pPr>
+            <a:r>
+              <a:rPr lang="es-CL" sz="1250" dirty="0">
+                <a:solidFill>
+                  <a:schemeClr val="tx2"/>
+                </a:solidFill>
+              </a:rPr>
+              <a:t>Una brecha </a:t>
+            </a:r>
+            <a:r>
+              <a:rPr lang="es-CL" sz="1250" b="1" dirty="0">
+                <a:solidFill>
+                  <a:schemeClr val="tx2"/>
+                </a:solidFill>
+              </a:rPr>
+              <a:t>no significa que la compañía no ejecute la actividad</a:t>
+            </a:r>
+            <a:r>
+              <a:rPr lang="es-CL" sz="1250" dirty="0">
+                <a:solidFill>
+                  <a:schemeClr val="tx2"/>
+                </a:solidFill>
+              </a:rPr>
+              <a:t>, sino que todavía no está descrito cómo la ejecuta.</a:t>
+            </a:r>
+            <a:endParaRPr lang="es-CL" sz="1250"/>
+          </a:p>
+          <a:p>
+            <a:pPr marL="228600" indent="-228600">
+              <a:spcBef>
+                <a:spcPts val="300"/>
+              </a:spcBef>
+              <a:buFont typeface="Wingdings" pitchFamily="2" charset="2"/>
+              <a:buChar char="q"/>
+            </a:pPr>
+            <a:r>
+              <a:rPr lang="es-CL" sz="1250" dirty="0">
+                <a:solidFill>
+                  <a:schemeClr val="tx2"/>
+                </a:solidFill>
+              </a:rPr>
+              <a:t>En </a:t>
+            </a:r>
+            <a:r>
+              <a:rPr lang="es-CL" sz="1250" b="1" dirty="0">
+                <a:solidFill>
+                  <a:schemeClr val="tx2"/>
+                </a:solidFill>
+              </a:rPr>
+              <a:t>8 de las 12</a:t>
+            </a:r>
+            <a:r>
+              <a:rPr lang="es-CL" sz="1250" dirty="0">
+                <a:solidFill>
+                  <a:schemeClr val="tx2"/>
+                </a:solidFill>
+              </a:rPr>
+              <a:t> el APQC PCF no desciende a un nivel accionable: el marco de referencia </a:t>
+            </a:r>
+            <a:r>
+              <a:rPr lang="es-CL" sz="1250" b="1" dirty="0">
+                <a:solidFill>
+                  <a:schemeClr val="tx2"/>
+                </a:solidFill>
+              </a:rPr>
+              <a:t>no sustituye</a:t>
+            </a:r>
+            <a:r>
+              <a:rPr lang="es-CL" sz="1250" dirty="0">
+                <a:solidFill>
+                  <a:schemeClr val="tx2"/>
+                </a:solidFill>
+              </a:rPr>
+              <a:t> el levantamiento en terreno.</a:t>
+            </a:r>
+            <a:endParaRPr lang="es-CL" sz="1250"/>
+          </a:p>
+        </p:txBody>
+      </p:sp>
+    </p:spTree>
+  </p:cSld>
+  <p:clrMapOvr>
+    <a:masterClrMapping/>
+  </p:clrMapOvr>
+</p:sld>
+</file>
+
+<file path=ppt/slides/slide13.xml><?xml version="1.0" encoding="utf-8"?>
+<p:sld xmlns:a="http://schemas.openxmlformats.org/drawingml/2006/main" xmlns:r="http://schemas.openxmlformats.org/officeDocument/2006/relationships" xmlns:p="http://schemas.openxmlformats.org/presentationml/2006/main">
+  <p:cSld>
+    <p:spTree>
+      <p:nvGrpSpPr>
+        <p:cNvPr id="1" name=""/>
+        <p:cNvGrpSpPr/>
+        <p:nvPr/>
+      </p:nvGrpSpPr>
+      <p:grpSpPr>
+        <a:xfrm>
+          <a:off x="0" y="0"/>
+          <a:ext cx="0" cy="0"/>
+          <a:chOff x="0" y="0"/>
+          <a:chExt cx="0" cy="0"/>
+        </a:xfrm>
+      </p:grpSpPr>
+      <p:sp>
+        <p:nvSpPr>
+          <p:cNvPr id="5" name="4 CuadroTexto"/>
+          <p:cNvSpPr txBox="1"/>
+          <p:nvPr/>
+        </p:nvSpPr>
+        <p:spPr>
+          <a:xfrm>
+            <a:off x="5675867" y="340990"/>
+            <a:ext cx="2337602" cy="252106"/>
+          </a:xfrm>
+          <a:prstGeom prst="rect">
+            <a:avLst/>
+          </a:prstGeom>
+          <a:noFill/>
+        </p:spPr>
+        <p:txBody>
+          <a:bodyPr wrap="square" lIns="82014" tIns="45697" rIns="82014" bIns="45697" rtlCol="0">
+            <a:spAutoFit/>
+          </a:bodyPr>
+          <a:lstStyle/>
+          <a:p>
+            <a:pPr algn="ctr"/>
+            <a:r>
+              <a:rPr lang="es-CL" sz="1000" b="1" dirty="0">
+                <a:solidFill>
+                  <a:prstClr val="black">
+                    <a:lumMod val="65000"/>
+                    <a:lumOff val="35000"/>
+                  </a:prstClr>
+                </a:solidFill>
+              </a:rPr>
+              <a:t>Sistema de gestión de riesgos MP8 y MP21</a:t>
+            </a:r>
+            <a:endParaRPr lang="es-CL" sz="1000"/>
+          </a:p>
+        </p:txBody>
+      </p:sp>
+      <p:sp>
+        <p:nvSpPr>
+          <p:cNvPr id="4" name="3 CuadroTexto"/>
+          <p:cNvSpPr txBox="1"/>
+          <p:nvPr/>
+        </p:nvSpPr>
+        <p:spPr>
+          <a:xfrm>
+            <a:off x="5740803" y="1034218"/>
+            <a:ext cx="2207735" cy="221341"/>
+          </a:xfrm>
+          <a:prstGeom prst="rect">
+            <a:avLst/>
+          </a:prstGeom>
+          <a:noFill/>
+        </p:spPr>
+        <p:txBody>
+          <a:bodyPr wrap="square" lIns="82014" tIns="45697" rIns="82014" bIns="45697" rtlCol="0">
+            <a:spAutoFit/>
+          </a:bodyPr>
+          <a:lstStyle/>
+          <a:p>
+            <a:pPr algn="ctr"/>
+            <a:r>
+              <a:rPr lang="es-CL" sz="900" dirty="0">
+                <a:solidFill>
+                  <a:prstClr val="white">
+                    <a:lumMod val="50000"/>
+                  </a:prstClr>
+                </a:solidFill>
+              </a:rPr>
+              <a:t>| </a:t>
+            </a:r>
+            <a:r>
+              <a:rPr lang="es-CL" sz="900" b="1" dirty="0">
+                <a:solidFill>
+                  <a:srgbClr val="1F497D">
+                    <a:lumMod val="75000"/>
+                  </a:srgbClr>
+                </a:solidFill>
+              </a:rPr>
+              <a:t>Estudiante: </a:t>
+            </a:r>
+            <a:r>
+              <a:rPr lang="es-CL" sz="900" dirty="0">
+                <a:solidFill>
+                  <a:srgbClr val="1F497D">
+                    <a:lumMod val="75000"/>
+                  </a:srgbClr>
+                </a:solidFill>
+              </a:rPr>
+              <a:t>Bastián Darwit Vera</a:t>
+            </a:r>
+            <a:r>
+              <a:rPr lang="es-CL" sz="900" dirty="0">
+                <a:solidFill>
+                  <a:prstClr val="white">
+                    <a:lumMod val="50000"/>
+                  </a:prstClr>
+                </a:solidFill>
+              </a:rPr>
+              <a:t> |</a:t>
+            </a:r>
+          </a:p>
+        </p:txBody>
+      </p:sp>
+      <p:sp>
+        <p:nvSpPr>
+          <p:cNvPr id="6" name="5 CuadroTexto"/>
+          <p:cNvSpPr txBox="1"/>
+          <p:nvPr/>
+        </p:nvSpPr>
+        <p:spPr>
+          <a:xfrm>
+            <a:off x="805865" y="1538381"/>
+            <a:ext cx="7077739" cy="852256"/>
+          </a:xfrm>
+          <a:prstGeom prst="rect">
+            <a:avLst/>
+          </a:prstGeom>
+          <a:noFill/>
+        </p:spPr>
+        <p:txBody>
+          <a:bodyPr wrap="square" lIns="82014" tIns="45697" rIns="82014" bIns="45697" rtlCol="0">
+            <a:spAutoFit/>
+          </a:bodyPr>
+          <a:lstStyle/>
+          <a:p>
+            <a:r>
+              <a:rPr lang="es-CL" sz="2000" b="1" dirty="0">
+                <a:solidFill>
+                  <a:prstClr val="black">
+                    <a:lumMod val="65000"/>
+                    <a:lumOff val="35000"/>
+                  </a:prstClr>
+                </a:solidFill>
+              </a:rPr>
+              <a:t>Resultados · Hallazgos y estado de los indicadores</a:t>
+            </a:r>
+            <a:endParaRPr lang="es-CL" sz="2000"/>
+          </a:p>
+        </p:txBody>
+      </p:sp>
+      <p:sp>
+        <p:nvSpPr>
+          <p:cNvPr id="8" name="7 CuadroTexto"/>
+          <p:cNvSpPr txBox="1"/>
+          <p:nvPr/>
+        </p:nvSpPr>
+        <p:spPr>
+          <a:xfrm>
+            <a:off x="323528" y="2450000"/>
+            <a:ext cx="8352928" cy="2100000"/>
+          </a:xfrm>
+          <a:prstGeom prst="rect">
+            <a:avLst/>
+          </a:prstGeom>
+          <a:noFill/>
+        </p:spPr>
+        <p:txBody>
+          <a:bodyPr wrap="square" lIns="91396" tIns="45697" rIns="91396" bIns="45697" rtlCol="0">
+            <a:spAutoFit/>
+          </a:bodyPr>
+          <a:lstStyle/>
+          <a:p>
+            <a:r>
+              <a:rPr lang="es-CL" sz="1400" b="1" dirty="0">
+                <a:solidFill>
+                  <a:srgbClr val="1F497D">
+                    <a:lumMod val="75000"/>
+                  </a:srgbClr>
+                </a:solidFill>
+              </a:rPr>
+              <a:t>Hallazgos del contraste entre fuentes</a:t>
+            </a:r>
+            <a:endParaRPr lang="es-CL" sz="1400"/>
+          </a:p>
+          <a:p>
+            <a:pPr marL="228600" indent="-228600">
+              <a:buFont typeface="Wingdings" pitchFamily="2" charset="2"/>
+              <a:buChar char="q"/>
+            </a:pPr>
+            <a:r>
+              <a:rPr lang="es-CL" sz="1200" b="1" dirty="0">
+                <a:solidFill>
+                  <a:schemeClr val="tx2"/>
+                </a:solidFill>
+              </a:rPr>
+              <a:t>36 pasos que la organización ejecuta habitualmente no constan en ningún procedimiento vigente</a:t>
+            </a:r>
+            <a:r>
+              <a:rPr lang="es-CL" sz="1200" dirty="0">
+                <a:solidFill>
+                  <a:schemeClr val="tx2"/>
+                </a:solidFill>
+              </a:rPr>
+              <a:t>, entre ellos la priorización de necesidades de dotación, la coordinación del examen preocupacional, la validación de la propuesta de renta y la facilitación de los comités de calibración. Incorporarlos es un aporte directo del trabajo.</a:t>
+            </a:r>
+            <a:endParaRPr lang="es-CL" sz="1200"/>
+          </a:p>
+          <a:p>
+            <a:pPr marL="228600" indent="-228600">
+              <a:spcBef>
+                <a:spcPts val="350"/>
+              </a:spcBef>
+              <a:buFont typeface="Wingdings" pitchFamily="2" charset="2"/>
+              <a:buChar char="q"/>
+            </a:pPr>
+            <a:r>
+              <a:rPr lang="es-CL" sz="1200" b="1" dirty="0">
+                <a:solidFill>
+                  <a:schemeClr val="tx2"/>
+                </a:solidFill>
+              </a:rPr>
+              <a:t>Tensión detectada en gestión del desempeño:</a:t>
+            </a:r>
+            <a:r>
+              <a:rPr lang="es-CL" sz="1200" dirty="0">
+                <a:solidFill>
+                  <a:schemeClr val="tx2"/>
+                </a:solidFill>
+              </a:rPr>
+              <a:t> el procedimiento sitúa la fijación de objetivos en los primeros meses del año y el registro de entrevista distribuye el ciclo por rol a lo largo del año. Debe resolverse con el dueño de proceso antes de consolidar el manual.</a:t>
+            </a:r>
+            <a:endParaRPr lang="es-CL" sz="1200"/>
+          </a:p>
+        </p:txBody>
+      </p:sp>
+      <p:graphicFrame>
+        <p:nvGraphicFramePr>
+          <p:cNvPr id="20" name="Tabla 20"/>
+          <p:cNvGraphicFramePr>
+            <a:graphicFrameLocks noGrp="1"/>
+          </p:cNvGraphicFramePr>
+          <p:nvPr/>
+        </p:nvGraphicFramePr>
+        <p:xfrm>
+          <a:off x="323528" y="4700000"/>
+          <a:ext cx="8352928" cy="1400000"/>
+        </p:xfrm>
+        <a:graphic>
+          <a:graphicData uri="http://schemas.openxmlformats.org/drawingml/2006/table">
+            <a:tbl>
+              <a:tblPr firstRow="1" bandRow="1"/>
+              <a:tblGrid>
+                <a:gridCol w="3000000"/>
+                <a:gridCol w="2600000"/>
+                <a:gridCol w="1500000"/>
+                <a:gridCol w="1252928"/>
+              </a:tblGrid>
+              <a:tr h="380">
+                <a:tc>
+                  <a:txBody>
+                    <a:bodyPr/>
+                    <a:lstStyle/>
+                    <a:p>
+                      <a:pPr/>
+                      <a:r>
+                        <a:rPr lang="es-CL" sz="950" b="1" dirty="0">
+                          <a:solidFill>
+                            <a:srgbClr val="FFFFFF"/>
+                          </a:solidFill>
+                        </a:rPr>
+                        <a:t>Medición</a:t>
+                      </a:r>
+                    </a:p>
+                  </a:txBody>
+                  <a:tcPr marL="45720" marR="45720" marT="27432" marB="27432" anchor="ctr">
+                    <a:solidFill>
+                      <a:srgbClr val="1F497D"/>
+                    </a:solidFill>
+                  </a:tcPr>
+                </a:tc>
+                <a:tc>
+                  <a:txBody>
+                    <a:bodyPr/>
+                    <a:lstStyle/>
+                    <a:p>
+                      <a:pPr/>
+                      <a:r>
+                        <a:rPr lang="es-CL" sz="950" b="1" dirty="0">
+                          <a:solidFill>
+                            <a:srgbClr val="FFFFFF"/>
+                          </a:solidFill>
+                        </a:rPr>
+                        <a:t>Qué mide</a:t>
+                      </a:r>
+                    </a:p>
+                  </a:txBody>
+                  <a:tcPr marL="45720" marR="45720" marT="27432" marB="27432" anchor="ctr">
+                    <a:solidFill>
+                      <a:srgbClr val="1F497D"/>
+                    </a:solidFill>
+                  </a:tcPr>
+                </a:tc>
+                <a:tc>
+                  <a:txBody>
+                    <a:bodyPr/>
+                    <a:lstStyle/>
+                    <a:p>
+                      <a:pPr algn="ctr"/>
+                      <a:r>
+                        <a:rPr lang="es-CL" sz="950" b="1" dirty="0">
+                          <a:solidFill>
+                            <a:srgbClr val="FFFFFF"/>
+                          </a:solidFill>
+                        </a:rPr>
+                        <a:t>MP8</a:t>
+                      </a:r>
+                    </a:p>
+                  </a:txBody>
+                  <a:tcPr marL="45720" marR="45720" marT="27432" marB="27432" anchor="ctr">
+                    <a:solidFill>
+                      <a:srgbClr val="1F497D"/>
+                    </a:solidFill>
+                  </a:tcPr>
+                </a:tc>
+                <a:tc>
+                  <a:txBody>
+                    <a:bodyPr/>
+                    <a:lstStyle/>
+                    <a:p>
+                      <a:pPr algn="ctr"/>
+                      <a:r>
+                        <a:rPr lang="es-CL" sz="950" b="1" dirty="0">
+                          <a:solidFill>
+                            <a:srgbClr val="FFFFFF"/>
+                          </a:solidFill>
+                        </a:rPr>
+                        <a:t>Meta</a:t>
+                      </a:r>
+                    </a:p>
+                  </a:txBody>
+                  <a:tcPr marL="45720" marR="45720" marT="27432" marB="27432" anchor="ctr">
+                    <a:solidFill>
+                      <a:srgbClr val="1F497D"/>
+                    </a:solidFill>
+                  </a:tcPr>
+                </a:tc>
+              </a:tr>
+              <a:tr h="500">
+                <a:tc>
+                  <a:txBody>
+                    <a:bodyPr/>
+                    <a:lstStyle/>
+                    <a:p>
+                      <a:pPr/>
+                      <a:r>
+                        <a:rPr lang="es-CL" sz="1050" b="1" dirty="0">
+                          <a:solidFill>
+                            <a:schemeClr val="tx2"/>
+                          </a:solidFill>
+                        </a:rPr>
+                        <a:t>Cobertura de trazabilidad del flujo</a:t>
+                      </a:r>
+                    </a:p>
+                  </a:txBody>
+                  <a:tcPr marL="45720" marR="45720" marT="27432" marB="27432" anchor="ctr">
+                    <a:solidFill>
+                      <a:srgbClr val="F2F2F2"/>
+                    </a:solidFill>
+                  </a:tcPr>
+                </a:tc>
+                <a:tc>
+                  <a:txBody>
+                    <a:bodyPr/>
+                    <a:lstStyle/>
+                    <a:p>
+                      <a:pPr/>
+                      <a:r>
+                        <a:rPr lang="es-CL" sz="1050" dirty="0">
+                          <a:solidFill>
+                            <a:schemeClr val="tx2"/>
+                          </a:solidFill>
+                        </a:rPr>
+                        <a:t>Pasos con respaldo en documento, entrevista o PCF</a:t>
+                      </a:r>
+                    </a:p>
+                  </a:txBody>
+                  <a:tcPr marL="45720" marR="45720" marT="27432" marB="27432" anchor="ctr">
+                    <a:solidFill>
+                      <a:srgbClr val="F2F2F2"/>
+                    </a:solidFill>
+                  </a:tcPr>
+                </a:tc>
+                <a:tc>
+                  <a:txBody>
+                    <a:bodyPr/>
+                    <a:lstStyle/>
+                    <a:p>
+                      <a:pPr algn="ctr"/>
+                      <a:r>
+                        <a:rPr lang="es-CL" sz="1050" b="1" dirty="0">
+                          <a:solidFill>
+                            <a:schemeClr val="tx2"/>
+                          </a:solidFill>
+                        </a:rPr>
+                        <a:t>222 de 234 · 94,9 %</a:t>
+                      </a:r>
+                    </a:p>
+                  </a:txBody>
+                  <a:tcPr marL="45720" marR="45720" marT="27432" marB="27432" anchor="ctr">
+                    <a:solidFill>
+                      <a:srgbClr val="F2F2F2"/>
+                    </a:solidFill>
+                  </a:tcPr>
+                </a:tc>
+                <a:tc>
+                  <a:txBody>
+                    <a:bodyPr/>
+                    <a:lstStyle/>
+                    <a:p>
+                      <a:pPr algn="ctr"/>
+                      <a:r>
+                        <a:rPr lang="es-CL" sz="1050" dirty="0">
+                          <a:solidFill>
+                            <a:schemeClr val="tx2"/>
+                          </a:solidFill>
+                        </a:rPr>
+                        <a:t>100 %</a:t>
+                      </a:r>
+                    </a:p>
+                  </a:txBody>
+                  <a:tcPr marL="45720" marR="45720" marT="27432" marB="27432" anchor="ctr">
+                    <a:solidFill>
+                      <a:srgbClr val="F2F2F2"/>
+                    </a:solidFill>
+                  </a:tcPr>
+                </a:tc>
+              </a:tr>
+              <a:tr h="500">
+                <a:tc>
+                  <a:txBody>
+                    <a:bodyPr/>
+                    <a:lstStyle/>
+                    <a:p>
+                      <a:pPr/>
+                      <a:r>
+                        <a:rPr lang="es-CL" sz="1050" b="1" dirty="0">
+                          <a:solidFill>
+                            <a:schemeClr val="tx2"/>
+                          </a:solidFill>
+                        </a:rPr>
+                        <a:t>CAP · cobertura de arquitectura</a:t>
+                      </a:r>
+                    </a:p>
+                  </a:txBody>
+                  <a:tcPr marL="45720" marR="45720" marT="27432" marB="27432" anchor="ctr"/>
+                </a:tc>
+                <a:tc>
+                  <a:txBody>
+                    <a:bodyPr/>
+                    <a:lstStyle/>
+                    <a:p>
+                      <a:pPr/>
+                      <a:r>
+                        <a:rPr lang="es-CL" sz="1050" dirty="0">
+                          <a:solidFill>
+                            <a:schemeClr val="tx2"/>
+                          </a:solidFill>
+                        </a:rPr>
+                        <a:t>Elementos documentados en los cinco niveles del MGO</a:t>
+                      </a:r>
+                    </a:p>
+                  </a:txBody>
+                  <a:tcPr marL="45720" marR="45720" marT="27432" marB="27432" anchor="ctr"/>
+                </a:tc>
+                <a:tc>
+                  <a:txBody>
+                    <a:bodyPr/>
+                    <a:lstStyle/>
+                    <a:p>
+                      <a:pPr algn="ctr"/>
+                      <a:r>
+                        <a:rPr lang="es-CL" sz="1050" b="1" dirty="0">
+                          <a:solidFill>
+                            <a:schemeClr val="tx2"/>
+                          </a:solidFill>
+                        </a:rPr>
+                        <a:t>0 %</a:t>
+                      </a:r>
+                    </a:p>
+                  </a:txBody>
+                  <a:tcPr marL="45720" marR="45720" marT="27432" marB="27432" anchor="ctr"/>
+                </a:tc>
+                <a:tc>
+                  <a:txBody>
+                    <a:bodyPr/>
+                    <a:lstStyle/>
+                    <a:p>
+                      <a:pPr algn="ctr"/>
+                      <a:r>
+                        <a:rPr lang="es-CL" sz="1050" dirty="0">
+                          <a:solidFill>
+                            <a:schemeClr val="tx2"/>
+                          </a:solidFill>
+                        </a:rPr>
+                        <a:t>100 %</a:t>
+                      </a:r>
+                    </a:p>
+                  </a:txBody>
+                  <a:tcPr marL="45720" marR="45720" marT="27432" marB="27432" anchor="ctr"/>
+                </a:tc>
+              </a:tr>
+            </a:tbl>
+          </a:graphicData>
+        </a:graphic>
+      </p:graphicFrame>
+      <p:sp>
+        <p:nvSpPr>
+          <p:cNvPr id="11" name="10 CuadroTexto"/>
+          <p:cNvSpPr txBox="1"/>
+          <p:nvPr/>
+        </p:nvSpPr>
+        <p:spPr>
+          <a:xfrm>
+            <a:off x="323528" y="6200000"/>
+            <a:ext cx="8352928" cy="450000"/>
+          </a:xfrm>
+          <a:prstGeom prst="rect">
+            <a:avLst/>
+          </a:prstGeom>
+          <a:noFill/>
+        </p:spPr>
+        <p:txBody>
+          <a:bodyPr wrap="square" lIns="91396" tIns="45697" rIns="91396" bIns="45697" rtlCol="0">
+            <a:spAutoFit/>
+          </a:bodyPr>
+          <a:lstStyle/>
+          <a:p>
+            <a:r>
+              <a:rPr lang="es-CL" sz="1000" i="1" dirty="0">
+                <a:solidFill>
+                  <a:prstClr val="black">
+                    <a:lumMod val="65000"/>
+                    <a:lumOff val="35000"/>
+                  </a:prstClr>
+                </a:solidFill>
+              </a:rPr>
+              <a:t>El CAP en 0 % no expresa ausencia de avance: mide la segmentación jerárquica, que es la etapa siguiente.</a:t>
+            </a:r>
+            <a:endParaRPr lang="es-CL" sz="1000"/>
+          </a:p>
+        </p:txBody>
+      </p:sp>
+    </p:spTree>
+  </p:cSld>
+  <p:clrMapOvr>
+    <a:masterClrMapping/>
+  </p:clrMapOvr>
+</p:sld>
+</file>
+
+<file path=ppt/slides/slide14.xml><?xml version="1.0" encoding="utf-8"?>
+<p:sld xmlns:a="http://schemas.openxmlformats.org/drawingml/2006/main" xmlns:r="http://schemas.openxmlformats.org/officeDocument/2006/relationships" xmlns:p="http://schemas.openxmlformats.org/presentationml/2006/main">
+  <p:cSld>
+    <p:spTree>
+      <p:nvGrpSpPr>
+        <p:cNvPr id="1" name=""/>
+        <p:cNvGrpSpPr/>
+        <p:nvPr/>
+      </p:nvGrpSpPr>
+      <p:grpSpPr>
+        <a:xfrm>
+          <a:off x="0" y="0"/>
+          <a:ext cx="0" cy="0"/>
+          <a:chOff x="0" y="0"/>
+          <a:chExt cx="0" cy="0"/>
+        </a:xfrm>
+      </p:grpSpPr>
+      <p:sp>
+        <p:nvSpPr>
+          <p:cNvPr id="5" name="4 CuadroTexto"/>
+          <p:cNvSpPr txBox="1"/>
+          <p:nvPr/>
+        </p:nvSpPr>
+        <p:spPr>
+          <a:xfrm>
+            <a:off x="5675867" y="340990"/>
+            <a:ext cx="2337602" cy="252106"/>
+          </a:xfrm>
+          <a:prstGeom prst="rect">
+            <a:avLst/>
+          </a:prstGeom>
+          <a:noFill/>
+        </p:spPr>
+        <p:txBody>
+          <a:bodyPr wrap="square" lIns="82014" tIns="45697" rIns="82014" bIns="45697" rtlCol="0">
+            <a:spAutoFit/>
+          </a:bodyPr>
+          <a:lstStyle/>
+          <a:p>
+            <a:pPr algn="ctr"/>
+            <a:r>
+              <a:rPr lang="es-CL" sz="1000" b="1" dirty="0">
+                <a:solidFill>
+                  <a:prstClr val="black">
+                    <a:lumMod val="65000"/>
+                    <a:lumOff val="35000"/>
+                  </a:prstClr>
+                </a:solidFill>
+              </a:rPr>
+              <a:t>Sistema de gestión de riesgos MP8 y MP21</a:t>
+            </a:r>
+            <a:endParaRPr lang="es-CL" sz="1000"/>
+          </a:p>
+        </p:txBody>
+      </p:sp>
+      <p:sp>
+        <p:nvSpPr>
+          <p:cNvPr id="4" name="3 CuadroTexto"/>
+          <p:cNvSpPr txBox="1"/>
+          <p:nvPr/>
+        </p:nvSpPr>
+        <p:spPr>
+          <a:xfrm>
+            <a:off x="5740803" y="1034218"/>
+            <a:ext cx="2207735" cy="221341"/>
+          </a:xfrm>
+          <a:prstGeom prst="rect">
+            <a:avLst/>
+          </a:prstGeom>
+          <a:noFill/>
+        </p:spPr>
+        <p:txBody>
+          <a:bodyPr wrap="square" lIns="82014" tIns="45697" rIns="82014" bIns="45697" rtlCol="0">
+            <a:spAutoFit/>
+          </a:bodyPr>
+          <a:lstStyle/>
+          <a:p>
+            <a:pPr algn="ctr"/>
+            <a:r>
+              <a:rPr lang="es-CL" sz="900" dirty="0">
+                <a:solidFill>
+                  <a:prstClr val="white">
+                    <a:lumMod val="50000"/>
+                  </a:prstClr>
+                </a:solidFill>
+              </a:rPr>
+              <a:t>| </a:t>
+            </a:r>
+            <a:r>
+              <a:rPr lang="es-CL" sz="900" b="1" dirty="0">
+                <a:solidFill>
+                  <a:srgbClr val="1F497D">
+                    <a:lumMod val="75000"/>
+                  </a:srgbClr>
+                </a:solidFill>
+              </a:rPr>
+              <a:t>Estudiante: </a:t>
+            </a:r>
+            <a:r>
+              <a:rPr lang="es-CL" sz="900" dirty="0">
+                <a:solidFill>
+                  <a:srgbClr val="1F497D">
+                    <a:lumMod val="75000"/>
+                  </a:srgbClr>
+                </a:solidFill>
+              </a:rPr>
+              <a:t>Bastián Darwit Vera</a:t>
+            </a:r>
+            <a:r>
+              <a:rPr lang="es-CL" sz="900" dirty="0">
+                <a:solidFill>
+                  <a:prstClr val="white">
+                    <a:lumMod val="50000"/>
+                  </a:prstClr>
+                </a:solidFill>
+              </a:rPr>
+              <a:t> |</a:t>
+            </a:r>
+          </a:p>
+        </p:txBody>
+      </p:sp>
+      <p:sp>
+        <p:nvSpPr>
+          <p:cNvPr id="6" name="5 CuadroTexto"/>
+          <p:cNvSpPr txBox="1"/>
+          <p:nvPr/>
+        </p:nvSpPr>
+        <p:spPr>
+          <a:xfrm>
+            <a:off x="805865" y="1538381"/>
+            <a:ext cx="7077739" cy="852256"/>
+          </a:xfrm>
+          <a:prstGeom prst="rect">
+            <a:avLst/>
+          </a:prstGeom>
+          <a:noFill/>
+        </p:spPr>
+        <p:txBody>
+          <a:bodyPr wrap="square" lIns="82014" tIns="45697" rIns="82014" bIns="45697" rtlCol="0">
+            <a:spAutoFit/>
+          </a:bodyPr>
+          <a:lstStyle/>
+          <a:p>
+            <a:r>
+              <a:rPr lang="es-CL" sz="2200" b="1" dirty="0">
+                <a:solidFill>
+                  <a:prstClr val="black">
+                    <a:lumMod val="65000"/>
+                    <a:lumOff val="35000"/>
+                  </a:prstClr>
+                </a:solidFill>
+              </a:rPr>
+              <a:t>Próximos pasos</a:t>
+            </a:r>
+            <a:endParaRPr lang="es-CL" sz="2200"/>
+          </a:p>
+        </p:txBody>
+      </p:sp>
+      <p:sp>
+        <p:nvSpPr>
+          <p:cNvPr id="8" name="7 CuadroTexto"/>
+          <p:cNvSpPr txBox="1"/>
+          <p:nvPr/>
+        </p:nvSpPr>
+        <p:spPr>
+          <a:xfrm>
+            <a:off x="323528" y="2500000"/>
+            <a:ext cx="8352928" cy="3300000"/>
+          </a:xfrm>
+          <a:prstGeom prst="rect">
+            <a:avLst/>
+          </a:prstGeom>
+          <a:noFill/>
+        </p:spPr>
+        <p:txBody>
+          <a:bodyPr wrap="square" lIns="91396" tIns="45697" rIns="91396" bIns="45697" rtlCol="0">
+            <a:spAutoFit/>
+          </a:bodyPr>
+          <a:lstStyle/>
+          <a:p>
+            <a:pPr marL="228600" indent="-228600">
+              <a:buFont typeface="Wingdings" pitchFamily="2" charset="2"/>
+              <a:buChar char="q"/>
+            </a:pPr>
+            <a:r>
+              <a:rPr lang="es-CL" sz="1300" b="1" dirty="0">
+                <a:solidFill>
+                  <a:schemeClr val="tx2"/>
+                </a:solidFill>
+              </a:rPr>
+              <a:t>Semanas 6 y 7 · Segmentación jerárquica de MP8.</a:t>
+            </a:r>
+            <a:r>
+              <a:rPr lang="es-CL" sz="1300" dirty="0">
+                <a:solidFill>
+                  <a:schemeClr val="tx2"/>
+                </a:solidFill>
+              </a:rPr>
+              <a:t> Derivar del flujo levantado los cinco niveles del MGO, con lo que comienza a medirse el CAP.</a:t>
+            </a:r>
+            <a:endParaRPr lang="es-CL" sz="1300"/>
+          </a:p>
+          <a:p>
+            <a:pPr marL="228600" indent="-228600">
+              <a:spcBef>
+                <a:spcPts val="450"/>
+              </a:spcBef>
+              <a:buFont typeface="Wingdings" pitchFamily="2" charset="2"/>
+              <a:buChar char="q"/>
+            </a:pPr>
+            <a:r>
+              <a:rPr lang="es-CL" sz="1300" b="1" dirty="0">
+                <a:solidFill>
+                  <a:schemeClr val="tx2"/>
+                </a:solidFill>
+              </a:rPr>
+              <a:t>Semanas 6 a 11 · Levantamiento de MP21.</a:t>
+            </a:r>
+            <a:r>
+              <a:rPr lang="es-CL" sz="1300" dirty="0">
+                <a:solidFill>
+                  <a:schemeClr val="tx2"/>
+                </a:solidFill>
+              </a:rPr>
+              <a:t> Aplicar la misma secuencia y la misma regla de trazabilidad, para permitir la comparación entre ambos macroprocesos.</a:t>
+            </a:r>
+            <a:endParaRPr lang="es-CL" sz="1300"/>
+          </a:p>
+          <a:p>
+            <a:pPr marL="228600" indent="-228600">
+              <a:spcBef>
+                <a:spcPts val="450"/>
+              </a:spcBef>
+              <a:buFont typeface="Wingdings" pitchFamily="2" charset="2"/>
+              <a:buChar char="q"/>
+            </a:pPr>
+            <a:r>
+              <a:rPr lang="es-CL" sz="1300" b="1" dirty="0">
+                <a:solidFill>
+                  <a:schemeClr val="tx2"/>
+                </a:solidFill>
+              </a:rPr>
+              <a:t>En paralelo · Cierre de las 12 brechas.</a:t>
+            </a:r>
+            <a:r>
+              <a:rPr lang="es-CL" sz="1300" dirty="0">
+                <a:solidFill>
+                  <a:schemeClr val="tx2"/>
+                </a:solidFill>
+              </a:rPr>
+              <a:t> Reuniones con los roles ya identificados en nómina, desvinculación y gobernanza de datos.</a:t>
+            </a:r>
+            <a:endParaRPr lang="es-CL" sz="1300"/>
+          </a:p>
+          <a:p>
+            <a:pPr marL="228600" indent="-228600">
+              <a:spcBef>
+                <a:spcPts val="450"/>
+              </a:spcBef>
+              <a:buFont typeface="Wingdings" pitchFamily="2" charset="2"/>
+              <a:buChar char="q"/>
+            </a:pPr>
+            <a:r>
+              <a:rPr lang="es-CL" sz="1300" b="1" dirty="0">
+                <a:solidFill>
+                  <a:schemeClr val="tx2"/>
+                </a:solidFill>
+              </a:rPr>
+              <a:t>Semanas 11 a 13 · Manuales y acta de validación.</a:t>
+            </a:r>
+            <a:r>
+              <a:rPr lang="es-CL" sz="1300" dirty="0">
+                <a:solidFill>
+                  <a:schemeClr val="tx2"/>
+                </a:solidFill>
+              </a:rPr>
+              <a:t> Consolidación de los dos manuales bajo el formato del MGO y validación formal con los dueños de proceso.</a:t>
+            </a:r>
+            <a:endParaRPr lang="es-CL" sz="1300"/>
+          </a:p>
+          <a:p>
+            <a:pPr marL="228600" indent="-228600">
+              <a:spcBef>
+                <a:spcPts val="450"/>
+              </a:spcBef>
+              <a:buFont typeface="Wingdings" pitchFamily="2" charset="2"/>
+              <a:buChar char="q"/>
+            </a:pPr>
+            <a:r>
+              <a:rPr lang="es-CL" sz="1300" b="1" dirty="0">
+                <a:solidFill>
+                  <a:schemeClr val="tx2"/>
+                </a:solidFill>
+              </a:rPr>
+              <a:t>Desde la semana 12 · Inicio de OE2.</a:t>
+            </a:r>
+            <a:r>
+              <a:rPr lang="es-CL" sz="1300" dirty="0">
+                <a:solidFill>
+                  <a:schemeClr val="tx2"/>
+                </a:solidFill>
+              </a:rPr>
+              <a:t> Identificación de eventos de riesgo por tarea, en talleres con los dueños de proceso.</a:t>
+            </a:r>
+            <a:endParaRPr lang="es-CL" sz="1300"/>
+          </a:p>
+        </p:txBody>
+      </p:sp>
+      <p:sp>
+        <p:nvSpPr>
+          <p:cNvPr id="11" name="10 CuadroTexto"/>
+          <p:cNvSpPr txBox="1"/>
+          <p:nvPr/>
+        </p:nvSpPr>
+        <p:spPr>
+          <a:xfrm>
+            <a:off x="323528" y="6200000"/>
+            <a:ext cx="8352928" cy="450000"/>
+          </a:xfrm>
+          <a:prstGeom prst="rect">
+            <a:avLst/>
+          </a:prstGeom>
+          <a:noFill/>
+        </p:spPr>
+        <p:txBody>
+          <a:bodyPr wrap="square" lIns="91396" tIns="45697" rIns="91396" bIns="45697" rtlCol="0">
+            <a:spAutoFit/>
+          </a:bodyPr>
+          <a:lstStyle/>
+          <a:p>
+            <a:r>
+              <a:rPr lang="es-CL" sz="1000" i="1" dirty="0">
+                <a:solidFill>
+                  <a:prstClr val="black">
+                    <a:lumMod val="65000"/>
+                    <a:lumOff val="35000"/>
+                  </a:prstClr>
+                </a:solidFill>
+              </a:rPr>
+              <a:t>Segundo hito de avance: semana 13.</a:t>
+            </a:r>
+            <a:endParaRPr lang="es-CL" sz="1000"/>
+          </a:p>
+        </p:txBody>
+      </p:sp>
+    </p:spTree>
+  </p:cSld>
+  <p:clrMapOvr>
+    <a:masterClrMapping/>
+  </p:clrMapOvr>
+</p:sld>
+</file>
+
+<file path=ppt/slides/slide15.xml><?xml version="1.0" encoding="utf-8"?>
+<p:sld xmlns:a="http://schemas.openxmlformats.org/drawingml/2006/main" xmlns:r="http://schemas.openxmlformats.org/officeDocument/2006/relationships" xmlns:p="http://schemas.openxmlformats.org/presentationml/2006/main">
+  <p:cSld>
+    <p:spTree>
+      <p:nvGrpSpPr>
+        <p:cNvPr id="1" name=""/>
+        <p:cNvGrpSpPr/>
+        <p:nvPr/>
+      </p:nvGrpSpPr>
+      <p:grpSpPr>
+        <a:xfrm>
+          <a:off x="0" y="0"/>
+          <a:ext cx="0" cy="0"/>
+          <a:chOff x="0" y="0"/>
+          <a:chExt cx="0" cy="0"/>
+        </a:xfrm>
+      </p:grpSpPr>
+      <p:sp>
+        <p:nvSpPr>
+          <p:cNvPr id="4" name="3 CuadroTexto"/>
+          <p:cNvSpPr txBox="1"/>
+          <p:nvPr/>
+        </p:nvSpPr>
+        <p:spPr>
+          <a:xfrm>
+            <a:off x="1500000" y="2900000"/>
+            <a:ext cx="6144000" cy="900000"/>
+          </a:xfrm>
+          <a:prstGeom prst="rect">
+            <a:avLst/>
+          </a:prstGeom>
+          <a:noFill/>
+        </p:spPr>
+        <p:txBody>
+          <a:bodyPr wrap="square" lIns="82014" tIns="45697" rIns="82014" bIns="45697" rtlCol="0">
+            <a:spAutoFit/>
+          </a:bodyPr>
+          <a:lstStyle/>
+          <a:p>
+            <a:pPr algn="ctr"/>
+            <a:r>
+              <a:rPr lang="es-CL" sz="2800" b="1" dirty="0">
+                <a:solidFill>
+                  <a:prstClr val="black">
+                    <a:lumMod val="65000"/>
+                    <a:lumOff val="35000"/>
+                  </a:prstClr>
+                </a:solidFill>
+              </a:rPr>
+              <a:t>Gracias por su atención</a:t>
+            </a:r>
+            <a:endParaRPr lang="es-CL" sz="2800"/>
+          </a:p>
+        </p:txBody>
+      </p:sp>
+      <p:sp>
+        <p:nvSpPr>
+          <p:cNvPr id="3" name="2 CuadroTexto"/>
+          <p:cNvSpPr txBox="1"/>
+          <p:nvPr/>
+        </p:nvSpPr>
+        <p:spPr>
+          <a:xfrm>
+            <a:off x="1500000" y="4000000"/>
+            <a:ext cx="6144000" cy="1200000"/>
+          </a:xfrm>
+          <a:prstGeom prst="rect">
+            <a:avLst/>
+          </a:prstGeom>
+          <a:noFill/>
+        </p:spPr>
+        <p:txBody>
+          <a:bodyPr wrap="square" lIns="82014" tIns="45697" rIns="82014" bIns="45697" rtlCol="0">
+            <a:spAutoFit/>
+          </a:bodyPr>
+          <a:lstStyle/>
+          <a:p>
+            <a:pPr algn="ctr"/>
+            <a:r>
+              <a:rPr lang="es-CL" sz="1400" b="1" dirty="0">
+                <a:solidFill>
+                  <a:srgbClr val="1F497D">
+                    <a:lumMod val="75000"/>
+                  </a:srgbClr>
+                </a:solidFill>
+              </a:rPr>
+              <a:t>Bastián Darwit Vera</a:t>
+            </a:r>
+            <a:endParaRPr lang="es-CL" sz="1400"/>
+          </a:p>
+          <a:p>
+            <a:pPr algn="ctr"/>
+            <a:r>
+              <a:rPr lang="es-CL" sz="1200" dirty="0">
+                <a:solidFill>
+                  <a:srgbClr val="1F497D">
+                    <a:lumMod val="75000"/>
+                  </a:srgbClr>
+                </a:solidFill>
+              </a:rPr>
+              <a:t>Magíster en Sistemas de Gestión Integral de la Calidad · Universidad de La Frontera</a:t>
+            </a:r>
+            <a:endParaRPr lang="es-CL" sz="1200"/>
+          </a:p>
+          <a:p>
+            <a:pPr algn="ctr"/>
+            <a:r>
+              <a:rPr lang="es-CL" sz="1200" dirty="0">
+                <a:solidFill>
+                  <a:srgbClr val="1F497D">
+                    <a:lumMod val="75000"/>
+                  </a:srgbClr>
+                </a:solidFill>
+              </a:rPr>
+              <a:t>Temuco, 12 de septiembre de 2026</a:t>
+            </a:r>
+            <a:endParaRPr lang="es-CL" sz="1200"/>
+          </a:p>
+        </p:txBody>
+      </p:sp>
+    </p:spTree>
+  </p:cSld>
+  <p:clrMapOvr>
+    <a:masterClrMapping/>
+  </p:clrMapOvr>
+</p:sld>
+</file>
+
 <file path=ppt/slides/slide2.xml><?xml version="1.0" encoding="utf-8"?>
 <p:sld xmlns:a="http://schemas.openxmlformats.org/drawingml/2006/main" xmlns:r="http://schemas.openxmlformats.org/officeDocument/2006/relationships" xmlns:p="http://schemas.openxmlformats.org/presentationml/2006/main">
   <p:cSld>
@@ -10567,7 +16909,7 @@
         <p:spPr>
           <a:xfrm>
             <a:off x="323528" y="2450000"/>
-            <a:ext cx="8352928" cy="1800000"/>
+            <a:ext cx="8352928" cy="1500000"/>
           </a:xfrm>
           <a:prstGeom prst="rect">
             <a:avLst/>
@@ -10581,7 +16923,7 @@
           <a:lstStyle/>
           <a:p>
             <a:r>
-              <a:rPr lang="es-CL" sz="2000" b="1" dirty="0">
+              <a:rPr lang="es-CL" sz="1900" b="1" dirty="0">
                 <a:solidFill>
                   <a:srgbClr val="1F497D">
                     <a:lumMod val="75000"/>
@@ -10590,7 +16932,7 @@
               </a:rPr>
               <a:t>Propuesta de un sistema de gestión de riesgos para los macroprocesos de Gestión de Personas (MP8) y Servicios Generales (MP21) de Celulosa Arauco y Constitución S.A.</a:t>
             </a:r>
-            <a:endParaRPr lang="es-CL" sz="2000"/>
+            <a:endParaRPr lang="es-CL" sz="1900"/>
           </a:p>
         </p:txBody>
       </p:sp>
@@ -10602,8 +16944,8 @@
         </p:nvSpPr>
         <p:spPr>
           <a:xfrm>
-            <a:off x="323528" y="4500000"/>
-            <a:ext cx="8352928" cy="1600000"/>
+            <a:off x="323528" y="4150000"/>
+            <a:ext cx="8352928" cy="2000000"/>
           </a:xfrm>
           <a:prstGeom prst="rect">
             <a:avLst/>
@@ -10621,82 +16963,111 @@
               <a:buChar char="q"/>
             </a:pPr>
             <a:r>
-              <a:rPr lang="es-CL" sz="1400" dirty="0">
+              <a:rPr lang="es-CL" sz="1300" b="1" dirty="0">
                 <a:solidFill>
                   <a:schemeClr val="tx2"/>
                 </a:solidFill>
               </a:rPr>
-              <a:t>El título se mantiene sin modificaciones respecto del anteproyecto aprobado.</a:t>
-            </a:r>
-            <a:endParaRPr lang="es-CL" sz="1400"/>
+              <a:t>Qué se aborda.</a:t>
+            </a:r>
+            <a:r>
+              <a:rPr lang="es-CL" sz="1300" dirty="0">
+                <a:solidFill>
+                  <a:schemeClr val="tx2"/>
+                </a:solidFill>
+              </a:rPr>
+              <a:t> Dos macroprocesos de apoyo que sostienen la operación y que hoy no cuentan con una gestión de riesgos estructurada ni con una arquitectura de procesos formalizada.</a:t>
+            </a:r>
+            <a:endParaRPr lang="es-CL" sz="1300"/>
           </a:p>
           <a:p>
             <a:pPr marL="228600" indent="-228600">
               <a:spcBef>
-                <a:spcPts val="600"/>
+                <a:spcPts val="500"/>
               </a:spcBef>
               <a:buFont typeface="Wingdings" pitchFamily="2" charset="2"/>
               <a:buChar char="q"/>
             </a:pPr>
             <a:r>
-              <a:rPr lang="es-CL" sz="1400" dirty="0">
+              <a:rPr lang="es-CL" sz="1300" b="1" dirty="0">
                 <a:solidFill>
                   <a:schemeClr val="tx2"/>
                 </a:solidFill>
               </a:rPr>
-              <a:t>Se conserva el carácter de </a:t>
-            </a:r>
-            <a:r>
-              <a:rPr lang="es-CL" sz="1400" b="1" dirty="0">
+              <a:t>Caso.</a:t>
+            </a:r>
+            <a:r>
+              <a:rPr lang="es-CL" sz="1300" dirty="0">
                 <a:solidFill>
                   <a:schemeClr val="tx2"/>
                 </a:solidFill>
               </a:rPr>
-              <a:t>propuesta</a:t>
-            </a:r>
-            <a:r>
-              <a:rPr lang="es-CL" sz="1400" dirty="0">
-                <a:solidFill>
-                  <a:schemeClr val="tx2"/>
-                </a:solidFill>
-              </a:rPr>
-              <a:t>: el trabajo comprende el diseño del sistema de gestión de riesgos y no su implementación, que queda a decisión de la compañía.</a:t>
-            </a:r>
-            <a:endParaRPr lang="es-CL" sz="1400"/>
+              <a:t> Celulosa Arauco y Constitución S.A. El trabajo se centra en el Negocio de Celulosa; MP8 es transversal a los negocios de celulosa, madera y forestal.</a:t>
+            </a:r>
+            <a:endParaRPr lang="es-CL" sz="1300"/>
           </a:p>
           <a:p>
             <a:pPr marL="228600" indent="-228600">
               <a:spcBef>
-                <a:spcPts val="600"/>
+                <a:spcPts val="500"/>
               </a:spcBef>
               <a:buFont typeface="Wingdings" pitchFamily="2" charset="2"/>
               <a:buChar char="q"/>
             </a:pPr>
             <a:r>
-              <a:rPr lang="es-CL" sz="1400" dirty="0">
+              <a:rPr lang="es-CL" sz="1300" b="1" dirty="0">
                 <a:solidFill>
                   <a:schemeClr val="tx2"/>
                 </a:solidFill>
               </a:rPr>
-              <a:t>Precisión de alcance incorporada: el trabajo se centra en el </a:t>
-            </a:r>
-            <a:r>
-              <a:rPr lang="es-CL" sz="1400" b="1" dirty="0">
+              <a:t>Carácter de propuesta.</a:t>
+            </a:r>
+            <a:r>
+              <a:rPr lang="es-CL" sz="1300" dirty="0">
                 <a:solidFill>
                   <a:schemeClr val="tx2"/>
                 </a:solidFill>
               </a:rPr>
-              <a:t>Negocio de Celulosa</a:t>
-            </a:r>
-            <a:r>
-              <a:rPr lang="es-CL" sz="1400" dirty="0">
-                <a:solidFill>
-                  <a:schemeClr val="tx2"/>
-                </a:solidFill>
-              </a:rPr>
-              <a:t>, y se explicita que MP8 es transversal a los negocios de celulosa, madera y forestal.</a:t>
-            </a:r>
-            <a:endParaRPr lang="es-CL" sz="1400"/>
+              <a:t> El trabajo comprende el diseño del sistema, no su implementación.</a:t>
+            </a:r>
+            <a:endParaRPr lang="es-CL" sz="1300"/>
+          </a:p>
+        </p:txBody>
+      </p:sp>
+      <p:sp>
+        <p:nvSpPr>
+          <p:cNvPr id="11" name="10 CuadroTexto"/>
+          <p:cNvSpPr txBox="1"/>
+          <p:nvPr/>
+        </p:nvSpPr>
+        <p:spPr>
+          <a:xfrm>
+            <a:off x="323528" y="6200000"/>
+            <a:ext cx="8352928" cy="450000"/>
+          </a:xfrm>
+          <a:prstGeom prst="rect">
+            <a:avLst/>
+          </a:prstGeom>
+          <a:noFill/>
+        </p:spPr>
+        <p:txBody>
+          <a:bodyPr wrap="square" lIns="91396" tIns="45697" rIns="91396" bIns="45697" rtlCol="0">
+            <a:spAutoFit/>
+          </a:bodyPr>
+          <a:lstStyle/>
+          <a:p>
+            <a:r>
+              <a:rPr lang="es-CL" sz="1000" i="1" dirty="0">
+                <a:solidFill>
+                  <a:prstClr val="black">
+                    <a:lumMod val="65000"/>
+                    <a:lumOff val="35000"/>
+                  </a:prstClr>
+                </a:solidFill>
+              </a:rPr>
+              <a:t>Título sin modificaciones respecto del anteproyecto aprobado.</a:t>
+            </a:r>
+            <a:endParaRPr lang="es-CL" sz="1000"/>
           </a:p>
         </p:txBody>
       </p:sp>
@@ -10875,7 +17246,7 @@
         <p:spPr>
           <a:xfrm>
             <a:off x="323528" y="2450000"/>
-            <a:ext cx="8352928" cy="1000000"/>
+            <a:ext cx="8352928" cy="1100000"/>
           </a:xfrm>
           <a:prstGeom prst="rect">
             <a:avLst/>
@@ -10921,8 +17292,8 @@
         </p:nvSpPr>
         <p:spPr>
           <a:xfrm>
-            <a:off x="323528" y="3750000"/>
-            <a:ext cx="8352928" cy="2400000"/>
+            <a:off x="323528" y="3800000"/>
+            <a:ext cx="8352928" cy="2300000"/>
           </a:xfrm>
           <a:prstGeom prst="rect">
             <a:avLst/>
@@ -10956,7 +17327,7 @@
               <a:buChar char="q"/>
             </a:pPr>
             <a:r>
-              <a:rPr lang="es-CL" sz="1400" b="1" dirty="0">
+              <a:rPr lang="es-CL" sz="1350" b="1" dirty="0">
                 <a:solidFill>
                   <a:schemeClr val="tx2"/>
                 </a:solidFill>
@@ -10964,14 +17335,14 @@
               <a:t>OE1. Modelar</a:t>
             </a:r>
             <a:r>
-              <a:rPr lang="es-CL" sz="1400" dirty="0">
+              <a:rPr lang="es-CL" sz="1350" dirty="0">
                 <a:solidFill>
                   <a:schemeClr val="tx2"/>
                 </a:solidFill>
               </a:rPr>
               <a:t> la arquitectura de procesos de MP8 y MP21, desde sus procesos hasta sus tareas, según el marco del Modelo de Gestión Operacional.</a:t>
             </a:r>
-            <a:endParaRPr lang="es-CL" sz="1400"/>
+            <a:endParaRPr lang="es-CL" sz="1350"/>
           </a:p>
           <a:p>
             <a:pPr marL="228600" indent="-228600">
@@ -10982,7 +17353,7 @@
               <a:buChar char="q"/>
             </a:pPr>
             <a:r>
-              <a:rPr lang="es-CL" sz="1400" b="1" dirty="0">
+              <a:rPr lang="es-CL" sz="1350" b="1" dirty="0">
                 <a:solidFill>
                   <a:schemeClr val="tx2"/>
                 </a:solidFill>
@@ -10990,14 +17361,14 @@
               <a:t>OE2. Evaluar</a:t>
             </a:r>
             <a:r>
-              <a:rPr lang="es-CL" sz="1400" dirty="0">
+              <a:rPr lang="es-CL" sz="1350" dirty="0">
                 <a:solidFill>
                   <a:schemeClr val="tx2"/>
                 </a:solidFill>
               </a:rPr>
-              <a:t> los riesgos operacionales asociados a las tareas modeladas de ambos macroprocesos mediante la metodología COSO II.</a:t>
-            </a:r>
-            <a:endParaRPr lang="es-CL" sz="1400"/>
+              <a:t> los riesgos operacionales de las tareas modeladas mediante la metodología COSO II.</a:t>
+            </a:r>
+            <a:endParaRPr lang="es-CL" sz="1350"/>
           </a:p>
           <a:p>
             <a:pPr marL="228600" indent="-228600">
@@ -11008,7 +17379,7 @@
               <a:buChar char="q"/>
             </a:pPr>
             <a:r>
-              <a:rPr lang="es-CL" sz="1400" b="1" dirty="0">
+              <a:rPr lang="es-CL" sz="1350" b="1" dirty="0">
                 <a:solidFill>
                   <a:schemeClr val="tx2"/>
                 </a:solidFill>
@@ -11016,27 +17387,27 @@
               <a:t>OE3. Elaborar</a:t>
             </a:r>
             <a:r>
-              <a:rPr lang="es-CL" sz="1400" dirty="0">
+              <a:rPr lang="es-CL" sz="1350" dirty="0">
                 <a:solidFill>
                   <a:schemeClr val="tx2"/>
                 </a:solidFill>
               </a:rPr>
-              <a:t> el sistema de gestión de riesgos, integrando el catálogo de riesgos evaluados y sus planes de mitigación.</a:t>
-            </a:r>
-            <a:endParaRPr lang="es-CL" sz="1400"/>
-          </a:p>
-        </p:txBody>
-      </p:sp>
-      <p:sp>
-        <p:nvSpPr>
-          <p:cNvPr id="10" name="9 CuadroTexto"/>
+              <a:t> el sistema de gestión de riesgos, integrando el catálogo de riesgos y sus planes de mitigación.</a:t>
+            </a:r>
+            <a:endParaRPr lang="es-CL" sz="1350"/>
+          </a:p>
+        </p:txBody>
+      </p:sp>
+      <p:sp>
+        <p:nvSpPr>
+          <p:cNvPr id="11" name="10 CuadroTexto"/>
           <p:cNvSpPr txBox="1"/>
           <p:nvPr/>
         </p:nvSpPr>
         <p:spPr>
           <a:xfrm>
-            <a:off x="323528" y="6180000"/>
-            <a:ext cx="8352928" cy="400000"/>
+            <a:off x="323528" y="6200000"/>
+            <a:ext cx="8352928" cy="450000"/>
           </a:xfrm>
           <a:prstGeom prst="rect">
             <a:avLst/>
@@ -11050,7 +17421,7 @@
           <a:lstStyle/>
           <a:p>
             <a:r>
-              <a:rPr lang="es-CL" sz="1100" i="1" dirty="0">
+              <a:rPr lang="es-CL" sz="1000" i="1" dirty="0">
                 <a:solidFill>
                   <a:prstClr val="black">
                     <a:lumMod val="65000"/>
@@ -11058,9 +17429,9 @@
                   </a:prstClr>
                 </a:solidFill>
               </a:rPr>
-              <a:t>Los objetivos no presentan modificaciones respecto del anteproyecto aprobado.</a:t>
-            </a:r>
-            <a:endParaRPr lang="es-CL" sz="1100"/>
+              <a:t>Objetivos sin modificaciones. Este avance reporta el objetivo específico 1.</a:t>
+            </a:r>
+            <a:endParaRPr lang="es-CL" sz="1000"/>
           </a:p>
         </p:txBody>
       </p:sp>
@@ -11216,7 +17587,7 @@
           <a:lstStyle/>
           <a:p>
             <a:r>
-              <a:rPr lang="es-CL" sz="2200" b="1" dirty="0">
+              <a:rPr lang="es-CL" sz="2100" b="1" dirty="0">
                 <a:solidFill>
                   <a:prstClr val="black">
                     <a:lumMod val="65000"/>
@@ -11226,7 +17597,7 @@
               </a:rPr>
               <a:t>Metodología (1 de 3) · Diseño y objetivo específico 1</a:t>
             </a:r>
-            <a:endParaRPr lang="es-CL" sz="2200"/>
+            <a:endParaRPr lang="es-CL" sz="2100"/>
           </a:p>
         </p:txBody>
       </p:sp>
@@ -11239,7 +17610,7 @@
         <p:spPr>
           <a:xfrm>
             <a:off x="323528" y="2450000"/>
-            <a:ext cx="8352928" cy="1100000"/>
+            <a:ext cx="8352928" cy="900000"/>
           </a:xfrm>
           <a:prstGeom prst="rect">
             <a:avLst/>
@@ -11253,25 +17624,36 @@
           <a:lstStyle/>
           <a:p>
             <a:r>
-              <a:rPr lang="es-CL" sz="1500" b="1" dirty="0">
-                <a:solidFill>
-                  <a:srgbClr val="1F497D">
-                    <a:lumMod val="75000"/>
-                  </a:srgbClr>
-                </a:solidFill>
-              </a:rPr>
-              <a:t>Diseño de investigación</a:t>
-            </a:r>
-            <a:endParaRPr lang="es-CL" sz="1500"/>
-          </a:p>
-          <a:p>
+              <a:rPr lang="es-CL" sz="1300" b="1" dirty="0">
+                <a:solidFill>
+                  <a:schemeClr val="tx2"/>
+                </a:solidFill>
+              </a:rPr>
+              <a:t>Diseño.</a:t>
+            </a:r>
             <a:r>
               <a:rPr lang="es-CL" sz="1300" dirty="0">
                 <a:solidFill>
                   <a:schemeClr val="tx2"/>
                 </a:solidFill>
               </a:rPr>
-              <a:t>Descriptivo-aplicado, con estrategia descriptiva de tipo observacional, sobre un caso único de carácter no experimental (Ato et al., 2013). Unidad de análisis: el nivel corporativo que define ambos macroprocesos.</a:t>
+              <a:t> Descriptivo-aplicado, observacional, caso único, no experimental. </a:t>
+            </a:r>
+            <a:r>
+              <a:rPr lang="es-CL" sz="1300" b="1" dirty="0">
+                <a:solidFill>
+                  <a:schemeClr val="tx2"/>
+                </a:solidFill>
+              </a:rPr>
+              <a:t>Unidad de análisis:</a:t>
+            </a:r>
+            <a:r>
+              <a:rPr lang="es-CL" sz="1300" dirty="0">
+                <a:solidFill>
+                  <a:schemeClr val="tx2"/>
+                </a:solidFill>
+              </a:rPr>
+              <a:t> el nivel corporativo que define ambos macroprocesos.</a:t>
             </a:r>
             <a:endParaRPr lang="es-CL" sz="1300"/>
           </a:p>
@@ -11285,8 +17667,8 @@
         </p:nvSpPr>
         <p:spPr>
           <a:xfrm>
-            <a:off x="323528" y="3700000"/>
-            <a:ext cx="8352928" cy="2450000"/>
+            <a:off x="323528" y="3350000"/>
+            <a:ext cx="8352928" cy="2700000"/>
           </a:xfrm>
           <a:prstGeom prst="rect">
             <a:avLst/>
@@ -11300,7 +17682,7 @@
           <a:lstStyle/>
           <a:p>
             <a:r>
-              <a:rPr lang="es-CL" sz="1500" b="1" dirty="0">
+              <a:rPr lang="es-CL" sz="1450" b="1" dirty="0">
                 <a:solidFill>
                   <a:srgbClr val="1F497D">
                     <a:lumMod val="75000"/>
@@ -11309,7 +17691,7 @@
               </a:rPr>
               <a:t>OE1 · El modelamiento se ejecuta en dos etapas por macroproceso</a:t>
             </a:r>
-            <a:endParaRPr lang="es-CL" sz="1500"/>
+            <a:endParaRPr lang="es-CL" sz="1450"/>
           </a:p>
           <a:p>
             <a:pPr marL="228600" indent="-228600">
@@ -11333,7 +17715,7 @@
                   <a:schemeClr val="tx2"/>
                 </a:solidFill>
               </a:rPr>
-              <a:t> Se traza la cadena SIPOC continua del primer proveedor al último cliente, con el orden y el arranque que fija el APQC PCF v8.0.</a:t>
+              <a:t> Cadena SIPOC continua del primer proveedor al último cliente, con el orden y el arranque que fija el APQC PCF v8.0, categoría 7.</a:t>
             </a:r>
             <a:endParaRPr lang="es-CL" sz="1300"/>
           </a:p>
@@ -11359,7 +17741,7 @@
                   <a:schemeClr val="tx2"/>
                 </a:solidFill>
               </a:rPr>
-              <a:t> La arquitectura en cinco niveles se deriva del flujo levantado, bajo el formato del MGO.</a:t>
+              <a:t> Los cinco niveles del MGO se derivan del flujo levantado, no se imponen sobre él.</a:t>
             </a:r>
             <a:endParaRPr lang="es-CL" sz="1300"/>
           </a:p>
@@ -11385,7 +17767,7 @@
                   <a:schemeClr val="tx2"/>
                 </a:solidFill>
               </a:rPr>
-              <a:t> Cada elemento se respalda en procedimiento vigente, entrevista o PCF. Si ninguna fuente lo sustenta, se declara como brecha en lugar de completarse por estimación.</a:t>
+              <a:t> Cada elemento se respalda en procedimiento vigente, entrevista o PCF. Si ninguna fuente lo sustenta, se declara brecha en lugar de completarse por estimación.</a:t>
             </a:r>
             <a:endParaRPr lang="es-CL" sz="1300"/>
           </a:p>
@@ -11393,14 +17775,14 @@
       </p:sp>
       <p:sp>
         <p:nvSpPr>
-          <p:cNvPr id="10" name="9 CuadroTexto"/>
+          <p:cNvPr id="11" name="10 CuadroTexto"/>
           <p:cNvSpPr txBox="1"/>
           <p:nvPr/>
         </p:nvSpPr>
         <p:spPr>
           <a:xfrm>
-            <a:off x="323528" y="6180000"/>
-            <a:ext cx="8352928" cy="400000"/>
+            <a:off x="323528" y="6200000"/>
+            <a:ext cx="8352928" cy="450000"/>
           </a:xfrm>
           <a:prstGeom prst="rect">
             <a:avLst/>
@@ -11414,7 +17796,7 @@
           <a:lstStyle/>
           <a:p>
             <a:r>
-              <a:rPr lang="es-CL" sz="1100" b="1" dirty="0">
+              <a:rPr lang="es-CL" sz="1000" i="1" dirty="0">
                 <a:solidFill>
                   <a:prstClr val="black">
                     <a:lumMod val="65000"/>
@@ -11424,7 +17806,7 @@
               </a:rPr>
               <a:t>Indicador de logro: CAP, cobertura de arquitectura de procesos.</a:t>
             </a:r>
-            <a:endParaRPr lang="es-CL" sz="1100"/>
+            <a:endParaRPr lang="es-CL" sz="1000"/>
           </a:p>
         </p:txBody>
       </p:sp>
@@ -11603,7 +17985,7 @@
         <p:spPr>
           <a:xfrm>
             <a:off x="323528" y="2450000"/>
-            <a:ext cx="8352928" cy="700000"/>
+            <a:ext cx="8352928" cy="600000"/>
           </a:xfrm>
           <a:prstGeom prst="rect">
             <a:avLst/>
@@ -11622,7 +18004,7 @@
                   <a:schemeClr val="tx2"/>
                 </a:solidFill>
               </a:rPr>
-              <a:t>Se evalúan los riesgos operacionales sobre la totalidad de las tareas modeladas y se determinan siete atributos para cada tarea, conforme a COSO II.</a:t>
+              <a:t>Se evalúan los riesgos sobre la totalidad de las tareas modeladas, determinando siete atributos por tarea según COSO II.</a:t>
             </a:r>
             <a:endParaRPr lang="es-CL" sz="1300"/>
           </a:p>
@@ -11637,18 +18019,18 @@
           <p:nvPr/>
         </p:nvGraphicFramePr>
         <p:xfrm>
-          <a:off x="323528" y="3150000"/>
-          <a:ext cx="8352928" cy="2900000"/>
+          <a:off x="323528" y="3050000"/>
+          <a:ext cx="8352928" cy="3000000"/>
         </p:xfrm>
         <a:graphic>
           <a:graphicData uri="http://schemas.openxmlformats.org/drawingml/2006/table">
             <a:tbl>
               <a:tblPr firstRow="1" bandRow="1"/>
               <a:tblGrid>
-                <a:gridCol w="2600000"/>
-                <a:gridCol w="5752928"/>
+                <a:gridCol w="2500000"/>
+                <a:gridCol w="5852928"/>
               </a:tblGrid>
-              <a:tr h="330">
+              <a:tr h="350">
                 <a:tc>
                   <a:txBody>
                     <a:bodyPr/>
@@ -11656,7 +18038,7 @@
                     <a:p>
                       <a:pPr/>
                       <a:r>
-                        <a:rPr lang="es-CL" sz="1100" b="1" dirty="0">
+                        <a:rPr lang="es-CL" sz="950" b="1" dirty="0">
                           <a:solidFill>
                             <a:srgbClr val="FFFFFF"/>
                           </a:solidFill>
@@ -11678,7 +18060,7 @@
                     <a:p>
                       <a:pPr/>
                       <a:r>
-                        <a:rPr lang="es-CL" sz="1100" b="1" dirty="0">
+                        <a:rPr lang="es-CL" sz="950" b="1" dirty="0">
                           <a:solidFill>
                             <a:srgbClr val="FFFFFF"/>
                           </a:solidFill>
@@ -11694,7 +18076,7 @@
                   </a:tcPr>
                 </a:tc>
               </a:tr>
-              <a:tr h="330">
+              <a:tr h="370">
                 <a:tc>
                   <a:txBody>
                     <a:bodyPr/>
@@ -11740,7 +18122,7 @@
                   </a:tcPr>
                 </a:tc>
               </a:tr>
-              <a:tr h="330">
+              <a:tr h="370">
                 <a:tc>
                   <a:txBody>
                     <a:bodyPr/>
@@ -11778,7 +18160,7 @@
                   <a:tcPr marL="45720" marR="45720" marT="27432" marB="27432" anchor="ctr"/>
                 </a:tc>
               </a:tr>
-              <a:tr h="330">
+              <a:tr h="370">
                 <a:tc>
                   <a:txBody>
                     <a:bodyPr/>
@@ -11824,7 +18206,7 @@
                   </a:tcPr>
                 </a:tc>
               </a:tr>
-              <a:tr h="330">
+              <a:tr h="370">
                 <a:tc>
                   <a:txBody>
                     <a:bodyPr/>
@@ -11862,7 +18244,7 @@
                   <a:tcPr marL="45720" marR="45720" marT="27432" marB="27432" anchor="ctr"/>
                 </a:tc>
               </a:tr>
-              <a:tr h="330">
+              <a:tr h="370">
                 <a:tc>
                   <a:txBody>
                     <a:bodyPr/>
@@ -11908,7 +18290,7 @@
                   </a:tcPr>
                 </a:tc>
               </a:tr>
-              <a:tr h="330">
+              <a:tr h="370">
                 <a:tc>
                   <a:txBody>
                     <a:bodyPr/>
@@ -11946,7 +18328,7 @@
                   <a:tcPr marL="45720" marR="45720" marT="27432" marB="27432" anchor="ctr"/>
                 </a:tc>
               </a:tr>
-              <a:tr h="330">
+              <a:tr h="370">
                 <a:tc>
                   <a:txBody>
                     <a:bodyPr/>
@@ -11998,14 +18380,14 @@
       </p:graphicFrame>
       <p:sp>
         <p:nvSpPr>
-          <p:cNvPr id="10" name="9 CuadroTexto"/>
+          <p:cNvPr id="11" name="10 CuadroTexto"/>
           <p:cNvSpPr txBox="1"/>
           <p:nvPr/>
         </p:nvSpPr>
         <p:spPr>
           <a:xfrm>
-            <a:off x="323528" y="6180000"/>
-            <a:ext cx="8352928" cy="400000"/>
+            <a:off x="323528" y="6200000"/>
+            <a:ext cx="8352928" cy="450000"/>
           </a:xfrm>
           <a:prstGeom prst="rect">
             <a:avLst/>
@@ -12019,7 +18401,7 @@
           <a:lstStyle/>
           <a:p>
             <a:r>
-              <a:rPr lang="es-CL" sz="1100" b="1" dirty="0">
+              <a:rPr lang="es-CL" sz="1000" i="1" dirty="0">
                 <a:solidFill>
                   <a:prstClr val="black">
                     <a:lumMod val="65000"/>
@@ -12029,7 +18411,7 @@
               </a:rPr>
               <a:t>Indicador de logro: TCER, tasa de cobertura de evaluación de riesgos.</a:t>
             </a:r>
-            <a:endParaRPr lang="es-CL" sz="1100"/>
+            <a:endParaRPr lang="es-CL" sz="1000"/>
           </a:p>
         </p:txBody>
       </p:sp>
@@ -12185,7 +18567,7 @@
           <a:lstStyle/>
           <a:p>
             <a:r>
-              <a:rPr lang="es-CL" sz="2200" b="1" dirty="0">
+              <a:rPr lang="es-CL" sz="2000" b="1" dirty="0">
                 <a:solidFill>
                   <a:prstClr val="black">
                     <a:lumMod val="65000"/>
@@ -12195,7 +18577,7 @@
               </a:rPr>
               <a:t>Metodología (3 de 3) · Objetivo específico 3 e indicadores</a:t>
             </a:r>
-            <a:endParaRPr lang="es-CL" sz="2200"/>
+            <a:endParaRPr lang="es-CL" sz="2000"/>
           </a:p>
         </p:txBody>
       </p:sp>
@@ -12222,7 +18604,7 @@
           <a:lstStyle/>
           <a:p>
             <a:r>
-              <a:rPr lang="es-CL" sz="1500" b="1" dirty="0">
+              <a:rPr lang="es-CL" sz="1450" b="1" dirty="0">
                 <a:solidFill>
                   <a:srgbClr val="1F497D">
                     <a:lumMod val="75000"/>
@@ -12231,7 +18613,7 @@
               </a:rPr>
               <a:t>OE3 · Composición del sistema de gestión de riesgos</a:t>
             </a:r>
-            <a:endParaRPr lang="es-CL" sz="1500"/>
+            <a:endParaRPr lang="es-CL" sz="1450"/>
           </a:p>
           <a:p>
             <a:r>
@@ -12240,7 +18622,7 @@
                   <a:schemeClr val="tx2"/>
                 </a:solidFill>
               </a:rPr>
-              <a:t>Catálogo de riesgos evaluados, insumo de OE2, </a:t>
+              <a:t>Catálogo de riesgos evaluados, </a:t>
             </a:r>
             <a:r>
               <a:rPr lang="es-CL" sz="1300" b="1" dirty="0">
@@ -12288,17 +18670,17 @@
         </p:nvGraphicFramePr>
         <p:xfrm>
           <a:off x="323528" y="3900000"/>
-          <a:ext cx="8352928" cy="1900000"/>
+          <a:ext cx="8352928" cy="2100000"/>
         </p:xfrm>
         <a:graphic>
           <a:graphicData uri="http://schemas.openxmlformats.org/drawingml/2006/table">
             <a:tbl>
               <a:tblPr firstRow="1" bandRow="1"/>
               <a:tblGrid>
-                <a:gridCol w="1000000"/>
-                <a:gridCol w="3300000"/>
-                <a:gridCol w="2400000"/>
-                <a:gridCol w="1652928"/>
+                <a:gridCol w="900000"/>
+                <a:gridCol w="3200000"/>
+                <a:gridCol w="2500000"/>
+                <a:gridCol w="1752928"/>
               </a:tblGrid>
               <a:tr h="380">
                 <a:tc>
@@ -12308,7 +18690,7 @@
                     <a:p>
                       <a:pPr algn="ctr"/>
                       <a:r>
-                        <a:rPr lang="es-CL" sz="1100" b="1" dirty="0">
+                        <a:rPr lang="es-CL" sz="950" b="1" dirty="0">
                           <a:solidFill>
                             <a:srgbClr val="FFFFFF"/>
                           </a:solidFill>
@@ -12330,7 +18712,7 @@
                     <a:p>
                       <a:pPr/>
                       <a:r>
-                        <a:rPr lang="es-CL" sz="1100" b="1" dirty="0">
+                        <a:rPr lang="es-CL" sz="950" b="1" dirty="0">
                           <a:solidFill>
                             <a:srgbClr val="FFFFFF"/>
                           </a:solidFill>
@@ -12352,7 +18734,7 @@
                     <a:p>
                       <a:pPr/>
                       <a:r>
-                        <a:rPr lang="es-CL" sz="1100" b="1" dirty="0">
+                        <a:rPr lang="es-CL" sz="950" b="1" dirty="0">
                           <a:solidFill>
                             <a:srgbClr val="FFFFFF"/>
                           </a:solidFill>
@@ -12374,7 +18756,7 @@
                     <a:p>
                       <a:pPr algn="ctr"/>
                       <a:r>
-                        <a:rPr lang="es-CL" sz="1100" b="1" dirty="0">
+                        <a:rPr lang="es-CL" sz="950" b="1" dirty="0">
                           <a:solidFill>
                             <a:srgbClr val="FFFFFF"/>
                           </a:solidFill>
@@ -12390,7 +18772,7 @@
                   </a:tcPr>
                 </a:tc>
               </a:tr>
-              <a:tr h="440">
+              <a:tr h="480">
                 <a:tc>
                   <a:txBody>
                     <a:bodyPr/>
@@ -12480,7 +18862,7 @@
                   </a:tcPr>
                 </a:tc>
               </a:tr>
-              <a:tr h="440">
+              <a:tr h="480">
                 <a:tc>
                   <a:txBody>
                     <a:bodyPr/>
@@ -12554,7 +18936,7 @@
                   <a:tcPr marL="45720" marR="45720" marT="27432" marB="27432" anchor="ctr"/>
                 </a:tc>
               </a:tr>
-              <a:tr h="440">
+              <a:tr h="480">
                 <a:tc>
                   <a:txBody>
                     <a:bodyPr/>
@@ -12650,14 +19032,14 @@
       </p:graphicFrame>
       <p:sp>
         <p:nvSpPr>
-          <p:cNvPr id="10" name="9 CuadroTexto"/>
+          <p:cNvPr id="11" name="10 CuadroTexto"/>
           <p:cNvSpPr txBox="1"/>
           <p:nvPr/>
         </p:nvSpPr>
         <p:spPr>
           <a:xfrm>
-            <a:off x="323528" y="6180000"/>
-            <a:ext cx="8352928" cy="400000"/>
+            <a:off x="323528" y="6200000"/>
+            <a:ext cx="8352928" cy="450000"/>
           </a:xfrm>
           <a:prstGeom prst="rect">
             <a:avLst/>
@@ -12671,7 +19053,7 @@
           <a:lstStyle/>
           <a:p>
             <a:r>
-              <a:rPr lang="es-CL" sz="1100" i="1" dirty="0">
+              <a:rPr lang="es-CL" sz="1000" i="1" dirty="0">
                 <a:solidFill>
                   <a:prstClr val="black">
                     <a:lumMod val="65000"/>
@@ -12681,7 +19063,7 @@
               </a:rPr>
               <a:t>El sistema se valida con los dueños de proceso y se presenta a la alta gerencia.</a:t>
             </a:r>
-            <a:endParaRPr lang="es-CL" sz="1100"/>
+            <a:endParaRPr lang="es-CL" sz="1000"/>
           </a:p>
         </p:txBody>
       </p:sp>
@@ -12845,6 +19227,549 @@
                   </a:prstClr>
                 </a:solidFill>
               </a:rPr>
+              <a:t>Cambios respecto del anteproyecto</a:t>
+            </a:r>
+            <a:endParaRPr lang="es-CL" sz="2200"/>
+          </a:p>
+        </p:txBody>
+      </p:sp>
+      <p:graphicFrame>
+        <p:nvGraphicFramePr>
+          <p:cNvPr id="20" name="Tabla 20"/>
+          <p:cNvGraphicFramePr>
+            <a:graphicFrameLocks noGrp="1"/>
+          </p:cNvGraphicFramePr>
+          <p:nvPr/>
+        </p:nvGraphicFramePr>
+        <p:xfrm>
+          <a:off x="323528" y="2500000"/>
+          <a:ext cx="8352928" cy="2900000"/>
+        </p:xfrm>
+        <a:graphic>
+          <a:graphicData uri="http://schemas.openxmlformats.org/drawingml/2006/table">
+            <a:tbl>
+              <a:tblPr firstRow="1" bandRow="1"/>
+              <a:tblGrid>
+                <a:gridCol w="2100000"/>
+                <a:gridCol w="2900000"/>
+                <a:gridCol w="3352928"/>
+              </a:tblGrid>
+              <a:tr h="380">
+                <a:tc>
+                  <a:txBody>
+                    <a:bodyPr/>
+                    <a:lstStyle/>
+                    <a:p>
+                      <a:pPr/>
+                      <a:r>
+                        <a:rPr lang="es-CL" sz="950" b="1" dirty="0">
+                          <a:solidFill>
+                            <a:srgbClr val="FFFFFF"/>
+                          </a:solidFill>
+                        </a:rPr>
+                        <a:t>Ámbito</a:t>
+                      </a:r>
+                    </a:p>
+                  </a:txBody>
+                  <a:tcPr marL="45720" marR="45720" marT="27432" marB="27432" anchor="ctr">
+                    <a:solidFill>
+                      <a:srgbClr val="1F497D"/>
+                    </a:solidFill>
+                  </a:tcPr>
+                </a:tc>
+                <a:tc>
+                  <a:txBody>
+                    <a:bodyPr/>
+                    <a:lstStyle/>
+                    <a:p>
+                      <a:pPr/>
+                      <a:r>
+                        <a:rPr lang="es-CL" sz="950" b="1" dirty="0">
+                          <a:solidFill>
+                            <a:srgbClr val="FFFFFF"/>
+                          </a:solidFill>
+                        </a:rPr>
+                        <a:t>Qué cambió</a:t>
+                      </a:r>
+                    </a:p>
+                  </a:txBody>
+                  <a:tcPr marL="45720" marR="45720" marT="27432" marB="27432" anchor="ctr">
+                    <a:solidFill>
+                      <a:srgbClr val="1F497D"/>
+                    </a:solidFill>
+                  </a:tcPr>
+                </a:tc>
+                <a:tc>
+                  <a:txBody>
+                    <a:bodyPr/>
+                    <a:lstStyle/>
+                    <a:p>
+                      <a:pPr/>
+                      <a:r>
+                        <a:rPr lang="es-CL" sz="950" b="1" dirty="0">
+                          <a:solidFill>
+                            <a:srgbClr val="FFFFFF"/>
+                          </a:solidFill>
+                        </a:rPr>
+                        <a:t>Por qué</a:t>
+                      </a:r>
+                    </a:p>
+                  </a:txBody>
+                  <a:tcPr marL="45720" marR="45720" marT="27432" marB="27432" anchor="ctr">
+                    <a:solidFill>
+                      <a:srgbClr val="1F497D"/>
+                    </a:solidFill>
+                  </a:tcPr>
+                </a:tc>
+              </a:tr>
+              <a:tr h="620">
+                <a:tc>
+                  <a:txBody>
+                    <a:bodyPr/>
+                    <a:lstStyle/>
+                    <a:p>
+                      <a:pPr/>
+                      <a:r>
+                        <a:rPr lang="es-CL" sz="1100" b="1" dirty="0">
+                          <a:solidFill>
+                            <a:schemeClr val="tx2"/>
+                          </a:solidFill>
+                        </a:rPr>
+                        <a:t>Plan de trabajo</a:t>
+                      </a:r>
+                    </a:p>
+                  </a:txBody>
+                  <a:tcPr marL="45720" marR="45720" marT="27432" marB="27432" anchor="ctr">
+                    <a:solidFill>
+                      <a:srgbClr val="F2F2F2"/>
+                    </a:solidFill>
+                  </a:tcPr>
+                </a:tc>
+                <a:tc>
+                  <a:txBody>
+                    <a:bodyPr/>
+                    <a:lstStyle/>
+                    <a:p>
+                      <a:pPr/>
+                      <a:r>
+                        <a:rPr lang="es-CL" sz="1100" dirty="0">
+                          <a:solidFill>
+                            <a:schemeClr val="tx2"/>
+                          </a:solidFill>
+                        </a:rPr>
+                        <a:t>A1.3 y A1.4 se desdoblan en flujo único y segmentación jerárquica</a:t>
+                      </a:r>
+                    </a:p>
+                  </a:txBody>
+                  <a:tcPr marL="45720" marR="45720" marT="27432" marB="27432" anchor="ctr">
+                    <a:solidFill>
+                      <a:srgbClr val="F2F2F2"/>
+                    </a:solidFill>
+                  </a:tcPr>
+                </a:tc>
+                <a:tc>
+                  <a:txBody>
+                    <a:bodyPr/>
+                    <a:lstStyle/>
+                    <a:p>
+                      <a:pPr/>
+                      <a:r>
+                        <a:rPr lang="es-CL" sz="1100" dirty="0">
+                          <a:solidFill>
+                            <a:schemeClr val="tx2"/>
+                          </a:solidFill>
+                        </a:rPr>
+                        <a:t>El modelamiento requiere levantar primero la cadena de información; la jerarquía se deriva de ella</a:t>
+                      </a:r>
+                    </a:p>
+                  </a:txBody>
+                  <a:tcPr marL="45720" marR="45720" marT="27432" marB="27432" anchor="ctr">
+                    <a:solidFill>
+                      <a:srgbClr val="F2F2F2"/>
+                    </a:solidFill>
+                  </a:tcPr>
+                </a:tc>
+              </a:tr>
+              <a:tr h="620">
+                <a:tc>
+                  <a:txBody>
+                    <a:bodyPr/>
+                    <a:lstStyle/>
+                    <a:p>
+                      <a:pPr/>
+                      <a:r>
+                        <a:rPr lang="es-CL" sz="1100" b="1" dirty="0">
+                          <a:solidFill>
+                            <a:schemeClr val="tx2"/>
+                          </a:solidFill>
+                        </a:rPr>
+                        <a:t>Alcance</a:t>
+                      </a:r>
+                    </a:p>
+                  </a:txBody>
+                  <a:tcPr marL="45720" marR="45720" marT="27432" marB="27432" anchor="ctr"/>
+                </a:tc>
+                <a:tc>
+                  <a:txBody>
+                    <a:bodyPr/>
+                    <a:lstStyle/>
+                    <a:p>
+                      <a:pPr/>
+                      <a:r>
+                        <a:rPr lang="es-CL" sz="1100" dirty="0">
+                          <a:solidFill>
+                            <a:schemeClr val="tx2"/>
+                          </a:solidFill>
+                        </a:rPr>
+                        <a:t>Se precisa que el trabajo se centra en el Negocio de Celulosa</a:t>
+                      </a:r>
+                    </a:p>
+                  </a:txBody>
+                  <a:tcPr marL="45720" marR="45720" marT="27432" marB="27432" anchor="ctr"/>
+                </a:tc>
+                <a:tc>
+                  <a:txBody>
+                    <a:bodyPr/>
+                    <a:lstStyle/>
+                    <a:p>
+                      <a:pPr/>
+                      <a:r>
+                        <a:rPr lang="es-CL" sz="1100" dirty="0">
+                          <a:solidFill>
+                            <a:schemeClr val="tx2"/>
+                          </a:solidFill>
+                        </a:rPr>
+                        <a:t>MP8 es transversal a celulosa, madera y forestal, y se define a nivel corporativo</a:t>
+                      </a:r>
+                    </a:p>
+                  </a:txBody>
+                  <a:tcPr marL="45720" marR="45720" marT="27432" marB="27432" anchor="ctr"/>
+                </a:tc>
+              </a:tr>
+              <a:tr h="620">
+                <a:tc>
+                  <a:txBody>
+                    <a:bodyPr/>
+                    <a:lstStyle/>
+                    <a:p>
+                      <a:pPr/>
+                      <a:r>
+                        <a:rPr lang="es-CL" sz="1100" b="1" dirty="0">
+                          <a:solidFill>
+                            <a:schemeClr val="tx2"/>
+                          </a:solidFill>
+                        </a:rPr>
+                        <a:t>Carta Gantt</a:t>
+                      </a:r>
+                    </a:p>
+                  </a:txBody>
+                  <a:tcPr marL="45720" marR="45720" marT="27432" marB="27432" anchor="ctr">
+                    <a:solidFill>
+                      <a:srgbClr val="F2F2F2"/>
+                    </a:solidFill>
+                  </a:tcPr>
+                </a:tc>
+                <a:tc>
+                  <a:txBody>
+                    <a:bodyPr/>
+                    <a:lstStyle/>
+                    <a:p>
+                      <a:pPr/>
+                      <a:r>
+                        <a:rPr lang="es-CL" sz="1100" dirty="0">
+                          <a:solidFill>
+                            <a:schemeClr val="tx2"/>
+                          </a:solidFill>
+                        </a:rPr>
+                        <a:t>Replanificada; el primer hito pasa de la semana 10 a la semana 5</a:t>
+                      </a:r>
+                    </a:p>
+                  </a:txBody>
+                  <a:tcPr marL="45720" marR="45720" marT="27432" marB="27432" anchor="ctr">
+                    <a:solidFill>
+                      <a:srgbClr val="F2F2F2"/>
+                    </a:solidFill>
+                  </a:tcPr>
+                </a:tc>
+                <a:tc>
+                  <a:txBody>
+                    <a:bodyPr/>
+                    <a:lstStyle/>
+                    <a:p>
+                      <a:pPr/>
+                      <a:r>
+                        <a:rPr lang="es-CL" sz="1100" dirty="0">
+                          <a:solidFill>
+                            <a:schemeClr val="tx2"/>
+                          </a:solidFill>
+                        </a:rPr>
+                        <a:t>Ajuste a la fecha efectiva de esta presentación</a:t>
+                      </a:r>
+                    </a:p>
+                  </a:txBody>
+                  <a:tcPr marL="45720" marR="45720" marT="27432" marB="27432" anchor="ctr">
+                    <a:solidFill>
+                      <a:srgbClr val="F2F2F2"/>
+                    </a:solidFill>
+                  </a:tcPr>
+                </a:tc>
+              </a:tr>
+              <a:tr h="620">
+                <a:tc>
+                  <a:txBody>
+                    <a:bodyPr/>
+                    <a:lstStyle/>
+                    <a:p>
+                      <a:pPr/>
+                      <a:r>
+                        <a:rPr lang="es-CL" sz="1100" b="1" dirty="0">
+                          <a:solidFill>
+                            <a:schemeClr val="tx2"/>
+                          </a:solidFill>
+                        </a:rPr>
+                        <a:t>Medición</a:t>
+                      </a:r>
+                    </a:p>
+                  </a:txBody>
+                  <a:tcPr marL="45720" marR="45720" marT="27432" marB="27432" anchor="ctr"/>
+                </a:tc>
+                <a:tc>
+                  <a:txBody>
+                    <a:bodyPr/>
+                    <a:lstStyle/>
+                    <a:p>
+                      <a:pPr/>
+                      <a:r>
+                        <a:rPr lang="es-CL" sz="1100" dirty="0">
+                          <a:solidFill>
+                            <a:schemeClr val="tx2"/>
+                          </a:solidFill>
+                        </a:rPr>
+                        <a:t>Se agrega la cobertura de trazabilidad del flujo</a:t>
+                      </a:r>
+                    </a:p>
+                  </a:txBody>
+                  <a:tcPr marL="45720" marR="45720" marT="27432" marB="27432" anchor="ctr"/>
+                </a:tc>
+                <a:tc>
+                  <a:txBody>
+                    <a:bodyPr/>
+                    <a:lstStyle/>
+                    <a:p>
+                      <a:pPr/>
+                      <a:r>
+                        <a:rPr lang="es-CL" sz="1100" dirty="0">
+                          <a:solidFill>
+                            <a:schemeClr val="tx2"/>
+                          </a:solidFill>
+                        </a:rPr>
+                        <a:t>El CAP mide la segmentación final y no refleja el avance intermedio</a:t>
+                      </a:r>
+                    </a:p>
+                  </a:txBody>
+                  <a:tcPr marL="45720" marR="45720" marT="27432" marB="27432" anchor="ctr"/>
+                </a:tc>
+              </a:tr>
+            </a:tbl>
+          </a:graphicData>
+        </a:graphic>
+      </p:graphicFrame>
+      <p:sp>
+        <p:nvSpPr>
+          <p:cNvPr id="9" name="8 CuadroTexto"/>
+          <p:cNvSpPr txBox="1"/>
+          <p:nvPr/>
+        </p:nvSpPr>
+        <p:spPr>
+          <a:xfrm>
+            <a:off x="323528" y="5500000"/>
+            <a:ext cx="8352928" cy="700000"/>
+          </a:xfrm>
+          <a:prstGeom prst="rect">
+            <a:avLst/>
+          </a:prstGeom>
+          <a:noFill/>
+        </p:spPr>
+        <p:txBody>
+          <a:bodyPr wrap="square" lIns="91396" tIns="45697" rIns="91396" bIns="45697" rtlCol="0">
+            <a:spAutoFit/>
+          </a:bodyPr>
+          <a:lstStyle/>
+          <a:p>
+            <a:r>
+              <a:rPr lang="es-CL" sz="1300" b="1" dirty="0">
+                <a:solidFill>
+                  <a:srgbClr val="1F497D">
+                    <a:lumMod val="75000"/>
+                  </a:srgbClr>
+                </a:solidFill>
+              </a:rPr>
+              <a:t>No cambian el objetivo general, los objetivos específicos, los indicadores de logro ni los entregables comprometidos.</a:t>
+            </a:r>
+            <a:endParaRPr lang="es-CL" sz="1300"/>
+          </a:p>
+        </p:txBody>
+      </p:sp>
+    </p:spTree>
+  </p:cSld>
+  <p:clrMapOvr>
+    <a:masterClrMapping/>
+  </p:clrMapOvr>
+</p:sld>
+</file>
+
+<file path=ppt/slides/slide8.xml><?xml version="1.0" encoding="utf-8"?>
+<p:sld xmlns:a="http://schemas.openxmlformats.org/drawingml/2006/main" xmlns:r="http://schemas.openxmlformats.org/officeDocument/2006/relationships" xmlns:p="http://schemas.openxmlformats.org/presentationml/2006/main">
+  <p:cSld>
+    <p:spTree>
+      <p:nvGrpSpPr>
+        <p:cNvPr id="1" name=""/>
+        <p:cNvGrpSpPr/>
+        <p:nvPr/>
+      </p:nvGrpSpPr>
+      <p:grpSpPr>
+        <a:xfrm>
+          <a:off x="0" y="0"/>
+          <a:ext cx="0" cy="0"/>
+          <a:chOff x="0" y="0"/>
+          <a:chExt cx="0" cy="0"/>
+        </a:xfrm>
+      </p:grpSpPr>
+      <p:sp>
+        <p:nvSpPr>
+          <p:cNvPr id="5" name="4 CuadroTexto"/>
+          <p:cNvSpPr txBox="1"/>
+          <p:nvPr/>
+        </p:nvSpPr>
+        <p:spPr>
+          <a:xfrm>
+            <a:off x="5675867" y="340990"/>
+            <a:ext cx="2337602" cy="252106"/>
+          </a:xfrm>
+          <a:prstGeom prst="rect">
+            <a:avLst/>
+          </a:prstGeom>
+          <a:noFill/>
+        </p:spPr>
+        <p:txBody>
+          <a:bodyPr wrap="square" lIns="82014" tIns="45697" rIns="82014" bIns="45697" rtlCol="0">
+            <a:spAutoFit/>
+          </a:bodyPr>
+          <a:lstStyle/>
+          <a:p>
+            <a:pPr algn="ctr"/>
+            <a:r>
+              <a:rPr lang="es-CL" sz="1000" b="1" dirty="0">
+                <a:solidFill>
+                  <a:prstClr val="black">
+                    <a:lumMod val="65000"/>
+                    <a:lumOff val="35000"/>
+                  </a:prstClr>
+                </a:solidFill>
+              </a:rPr>
+              <a:t>Sistema de gestión de riesgos MP8 y MP21</a:t>
+            </a:r>
+            <a:endParaRPr lang="es-CL" sz="1000"/>
+          </a:p>
+        </p:txBody>
+      </p:sp>
+      <p:sp>
+        <p:nvSpPr>
+          <p:cNvPr id="4" name="3 CuadroTexto"/>
+          <p:cNvSpPr txBox="1"/>
+          <p:nvPr/>
+        </p:nvSpPr>
+        <p:spPr>
+          <a:xfrm>
+            <a:off x="5740803" y="1034218"/>
+            <a:ext cx="2207735" cy="221341"/>
+          </a:xfrm>
+          <a:prstGeom prst="rect">
+            <a:avLst/>
+          </a:prstGeom>
+          <a:noFill/>
+        </p:spPr>
+        <p:txBody>
+          <a:bodyPr wrap="square" lIns="82014" tIns="45697" rIns="82014" bIns="45697" rtlCol="0">
+            <a:spAutoFit/>
+          </a:bodyPr>
+          <a:lstStyle/>
+          <a:p>
+            <a:pPr algn="ctr"/>
+            <a:r>
+              <a:rPr lang="es-CL" sz="900" dirty="0">
+                <a:solidFill>
+                  <a:prstClr val="white">
+                    <a:lumMod val="50000"/>
+                  </a:prstClr>
+                </a:solidFill>
+              </a:rPr>
+              <a:t>| </a:t>
+            </a:r>
+            <a:r>
+              <a:rPr lang="es-CL" sz="900" b="1" dirty="0">
+                <a:solidFill>
+                  <a:srgbClr val="1F497D">
+                    <a:lumMod val="75000"/>
+                  </a:srgbClr>
+                </a:solidFill>
+              </a:rPr>
+              <a:t>Estudiante: </a:t>
+            </a:r>
+            <a:r>
+              <a:rPr lang="es-CL" sz="900" dirty="0">
+                <a:solidFill>
+                  <a:srgbClr val="1F497D">
+                    <a:lumMod val="75000"/>
+                  </a:srgbClr>
+                </a:solidFill>
+              </a:rPr>
+              <a:t>Bastián Darwit Vera</a:t>
+            </a:r>
+            <a:r>
+              <a:rPr lang="es-CL" sz="900" dirty="0">
+                <a:solidFill>
+                  <a:prstClr val="white">
+                    <a:lumMod val="50000"/>
+                  </a:prstClr>
+                </a:solidFill>
+              </a:rPr>
+              <a:t> |</a:t>
+            </a:r>
+          </a:p>
+        </p:txBody>
+      </p:sp>
+      <p:sp>
+        <p:nvSpPr>
+          <p:cNvPr id="6" name="5 CuadroTexto"/>
+          <p:cNvSpPr txBox="1"/>
+          <p:nvPr/>
+        </p:nvSpPr>
+        <p:spPr>
+          <a:xfrm>
+            <a:off x="805865" y="1538381"/>
+            <a:ext cx="7077739" cy="852256"/>
+          </a:xfrm>
+          <a:prstGeom prst="rect">
+            <a:avLst/>
+          </a:prstGeom>
+          <a:noFill/>
+        </p:spPr>
+        <p:txBody>
+          <a:bodyPr wrap="square" lIns="82014" tIns="45697" rIns="82014" bIns="45697" rtlCol="0">
+            <a:spAutoFit/>
+          </a:bodyPr>
+          <a:lstStyle/>
+          <a:p>
+            <a:r>
+              <a:rPr lang="es-CL" sz="2200" b="1" dirty="0">
+                <a:solidFill>
+                  <a:prstClr val="black">
+                    <a:lumMod val="65000"/>
+                    <a:lumOff val="35000"/>
+                  </a:prstClr>
+                </a:solidFill>
+              </a:rPr>
               <a:t>Carta Gantt actualizada</a:t>
             </a:r>
             <a:endParaRPr lang="es-CL" sz="2200"/>
@@ -12874,15 +19799,15 @@
           <a:lstStyle/>
           <a:p>
             <a:r>
-              <a:rPr lang="es-CL" sz="1200" dirty="0">
+              <a:rPr lang="es-CL" sz="1250" dirty="0">
                 <a:solidFill>
                   <a:schemeClr val="tx2"/>
                 </a:solidFill>
               </a:rPr>
-              <a:t>Horizonte de 20 semanas, agosto 2026 a enero 2027. La presentación de este avance corresponde a la </a:t>
-            </a:r>
-            <a:r>
-              <a:rPr lang="es-CL" sz="1200" b="1" dirty="0">
+              <a:t>Horizonte de 20 semanas, agosto 2026 a enero 2027. Esta presentación corresponde a la </a:t>
+            </a:r>
+            <a:r>
+              <a:rPr lang="es-CL" sz="1250" b="1" dirty="0">
                 <a:solidFill>
                   <a:schemeClr val="tx2"/>
                 </a:solidFill>
@@ -12890,14 +19815,14 @@
               <a:t>semana 5</a:t>
             </a:r>
             <a:r>
-              <a:rPr lang="es-CL" sz="1200" dirty="0">
+              <a:rPr lang="es-CL" sz="1250" dirty="0">
                 <a:solidFill>
                   <a:schemeClr val="tx2"/>
                 </a:solidFill>
               </a:rPr>
               <a:t>.</a:t>
             </a:r>
-            <a:endParaRPr lang="es-CL" sz="1200"/>
+            <a:endParaRPr lang="es-CL" sz="1250"/>
           </a:p>
         </p:txBody>
       </p:sp>
@@ -12948,7 +19873,7 @@
                     <a:p>
                       <a:pPr/>
                       <a:r>
-                        <a:rPr lang="es-CL" sz="800" b="1" dirty="0">
+                        <a:rPr lang="es-CL" sz="950" b="1" dirty="0">
                           <a:solidFill>
                             <a:srgbClr val="FFFFFF"/>
                           </a:solidFill>
@@ -12970,7 +19895,7 @@
                     <a:p>
                       <a:pPr algn="ctr"/>
                       <a:r>
-                        <a:rPr lang="es-CL" sz="700" b="1" dirty="0">
+                        <a:rPr lang="es-CL" sz="950" b="1" dirty="0">
                           <a:solidFill>
                             <a:srgbClr val="FFFFFF"/>
                           </a:solidFill>
@@ -12992,7 +19917,7 @@
                     <a:p>
                       <a:pPr algn="ctr"/>
                       <a:r>
-                        <a:rPr lang="es-CL" sz="700" b="1" dirty="0">
+                        <a:rPr lang="es-CL" sz="950" b="1" dirty="0">
                           <a:solidFill>
                             <a:srgbClr val="FFFFFF"/>
                           </a:solidFill>
@@ -13014,7 +19939,7 @@
                     <a:p>
                       <a:pPr algn="ctr"/>
                       <a:r>
-                        <a:rPr lang="es-CL" sz="700" b="1" dirty="0">
+                        <a:rPr lang="es-CL" sz="950" b="1" dirty="0">
                           <a:solidFill>
                             <a:srgbClr val="FFFFFF"/>
                           </a:solidFill>
@@ -13036,7 +19961,7 @@
                     <a:p>
                       <a:pPr algn="ctr"/>
                       <a:r>
-                        <a:rPr lang="es-CL" sz="700" b="1" dirty="0">
+                        <a:rPr lang="es-CL" sz="950" b="1" dirty="0">
                           <a:solidFill>
                             <a:srgbClr val="FFFFFF"/>
                           </a:solidFill>
@@ -13058,7 +19983,7 @@
                     <a:p>
                       <a:pPr algn="ctr"/>
                       <a:r>
-                        <a:rPr lang="es-CL" sz="700" b="1" dirty="0">
+                        <a:rPr lang="es-CL" sz="950" b="1" dirty="0">
                           <a:solidFill>
                             <a:srgbClr val="FFFFFF"/>
                           </a:solidFill>
@@ -13080,7 +20005,7 @@
                     <a:p>
                       <a:pPr algn="ctr"/>
                       <a:r>
-                        <a:rPr lang="es-CL" sz="700" b="1" dirty="0">
+                        <a:rPr lang="es-CL" sz="950" b="1" dirty="0">
                           <a:solidFill>
                             <a:srgbClr val="FFFFFF"/>
                           </a:solidFill>
@@ -13102,7 +20027,7 @@
                     <a:p>
                       <a:pPr algn="ctr"/>
                       <a:r>
-                        <a:rPr lang="es-CL" sz="700" b="1" dirty="0">
+                        <a:rPr lang="es-CL" sz="950" b="1" dirty="0">
                           <a:solidFill>
                             <a:srgbClr val="FFFFFF"/>
                           </a:solidFill>
@@ -13124,7 +20049,7 @@
                     <a:p>
                       <a:pPr algn="ctr"/>
                       <a:r>
-                        <a:rPr lang="es-CL" sz="700" b="1" dirty="0">
+                        <a:rPr lang="es-CL" sz="950" b="1" dirty="0">
                           <a:solidFill>
                             <a:srgbClr val="FFFFFF"/>
                           </a:solidFill>
@@ -13146,7 +20071,7 @@
                     <a:p>
                       <a:pPr algn="ctr"/>
                       <a:r>
-                        <a:rPr lang="es-CL" sz="700" b="1" dirty="0">
+                        <a:rPr lang="es-CL" sz="950" b="1" dirty="0">
                           <a:solidFill>
                             <a:srgbClr val="FFFFFF"/>
                           </a:solidFill>
@@ -13168,7 +20093,7 @@
                     <a:p>
                       <a:pPr algn="ctr"/>
                       <a:r>
-                        <a:rPr lang="es-CL" sz="700" b="1" dirty="0">
+                        <a:rPr lang="es-CL" sz="950" b="1" dirty="0">
                           <a:solidFill>
                             <a:srgbClr val="FFFFFF"/>
                           </a:solidFill>
@@ -13190,7 +20115,7 @@
                     <a:p>
                       <a:pPr algn="ctr"/>
                       <a:r>
-                        <a:rPr lang="es-CL" sz="700" b="1" dirty="0">
+                        <a:rPr lang="es-CL" sz="950" b="1" dirty="0">
                           <a:solidFill>
                             <a:srgbClr val="FFFFFF"/>
                           </a:solidFill>
@@ -13212,7 +20137,7 @@
                     <a:p>
                       <a:pPr algn="ctr"/>
                       <a:r>
-                        <a:rPr lang="es-CL" sz="700" b="1" dirty="0">
+                        <a:rPr lang="es-CL" sz="950" b="1" dirty="0">
                           <a:solidFill>
                             <a:srgbClr val="FFFFFF"/>
                           </a:solidFill>
@@ -13234,7 +20159,7 @@
                     <a:p>
                       <a:pPr algn="ctr"/>
                       <a:r>
-                        <a:rPr lang="es-CL" sz="700" b="1" dirty="0">
+                        <a:rPr lang="es-CL" sz="950" b="1" dirty="0">
                           <a:solidFill>
                             <a:srgbClr val="FFFFFF"/>
                           </a:solidFill>
@@ -13256,7 +20181,7 @@
                     <a:p>
                       <a:pPr algn="ctr"/>
                       <a:r>
-                        <a:rPr lang="es-CL" sz="700" b="1" dirty="0">
+                        <a:rPr lang="es-CL" sz="950" b="1" dirty="0">
                           <a:solidFill>
                             <a:srgbClr val="FFFFFF"/>
                           </a:solidFill>
@@ -13278,7 +20203,7 @@
                     <a:p>
                       <a:pPr algn="ctr"/>
                       <a:r>
-                        <a:rPr lang="es-CL" sz="700" b="1" dirty="0">
+                        <a:rPr lang="es-CL" sz="950" b="1" dirty="0">
                           <a:solidFill>
                             <a:srgbClr val="FFFFFF"/>
                           </a:solidFill>
@@ -13300,7 +20225,7 @@
                     <a:p>
                       <a:pPr algn="ctr"/>
                       <a:r>
-                        <a:rPr lang="es-CL" sz="700" b="1" dirty="0">
+                        <a:rPr lang="es-CL" sz="950" b="1" dirty="0">
                           <a:solidFill>
                             <a:srgbClr val="FFFFFF"/>
                           </a:solidFill>
@@ -13322,7 +20247,7 @@
                     <a:p>
                       <a:pPr algn="ctr"/>
                       <a:r>
-                        <a:rPr lang="es-CL" sz="700" b="1" dirty="0">
+                        <a:rPr lang="es-CL" sz="950" b="1" dirty="0">
                           <a:solidFill>
                             <a:srgbClr val="FFFFFF"/>
                           </a:solidFill>
@@ -13344,7 +20269,7 @@
                     <a:p>
                       <a:pPr algn="ctr"/>
                       <a:r>
-                        <a:rPr lang="es-CL" sz="700" b="1" dirty="0">
+                        <a:rPr lang="es-CL" sz="950" b="1" dirty="0">
                           <a:solidFill>
                             <a:srgbClr val="FFFFFF"/>
                           </a:solidFill>
@@ -13366,7 +20291,7 @@
                     <a:p>
                       <a:pPr algn="ctr"/>
                       <a:r>
-                        <a:rPr lang="es-CL" sz="700" b="1" dirty="0">
+                        <a:rPr lang="es-CL" sz="950" b="1" dirty="0">
                           <a:solidFill>
                             <a:srgbClr val="FFFFFF"/>
                           </a:solidFill>
@@ -13388,7 +20313,7 @@
                     <a:p>
                       <a:pPr algn="ctr"/>
                       <a:r>
-                        <a:rPr lang="es-CL" sz="700" b="1" dirty="0">
+                        <a:rPr lang="es-CL" sz="950" b="1" dirty="0">
                           <a:solidFill>
                             <a:srgbClr val="FFFFFF"/>
                           </a:solidFill>
@@ -16266,14 +23191,14 @@
       </p:graphicFrame>
       <p:sp>
         <p:nvSpPr>
-          <p:cNvPr id="10" name="9 CuadroTexto"/>
+          <p:cNvPr id="11" name="10 CuadroTexto"/>
           <p:cNvSpPr txBox="1"/>
           <p:nvPr/>
         </p:nvSpPr>
         <p:spPr>
           <a:xfrm>
-            <a:off x="323528" y="6150000"/>
-            <a:ext cx="8352928" cy="500000"/>
+            <a:off x="323528" y="6200000"/>
+            <a:ext cx="8352928" cy="450000"/>
           </a:xfrm>
           <a:prstGeom prst="rect">
             <a:avLst/>
@@ -16295,799 +23220,9 @@
                   </a:prstClr>
                 </a:solidFill>
               </a:rPr>
-              <a:t>Completada    ·    En ejecución    ·    Pendiente    ·    Hito. Ajustes respecto del anteproyecto: A1.3 y A1.4 se desdoblan en flujo único y segmentación jerárquica, y el primer hito se sitúa en la semana 5.</a:t>
+              <a:t>Completada  ·  En ejecución  ·  Pendiente  ·  Hito.</a:t>
             </a:r>
             <a:endParaRPr lang="es-CL" sz="1000"/>
-          </a:p>
-        </p:txBody>
-      </p:sp>
-    </p:spTree>
-  </p:cSld>
-  <p:clrMapOvr>
-    <a:masterClrMapping/>
-  </p:clrMapOvr>
-</p:sld>
-</file>
-
-<file path=ppt/slides/slide8.xml><?xml version="1.0" encoding="utf-8"?>
-<p:sld xmlns:a="http://schemas.openxmlformats.org/drawingml/2006/main" xmlns:r="http://schemas.openxmlformats.org/officeDocument/2006/relationships" xmlns:p="http://schemas.openxmlformats.org/presentationml/2006/main">
-  <p:cSld>
-    <p:spTree>
-      <p:nvGrpSpPr>
-        <p:cNvPr id="1" name=""/>
-        <p:cNvGrpSpPr/>
-        <p:nvPr/>
-      </p:nvGrpSpPr>
-      <p:grpSpPr>
-        <a:xfrm>
-          <a:off x="0" y="0"/>
-          <a:ext cx="0" cy="0"/>
-          <a:chOff x="0" y="0"/>
-          <a:chExt cx="0" cy="0"/>
-        </a:xfrm>
-      </p:grpSpPr>
-      <p:sp>
-        <p:nvSpPr>
-          <p:cNvPr id="5" name="4 CuadroTexto"/>
-          <p:cNvSpPr txBox="1"/>
-          <p:nvPr/>
-        </p:nvSpPr>
-        <p:spPr>
-          <a:xfrm>
-            <a:off x="5675867" y="340990"/>
-            <a:ext cx="2337602" cy="252106"/>
-          </a:xfrm>
-          <a:prstGeom prst="rect">
-            <a:avLst/>
-          </a:prstGeom>
-          <a:noFill/>
-        </p:spPr>
-        <p:txBody>
-          <a:bodyPr wrap="square" lIns="82014" tIns="45697" rIns="82014" bIns="45697" rtlCol="0">
-            <a:spAutoFit/>
-          </a:bodyPr>
-          <a:lstStyle/>
-          <a:p>
-            <a:pPr algn="ctr"/>
-            <a:r>
-              <a:rPr lang="es-CL" sz="1000" b="1" dirty="0">
-                <a:solidFill>
-                  <a:prstClr val="black">
-                    <a:lumMod val="65000"/>
-                    <a:lumOff val="35000"/>
-                  </a:prstClr>
-                </a:solidFill>
-              </a:rPr>
-              <a:t>Sistema de gestión de riesgos MP8 y MP21</a:t>
-            </a:r>
-            <a:endParaRPr lang="es-CL" sz="1000"/>
-          </a:p>
-        </p:txBody>
-      </p:sp>
-      <p:sp>
-        <p:nvSpPr>
-          <p:cNvPr id="4" name="3 CuadroTexto"/>
-          <p:cNvSpPr txBox="1"/>
-          <p:nvPr/>
-        </p:nvSpPr>
-        <p:spPr>
-          <a:xfrm>
-            <a:off x="5740803" y="1034218"/>
-            <a:ext cx="2207735" cy="221341"/>
-          </a:xfrm>
-          <a:prstGeom prst="rect">
-            <a:avLst/>
-          </a:prstGeom>
-          <a:noFill/>
-        </p:spPr>
-        <p:txBody>
-          <a:bodyPr wrap="square" lIns="82014" tIns="45697" rIns="82014" bIns="45697" rtlCol="0">
-            <a:spAutoFit/>
-          </a:bodyPr>
-          <a:lstStyle/>
-          <a:p>
-            <a:pPr algn="ctr"/>
-            <a:r>
-              <a:rPr lang="es-CL" sz="900" dirty="0">
-                <a:solidFill>
-                  <a:prstClr val="white">
-                    <a:lumMod val="50000"/>
-                  </a:prstClr>
-                </a:solidFill>
-              </a:rPr>
-              <a:t>| </a:t>
-            </a:r>
-            <a:r>
-              <a:rPr lang="es-CL" sz="900" b="1" dirty="0">
-                <a:solidFill>
-                  <a:srgbClr val="1F497D">
-                    <a:lumMod val="75000"/>
-                  </a:srgbClr>
-                </a:solidFill>
-              </a:rPr>
-              <a:t>Estudiante: </a:t>
-            </a:r>
-            <a:r>
-              <a:rPr lang="es-CL" sz="900" dirty="0">
-                <a:solidFill>
-                  <a:srgbClr val="1F497D">
-                    <a:lumMod val="75000"/>
-                  </a:srgbClr>
-                </a:solidFill>
-              </a:rPr>
-              <a:t>Bastián Darwit Vera</a:t>
-            </a:r>
-            <a:r>
-              <a:rPr lang="es-CL" sz="900" dirty="0">
-                <a:solidFill>
-                  <a:prstClr val="white">
-                    <a:lumMod val="50000"/>
-                  </a:prstClr>
-                </a:solidFill>
-              </a:rPr>
-              <a:t> |</a:t>
-            </a:r>
-          </a:p>
-        </p:txBody>
-      </p:sp>
-      <p:sp>
-        <p:nvSpPr>
-          <p:cNvPr id="6" name="5 CuadroTexto"/>
-          <p:cNvSpPr txBox="1"/>
-          <p:nvPr/>
-        </p:nvSpPr>
-        <p:spPr>
-          <a:xfrm>
-            <a:off x="805865" y="1538381"/>
-            <a:ext cx="7077739" cy="852256"/>
-          </a:xfrm>
-          <a:prstGeom prst="rect">
-            <a:avLst/>
-          </a:prstGeom>
-          <a:noFill/>
-        </p:spPr>
-        <p:txBody>
-          <a:bodyPr wrap="square" lIns="82014" tIns="45697" rIns="82014" bIns="45697" rtlCol="0">
-            <a:spAutoFit/>
-          </a:bodyPr>
-          <a:lstStyle/>
-          <a:p>
-            <a:r>
-              <a:rPr lang="es-CL" sz="2000" b="1" dirty="0">
-                <a:solidFill>
-                  <a:prstClr val="black">
-                    <a:lumMod val="65000"/>
-                    <a:lumOff val="35000"/>
-                  </a:prstClr>
-                </a:solidFill>
-              </a:rPr>
-              <a:t>Desarrollo y resultados del objetivo específico 1 (1 de 2)</a:t>
-            </a:r>
-            <a:endParaRPr lang="es-CL" sz="2000"/>
-          </a:p>
-        </p:txBody>
-      </p:sp>
-      <p:sp>
-        <p:nvSpPr>
-          <p:cNvPr id="8" name="7 CuadroTexto"/>
-          <p:cNvSpPr txBox="1"/>
-          <p:nvPr/>
-        </p:nvSpPr>
-        <p:spPr>
-          <a:xfrm>
-            <a:off x="323528" y="2400000"/>
-            <a:ext cx="8352928" cy="400000"/>
-          </a:xfrm>
-          <a:prstGeom prst="rect">
-            <a:avLst/>
-          </a:prstGeom>
-          <a:noFill/>
-        </p:spPr>
-        <p:txBody>
-          <a:bodyPr wrap="square" lIns="91396" tIns="45697" rIns="91396" bIns="45697" rtlCol="0">
-            <a:spAutoFit/>
-          </a:bodyPr>
-          <a:lstStyle/>
-          <a:p>
-            <a:r>
-              <a:rPr lang="es-CL" sz="1500" b="1" dirty="0">
-                <a:solidFill>
-                  <a:srgbClr val="1F497D">
-                    <a:lumMod val="75000"/>
-                  </a:srgbClr>
-                </a:solidFill>
-              </a:rPr>
-              <a:t>Actividades realizadas</a:t>
-            </a:r>
-            <a:endParaRPr lang="es-CL" sz="1500"/>
-          </a:p>
-        </p:txBody>
-      </p:sp>
-      <p:graphicFrame>
-        <p:nvGraphicFramePr>
-          <p:cNvPr id="20" name="Tabla 20"/>
-          <p:cNvGraphicFramePr>
-            <a:graphicFrameLocks noGrp="1"/>
-          </p:cNvGraphicFramePr>
-          <p:nvPr/>
-        </p:nvGraphicFramePr>
-        <p:xfrm>
-          <a:off x="323528" y="2830000"/>
-          <a:ext cx="8352928" cy="2400000"/>
-        </p:xfrm>
-        <a:graphic>
-          <a:graphicData uri="http://schemas.openxmlformats.org/drawingml/2006/table">
-            <a:tbl>
-              <a:tblPr firstRow="1" bandRow="1"/>
-              <a:tblGrid>
-                <a:gridCol w="900000"/>
-                <a:gridCol w="3300000"/>
-                <a:gridCol w="1300000"/>
-                <a:gridCol w="2852928"/>
-              </a:tblGrid>
-              <a:tr h="350">
-                <a:tc>
-                  <a:txBody>
-                    <a:bodyPr/>
-                    <a:lstStyle/>
-                    <a:p>
-                      <a:pPr algn="ctr"/>
-                      <a:r>
-                        <a:rPr lang="es-CL" sz="1000" b="1" dirty="0">
-                          <a:solidFill>
-                            <a:srgbClr val="FFFFFF"/>
-                          </a:solidFill>
-                        </a:rPr>
-                        <a:t>Código</a:t>
-                      </a:r>
-                    </a:p>
-                  </a:txBody>
-                  <a:tcPr marL="45720" marR="45720" marT="27432" marB="27432" anchor="ctr">
-                    <a:solidFill>
-                      <a:srgbClr val="1F497D"/>
-                    </a:solidFill>
-                  </a:tcPr>
-                </a:tc>
-                <a:tc>
-                  <a:txBody>
-                    <a:bodyPr/>
-                    <a:lstStyle/>
-                    <a:p>
-                      <a:pPr/>
-                      <a:r>
-                        <a:rPr lang="es-CL" sz="1000" b="1" dirty="0">
-                          <a:solidFill>
-                            <a:srgbClr val="FFFFFF"/>
-                          </a:solidFill>
-                        </a:rPr>
-                        <a:t>Actividad</a:t>
-                      </a:r>
-                    </a:p>
-                  </a:txBody>
-                  <a:tcPr marL="45720" marR="45720" marT="27432" marB="27432" anchor="ctr">
-                    <a:solidFill>
-                      <a:srgbClr val="1F497D"/>
-                    </a:solidFill>
-                  </a:tcPr>
-                </a:tc>
-                <a:tc>
-                  <a:txBody>
-                    <a:bodyPr/>
-                    <a:lstStyle/>
-                    <a:p>
-                      <a:pPr algn="ctr"/>
-                      <a:r>
-                        <a:rPr lang="es-CL" sz="1000" b="1" dirty="0">
-                          <a:solidFill>
-                            <a:srgbClr val="FFFFFF"/>
-                          </a:solidFill>
-                        </a:rPr>
-                        <a:t>Estado</a:t>
-                      </a:r>
-                    </a:p>
-                  </a:txBody>
-                  <a:tcPr marL="45720" marR="45720" marT="27432" marB="27432" anchor="ctr">
-                    <a:solidFill>
-                      <a:srgbClr val="1F497D"/>
-                    </a:solidFill>
-                  </a:tcPr>
-                </a:tc>
-                <a:tc>
-                  <a:txBody>
-                    <a:bodyPr/>
-                    <a:lstStyle/>
-                    <a:p>
-                      <a:pPr/>
-                      <a:r>
-                        <a:rPr lang="es-CL" sz="1000" b="1" dirty="0">
-                          <a:solidFill>
-                            <a:srgbClr val="FFFFFF"/>
-                          </a:solidFill>
-                        </a:rPr>
-                        <a:t>Evidencia</a:t>
-                      </a:r>
-                    </a:p>
-                  </a:txBody>
-                  <a:tcPr marL="45720" marR="45720" marT="27432" marB="27432" anchor="ctr">
-                    <a:solidFill>
-                      <a:srgbClr val="1F497D"/>
-                    </a:solidFill>
-                  </a:tcPr>
-                </a:tc>
-              </a:tr>
-              <a:tr h="380">
-                <a:tc>
-                  <a:txBody>
-                    <a:bodyPr/>
-                    <a:lstStyle/>
-                    <a:p>
-                      <a:pPr algn="ctr"/>
-                      <a:r>
-                        <a:rPr lang="es-CL" sz="1000" b="1" dirty="0">
-                          <a:solidFill>
-                            <a:schemeClr val="tx2"/>
-                          </a:solidFill>
-                        </a:rPr>
-                        <a:t>A1.1</a:t>
-                      </a:r>
-                    </a:p>
-                  </a:txBody>
-                  <a:tcPr marL="45720" marR="45720" marT="27432" marB="27432" anchor="ctr">
-                    <a:solidFill>
-                      <a:srgbClr val="F2F2F2"/>
-                    </a:solidFill>
-                  </a:tcPr>
-                </a:tc>
-                <a:tc>
-                  <a:txBody>
-                    <a:bodyPr/>
-                    <a:lstStyle/>
-                    <a:p>
-                      <a:pPr/>
-                      <a:r>
-                        <a:rPr lang="es-CL" sz="1000" dirty="0">
-                          <a:solidFill>
-                            <a:schemeClr val="tx2"/>
-                          </a:solidFill>
-                        </a:rPr>
-                        <a:t>Revisión documental y diagnóstico preliminar</a:t>
-                      </a:r>
-                    </a:p>
-                  </a:txBody>
-                  <a:tcPr marL="45720" marR="45720" marT="27432" marB="27432" anchor="ctr">
-                    <a:solidFill>
-                      <a:srgbClr val="F2F2F2"/>
-                    </a:solidFill>
-                  </a:tcPr>
-                </a:tc>
-                <a:tc>
-                  <a:txBody>
-                    <a:bodyPr/>
-                    <a:lstStyle/>
-                    <a:p>
-                      <a:pPr algn="ctr"/>
-                      <a:r>
-                        <a:rPr lang="es-CL" sz="1000" dirty="0">
-                          <a:solidFill>
-                            <a:schemeClr val="tx2"/>
-                          </a:solidFill>
-                        </a:rPr>
-                        <a:t>Completada</a:t>
-                      </a:r>
-                    </a:p>
-                  </a:txBody>
-                  <a:tcPr marL="45720" marR="45720" marT="27432" marB="27432" anchor="ctr">
-                    <a:solidFill>
-                      <a:srgbClr val="F2F2F2"/>
-                    </a:solidFill>
-                  </a:tcPr>
-                </a:tc>
-                <a:tc>
-                  <a:txBody>
-                    <a:bodyPr/>
-                    <a:lstStyle/>
-                    <a:p>
-                      <a:pPr/>
-                      <a:r>
-                        <a:rPr lang="es-CL" sz="1000" dirty="0">
-                          <a:solidFill>
-                            <a:schemeClr val="tx2"/>
-                          </a:solidFill>
-                        </a:rPr>
-                        <a:t>Inventario de fuentes y matriz de trazabilidad</a:t>
-                      </a:r>
-                    </a:p>
-                  </a:txBody>
-                  <a:tcPr marL="45720" marR="45720" marT="27432" marB="27432" anchor="ctr">
-                    <a:solidFill>
-                      <a:srgbClr val="F2F2F2"/>
-                    </a:solidFill>
-                  </a:tcPr>
-                </a:tc>
-              </a:tr>
-              <a:tr h="380">
-                <a:tc>
-                  <a:txBody>
-                    <a:bodyPr/>
-                    <a:lstStyle/>
-                    <a:p>
-                      <a:pPr algn="ctr"/>
-                      <a:r>
-                        <a:rPr lang="es-CL" sz="1000" b="1" dirty="0">
-                          <a:solidFill>
-                            <a:schemeClr val="tx2"/>
-                          </a:solidFill>
-                        </a:rPr>
-                        <a:t>A1.2</a:t>
-                      </a:r>
-                    </a:p>
-                  </a:txBody>
-                  <a:tcPr marL="45720" marR="45720" marT="27432" marB="27432" anchor="ctr"/>
-                </a:tc>
-                <a:tc>
-                  <a:txBody>
-                    <a:bodyPr/>
-                    <a:lstStyle/>
-                    <a:p>
-                      <a:pPr/>
-                      <a:r>
-                        <a:rPr lang="es-CL" sz="1000" dirty="0">
-                          <a:solidFill>
-                            <a:schemeClr val="tx2"/>
-                          </a:solidFill>
-                        </a:rPr>
-                        <a:t>Entrevistas con los dueños de proceso</a:t>
-                      </a:r>
-                    </a:p>
-                  </a:txBody>
-                  <a:tcPr marL="45720" marR="45720" marT="27432" marB="27432" anchor="ctr"/>
-                </a:tc>
-                <a:tc>
-                  <a:txBody>
-                    <a:bodyPr/>
-                    <a:lstStyle/>
-                    <a:p>
-                      <a:pPr algn="ctr"/>
-                      <a:r>
-                        <a:rPr lang="es-CL" sz="1000" dirty="0">
-                          <a:solidFill>
-                            <a:schemeClr val="tx2"/>
-                          </a:solidFill>
-                        </a:rPr>
-                        <a:t>Completada</a:t>
-                      </a:r>
-                    </a:p>
-                  </a:txBody>
-                  <a:tcPr marL="45720" marR="45720" marT="27432" marB="27432" anchor="ctr"/>
-                </a:tc>
-                <a:tc>
-                  <a:txBody>
-                    <a:bodyPr/>
-                    <a:lstStyle/>
-                    <a:p>
-                      <a:pPr/>
-                      <a:r>
-                        <a:rPr lang="es-CL" sz="1000" dirty="0">
-                          <a:solidFill>
-                            <a:schemeClr val="tx2"/>
-                          </a:solidFill>
-                        </a:rPr>
-                        <a:t>Registros de tres áreas funcionales de MP8</a:t>
-                      </a:r>
-                    </a:p>
-                  </a:txBody>
-                  <a:tcPr marL="45720" marR="45720" marT="27432" marB="27432" anchor="ctr"/>
-                </a:tc>
-              </a:tr>
-              <a:tr h="380">
-                <a:tc>
-                  <a:txBody>
-                    <a:bodyPr/>
-                    <a:lstStyle/>
-                    <a:p>
-                      <a:pPr algn="ctr"/>
-                      <a:r>
-                        <a:rPr lang="es-CL" sz="1000" b="1" dirty="0">
-                          <a:solidFill>
-                            <a:schemeClr val="tx2"/>
-                          </a:solidFill>
-                        </a:rPr>
-                        <a:t>A1.3.1</a:t>
-                      </a:r>
-                    </a:p>
-                  </a:txBody>
-                  <a:tcPr marL="45720" marR="45720" marT="27432" marB="27432" anchor="ctr">
-                    <a:solidFill>
-                      <a:srgbClr val="F2F2F2"/>
-                    </a:solidFill>
-                  </a:tcPr>
-                </a:tc>
-                <a:tc>
-                  <a:txBody>
-                    <a:bodyPr/>
-                    <a:lstStyle/>
-                    <a:p>
-                      <a:pPr/>
-                      <a:r>
-                        <a:rPr lang="es-CL" sz="1000" dirty="0">
-                          <a:solidFill>
-                            <a:schemeClr val="tx2"/>
-                          </a:solidFill>
-                        </a:rPr>
-                        <a:t>Flujo único de información de MP8</a:t>
-                      </a:r>
-                    </a:p>
-                  </a:txBody>
-                  <a:tcPr marL="45720" marR="45720" marT="27432" marB="27432" anchor="ctr">
-                    <a:solidFill>
-                      <a:srgbClr val="F2F2F2"/>
-                    </a:solidFill>
-                  </a:tcPr>
-                </a:tc>
-                <a:tc>
-                  <a:txBody>
-                    <a:bodyPr/>
-                    <a:lstStyle/>
-                    <a:p>
-                      <a:pPr algn="ctr"/>
-                      <a:r>
-                        <a:rPr lang="es-CL" sz="1000" dirty="0">
-                          <a:solidFill>
-                            <a:schemeClr val="tx2"/>
-                          </a:solidFill>
-                        </a:rPr>
-                        <a:t>Completada</a:t>
-                      </a:r>
-                    </a:p>
-                  </a:txBody>
-                  <a:tcPr marL="45720" marR="45720" marT="27432" marB="27432" anchor="ctr">
-                    <a:solidFill>
-                      <a:srgbClr val="F2F2F2"/>
-                    </a:solidFill>
-                  </a:tcPr>
-                </a:tc>
-                <a:tc>
-                  <a:txBody>
-                    <a:bodyPr/>
-                    <a:lstStyle/>
-                    <a:p>
-                      <a:pPr/>
-                      <a:r>
-                        <a:rPr lang="es-CL" sz="1000" dirty="0">
-                          <a:solidFill>
-                            <a:schemeClr val="tx2"/>
-                          </a:solidFill>
-                        </a:rPr>
-                        <a:t>Flujo v3: 261 elementos y 318 conexiones</a:t>
-                      </a:r>
-                    </a:p>
-                  </a:txBody>
-                  <a:tcPr marL="45720" marR="45720" marT="27432" marB="27432" anchor="ctr">
-                    <a:solidFill>
-                      <a:srgbClr val="F2F2F2"/>
-                    </a:solidFill>
-                  </a:tcPr>
-                </a:tc>
-              </a:tr>
-              <a:tr h="380">
-                <a:tc>
-                  <a:txBody>
-                    <a:bodyPr/>
-                    <a:lstStyle/>
-                    <a:p>
-                      <a:pPr algn="ctr"/>
-                      <a:r>
-                        <a:rPr lang="es-CL" sz="1000" b="1" dirty="0">
-                          <a:solidFill>
-                            <a:schemeClr val="tx2"/>
-                          </a:solidFill>
-                        </a:rPr>
-                        <a:t>A1.3.2</a:t>
-                      </a:r>
-                    </a:p>
-                  </a:txBody>
-                  <a:tcPr marL="45720" marR="45720" marT="27432" marB="27432" anchor="ctr"/>
-                </a:tc>
-                <a:tc>
-                  <a:txBody>
-                    <a:bodyPr/>
-                    <a:lstStyle/>
-                    <a:p>
-                      <a:pPr/>
-                      <a:r>
-                        <a:rPr lang="es-CL" sz="1000" dirty="0">
-                          <a:solidFill>
-                            <a:schemeClr val="tx2"/>
-                          </a:solidFill>
-                        </a:rPr>
-                        <a:t>Segmentación jerárquica de MP8</a:t>
-                      </a:r>
-                    </a:p>
-                  </a:txBody>
-                  <a:tcPr marL="45720" marR="45720" marT="27432" marB="27432" anchor="ctr"/>
-                </a:tc>
-                <a:tc>
-                  <a:txBody>
-                    <a:bodyPr/>
-                    <a:lstStyle/>
-                    <a:p>
-                      <a:pPr algn="ctr"/>
-                      <a:r>
-                        <a:rPr lang="es-CL" sz="1000" dirty="0">
-                          <a:solidFill>
-                            <a:schemeClr val="tx2"/>
-                          </a:solidFill>
-                        </a:rPr>
-                        <a:t>No iniciada</a:t>
-                      </a:r>
-                    </a:p>
-                  </a:txBody>
-                  <a:tcPr marL="45720" marR="45720" marT="27432" marB="27432" anchor="ctr"/>
-                </a:tc>
-                <a:tc>
-                  <a:txBody>
-                    <a:bodyPr/>
-                    <a:lstStyle/>
-                    <a:p>
-                      <a:pPr/>
-                      <a:r>
-                        <a:rPr lang="es-CL" sz="1000" dirty="0">
-                          <a:solidFill>
-                            <a:schemeClr val="tx2"/>
-                          </a:solidFill>
-                        </a:rPr>
-                        <a:t>Programada en las semanas 6 y 7</a:t>
-                      </a:r>
-                    </a:p>
-                  </a:txBody>
-                  <a:tcPr marL="45720" marR="45720" marT="27432" marB="27432" anchor="ctr"/>
-                </a:tc>
-              </a:tr>
-              <a:tr h="380">
-                <a:tc>
-                  <a:txBody>
-                    <a:bodyPr/>
-                    <a:lstStyle/>
-                    <a:p>
-                      <a:pPr algn="ctr"/>
-                      <a:r>
-                        <a:rPr lang="es-CL" sz="1000" b="1" dirty="0">
-                          <a:solidFill>
-                            <a:schemeClr val="tx2"/>
-                          </a:solidFill>
-                        </a:rPr>
-                        <a:t>A1.4</a:t>
-                      </a:r>
-                    </a:p>
-                  </a:txBody>
-                  <a:tcPr marL="45720" marR="45720" marT="27432" marB="27432" anchor="ctr">
-                    <a:solidFill>
-                      <a:srgbClr val="F2F2F2"/>
-                    </a:solidFill>
-                  </a:tcPr>
-                </a:tc>
-                <a:tc>
-                  <a:txBody>
-                    <a:bodyPr/>
-                    <a:lstStyle/>
-                    <a:p>
-                      <a:pPr/>
-                      <a:r>
-                        <a:rPr lang="es-CL" sz="1000" dirty="0">
-                          <a:solidFill>
-                            <a:schemeClr val="tx2"/>
-                          </a:solidFill>
-                        </a:rPr>
-                        <a:t>Levantamiento de MP21</a:t>
-                      </a:r>
-                    </a:p>
-                  </a:txBody>
-                  <a:tcPr marL="45720" marR="45720" marT="27432" marB="27432" anchor="ctr">
-                    <a:solidFill>
-                      <a:srgbClr val="F2F2F2"/>
-                    </a:solidFill>
-                  </a:tcPr>
-                </a:tc>
-                <a:tc>
-                  <a:txBody>
-                    <a:bodyPr/>
-                    <a:lstStyle/>
-                    <a:p>
-                      <a:pPr algn="ctr"/>
-                      <a:r>
-                        <a:rPr lang="es-CL" sz="1000" dirty="0">
-                          <a:solidFill>
-                            <a:schemeClr val="tx2"/>
-                          </a:solidFill>
-                        </a:rPr>
-                        <a:t>No iniciada</a:t>
-                      </a:r>
-                    </a:p>
-                  </a:txBody>
-                  <a:tcPr marL="45720" marR="45720" marT="27432" marB="27432" anchor="ctr">
-                    <a:solidFill>
-                      <a:srgbClr val="F2F2F2"/>
-                    </a:solidFill>
-                  </a:tcPr>
-                </a:tc>
-                <a:tc>
-                  <a:txBody>
-                    <a:bodyPr/>
-                    <a:lstStyle/>
-                    <a:p>
-                      <a:pPr/>
-                      <a:r>
-                        <a:rPr lang="es-CL" sz="1000" dirty="0">
-                          <a:solidFill>
-                            <a:schemeClr val="tx2"/>
-                          </a:solidFill>
-                        </a:rPr>
-                        <a:t>Programada desde la semana 6</a:t>
-                      </a:r>
-                    </a:p>
-                  </a:txBody>
-                  <a:tcPr marL="45720" marR="45720" marT="27432" marB="27432" anchor="ctr">
-                    <a:solidFill>
-                      <a:srgbClr val="F2F2F2"/>
-                    </a:solidFill>
-                  </a:tcPr>
-                </a:tc>
-              </a:tr>
-            </a:tbl>
-          </a:graphicData>
-        </a:graphic>
-      </p:graphicFrame>
-      <p:sp>
-        <p:nvSpPr>
-          <p:cNvPr id="10" name="9 CuadroTexto"/>
-          <p:cNvSpPr txBox="1"/>
-          <p:nvPr/>
-        </p:nvSpPr>
-        <p:spPr>
-          <a:xfrm>
-            <a:off x="323528" y="5400000"/>
-            <a:ext cx="8352928" cy="1100000"/>
-          </a:xfrm>
-          <a:prstGeom prst="rect">
-            <a:avLst/>
-          </a:prstGeom>
-          <a:noFill/>
-        </p:spPr>
-        <p:txBody>
-          <a:bodyPr wrap="square" lIns="91396" tIns="45697" rIns="91396" bIns="45697" rtlCol="0">
-            <a:spAutoFit/>
-          </a:bodyPr>
-          <a:lstStyle/>
-          <a:p>
-            <a:pPr marL="228600" indent="-228600">
-              <a:buFont typeface="Wingdings" pitchFamily="2" charset="2"/>
-              <a:buChar char="q"/>
-            </a:pPr>
-            <a:r>
-              <a:rPr lang="es-CL" sz="1200" dirty="0">
-                <a:solidFill>
-                  <a:schemeClr val="tx2"/>
-                </a:solidFill>
-              </a:rPr>
-              <a:t>El flujo levantado fue revisado con el </a:t>
-            </a:r>
-            <a:r>
-              <a:rPr lang="es-CL" sz="1200" b="1" dirty="0">
-                <a:solidFill>
-                  <a:schemeClr val="tx2"/>
-                </a:solidFill>
-              </a:rPr>
-              <a:t>líder de mejora continua</a:t>
-            </a:r>
-            <a:r>
-              <a:rPr lang="es-CL" sz="1200" dirty="0">
-                <a:solidFill>
-                  <a:schemeClr val="tx2"/>
-                </a:solidFill>
-              </a:rPr>
-              <a:t>, verificando la continuidad de la cadena y la consistencia de la secuencia entre áreas. La validación formal mediante acta de los dueños de proceso corresponde a A1.6 y está pendiente.</a:t>
-            </a:r>
-            <a:endParaRPr lang="es-CL" sz="1200"/>
           </a:p>
         </p:txBody>
       </p:sp>
@@ -17243,7 +23378,7 @@
           <a:lstStyle/>
           <a:p>
             <a:r>
-              <a:rPr lang="es-CL" sz="2000" b="1" dirty="0">
+              <a:rPr lang="es-CL" sz="2200" b="1" dirty="0">
                 <a:solidFill>
                   <a:prstClr val="black">
                     <a:lumMod val="65000"/>
@@ -17251,45 +23386,9 @@
                   </a:prstClr>
                 </a:solidFill>
               </a:rPr>
-              <a:t>Desarrollo y resultados del objetivo específico 1 (2 de 2)</a:t>
-            </a:r>
-            <a:endParaRPr lang="es-CL" sz="2000"/>
-          </a:p>
-        </p:txBody>
-      </p:sp>
-      <p:sp>
-        <p:nvSpPr>
-          <p:cNvPr id="8" name="7 CuadroTexto"/>
-          <p:cNvSpPr txBox="1"/>
-          <p:nvPr/>
-        </p:nvSpPr>
-        <p:spPr>
-          <a:xfrm>
-            <a:off x="323528" y="2400000"/>
-            <a:ext cx="8352928" cy="400000"/>
-          </a:xfrm>
-          <a:prstGeom prst="rect">
-            <a:avLst/>
-          </a:prstGeom>
-          <a:noFill/>
-        </p:spPr>
-        <p:txBody>
-          <a:bodyPr wrap="square" lIns="91396" tIns="45697" rIns="91396" bIns="45697" rtlCol="0">
-            <a:spAutoFit/>
-          </a:bodyPr>
-          <a:lstStyle/>
-          <a:p>
-            <a:r>
-              <a:rPr lang="es-CL" sz="1400" b="1" dirty="0">
-                <a:solidFill>
-                  <a:srgbClr val="1F497D">
-                    <a:lumMod val="75000"/>
-                  </a:srgbClr>
-                </a:solidFill>
-              </a:rPr>
-              <a:t>Resultados obtenidos · Flujo único de MP8: 18 fases, 261 elementos, 318 conexiones</a:t>
-            </a:r>
-            <a:endParaRPr lang="es-CL" sz="1400"/>
+              <a:t>Resultados · Actividades realizadas</a:t>
+            </a:r>
+            <a:endParaRPr lang="es-CL" sz="2200"/>
           </a:p>
         </p:txBody>
       </p:sp>
@@ -17302,32 +23401,33 @@
           <p:nvPr/>
         </p:nvGraphicFramePr>
         <p:xfrm>
-          <a:off x="323528" y="2830000"/>
-          <a:ext cx="4100000" cy="2100000"/>
+          <a:off x="323528" y="2500000"/>
+          <a:ext cx="8352928" cy="2600000"/>
         </p:xfrm>
         <a:graphic>
           <a:graphicData uri="http://schemas.openxmlformats.org/drawingml/2006/table">
             <a:tbl>
               <a:tblPr firstRow="1" bandRow="1"/>
               <a:tblGrid>
-                <a:gridCol w="2900000"/>
-                <a:gridCol w="700000"/>
-                <a:gridCol w="500000"/>
+                <a:gridCol w="900000"/>
+                <a:gridCol w="3100000"/>
+                <a:gridCol w="1300000"/>
+                <a:gridCol w="3052928"/>
               </a:tblGrid>
-              <a:tr h="330">
-                <a:tc>
-                  <a:txBody>
-                    <a:bodyPr/>
-                    <a:lstStyle/>
-                    <a:p>
-                      <a:pPr/>
+              <a:tr h="350">
+                <a:tc>
+                  <a:txBody>
+                    <a:bodyPr/>
+                    <a:lstStyle/>
+                    <a:p>
+                      <a:pPr algn="ctr"/>
                       <a:r>
-                        <a:rPr lang="es-CL" sz="1000" b="1" dirty="0">
+                        <a:rPr lang="es-CL" sz="950" b="1" dirty="0">
                           <a:solidFill>
                             <a:srgbClr val="FFFFFF"/>
                           </a:solidFill>
                         </a:rPr>
-                        <a:t>Procedencia del elemento</a:t>
+                        <a:t>Código</a:t>
                       </a:r>
                     </a:p>
                   </a:txBody>
@@ -17342,14 +23442,14 @@
                     <a:bodyPr/>
                     <a:lstStyle/>
                     <a:p>
-                      <a:pPr algn="ctr"/>
+                      <a:pPr/>
                       <a:r>
-                        <a:rPr lang="es-CL" sz="1000" b="1" dirty="0">
+                        <a:rPr lang="es-CL" sz="950" b="1" dirty="0">
                           <a:solidFill>
                             <a:srgbClr val="FFFFFF"/>
                           </a:solidFill>
                         </a:rPr>
-                        <a:t>N.º</a:t>
+                        <a:t>Actividad</a:t>
                       </a:r>
                     </a:p>
                   </a:txBody>
@@ -17366,12 +23466,12 @@
                     <a:p>
                       <a:pPr algn="ctr"/>
                       <a:r>
-                        <a:rPr lang="es-CL" sz="1000" b="1" dirty="0">
+                        <a:rPr lang="es-CL" sz="950" b="1" dirty="0">
                           <a:solidFill>
                             <a:srgbClr val="FFFFFF"/>
                           </a:solidFill>
                         </a:rPr>
-                        <a:t>%</a:t>
+                        <a:t>Estado</a:t>
                       </a:r>
                     </a:p>
                   </a:txBody>
@@ -17381,21 +23481,43 @@
                     </a:solidFill>
                   </a:tcPr>
                 </a:tc>
+                <a:tc>
+                  <a:txBody>
+                    <a:bodyPr/>
+                    <a:lstStyle/>
+                    <a:p>
+                      <a:pPr/>
+                      <a:r>
+                        <a:rPr lang="es-CL" sz="950" b="1" dirty="0">
+                          <a:solidFill>
+                            <a:srgbClr val="FFFFFF"/>
+                          </a:solidFill>
+                        </a:rPr>
+                        <a:t>Evidencia</a:t>
+                      </a:r>
+                    </a:p>
+                  </a:txBody>
+                  <a:tcPr marL="45720" marR="45720" marT="27432" marB="27432" anchor="ctr">
+                    <a:solidFill>
+                      <a:srgbClr val="1F497D"/>
+                    </a:solidFill>
+                  </a:tcPr>
+                </a:tc>
               </a:tr>
-              <a:tr h="330">
-                <a:tc>
-                  <a:txBody>
-                    <a:bodyPr/>
-                    <a:lstStyle/>
-                    <a:p>
-                      <a:pPr/>
+              <a:tr h="420">
+                <a:tc>
+                  <a:txBody>
+                    <a:bodyPr/>
+                    <a:lstStyle/>
+                    <a:p>
+                      <a:pPr algn="ctr"/>
                       <a:r>
-                        <a:rPr lang="es-CL" sz="1000" dirty="0">
+                        <a:rPr lang="es-CL" sz="1050" b="1" dirty="0">
                           <a:solidFill>
                             <a:schemeClr val="tx2"/>
                           </a:solidFill>
                         </a:rPr>
-                        <a:t>Procedimiento vigente</a:t>
+                        <a:t>A1.1</a:t>
                       </a:r>
                     </a:p>
                   </a:txBody>
@@ -17410,14 +23532,14 @@
                     <a:bodyPr/>
                     <a:lstStyle/>
                     <a:p>
-                      <a:pPr algn="ctr"/>
+                      <a:pPr/>
                       <a:r>
-                        <a:rPr lang="es-CL" sz="1000" dirty="0">
+                        <a:rPr lang="es-CL" sz="1050" dirty="0">
                           <a:solidFill>
                             <a:schemeClr val="tx2"/>
                           </a:solidFill>
                         </a:rPr>
-                        <a:t>94</a:t>
+                        <a:t>Revisión documental y diagnóstico preliminar</a:t>
                       </a:r>
                     </a:p>
                   </a:txBody>
@@ -17434,12 +23556,12 @@
                     <a:p>
                       <a:pPr algn="ctr"/>
                       <a:r>
-                        <a:rPr lang="es-CL" sz="1000" dirty="0">
+                        <a:rPr lang="es-CL" sz="1050" dirty="0">
                           <a:solidFill>
                             <a:schemeClr val="tx2"/>
                           </a:solidFill>
                         </a:rPr>
-                        <a:t>36,0</a:t>
+                        <a:t>Completada</a:t>
                       </a:r>
                     </a:p>
                   </a:txBody>
@@ -17449,8 +23571,6 @@
                     </a:solidFill>
                   </a:tcPr>
                 </a:tc>
-              </a:tr>
-              <a:tr h="330">
                 <a:tc>
                   <a:txBody>
                     <a:bodyPr/>
@@ -17458,68 +23578,12 @@
                     <a:p>
                       <a:pPr/>
                       <a:r>
-                        <a:rPr lang="es-CL" sz="1000" dirty="0">
+                        <a:rPr lang="es-CL" sz="1050" dirty="0">
                           <a:solidFill>
                             <a:schemeClr val="tx2"/>
                           </a:solidFill>
                         </a:rPr>
-                        <a:t>Insumo interno o marco de referencia</a:t>
-                      </a:r>
-                    </a:p>
-                  </a:txBody>
-                  <a:tcPr marL="45720" marR="45720" marT="27432" marB="27432" anchor="ctr"/>
-                </a:tc>
-                <a:tc>
-                  <a:txBody>
-                    <a:bodyPr/>
-                    <a:lstStyle/>
-                    <a:p>
-                      <a:pPr algn="ctr"/>
-                      <a:r>
-                        <a:rPr lang="es-CL" sz="1000" dirty="0">
-                          <a:solidFill>
-                            <a:schemeClr val="tx2"/>
-                          </a:solidFill>
-                        </a:rPr>
-                        <a:t>92</a:t>
-                      </a:r>
-                    </a:p>
-                  </a:txBody>
-                  <a:tcPr marL="45720" marR="45720" marT="27432" marB="27432" anchor="ctr"/>
-                </a:tc>
-                <a:tc>
-                  <a:txBody>
-                    <a:bodyPr/>
-                    <a:lstStyle/>
-                    <a:p>
-                      <a:pPr algn="ctr"/>
-                      <a:r>
-                        <a:rPr lang="es-CL" sz="1000" dirty="0">
-                          <a:solidFill>
-                            <a:schemeClr val="tx2"/>
-                          </a:solidFill>
-                        </a:rPr>
-                        <a:t>35,2</a:t>
-                      </a:r>
-                    </a:p>
-                  </a:txBody>
-                  <a:tcPr marL="45720" marR="45720" marT="27432" marB="27432" anchor="ctr"/>
-                </a:tc>
-              </a:tr>
-              <a:tr h="330">
-                <a:tc>
-                  <a:txBody>
-                    <a:bodyPr/>
-                    <a:lstStyle/>
-                    <a:p>
-                      <a:pPr/>
-                      <a:r>
-                        <a:rPr lang="es-CL" sz="1000" dirty="0">
-                          <a:solidFill>
-                            <a:schemeClr val="tx2"/>
-                          </a:solidFill>
-                        </a:rPr>
-                        <a:t>Entrevista, sin documentación previa</a:t>
+                        <a:t>Inventario de fuentes y matriz de trazabilidad</a:t>
                       </a:r>
                     </a:p>
                   </a:txBody>
@@ -17529,6 +23593,8 @@
                     </a:solidFill>
                   </a:tcPr>
                 </a:tc>
+              </a:tr>
+              <a:tr h="420">
                 <a:tc>
                   <a:txBody>
                     <a:bodyPr/>
@@ -17536,12 +23602,86 @@
                     <a:p>
                       <a:pPr algn="ctr"/>
                       <a:r>
-                        <a:rPr lang="es-CL" sz="1000" dirty="0">
+                        <a:rPr lang="es-CL" sz="1050" b="1" dirty="0">
                           <a:solidFill>
                             <a:schemeClr val="tx2"/>
                           </a:solidFill>
                         </a:rPr>
-                        <a:t>36</a:t>
+                        <a:t>A1.2</a:t>
+                      </a:r>
+                    </a:p>
+                  </a:txBody>
+                  <a:tcPr marL="45720" marR="45720" marT="27432" marB="27432" anchor="ctr"/>
+                </a:tc>
+                <a:tc>
+                  <a:txBody>
+                    <a:bodyPr/>
+                    <a:lstStyle/>
+                    <a:p>
+                      <a:pPr/>
+                      <a:r>
+                        <a:rPr lang="es-CL" sz="1050" dirty="0">
+                          <a:solidFill>
+                            <a:schemeClr val="tx2"/>
+                          </a:solidFill>
+                        </a:rPr>
+                        <a:t>Entrevistas con los dueños de proceso</a:t>
+                      </a:r>
+                    </a:p>
+                  </a:txBody>
+                  <a:tcPr marL="45720" marR="45720" marT="27432" marB="27432" anchor="ctr"/>
+                </a:tc>
+                <a:tc>
+                  <a:txBody>
+                    <a:bodyPr/>
+                    <a:lstStyle/>
+                    <a:p>
+                      <a:pPr algn="ctr"/>
+                      <a:r>
+                        <a:rPr lang="es-CL" sz="1050" dirty="0">
+                          <a:solidFill>
+                            <a:schemeClr val="tx2"/>
+                          </a:solidFill>
+                        </a:rPr>
+                        <a:t>Completada</a:t>
+                      </a:r>
+                    </a:p>
+                  </a:txBody>
+                  <a:tcPr marL="45720" marR="45720" marT="27432" marB="27432" anchor="ctr"/>
+                </a:tc>
+                <a:tc>
+                  <a:txBody>
+                    <a:bodyPr/>
+                    <a:lstStyle/>
+                    <a:p>
+                      <a:pPr/>
+                      <a:r>
+                        <a:rPr lang="es-CL" sz="1050" dirty="0">
+                          <a:solidFill>
+                            <a:schemeClr val="tx2"/>
+                          </a:solidFill>
+                        </a:rPr>
+                        <a:t>Registros de tres áreas funcionales de MP8</a:t>
+                      </a:r>
+                    </a:p>
+                  </a:txBody>
+                  <a:tcPr marL="45720" marR="45720" marT="27432" marB="27432" anchor="ctr"/>
+                </a:tc>
+              </a:tr>
+              <a:tr h="420">
+                <a:tc>
+                  <a:txBody>
+                    <a:bodyPr/>
+                    <a:lstStyle/>
+                    <a:p>
+                      <a:pPr algn="ctr"/>
+                      <a:r>
+                        <a:rPr lang="es-CL" sz="1050" b="1" dirty="0">
+                          <a:solidFill>
+                            <a:schemeClr val="tx2"/>
+                          </a:solidFill>
+                        </a:rPr>
+                        <a:t>A1.3.1</a:t>
                       </a:r>
                     </a:p>
                   </a:txBody>
@@ -17556,14 +23696,14 @@
                     <a:bodyPr/>
                     <a:lstStyle/>
                     <a:p>
-                      <a:pPr algn="ctr"/>
+                      <a:pPr/>
                       <a:r>
-                        <a:rPr lang="es-CL" sz="1000" dirty="0">
+                        <a:rPr lang="es-CL" sz="1050" dirty="0">
                           <a:solidFill>
                             <a:schemeClr val="tx2"/>
                           </a:solidFill>
                         </a:rPr>
-                        <a:t>13,8</a:t>
+                        <a:t>Flujo único de información de MP8</a:t>
                       </a:r>
                     </a:p>
                   </a:txBody>
@@ -17573,77 +23713,19 @@
                     </a:solidFill>
                   </a:tcPr>
                 </a:tc>
-              </a:tr>
-              <a:tr h="330">
-                <a:tc>
-                  <a:txBody>
-                    <a:bodyPr/>
-                    <a:lstStyle/>
-                    <a:p>
-                      <a:pPr/>
+                <a:tc>
+                  <a:txBody>
+                    <a:bodyPr/>
+                    <a:lstStyle/>
+                    <a:p>
+                      <a:pPr algn="ctr"/>
                       <a:r>
-                        <a:rPr lang="es-CL" sz="1000" dirty="0">
+                        <a:rPr lang="es-CL" sz="1050" dirty="0">
                           <a:solidFill>
                             <a:schemeClr val="tx2"/>
                           </a:solidFill>
                         </a:rPr>
-                        <a:t>Brecha declarada</a:t>
-                      </a:r>
-                    </a:p>
-                  </a:txBody>
-                  <a:tcPr marL="45720" marR="45720" marT="27432" marB="27432" anchor="ctr"/>
-                </a:tc>
-                <a:tc>
-                  <a:txBody>
-                    <a:bodyPr/>
-                    <a:lstStyle/>
-                    <a:p>
-                      <a:pPr algn="ctr"/>
-                      <a:r>
-                        <a:rPr lang="es-CL" sz="1000" dirty="0">
-                          <a:solidFill>
-                            <a:schemeClr val="tx2"/>
-                          </a:solidFill>
-                        </a:rPr>
-                        <a:t>12</a:t>
-                      </a:r>
-                    </a:p>
-                  </a:txBody>
-                  <a:tcPr marL="45720" marR="45720" marT="27432" marB="27432" anchor="ctr"/>
-                </a:tc>
-                <a:tc>
-                  <a:txBody>
-                    <a:bodyPr/>
-                    <a:lstStyle/>
-                    <a:p>
-                      <a:pPr algn="ctr"/>
-                      <a:r>
-                        <a:rPr lang="es-CL" sz="1000" dirty="0">
-                          <a:solidFill>
-                            <a:schemeClr val="tx2"/>
-                          </a:solidFill>
-                        </a:rPr>
-                        <a:t>4,6</a:t>
-                      </a:r>
-                    </a:p>
-                  </a:txBody>
-                  <a:tcPr marL="45720" marR="45720" marT="27432" marB="27432" anchor="ctr"/>
-                </a:tc>
-              </a:tr>
-              <a:tr h="330">
-                <a:tc>
-                  <a:txBody>
-                    <a:bodyPr/>
-                    <a:lstStyle/>
-                    <a:p>
-                      <a:pPr/>
-                      <a:r>
-                        <a:rPr lang="es-CL" sz="1000" dirty="0">
-                          <a:solidFill>
-                            <a:schemeClr val="tx2"/>
-                          </a:solidFill>
-                        </a:rPr>
-                        <a:t>Elementos auxiliares de notación</a:t>
+                        <a:t>Completada</a:t>
                       </a:r>
                     </a:p>
                   </a:txBody>
@@ -17658,14 +23740,14 @@
                     <a:bodyPr/>
                     <a:lstStyle/>
                     <a:p>
-                      <a:pPr algn="ctr"/>
+                      <a:pPr/>
                       <a:r>
-                        <a:rPr lang="es-CL" sz="1000" dirty="0">
+                        <a:rPr lang="es-CL" sz="1050" dirty="0">
                           <a:solidFill>
                             <a:schemeClr val="tx2"/>
                           </a:solidFill>
                         </a:rPr>
-                        <a:t>27</a:t>
+                        <a:t>261 elementos, 318 conexiones, 18 fases</a:t>
                       </a:r>
                     </a:p>
                   </a:txBody>
@@ -17675,6 +23757,8 @@
                     </a:solidFill>
                   </a:tcPr>
                 </a:tc>
+              </a:tr>
+              <a:tr h="420">
                 <a:tc>
                   <a:txBody>
                     <a:bodyPr/>
@@ -17682,12 +23766,86 @@
                     <a:p>
                       <a:pPr algn="ctr"/>
                       <a:r>
-                        <a:rPr lang="es-CL" sz="1000" dirty="0">
+                        <a:rPr lang="es-CL" sz="1050" b="1" dirty="0">
                           <a:solidFill>
                             <a:schemeClr val="tx2"/>
                           </a:solidFill>
                         </a:rPr>
-                        <a:t>10,4</a:t>
+                        <a:t>A1.3.2</a:t>
+                      </a:r>
+                    </a:p>
+                  </a:txBody>
+                  <a:tcPr marL="45720" marR="45720" marT="27432" marB="27432" anchor="ctr"/>
+                </a:tc>
+                <a:tc>
+                  <a:txBody>
+                    <a:bodyPr/>
+                    <a:lstStyle/>
+                    <a:p>
+                      <a:pPr/>
+                      <a:r>
+                        <a:rPr lang="es-CL" sz="1050" dirty="0">
+                          <a:solidFill>
+                            <a:schemeClr val="tx2"/>
+                          </a:solidFill>
+                        </a:rPr>
+                        <a:t>Segmentación jerárquica de MP8</a:t>
+                      </a:r>
+                    </a:p>
+                  </a:txBody>
+                  <a:tcPr marL="45720" marR="45720" marT="27432" marB="27432" anchor="ctr"/>
+                </a:tc>
+                <a:tc>
+                  <a:txBody>
+                    <a:bodyPr/>
+                    <a:lstStyle/>
+                    <a:p>
+                      <a:pPr algn="ctr"/>
+                      <a:r>
+                        <a:rPr lang="es-CL" sz="1050" dirty="0">
+                          <a:solidFill>
+                            <a:schemeClr val="tx2"/>
+                          </a:solidFill>
+                        </a:rPr>
+                        <a:t>No iniciada</a:t>
+                      </a:r>
+                    </a:p>
+                  </a:txBody>
+                  <a:tcPr marL="45720" marR="45720" marT="27432" marB="27432" anchor="ctr"/>
+                </a:tc>
+                <a:tc>
+                  <a:txBody>
+                    <a:bodyPr/>
+                    <a:lstStyle/>
+                    <a:p>
+                      <a:pPr/>
+                      <a:r>
+                        <a:rPr lang="es-CL" sz="1050" dirty="0">
+                          <a:solidFill>
+                            <a:schemeClr val="tx2"/>
+                          </a:solidFill>
+                        </a:rPr>
+                        <a:t>Programada en las semanas 6 y 7</a:t>
+                      </a:r>
+                    </a:p>
+                  </a:txBody>
+                  <a:tcPr marL="45720" marR="45720" marT="27432" marB="27432" anchor="ctr"/>
+                </a:tc>
+              </a:tr>
+              <a:tr h="420">
+                <a:tc>
+                  <a:txBody>
+                    <a:bodyPr/>
+                    <a:lstStyle/>
+                    <a:p>
+                      <a:pPr algn="ctr"/>
+                      <a:r>
+                        <a:rPr lang="es-CL" sz="1050" b="1" dirty="0">
+                          <a:solidFill>
+                            <a:schemeClr val="tx2"/>
+                          </a:solidFill>
+                        </a:rPr>
+                        <a:t>A1.4</a:t>
                       </a:r>
                     </a:p>
                   </a:txBody>
@@ -17697,8 +23855,6 @@
                     </a:solidFill>
                   </a:tcPr>
                 </a:tc>
-              </a:tr>
-              <a:tr h="330">
                 <a:tc>
                   <a:txBody>
                     <a:bodyPr/>
@@ -17706,18 +23862,18 @@
                     <a:p>
                       <a:pPr/>
                       <a:r>
-                        <a:rPr lang="es-CL" sz="1000" b="1" dirty="0">
+                        <a:rPr lang="es-CL" sz="1050" dirty="0">
                           <a:solidFill>
                             <a:schemeClr val="tx2"/>
                           </a:solidFill>
                         </a:rPr>
-                        <a:t>Total</a:t>
+                        <a:t>Levantamiento de MP21</a:t>
                       </a:r>
                     </a:p>
                   </a:txBody>
                   <a:tcPr marL="45720" marR="45720" marT="27432" marB="27432" anchor="ctr">
                     <a:solidFill>
-                      <a:srgbClr val="D9D9D9"/>
+                      <a:srgbClr val="F2F2F2"/>
                     </a:solidFill>
                   </a:tcPr>
                 </a:tc>
@@ -17728,18 +23884,18 @@
                     <a:p>
                       <a:pPr algn="ctr"/>
                       <a:r>
-                        <a:rPr lang="es-CL" sz="1000" b="1" dirty="0">
+                        <a:rPr lang="es-CL" sz="1050" dirty="0">
                           <a:solidFill>
                             <a:schemeClr val="tx2"/>
                           </a:solidFill>
                         </a:rPr>
-                        <a:t>261</a:t>
+                        <a:t>No iniciada</a:t>
                       </a:r>
                     </a:p>
                   </a:txBody>
                   <a:tcPr marL="45720" marR="45720" marT="27432" marB="27432" anchor="ctr">
                     <a:solidFill>
-                      <a:srgbClr val="D9D9D9"/>
+                      <a:srgbClr val="F2F2F2"/>
                     </a:solidFill>
                   </a:tcPr>
                 </a:tc>
@@ -17748,20 +23904,20 @@
                     <a:bodyPr/>
                     <a:lstStyle/>
                     <a:p>
-                      <a:pPr algn="ctr"/>
+                      <a:pPr/>
                       <a:r>
-                        <a:rPr lang="es-CL" sz="1000" b="1" dirty="0">
+                        <a:rPr lang="es-CL" sz="1050" dirty="0">
                           <a:solidFill>
                             <a:schemeClr val="tx2"/>
                           </a:solidFill>
                         </a:rPr>
-                        <a:t>100</a:t>
+                        <a:t>Programada desde la semana 6</a:t>
                       </a:r>
                     </a:p>
                   </a:txBody>
                   <a:tcPr marL="45720" marR="45720" marT="27432" marB="27432" anchor="ctr">
                     <a:solidFill>
-                      <a:srgbClr val="D9D9D9"/>
+                      <a:srgbClr val="F2F2F2"/>
                     </a:solidFill>
                   </a:tcPr>
                 </a:tc>
@@ -17778,8 +23934,8 @@
         </p:nvSpPr>
         <p:spPr>
           <a:xfrm>
-            <a:off x="4576456" y="2800000"/>
-            <a:ext cx="4100000" cy="2200000"/>
+            <a:off x="323528" y="5250000"/>
+            <a:ext cx="8352928" cy="1000000"/>
           </a:xfrm>
           <a:prstGeom prst="rect">
             <a:avLst/>
@@ -17797,241 +23953,46 @@
               <a:buChar char="q"/>
             </a:pPr>
             <a:r>
-              <a:rPr lang="es-CL" sz="1150" b="1" dirty="0">
+              <a:rPr lang="es-CL" sz="1250" dirty="0">
                 <a:solidFill>
                   <a:schemeClr val="tx2"/>
                 </a:solidFill>
               </a:rPr>
-              <a:t>Cobertura de trazabilidad: 222 de 234 pasos, 94,9 %.</a:t>
-            </a:r>
-            <a:r>
-              <a:rPr lang="es-CL" sz="1150" dirty="0">
+              <a:t>El flujo levantado fue revisado con el </a:t>
+            </a:r>
+            <a:r>
+              <a:rPr lang="es-CL" sz="1250" b="1" dirty="0">
                 <a:solidFill>
                   <a:schemeClr val="tx2"/>
                 </a:solidFill>
               </a:rPr>
-              <a:t> El remanente son brechas identificadas y asignadas a un rol, no tramos desconocidos.</a:t>
-            </a:r>
-            <a:endParaRPr lang="es-CL" sz="1150"/>
-          </a:p>
-          <a:p>
-            <a:pPr marL="228600" indent="-228600">
-              <a:spcBef>
-                <a:spcPts val="400"/>
-              </a:spcBef>
-              <a:buFont typeface="Wingdings" pitchFamily="2" charset="2"/>
-              <a:buChar char="q"/>
-            </a:pPr>
-            <a:r>
-              <a:rPr lang="es-CL" sz="1150" b="1" dirty="0">
+              <a:t>líder de mejora continua</a:t>
+            </a:r>
+            <a:r>
+              <a:rPr lang="es-CL" sz="1250" dirty="0">
                 <a:solidFill>
                   <a:schemeClr val="tx2"/>
                 </a:solidFill>
               </a:rPr>
-              <a:t>CAP: 0 %.</a:t>
-            </a:r>
-            <a:r>
-              <a:rPr lang="es-CL" sz="1150" dirty="0">
+              <a:t>: se verificó la continuidad de la cadena y la consistencia de la secuencia entre áreas. La </a:t>
+            </a:r>
+            <a:r>
+              <a:rPr lang="es-CL" sz="1250" b="1" dirty="0">
                 <a:solidFill>
                   <a:schemeClr val="tx2"/>
                 </a:solidFill>
               </a:rPr>
-              <a:t> El indicador mide la segmentación en cinco niveles, etapa aún no iniciada.</a:t>
-            </a:r>
-            <a:endParaRPr lang="es-CL" sz="1150"/>
-          </a:p>
-          <a:p>
-            <a:pPr marL="228600" indent="-228600">
-              <a:spcBef>
-                <a:spcPts val="400"/>
-              </a:spcBef>
-              <a:buFont typeface="Wingdings" pitchFamily="2" charset="2"/>
-              <a:buChar char="q"/>
-            </a:pPr>
-            <a:r>
-              <a:rPr lang="es-CL" sz="1150" b="1" dirty="0">
+              <a:t>validación formal mediante acta</a:t>
+            </a:r>
+            <a:r>
+              <a:rPr lang="es-CL" sz="1250" dirty="0">
                 <a:solidFill>
                   <a:schemeClr val="tx2"/>
                 </a:solidFill>
               </a:rPr>
-              <a:t>198 elementos</a:t>
-            </a:r>
-            <a:r>
-              <a:rPr lang="es-CL" sz="1150" dirty="0">
-                <a:solidFill>
-                  <a:schemeClr val="tx2"/>
-                </a:solidFill>
-              </a:rPr>
-              <a:t> quedaron asociados a </a:t>
-            </a:r>
-            <a:r>
-              <a:rPr lang="es-CL" sz="1150" b="1" dirty="0">
-                <a:solidFill>
-                  <a:schemeClr val="tx2"/>
-                </a:solidFill>
-              </a:rPr>
-              <a:t>86 códigos</a:t>
-            </a:r>
-            <a:r>
-              <a:rPr lang="es-CL" sz="1150" dirty="0">
-                <a:solidFill>
-                  <a:schemeClr val="tx2"/>
-                </a:solidFill>
-              </a:rPr>
-              <a:t> del APQC PCF, categoría 7.</a:t>
-            </a:r>
-            <a:endParaRPr lang="es-CL" sz="1150"/>
-          </a:p>
-        </p:txBody>
-      </p:sp>
-      <p:sp>
-        <p:nvSpPr>
-          <p:cNvPr id="10" name="9 CuadroTexto"/>
-          <p:cNvSpPr txBox="1"/>
-          <p:nvPr/>
-        </p:nvSpPr>
-        <p:spPr>
-          <a:xfrm>
-            <a:off x="323528" y="5100000"/>
-            <a:ext cx="8352928" cy="1500000"/>
-          </a:xfrm>
-          <a:prstGeom prst="rect">
-            <a:avLst/>
-          </a:prstGeom>
-          <a:noFill/>
-        </p:spPr>
-        <p:txBody>
-          <a:bodyPr wrap="square" lIns="91396" tIns="45697" rIns="91396" bIns="45697" rtlCol="0">
-            <a:spAutoFit/>
-          </a:bodyPr>
-          <a:lstStyle/>
-          <a:p>
-            <a:r>
-              <a:rPr lang="es-CL" sz="1300" b="1" dirty="0">
-                <a:solidFill>
-                  <a:srgbClr val="1F497D">
-                    <a:lumMod val="75000"/>
-                  </a:srgbClr>
-                </a:solidFill>
-              </a:rPr>
-              <a:t>Hallazgos</a:t>
-            </a:r>
-            <a:endParaRPr lang="es-CL" sz="1300"/>
-          </a:p>
-          <a:p>
-            <a:pPr marL="228600" indent="-228600">
-              <a:buFont typeface="Wingdings" pitchFamily="2" charset="2"/>
-              <a:buChar char="q"/>
-            </a:pPr>
-            <a:r>
-              <a:rPr lang="es-CL" sz="1150" b="1" dirty="0">
-                <a:solidFill>
-                  <a:schemeClr val="tx2"/>
-                </a:solidFill>
-              </a:rPr>
-              <a:t>36 pasos</a:t>
-            </a:r>
-            <a:r>
-              <a:rPr lang="es-CL" sz="1150" dirty="0">
-                <a:solidFill>
-                  <a:schemeClr val="tx2"/>
-                </a:solidFill>
-              </a:rPr>
-              <a:t> que la organización ejecuta habitualmente </a:t>
-            </a:r>
-            <a:r>
-              <a:rPr lang="es-CL" sz="1150" b="1" dirty="0">
-                <a:solidFill>
-                  <a:schemeClr val="tx2"/>
-                </a:solidFill>
-              </a:rPr>
-              <a:t>no constan en ningún procedimiento vigente</a:t>
-            </a:r>
-            <a:r>
-              <a:rPr lang="es-CL" sz="1150" dirty="0">
-                <a:solidFill>
-                  <a:schemeClr val="tx2"/>
-                </a:solidFill>
-              </a:rPr>
-              <a:t>; su incorporación es un aporte directo del trabajo.</a:t>
-            </a:r>
-            <a:endParaRPr lang="es-CL" sz="1150"/>
-          </a:p>
-          <a:p>
-            <a:pPr marL="228600" indent="-228600">
-              <a:spcBef>
-                <a:spcPts val="300"/>
-              </a:spcBef>
-              <a:buFont typeface="Wingdings" pitchFamily="2" charset="2"/>
-              <a:buChar char="q"/>
-            </a:pPr>
-            <a:r>
-              <a:rPr lang="es-CL" sz="1150" b="1" dirty="0">
-                <a:solidFill>
-                  <a:schemeClr val="tx2"/>
-                </a:solidFill>
-              </a:rPr>
-              <a:t>12 brechas declaradas</a:t>
-            </a:r>
-            <a:r>
-              <a:rPr lang="es-CL" sz="1150" dirty="0">
-                <a:solidFill>
-                  <a:schemeClr val="tx2"/>
-                </a:solidFill>
-              </a:rPr>
-              <a:t>, de las cuales </a:t>
-            </a:r>
-            <a:r>
-              <a:rPr lang="es-CL" sz="1150" b="1" dirty="0">
-                <a:solidFill>
-                  <a:schemeClr val="tx2"/>
-                </a:solidFill>
-              </a:rPr>
-              <a:t>10 se concentran</a:t>
-            </a:r>
-            <a:r>
-              <a:rPr lang="es-CL" sz="1150" dirty="0">
-                <a:solidFill>
-                  <a:schemeClr val="tx2"/>
-                </a:solidFill>
-              </a:rPr>
-              <a:t> en administración de nómina y desvinculación: el cierre del ciclo de vida del trabajador es el tramo menos documentado.</a:t>
-            </a:r>
-            <a:endParaRPr lang="es-CL" sz="1150"/>
-          </a:p>
-          <a:p>
-            <a:pPr marL="228600" indent="-228600">
-              <a:spcBef>
-                <a:spcPts val="300"/>
-              </a:spcBef>
-              <a:buFont typeface="Wingdings" pitchFamily="2" charset="2"/>
-              <a:buChar char="q"/>
-            </a:pPr>
-            <a:r>
-              <a:rPr lang="es-CL" sz="1150" dirty="0">
-                <a:solidFill>
-                  <a:schemeClr val="tx2"/>
-                </a:solidFill>
-              </a:rPr>
-              <a:t>En </a:t>
-            </a:r>
-            <a:r>
-              <a:rPr lang="es-CL" sz="1150" b="1" dirty="0">
-                <a:solidFill>
-                  <a:schemeClr val="tx2"/>
-                </a:solidFill>
-              </a:rPr>
-              <a:t>8 de las 12</a:t>
-            </a:r>
-            <a:r>
-              <a:rPr lang="es-CL" sz="1150" dirty="0">
-                <a:solidFill>
-                  <a:schemeClr val="tx2"/>
-                </a:solidFill>
-              </a:rPr>
-              <a:t> brechas el APQC PCF no desciende a un nivel accionable, de modo que el marco no sustituye el levantamiento en terreno.</a:t>
-            </a:r>
-            <a:endParaRPr lang="es-CL" sz="1150"/>
+              <a:t> de los dueños de proceso corresponde a A1.6 y está pendiente.</a:t>
+            </a:r>
+            <a:endParaRPr lang="es-CL" sz="1250"/>
           </a:p>
         </p:txBody>
       </p:sp>

--- a/Avance_1_TFG_Bastian_Darwit_v1.pptx
+++ b/Avance_1_TFG_Bastian_Darwit_v1.pptx
@@ -22,12 +22,6 @@
     <p:sldId id="306" r:id="rId106"/>
     <p:sldId id="307" r:id="rId107"/>
     <p:sldId id="308" r:id="rId108"/>
-    <p:sldId id="309" r:id="rId109"/>
-    <p:sldId id="310" r:id="rId110"/>
-    <p:sldId id="311" r:id="rId111"/>
-    <p:sldId id="312" r:id="rId112"/>
-    <p:sldId id="313" r:id="rId113"/>
-    <p:sldId id="314" r:id="rId114"/>
   </p:sldIdLst>
   <p:sldSz cx="9144000" cy="6858000" type="screen4x3"/>
   <p:notesSz cx="7053263" cy="9309100"/>
@@ -642,1314 +636,6 @@
     </a:lvl9pPr>
   </p:notesStyle>
 </p:notesMaster>
-</file>
-
-<file path=ppt/notesSlides/notesSlide1.xml><?xml version="1.0" encoding="utf-8"?>
-<p:notes xmlns:a="http://schemas.openxmlformats.org/drawingml/2006/main" xmlns:r="http://schemas.openxmlformats.org/officeDocument/2006/relationships" xmlns:p="http://schemas.openxmlformats.org/presentationml/2006/main">
-  <p:cSld>
-    <p:spTree>
-      <p:nvGrpSpPr>
-        <p:cNvPr id="1" name=""/>
-        <p:cNvGrpSpPr/>
-        <p:nvPr/>
-      </p:nvGrpSpPr>
-      <p:grpSpPr>
-        <a:xfrm>
-          <a:off x="0" y="0"/>
-          <a:ext cx="0" cy="0"/>
-          <a:chOff x="0" y="0"/>
-          <a:chExt cx="0" cy="0"/>
-        </a:xfrm>
-      </p:grpSpPr>
-      <p:sp>
-        <p:nvSpPr>
-          <p:cNvPr id="2" name="Marcador de imagen"/>
-          <p:cNvSpPr>
-            <a:spLocks noGrp="1" noRot="1" noChangeAspect="1"/>
-          </p:cNvSpPr>
-          <p:nvPr>
-            <p:ph type="sldImg"/>
-          </p:nvPr>
-        </p:nvSpPr>
-        <p:spPr/>
-      </p:sp>
-      <p:sp>
-        <p:nvSpPr>
-          <p:cNvPr id="3" name="Marcador de notas"/>
-          <p:cNvSpPr>
-            <a:spLocks noGrp="1"/>
-          </p:cNvSpPr>
-          <p:nvPr>
-            <p:ph type="body" idx="1"/>
-          </p:nvPr>
-        </p:nvSpPr>
-        <p:spPr/>
-        <p:txBody>
-          <a:bodyPr/>
-          <a:lstStyle/>
-          <a:p>
-            <a:r>
-              <a:rPr lang="es-CL" sz="1200" dirty="0"/>
-              <a:t>Tiempo sugerido: 0:20 · Acumulado: 0:20</a:t>
-            </a:r>
-          </a:p>
-          <a:p>
-            <a:endParaRPr lang="es-CL" sz="1200"/>
-          </a:p>
-          <a:p>
-            <a:r>
-              <a:rPr lang="es-CL" sz="1200" dirty="0"/>
-              <a:t>Saludo y presentación. Este es el primer avance del TFG; el</a:t>
-            </a:r>
-          </a:p>
-          <a:p>
-            <a:r>
-              <a:rPr lang="es-CL" sz="1200" dirty="0"/>
-              <a:t>anteproyecto fue aprobado y presentado el 8 de agosto.</a:t>
-            </a:r>
-          </a:p>
-        </p:txBody>
-      </p:sp>
-    </p:spTree>
-  </p:cSld>
-  <p:clrMapOvr>
-    <a:masterClrMapping/>
-  </p:clrMapOvr>
-</p:notes>
-</file>
-
-<file path=ppt/notesSlides/notesSlide10.xml><?xml version="1.0" encoding="utf-8"?>
-<p:notes xmlns:a="http://schemas.openxmlformats.org/drawingml/2006/main" xmlns:r="http://schemas.openxmlformats.org/officeDocument/2006/relationships" xmlns:p="http://schemas.openxmlformats.org/presentationml/2006/main">
-  <p:cSld>
-    <p:spTree>
-      <p:nvGrpSpPr>
-        <p:cNvPr id="1" name=""/>
-        <p:cNvGrpSpPr/>
-        <p:nvPr/>
-      </p:nvGrpSpPr>
-      <p:grpSpPr>
-        <a:xfrm>
-          <a:off x="0" y="0"/>
-          <a:ext cx="0" cy="0"/>
-          <a:chOff x="0" y="0"/>
-          <a:chExt cx="0" cy="0"/>
-        </a:xfrm>
-      </p:grpSpPr>
-      <p:sp>
-        <p:nvSpPr>
-          <p:cNvPr id="2" name="Marcador de imagen"/>
-          <p:cNvSpPr>
-            <a:spLocks noGrp="1" noRot="1" noChangeAspect="1"/>
-          </p:cNvSpPr>
-          <p:nvPr>
-            <p:ph type="sldImg"/>
-          </p:nvPr>
-        </p:nvSpPr>
-        <p:spPr/>
-      </p:sp>
-      <p:sp>
-        <p:nvSpPr>
-          <p:cNvPr id="3" name="Marcador de notas"/>
-          <p:cNvSpPr>
-            <a:spLocks noGrp="1"/>
-          </p:cNvSpPr>
-          <p:nvPr>
-            <p:ph type="body" idx="1"/>
-          </p:nvPr>
-        </p:nvSpPr>
-        <p:spPr/>
-        <p:txBody>
-          <a:bodyPr/>
-          <a:lstStyle/>
-          <a:p>
-            <a:r>
-              <a:rPr lang="es-CL" sz="1200" dirty="0"/>
-              <a:t>Tiempo sugerido: 1:00 · Acumulado: 7:30</a:t>
-            </a:r>
-          </a:p>
-          <a:p>
-            <a:endParaRPr lang="es-CL" sz="1200"/>
-          </a:p>
-          <a:p>
-            <a:r>
-              <a:rPr lang="es-CL" sz="1200" dirty="0"/>
-              <a:t>Este es el resultado central del avance. Destacar el cambio de mirada:</a:t>
-            </a:r>
-          </a:p>
-          <a:p>
-            <a:r>
-              <a:rPr lang="es-CL" sz="1200" dirty="0"/>
-              <a:t>antes había ocho silos funcionales, ahora hay una sola cadena de</a:t>
-            </a:r>
-          </a:p>
-          <a:p>
-            <a:r>
-              <a:rPr lang="es-CL" sz="1200" dirty="0"/>
-              <a:t>información de punta a punta.</a:t>
-            </a:r>
-          </a:p>
-          <a:p>
-            <a:r>
-              <a:rPr lang="es-CL" sz="1200" dirty="0"/>
-              <a:t>El dato del arranque, en la necesidad estratégica y no en la vacante,</a:t>
-            </a:r>
-          </a:p>
-          <a:p>
-            <a:r>
-              <a:rPr lang="es-CL" sz="1200" dirty="0"/>
-              <a:t>suele generar preguntas: viene del orden que fija el APQC PCF.</a:t>
-            </a:r>
-          </a:p>
-        </p:txBody>
-      </p:sp>
-    </p:spTree>
-  </p:cSld>
-  <p:clrMapOvr>
-    <a:masterClrMapping/>
-  </p:clrMapOvr>
-</p:notes>
-</file>
-
-<file path=ppt/notesSlides/notesSlide11.xml><?xml version="1.0" encoding="utf-8"?>
-<p:notes xmlns:a="http://schemas.openxmlformats.org/drawingml/2006/main" xmlns:r="http://schemas.openxmlformats.org/officeDocument/2006/relationships" xmlns:p="http://schemas.openxmlformats.org/presentationml/2006/main">
-  <p:cSld>
-    <p:spTree>
-      <p:nvGrpSpPr>
-        <p:cNvPr id="1" name=""/>
-        <p:cNvGrpSpPr/>
-        <p:nvPr/>
-      </p:nvGrpSpPr>
-      <p:grpSpPr>
-        <a:xfrm>
-          <a:off x="0" y="0"/>
-          <a:ext cx="0" cy="0"/>
-          <a:chOff x="0" y="0"/>
-          <a:chExt cx="0" cy="0"/>
-        </a:xfrm>
-      </p:grpSpPr>
-      <p:sp>
-        <p:nvSpPr>
-          <p:cNvPr id="2" name="Marcador de imagen"/>
-          <p:cNvSpPr>
-            <a:spLocks noGrp="1" noRot="1" noChangeAspect="1"/>
-          </p:cNvSpPr>
-          <p:nvPr>
-            <p:ph type="sldImg"/>
-          </p:nvPr>
-        </p:nvSpPr>
-        <p:spPr/>
-      </p:sp>
-      <p:sp>
-        <p:nvSpPr>
-          <p:cNvPr id="3" name="Marcador de notas"/>
-          <p:cNvSpPr>
-            <a:spLocks noGrp="1"/>
-          </p:cNvSpPr>
-          <p:nvPr>
-            <p:ph type="body" idx="1"/>
-          </p:nvPr>
-        </p:nvSpPr>
-        <p:spPr/>
-        <p:txBody>
-          <a:bodyPr/>
-          <a:lstStyle/>
-          <a:p>
-            <a:r>
-              <a:rPr lang="es-CL" sz="1200" dirty="0"/>
-              <a:t>Tiempo sugerido: 0:50 · Acumulado: 8:20</a:t>
-            </a:r>
-          </a:p>
-          <a:p>
-            <a:endParaRPr lang="es-CL" sz="1200"/>
-          </a:p>
-          <a:p>
-            <a:r>
-              <a:rPr lang="es-CL" sz="1200" dirty="0"/>
-              <a:t>No leer la tabla. Señalar el patrón: el centro del ciclo, selección y</a:t>
-            </a:r>
-          </a:p>
-          <a:p>
-            <a:r>
-              <a:rPr lang="es-CL" sz="1200" dirty="0"/>
-              <a:t>formación, está documentado; los extremos no. Las dos fases con</a:t>
-            </a:r>
-          </a:p>
-          <a:p>
-            <a:r>
-              <a:rPr lang="es-CL" sz="1200" dirty="0"/>
-              <a:t>brechas quedan marcadas en rojo y son el puente a la lámina siguiente.</a:t>
-            </a:r>
-          </a:p>
-          <a:p>
-            <a:r>
-              <a:rPr lang="es-CL" sz="1200" dirty="0"/>
-              <a:t>Conclusión: la madurez conviene medirse por fase, no de forma agregada.</a:t>
-            </a:r>
-          </a:p>
-        </p:txBody>
-      </p:sp>
-    </p:spTree>
-  </p:cSld>
-  <p:clrMapOvr>
-    <a:masterClrMapping/>
-  </p:clrMapOvr>
-</p:notes>
-</file>
-
-<file path=ppt/notesSlides/notesSlide12.xml><?xml version="1.0" encoding="utf-8"?>
-<p:notes xmlns:a="http://schemas.openxmlformats.org/drawingml/2006/main" xmlns:r="http://schemas.openxmlformats.org/officeDocument/2006/relationships" xmlns:p="http://schemas.openxmlformats.org/presentationml/2006/main">
-  <p:cSld>
-    <p:spTree>
-      <p:nvGrpSpPr>
-        <p:cNvPr id="1" name=""/>
-        <p:cNvGrpSpPr/>
-        <p:nvPr/>
-      </p:nvGrpSpPr>
-      <p:grpSpPr>
-        <a:xfrm>
-          <a:off x="0" y="0"/>
-          <a:ext cx="0" cy="0"/>
-          <a:chOff x="0" y="0"/>
-          <a:chExt cx="0" cy="0"/>
-        </a:xfrm>
-      </p:grpSpPr>
-      <p:sp>
-        <p:nvSpPr>
-          <p:cNvPr id="2" name="Marcador de imagen"/>
-          <p:cNvSpPr>
-            <a:spLocks noGrp="1" noRot="1" noChangeAspect="1"/>
-          </p:cNvSpPr>
-          <p:nvPr>
-            <p:ph type="sldImg"/>
-          </p:nvPr>
-        </p:nvSpPr>
-        <p:spPr/>
-      </p:sp>
-      <p:sp>
-        <p:nvSpPr>
-          <p:cNvPr id="3" name="Marcador de notas"/>
-          <p:cNvSpPr>
-            <a:spLocks noGrp="1"/>
-          </p:cNvSpPr>
-          <p:nvPr>
-            <p:ph type="body" idx="1"/>
-          </p:nvPr>
-        </p:nvSpPr>
-        <p:spPr/>
-        <p:txBody>
-          <a:bodyPr/>
-          <a:lstStyle/>
-          <a:p>
-            <a:r>
-              <a:rPr lang="es-CL" sz="1200" dirty="0"/>
-              <a:t>Tiempo sugerido: 0:50 · Acumulado: 9:10</a:t>
-            </a:r>
-          </a:p>
-          <a:p>
-            <a:endParaRPr lang="es-CL" sz="1200"/>
-          </a:p>
-          <a:p>
-            <a:r>
-              <a:rPr lang="es-CL" sz="1200" dirty="0"/>
-              <a:t>Presentar las brechas como resultado, no como falta. Son el producto de</a:t>
-            </a:r>
-          </a:p>
-          <a:p>
-            <a:r>
-              <a:rPr lang="es-CL" sz="1200" dirty="0"/>
-              <a:t>la regla de trazabilidad: se declaran en lugar de rellenarse a ojo.</a:t>
-            </a:r>
-          </a:p>
-          <a:p>
-            <a:r>
-              <a:rPr lang="es-CL" sz="1200" dirty="0"/>
-              <a:t>La desvinculación es el espejo del onboarding y está sin documentar.</a:t>
-            </a:r>
-          </a:p>
-          <a:p>
-            <a:r>
-              <a:rPr lang="es-CL" sz="1200" dirty="0"/>
-              <a:t>Consecuencia para OE2: una tarea no descrita no se puede evaluar,</a:t>
-            </a:r>
-          </a:p>
-          <a:p>
-            <a:r>
-              <a:rPr lang="es-CL" sz="1200" dirty="0"/>
-              <a:t>de modo que cerrar estas brechas condiciona la cobertura alcanzable.</a:t>
-            </a:r>
-          </a:p>
-        </p:txBody>
-      </p:sp>
-    </p:spTree>
-  </p:cSld>
-  <p:clrMapOvr>
-    <a:masterClrMapping/>
-  </p:clrMapOvr>
-</p:notes>
-</file>
-
-<file path=ppt/notesSlides/notesSlide13.xml><?xml version="1.0" encoding="utf-8"?>
-<p:notes xmlns:a="http://schemas.openxmlformats.org/drawingml/2006/main" xmlns:r="http://schemas.openxmlformats.org/officeDocument/2006/relationships" xmlns:p="http://schemas.openxmlformats.org/presentationml/2006/main">
-  <p:cSld>
-    <p:spTree>
-      <p:nvGrpSpPr>
-        <p:cNvPr id="1" name=""/>
-        <p:cNvGrpSpPr/>
-        <p:nvPr/>
-      </p:nvGrpSpPr>
-      <p:grpSpPr>
-        <a:xfrm>
-          <a:off x="0" y="0"/>
-          <a:ext cx="0" cy="0"/>
-          <a:chOff x="0" y="0"/>
-          <a:chExt cx="0" cy="0"/>
-        </a:xfrm>
-      </p:grpSpPr>
-      <p:sp>
-        <p:nvSpPr>
-          <p:cNvPr id="2" name="Marcador de imagen"/>
-          <p:cNvSpPr>
-            <a:spLocks noGrp="1" noRot="1" noChangeAspect="1"/>
-          </p:cNvSpPr>
-          <p:nvPr>
-            <p:ph type="sldImg"/>
-          </p:nvPr>
-        </p:nvSpPr>
-        <p:spPr/>
-      </p:sp>
-      <p:sp>
-        <p:nvSpPr>
-          <p:cNvPr id="3" name="Marcador de notas"/>
-          <p:cNvSpPr>
-            <a:spLocks noGrp="1"/>
-          </p:cNvSpPr>
-          <p:nvPr>
-            <p:ph type="body" idx="1"/>
-          </p:nvPr>
-        </p:nvSpPr>
-        <p:spPr/>
-        <p:txBody>
-          <a:bodyPr/>
-          <a:lstStyle/>
-          <a:p>
-            <a:r>
-              <a:rPr lang="es-CL" sz="1200" dirty="0"/>
-              <a:t>Tiempo sugerido: 0:50 · Acumulado: 10:00</a:t>
-            </a:r>
-          </a:p>
-          <a:p>
-            <a:endParaRPr lang="es-CL" sz="1200"/>
-          </a:p>
-          <a:p>
-            <a:r>
-              <a:rPr lang="es-CL" sz="1200" dirty="0"/>
-              <a:t>Los 36 pasos son el argumento de valor para la empresa: se está</a:t>
-            </a:r>
-          </a:p>
-          <a:p>
-            <a:r>
-              <a:rPr lang="es-CL" sz="1200" dirty="0"/>
-              <a:t>documentando lo que se hace y no estaba escrito.</a:t>
-            </a:r>
-          </a:p>
-          <a:p>
-            <a:r>
-              <a:rPr lang="es-CL" sz="1200" dirty="0"/>
-              <a:t>Explicar bien el CAP en 0 %: es una consecuencia de la definición del</a:t>
-            </a:r>
-          </a:p>
-          <a:p>
-            <a:r>
-              <a:rPr lang="es-CL" sz="1200" dirty="0"/>
-              <a:t>indicador, no una falta de avance. Para eso se agregó la cobertura de</a:t>
-            </a:r>
-          </a:p>
-          <a:p>
-            <a:r>
-              <a:rPr lang="es-CL" sz="1200" dirty="0"/>
-              <a:t>trazabilidad, que sí refleja el estado de la primera etapa.</a:t>
-            </a:r>
-          </a:p>
-        </p:txBody>
-      </p:sp>
-    </p:spTree>
-  </p:cSld>
-  <p:clrMapOvr>
-    <a:masterClrMapping/>
-  </p:clrMapOvr>
-</p:notes>
-</file>
-
-<file path=ppt/notesSlides/notesSlide14.xml><?xml version="1.0" encoding="utf-8"?>
-<p:notes xmlns:a="http://schemas.openxmlformats.org/drawingml/2006/main" xmlns:r="http://schemas.openxmlformats.org/officeDocument/2006/relationships" xmlns:p="http://schemas.openxmlformats.org/presentationml/2006/main">
-  <p:cSld>
-    <p:spTree>
-      <p:nvGrpSpPr>
-        <p:cNvPr id="1" name=""/>
-        <p:cNvGrpSpPr/>
-        <p:nvPr/>
-      </p:nvGrpSpPr>
-      <p:grpSpPr>
-        <a:xfrm>
-          <a:off x="0" y="0"/>
-          <a:ext cx="0" cy="0"/>
-          <a:chOff x="0" y="0"/>
-          <a:chExt cx="0" cy="0"/>
-        </a:xfrm>
-      </p:grpSpPr>
-      <p:sp>
-        <p:nvSpPr>
-          <p:cNvPr id="2" name="Marcador de imagen"/>
-          <p:cNvSpPr>
-            <a:spLocks noGrp="1" noRot="1" noChangeAspect="1"/>
-          </p:cNvSpPr>
-          <p:nvPr>
-            <p:ph type="sldImg"/>
-          </p:nvPr>
-        </p:nvSpPr>
-        <p:spPr/>
-      </p:sp>
-      <p:sp>
-        <p:nvSpPr>
-          <p:cNvPr id="3" name="Marcador de notas"/>
-          <p:cNvSpPr>
-            <a:spLocks noGrp="1"/>
-          </p:cNvSpPr>
-          <p:nvPr>
-            <p:ph type="body" idx="1"/>
-          </p:nvPr>
-        </p:nvSpPr>
-        <p:spPr/>
-        <p:txBody>
-          <a:bodyPr/>
-          <a:lstStyle/>
-          <a:p>
-            <a:r>
-              <a:rPr lang="es-CL" sz="1200" dirty="0"/>
-              <a:t>Tiempo sugerido: 0:40 · Acumulado: 10:40</a:t>
-            </a:r>
-          </a:p>
-          <a:p>
-            <a:endParaRPr lang="es-CL" sz="1200"/>
-          </a:p>
-          <a:p>
-            <a:r>
-              <a:rPr lang="es-CL" sz="1200" dirty="0"/>
-              <a:t>Cerrar con compromisos concretos y fechas. Mencionar que el cierre de</a:t>
-            </a:r>
-          </a:p>
-          <a:p>
-            <a:r>
-              <a:rPr lang="es-CL" sz="1200" dirty="0"/>
-              <a:t>brechas corre en paralelo y no bloquea la segmentación de MP8.</a:t>
-            </a:r>
-          </a:p>
-          <a:p>
-            <a:r>
-              <a:rPr lang="es-CL" sz="1200" dirty="0"/>
-              <a:t>Dejar espacio para preguntas.</a:t>
-            </a:r>
-          </a:p>
-        </p:txBody>
-      </p:sp>
-    </p:spTree>
-  </p:cSld>
-  <p:clrMapOvr>
-    <a:masterClrMapping/>
-  </p:clrMapOvr>
-</p:notes>
-</file>
-
-<file path=ppt/notesSlides/notesSlide15.xml><?xml version="1.0" encoding="utf-8"?>
-<p:notes xmlns:a="http://schemas.openxmlformats.org/drawingml/2006/main" xmlns:r="http://schemas.openxmlformats.org/officeDocument/2006/relationships" xmlns:p="http://schemas.openxmlformats.org/presentationml/2006/main">
-  <p:cSld>
-    <p:spTree>
-      <p:nvGrpSpPr>
-        <p:cNvPr id="1" name=""/>
-        <p:cNvGrpSpPr/>
-        <p:nvPr/>
-      </p:nvGrpSpPr>
-      <p:grpSpPr>
-        <a:xfrm>
-          <a:off x="0" y="0"/>
-          <a:ext cx="0" cy="0"/>
-          <a:chOff x="0" y="0"/>
-          <a:chExt cx="0" cy="0"/>
-        </a:xfrm>
-      </p:grpSpPr>
-      <p:sp>
-        <p:nvSpPr>
-          <p:cNvPr id="2" name="Marcador de imagen"/>
-          <p:cNvSpPr>
-            <a:spLocks noGrp="1" noRot="1" noChangeAspect="1"/>
-          </p:cNvSpPr>
-          <p:nvPr>
-            <p:ph type="sldImg"/>
-          </p:nvPr>
-        </p:nvSpPr>
-        <p:spPr/>
-      </p:sp>
-      <p:sp>
-        <p:nvSpPr>
-          <p:cNvPr id="3" name="Marcador de notas"/>
-          <p:cNvSpPr>
-            <a:spLocks noGrp="1"/>
-          </p:cNvSpPr>
-          <p:nvPr>
-            <p:ph type="body" idx="1"/>
-          </p:nvPr>
-        </p:nvSpPr>
-        <p:spPr/>
-        <p:txBody>
-          <a:bodyPr/>
-          <a:lstStyle/>
-          <a:p>
-            <a:r>
-              <a:rPr lang="es-CL" sz="1200" dirty="0"/>
-              <a:t>Tiempo sugerido: 0:10 · Total: 10:50</a:t>
-            </a:r>
-          </a:p>
-          <a:p>
-            <a:endParaRPr lang="es-CL" sz="1200"/>
-          </a:p>
-          <a:p>
-            <a:r>
-              <a:rPr lang="es-CL" sz="1200" dirty="0"/>
-              <a:t>Preguntas probables de la comisión:</a:t>
-            </a:r>
-          </a:p>
-          <a:p>
-            <a:r>
-              <a:rPr lang="es-CL" sz="1200" dirty="0"/>
-              <a:t>1. ¿Por qué el CAP está en 0 %? Ver lámina 13.</a:t>
-            </a:r>
-          </a:p>
-          <a:p>
-            <a:r>
-              <a:rPr lang="es-CL" sz="1200" dirty="0"/>
-              <a:t>2. ¿El cambio de metodología altera el alcance? Ver lámina 7.</a:t>
-            </a:r>
-          </a:p>
-          <a:p>
-            <a:r>
-              <a:rPr lang="es-CL" sz="1200" dirty="0"/>
-              <a:t>3. ¿Cómo se resguarda la confidencialidad? Datos agregados, roles sin</a:t>
-            </a:r>
-          </a:p>
-          <a:p>
-            <a:r>
-              <a:rPr lang="es-CL" sz="1200" dirty="0"/>
-              <a:t>   nombres, e informe final marcado como reservado.</a:t>
-            </a:r>
-          </a:p>
-          <a:p>
-            <a:r>
-              <a:rPr lang="es-CL" sz="1200" dirty="0"/>
-              <a:t>4. ¿Qué pasa si las brechas no se cierran? Acotan la cobertura de OE2;</a:t>
-            </a:r>
-          </a:p>
-          <a:p>
-            <a:r>
-              <a:rPr lang="es-CL" sz="1200" dirty="0"/>
-              <a:t>   se declararían como limitación del estudio.</a:t>
-            </a:r>
-          </a:p>
-        </p:txBody>
-      </p:sp>
-    </p:spTree>
-  </p:cSld>
-  <p:clrMapOvr>
-    <a:masterClrMapping/>
-  </p:clrMapOvr>
-</p:notes>
-</file>
-
-<file path=ppt/notesSlides/notesSlide2.xml><?xml version="1.0" encoding="utf-8"?>
-<p:notes xmlns:a="http://schemas.openxmlformats.org/drawingml/2006/main" xmlns:r="http://schemas.openxmlformats.org/officeDocument/2006/relationships" xmlns:p="http://schemas.openxmlformats.org/presentationml/2006/main">
-  <p:cSld>
-    <p:spTree>
-      <p:nvGrpSpPr>
-        <p:cNvPr id="1" name=""/>
-        <p:cNvGrpSpPr/>
-        <p:nvPr/>
-      </p:nvGrpSpPr>
-      <p:grpSpPr>
-        <a:xfrm>
-          <a:off x="0" y="0"/>
-          <a:ext cx="0" cy="0"/>
-          <a:chOff x="0" y="0"/>
-          <a:chExt cx="0" cy="0"/>
-        </a:xfrm>
-      </p:grpSpPr>
-      <p:sp>
-        <p:nvSpPr>
-          <p:cNvPr id="2" name="Marcador de imagen"/>
-          <p:cNvSpPr>
-            <a:spLocks noGrp="1" noRot="1" noChangeAspect="1"/>
-          </p:cNvSpPr>
-          <p:nvPr>
-            <p:ph type="sldImg"/>
-          </p:nvPr>
-        </p:nvSpPr>
-        <p:spPr/>
-      </p:sp>
-      <p:sp>
-        <p:nvSpPr>
-          <p:cNvPr id="3" name="Marcador de notas"/>
-          <p:cNvSpPr>
-            <a:spLocks noGrp="1"/>
-          </p:cNvSpPr>
-          <p:nvPr>
-            <p:ph type="body" idx="1"/>
-          </p:nvPr>
-        </p:nvSpPr>
-        <p:spPr/>
-        <p:txBody>
-          <a:bodyPr/>
-          <a:lstStyle/>
-          <a:p>
-            <a:r>
-              <a:rPr lang="es-CL" sz="1200" dirty="0"/>
-              <a:t>Tiempo sugerido: 0:40 · Acumulado: 1:00</a:t>
-            </a:r>
-          </a:p>
-          <a:p>
-            <a:endParaRPr lang="es-CL" sz="1200"/>
-          </a:p>
-          <a:p>
-            <a:r>
-              <a:rPr lang="es-CL" sz="1200" dirty="0"/>
-              <a:t>El título no cambió. Dejar claro desde el inicio que es una propuesta:</a:t>
-            </a:r>
-          </a:p>
-          <a:p>
-            <a:r>
-              <a:rPr lang="es-CL" sz="1200" dirty="0"/>
-              <a:t>se diseña el sistema, la implementación es decisión de la compañía.</a:t>
-            </a:r>
-          </a:p>
-          <a:p>
-            <a:r>
-              <a:rPr lang="es-CL" sz="1200" dirty="0"/>
-              <a:t>Mencionar que MP8 es transversal a los tres negocios, no solo celulosa.</a:t>
-            </a:r>
-          </a:p>
-        </p:txBody>
-      </p:sp>
-    </p:spTree>
-  </p:cSld>
-  <p:clrMapOvr>
-    <a:masterClrMapping/>
-  </p:clrMapOvr>
-</p:notes>
-</file>
-
-<file path=ppt/notesSlides/notesSlide3.xml><?xml version="1.0" encoding="utf-8"?>
-<p:notes xmlns:a="http://schemas.openxmlformats.org/drawingml/2006/main" xmlns:r="http://schemas.openxmlformats.org/officeDocument/2006/relationships" xmlns:p="http://schemas.openxmlformats.org/presentationml/2006/main">
-  <p:cSld>
-    <p:spTree>
-      <p:nvGrpSpPr>
-        <p:cNvPr id="1" name=""/>
-        <p:cNvGrpSpPr/>
-        <p:nvPr/>
-      </p:nvGrpSpPr>
-      <p:grpSpPr>
-        <a:xfrm>
-          <a:off x="0" y="0"/>
-          <a:ext cx="0" cy="0"/>
-          <a:chOff x="0" y="0"/>
-          <a:chExt cx="0" cy="0"/>
-        </a:xfrm>
-      </p:grpSpPr>
-      <p:sp>
-        <p:nvSpPr>
-          <p:cNvPr id="2" name="Marcador de imagen"/>
-          <p:cNvSpPr>
-            <a:spLocks noGrp="1" noRot="1" noChangeAspect="1"/>
-          </p:cNvSpPr>
-          <p:nvPr>
-            <p:ph type="sldImg"/>
-          </p:nvPr>
-        </p:nvSpPr>
-        <p:spPr/>
-      </p:sp>
-      <p:sp>
-        <p:nvSpPr>
-          <p:cNvPr id="3" name="Marcador de notas"/>
-          <p:cNvSpPr>
-            <a:spLocks noGrp="1"/>
-          </p:cNvSpPr>
-          <p:nvPr>
-            <p:ph type="body" idx="1"/>
-          </p:nvPr>
-        </p:nvSpPr>
-        <p:spPr/>
-        <p:txBody>
-          <a:bodyPr/>
-          <a:lstStyle/>
-          <a:p>
-            <a:r>
-              <a:rPr lang="es-CL" sz="1200" dirty="0"/>
-              <a:t>Tiempo sugerido: 0:50 · Acumulado: 1:50</a:t>
-            </a:r>
-          </a:p>
-          <a:p>
-            <a:endParaRPr lang="es-CL" sz="1200"/>
-          </a:p>
-          <a:p>
-            <a:r>
-              <a:rPr lang="es-CL" sz="1200" dirty="0"/>
-              <a:t>Los objetivos no cambiaron. Recalcar la secuencia de dependencia:</a:t>
-            </a:r>
-          </a:p>
-          <a:p>
-            <a:r>
-              <a:rPr lang="es-CL" sz="1200" dirty="0"/>
-              <a:t>sin arquitectura modelada no hay universo de tareas que evaluar,</a:t>
-            </a:r>
-          </a:p>
-          <a:p>
-            <a:r>
-              <a:rPr lang="es-CL" sz="1200" dirty="0"/>
-              <a:t>y sin evaluación no hay sistema que integrar.</a:t>
-            </a:r>
-          </a:p>
-          <a:p>
-            <a:r>
-              <a:rPr lang="es-CL" sz="1200" dirty="0"/>
-              <a:t>Anunciar que este avance se concentra en OE1.</a:t>
-            </a:r>
-          </a:p>
-        </p:txBody>
-      </p:sp>
-    </p:spTree>
-  </p:cSld>
-  <p:clrMapOvr>
-    <a:masterClrMapping/>
-  </p:clrMapOvr>
-</p:notes>
-</file>
-
-<file path=ppt/notesSlides/notesSlide4.xml><?xml version="1.0" encoding="utf-8"?>
-<p:notes xmlns:a="http://schemas.openxmlformats.org/drawingml/2006/main" xmlns:r="http://schemas.openxmlformats.org/officeDocument/2006/relationships" xmlns:p="http://schemas.openxmlformats.org/presentationml/2006/main">
-  <p:cSld>
-    <p:spTree>
-      <p:nvGrpSpPr>
-        <p:cNvPr id="1" name=""/>
-        <p:cNvGrpSpPr/>
-        <p:nvPr/>
-      </p:nvGrpSpPr>
-      <p:grpSpPr>
-        <a:xfrm>
-          <a:off x="0" y="0"/>
-          <a:ext cx="0" cy="0"/>
-          <a:chOff x="0" y="0"/>
-          <a:chExt cx="0" cy="0"/>
-        </a:xfrm>
-      </p:grpSpPr>
-      <p:sp>
-        <p:nvSpPr>
-          <p:cNvPr id="2" name="Marcador de imagen"/>
-          <p:cNvSpPr>
-            <a:spLocks noGrp="1" noRot="1" noChangeAspect="1"/>
-          </p:cNvSpPr>
-          <p:nvPr>
-            <p:ph type="sldImg"/>
-          </p:nvPr>
-        </p:nvSpPr>
-        <p:spPr/>
-      </p:sp>
-      <p:sp>
-        <p:nvSpPr>
-          <p:cNvPr id="3" name="Marcador de notas"/>
-          <p:cNvSpPr>
-            <a:spLocks noGrp="1"/>
-          </p:cNvSpPr>
-          <p:nvPr>
-            <p:ph type="body" idx="1"/>
-          </p:nvPr>
-        </p:nvSpPr>
-        <p:spPr/>
-        <p:txBody>
-          <a:bodyPr/>
-          <a:lstStyle/>
-          <a:p>
-            <a:r>
-              <a:rPr lang="es-CL" sz="1200" dirty="0"/>
-              <a:t>Tiempo sugerido: 0:50 · Acumulado: 2:40</a:t>
-            </a:r>
-          </a:p>
-          <a:p>
-            <a:endParaRPr lang="es-CL" sz="1200"/>
-          </a:p>
-          <a:p>
-            <a:r>
-              <a:rPr lang="es-CL" sz="1200" dirty="0"/>
-              <a:t>Esta es la lámina clave de metodología. Explicar por qué dos etapas:</a:t>
-            </a:r>
-          </a:p>
-          <a:p>
-            <a:r>
-              <a:rPr lang="es-CL" sz="1200" dirty="0"/>
-              <a:t>Arauco organiza por áreas funcionales, así que la jerarquía no existe</a:t>
-            </a:r>
-          </a:p>
-          <a:p>
-            <a:r>
-              <a:rPr lang="es-CL" sz="1200" dirty="0"/>
-              <a:t>como punto de partida. Derivarla del flujo evita suponer agrupaciones</a:t>
-            </a:r>
-          </a:p>
-          <a:p>
-            <a:r>
-              <a:rPr lang="es-CL" sz="1200" dirty="0"/>
-              <a:t>que la organización no tiene declaradas.</a:t>
-            </a:r>
-          </a:p>
-          <a:p>
-            <a:r>
-              <a:rPr lang="es-CL" sz="1200" dirty="0"/>
-              <a:t>La regla de trazabilidad es el resguardo metodológico: nada se inventa.</a:t>
-            </a:r>
-          </a:p>
-        </p:txBody>
-      </p:sp>
-    </p:spTree>
-  </p:cSld>
-  <p:clrMapOvr>
-    <a:masterClrMapping/>
-  </p:clrMapOvr>
-</p:notes>
-</file>
-
-<file path=ppt/notesSlides/notesSlide5.xml><?xml version="1.0" encoding="utf-8"?>
-<p:notes xmlns:a="http://schemas.openxmlformats.org/drawingml/2006/main" xmlns:r="http://schemas.openxmlformats.org/officeDocument/2006/relationships" xmlns:p="http://schemas.openxmlformats.org/presentationml/2006/main">
-  <p:cSld>
-    <p:spTree>
-      <p:nvGrpSpPr>
-        <p:cNvPr id="1" name=""/>
-        <p:cNvGrpSpPr/>
-        <p:nvPr/>
-      </p:nvGrpSpPr>
-      <p:grpSpPr>
-        <a:xfrm>
-          <a:off x="0" y="0"/>
-          <a:ext cx="0" cy="0"/>
-          <a:chOff x="0" y="0"/>
-          <a:chExt cx="0" cy="0"/>
-        </a:xfrm>
-      </p:grpSpPr>
-      <p:sp>
-        <p:nvSpPr>
-          <p:cNvPr id="2" name="Marcador de imagen"/>
-          <p:cNvSpPr>
-            <a:spLocks noGrp="1" noRot="1" noChangeAspect="1"/>
-          </p:cNvSpPr>
-          <p:nvPr>
-            <p:ph type="sldImg"/>
-          </p:nvPr>
-        </p:nvSpPr>
-        <p:spPr/>
-      </p:sp>
-      <p:sp>
-        <p:nvSpPr>
-          <p:cNvPr id="3" name="Marcador de notas"/>
-          <p:cNvSpPr>
-            <a:spLocks noGrp="1"/>
-          </p:cNvSpPr>
-          <p:nvPr>
-            <p:ph type="body" idx="1"/>
-          </p:nvPr>
-        </p:nvSpPr>
-        <p:spPr/>
-        <p:txBody>
-          <a:bodyPr/>
-          <a:lstStyle/>
-          <a:p>
-            <a:r>
-              <a:rPr lang="es-CL" sz="1200" dirty="0"/>
-              <a:t>Tiempo sugerido: 0:40 · Acumulado: 3:20</a:t>
-            </a:r>
-          </a:p>
-          <a:p>
-            <a:endParaRPr lang="es-CL" sz="1200"/>
-          </a:p>
-          <a:p>
-            <a:r>
-              <a:rPr lang="es-CL" sz="1200" dirty="0"/>
-              <a:t>No detenerse en cada atributo: mencionar que el riesgo residual es el</a:t>
-            </a:r>
-          </a:p>
-          <a:p>
-            <a:r>
-              <a:rPr lang="es-CL" sz="1200" dirty="0"/>
-              <a:t>que orienta la respuesta y conecta con OE3. Señalar que la evaluación</a:t>
-            </a:r>
-          </a:p>
-          <a:p>
-            <a:r>
-              <a:rPr lang="es-CL" sz="1200" dirty="0"/>
-              <a:t>se hará en talleres con los dueños de proceso.</a:t>
-            </a:r>
-          </a:p>
-        </p:txBody>
-      </p:sp>
-    </p:spTree>
-  </p:cSld>
-  <p:clrMapOvr>
-    <a:masterClrMapping/>
-  </p:clrMapOvr>
-</p:notes>
-</file>
-
-<file path=ppt/notesSlides/notesSlide6.xml><?xml version="1.0" encoding="utf-8"?>
-<p:notes xmlns:a="http://schemas.openxmlformats.org/drawingml/2006/main" xmlns:r="http://schemas.openxmlformats.org/officeDocument/2006/relationships" xmlns:p="http://schemas.openxmlformats.org/presentationml/2006/main">
-  <p:cSld>
-    <p:spTree>
-      <p:nvGrpSpPr>
-        <p:cNvPr id="1" name=""/>
-        <p:cNvGrpSpPr/>
-        <p:nvPr/>
-      </p:nvGrpSpPr>
-      <p:grpSpPr>
-        <a:xfrm>
-          <a:off x="0" y="0"/>
-          <a:ext cx="0" cy="0"/>
-          <a:chOff x="0" y="0"/>
-          <a:chExt cx="0" cy="0"/>
-        </a:xfrm>
-      </p:grpSpPr>
-      <p:sp>
-        <p:nvSpPr>
-          <p:cNvPr id="2" name="Marcador de imagen"/>
-          <p:cNvSpPr>
-            <a:spLocks noGrp="1" noRot="1" noChangeAspect="1"/>
-          </p:cNvSpPr>
-          <p:nvPr>
-            <p:ph type="sldImg"/>
-          </p:nvPr>
-        </p:nvSpPr>
-        <p:spPr/>
-      </p:sp>
-      <p:sp>
-        <p:nvSpPr>
-          <p:cNvPr id="3" name="Marcador de notas"/>
-          <p:cNvSpPr>
-            <a:spLocks noGrp="1"/>
-          </p:cNvSpPr>
-          <p:nvPr>
-            <p:ph type="body" idx="1"/>
-          </p:nvPr>
-        </p:nvSpPr>
-        <p:spPr/>
-        <p:txBody>
-          <a:bodyPr/>
-          <a:lstStyle/>
-          <a:p>
-            <a:r>
-              <a:rPr lang="es-CL" sz="1200" dirty="0"/>
-              <a:t>Tiempo sugerido: 0:40 · Acumulado: 4:00</a:t>
-            </a:r>
-          </a:p>
-          <a:p>
-            <a:endParaRPr lang="es-CL" sz="1200"/>
-          </a:p>
-          <a:p>
-            <a:r>
-              <a:rPr lang="es-CL" sz="1200" dirty="0"/>
-              <a:t>Insistir en la distinción entre catálogo y sistema: el sistema integra</a:t>
-            </a:r>
-          </a:p>
-          <a:p>
-            <a:r>
-              <a:rPr lang="es-CL" sz="1200" dirty="0"/>
-              <a:t>valoración, tratamiento, gobernanza y seguimiento.</a:t>
-            </a:r>
-          </a:p>
-          <a:p>
-            <a:r>
-              <a:rPr lang="es-CL" sz="1200" dirty="0"/>
-              <a:t>La tabla de indicadores sirve para anunciar cómo se medirá el logro,</a:t>
-            </a:r>
-          </a:p>
-          <a:p>
-            <a:r>
-              <a:rPr lang="es-CL" sz="1200" dirty="0"/>
-              <a:t>y se retoma al final con el estado actual de cada uno.</a:t>
-            </a:r>
-          </a:p>
-        </p:txBody>
-      </p:sp>
-    </p:spTree>
-  </p:cSld>
-  <p:clrMapOvr>
-    <a:masterClrMapping/>
-  </p:clrMapOvr>
-</p:notes>
-</file>
-
-<file path=ppt/notesSlides/notesSlide7.xml><?xml version="1.0" encoding="utf-8"?>
-<p:notes xmlns:a="http://schemas.openxmlformats.org/drawingml/2006/main" xmlns:r="http://schemas.openxmlformats.org/officeDocument/2006/relationships" xmlns:p="http://schemas.openxmlformats.org/presentationml/2006/main">
-  <p:cSld>
-    <p:spTree>
-      <p:nvGrpSpPr>
-        <p:cNvPr id="1" name=""/>
-        <p:cNvGrpSpPr/>
-        <p:nvPr/>
-      </p:nvGrpSpPr>
-      <p:grpSpPr>
-        <a:xfrm>
-          <a:off x="0" y="0"/>
-          <a:ext cx="0" cy="0"/>
-          <a:chOff x="0" y="0"/>
-          <a:chExt cx="0" cy="0"/>
-        </a:xfrm>
-      </p:grpSpPr>
-      <p:sp>
-        <p:nvSpPr>
-          <p:cNvPr id="2" name="Marcador de imagen"/>
-          <p:cNvSpPr>
-            <a:spLocks noGrp="1" noRot="1" noChangeAspect="1"/>
-          </p:cNvSpPr>
-          <p:nvPr>
-            <p:ph type="sldImg"/>
-          </p:nvPr>
-        </p:nvSpPr>
-        <p:spPr/>
-      </p:sp>
-      <p:sp>
-        <p:nvSpPr>
-          <p:cNvPr id="3" name="Marcador de notas"/>
-          <p:cNvSpPr>
-            <a:spLocks noGrp="1"/>
-          </p:cNvSpPr>
-          <p:nvPr>
-            <p:ph type="body" idx="1"/>
-          </p:nvPr>
-        </p:nvSpPr>
-        <p:spPr/>
-        <p:txBody>
-          <a:bodyPr/>
-          <a:lstStyle/>
-          <a:p>
-            <a:r>
-              <a:rPr lang="es-CL" sz="1200" dirty="0"/>
-              <a:t>Tiempo sugerido: 0:50 · Acumulado: 4:50</a:t>
-            </a:r>
-          </a:p>
-          <a:p>
-            <a:endParaRPr lang="es-CL" sz="1200"/>
-          </a:p>
-          <a:p>
-            <a:r>
-              <a:rPr lang="es-CL" sz="1200" dirty="0"/>
-              <a:t>Lámina importante ante la comisión. Ser explícito: lo que cambió es el</a:t>
-            </a:r>
-          </a:p>
-          <a:p>
-            <a:r>
-              <a:rPr lang="es-CL" sz="1200" dirty="0"/>
-              <a:t>modo de ejecutar el modelamiento y la programación, no el alcance</a:t>
-            </a:r>
-          </a:p>
-          <a:p>
-            <a:r>
-              <a:rPr lang="es-CL" sz="1200" dirty="0"/>
-              <a:t>comprometido. Cerrar con la frase de la última línea, que es la que</a:t>
-            </a:r>
-          </a:p>
-          <a:p>
-            <a:r>
-              <a:rPr lang="es-CL" sz="1200" dirty="0"/>
-              <a:t>responde la pregunta que probablemente hará la comisión.</a:t>
-            </a:r>
-          </a:p>
-        </p:txBody>
-      </p:sp>
-    </p:spTree>
-  </p:cSld>
-  <p:clrMapOvr>
-    <a:masterClrMapping/>
-  </p:clrMapOvr>
-</p:notes>
-</file>
-
-<file path=ppt/notesSlides/notesSlide8.xml><?xml version="1.0" encoding="utf-8"?>
-<p:notes xmlns:a="http://schemas.openxmlformats.org/drawingml/2006/main" xmlns:r="http://schemas.openxmlformats.org/officeDocument/2006/relationships" xmlns:p="http://schemas.openxmlformats.org/presentationml/2006/main">
-  <p:cSld>
-    <p:spTree>
-      <p:nvGrpSpPr>
-        <p:cNvPr id="1" name=""/>
-        <p:cNvGrpSpPr/>
-        <p:nvPr/>
-      </p:nvGrpSpPr>
-      <p:grpSpPr>
-        <a:xfrm>
-          <a:off x="0" y="0"/>
-          <a:ext cx="0" cy="0"/>
-          <a:chOff x="0" y="0"/>
-          <a:chExt cx="0" cy="0"/>
-        </a:xfrm>
-      </p:grpSpPr>
-      <p:sp>
-        <p:nvSpPr>
-          <p:cNvPr id="2" name="Marcador de imagen"/>
-          <p:cNvSpPr>
-            <a:spLocks noGrp="1" noRot="1" noChangeAspect="1"/>
-          </p:cNvSpPr>
-          <p:nvPr>
-            <p:ph type="sldImg"/>
-          </p:nvPr>
-        </p:nvSpPr>
-        <p:spPr/>
-      </p:sp>
-      <p:sp>
-        <p:nvSpPr>
-          <p:cNvPr id="3" name="Marcador de notas"/>
-          <p:cNvSpPr>
-            <a:spLocks noGrp="1"/>
-          </p:cNvSpPr>
-          <p:nvPr>
-            <p:ph type="body" idx="1"/>
-          </p:nvPr>
-        </p:nvSpPr>
-        <p:spPr/>
-        <p:txBody>
-          <a:bodyPr/>
-          <a:lstStyle/>
-          <a:p>
-            <a:r>
-              <a:rPr lang="es-CL" sz="1200" dirty="0"/>
-              <a:t>Tiempo sugerido: 0:50 · Acumulado: 5:40</a:t>
-            </a:r>
-          </a:p>
-          <a:p>
-            <a:endParaRPr lang="es-CL" sz="1200"/>
-          </a:p>
-          <a:p>
-            <a:r>
-              <a:rPr lang="es-CL" sz="1200" dirty="0"/>
-              <a:t>Recorrer solo las filas oscuras: lo completado. Señalar que MP21</a:t>
-            </a:r>
-          </a:p>
-          <a:p>
-            <a:r>
-              <a:rPr lang="es-CL" sz="1200" dirty="0"/>
-              <a:t>arranca en la semana 6 y que el segundo hito queda en la semana 13.</a:t>
-            </a:r>
-          </a:p>
-          <a:p>
-            <a:r>
-              <a:rPr lang="es-CL" sz="1200" dirty="0"/>
-              <a:t>Si preguntan por el desfase: el hito se adelantó de la semana 10 a la 5,</a:t>
-            </a:r>
-          </a:p>
-          <a:p>
-            <a:r>
-              <a:rPr lang="es-CL" sz="1200" dirty="0"/>
-              <a:t>de modo que se expone menos avance del originalmente previsto para</a:t>
-            </a:r>
-          </a:p>
-          <a:p>
-            <a:r>
-              <a:rPr lang="es-CL" sz="1200" dirty="0"/>
-              <a:t>este punto, y la programación total se mantiene en 20 semanas.</a:t>
-            </a:r>
-          </a:p>
-        </p:txBody>
-      </p:sp>
-    </p:spTree>
-  </p:cSld>
-  <p:clrMapOvr>
-    <a:masterClrMapping/>
-  </p:clrMapOvr>
-</p:notes>
-</file>
-
-<file path=ppt/notesSlides/notesSlide9.xml><?xml version="1.0" encoding="utf-8"?>
-<p:notes xmlns:a="http://schemas.openxmlformats.org/drawingml/2006/main" xmlns:r="http://schemas.openxmlformats.org/officeDocument/2006/relationships" xmlns:p="http://schemas.openxmlformats.org/presentationml/2006/main">
-  <p:cSld>
-    <p:spTree>
-      <p:nvGrpSpPr>
-        <p:cNvPr id="1" name=""/>
-        <p:cNvGrpSpPr/>
-        <p:nvPr/>
-      </p:nvGrpSpPr>
-      <p:grpSpPr>
-        <a:xfrm>
-          <a:off x="0" y="0"/>
-          <a:ext cx="0" cy="0"/>
-          <a:chOff x="0" y="0"/>
-          <a:chExt cx="0" cy="0"/>
-        </a:xfrm>
-      </p:grpSpPr>
-      <p:sp>
-        <p:nvSpPr>
-          <p:cNvPr id="2" name="Marcador de imagen"/>
-          <p:cNvSpPr>
-            <a:spLocks noGrp="1" noRot="1" noChangeAspect="1"/>
-          </p:cNvSpPr>
-          <p:nvPr>
-            <p:ph type="sldImg"/>
-          </p:nvPr>
-        </p:nvSpPr>
-        <p:spPr/>
-      </p:sp>
-      <p:sp>
-        <p:nvSpPr>
-          <p:cNvPr id="3" name="Marcador de notas"/>
-          <p:cNvSpPr>
-            <a:spLocks noGrp="1"/>
-          </p:cNvSpPr>
-          <p:nvPr>
-            <p:ph type="body" idx="1"/>
-          </p:nvPr>
-        </p:nvSpPr>
-        <p:spPr/>
-        <p:txBody>
-          <a:bodyPr/>
-          <a:lstStyle/>
-          <a:p>
-            <a:r>
-              <a:rPr lang="es-CL" sz="1200" dirty="0"/>
-              <a:t>Tiempo sugerido: 0:50 · Acumulado: 6:30</a:t>
-            </a:r>
-          </a:p>
-          <a:p>
-            <a:endParaRPr lang="es-CL" sz="1200"/>
-          </a:p>
-          <a:p>
-            <a:r>
-              <a:rPr lang="es-CL" sz="1200" dirty="0"/>
-              <a:t>Ser claro con los dos niveles de validación: hay revisión técnica con el</a:t>
-            </a:r>
-          </a:p>
-          <a:p>
-            <a:r>
-              <a:rPr lang="es-CL" sz="1200" dirty="0"/>
-              <a:t>líder de mejora continua, pero el acta formal es posterior. No presentar</a:t>
-            </a:r>
-          </a:p>
-          <a:p>
-            <a:r>
-              <a:rPr lang="es-CL" sz="1200" dirty="0"/>
-              <a:t>como validado lo que aún no lo está.</a:t>
-            </a:r>
-          </a:p>
-          <a:p>
-            <a:r>
-              <a:rPr lang="es-CL" sz="1200" dirty="0"/>
-              <a:t>Decir sin rodeos que MP21 no ha comenzado.</a:t>
-            </a:r>
-          </a:p>
-        </p:txBody>
-      </p:sp>
-    </p:spTree>
-  </p:cSld>
-  <p:clrMapOvr>
-    <a:masterClrMapping/>
-  </p:clrMapOvr>
-</p:notes>
 </file>
 
 <file path=ppt/slideLayouts/slideLayout1.xml><?xml version="1.0" encoding="utf-8"?>
@@ -11714,5034 +10400,6 @@
 </p:sld>
 </file>
 
-<file path=ppt/slides/slide10.xml><?xml version="1.0" encoding="utf-8"?>
-<p:sld xmlns:a="http://schemas.openxmlformats.org/drawingml/2006/main" xmlns:r="http://schemas.openxmlformats.org/officeDocument/2006/relationships" xmlns:p="http://schemas.openxmlformats.org/presentationml/2006/main">
-  <p:cSld>
-    <p:spTree>
-      <p:nvGrpSpPr>
-        <p:cNvPr id="1" name=""/>
-        <p:cNvGrpSpPr/>
-        <p:nvPr/>
-      </p:nvGrpSpPr>
-      <p:grpSpPr>
-        <a:xfrm>
-          <a:off x="0" y="0"/>
-          <a:ext cx="0" cy="0"/>
-          <a:chOff x="0" y="0"/>
-          <a:chExt cx="0" cy="0"/>
-        </a:xfrm>
-      </p:grpSpPr>
-      <p:sp>
-        <p:nvSpPr>
-          <p:cNvPr id="5" name="4 CuadroTexto"/>
-          <p:cNvSpPr txBox="1"/>
-          <p:nvPr/>
-        </p:nvSpPr>
-        <p:spPr>
-          <a:xfrm>
-            <a:off x="5675867" y="340990"/>
-            <a:ext cx="2337602" cy="252106"/>
-          </a:xfrm>
-          <a:prstGeom prst="rect">
-            <a:avLst/>
-          </a:prstGeom>
-          <a:noFill/>
-        </p:spPr>
-        <p:txBody>
-          <a:bodyPr wrap="square" lIns="82014" tIns="45697" rIns="82014" bIns="45697" rtlCol="0">
-            <a:spAutoFit/>
-          </a:bodyPr>
-          <a:lstStyle/>
-          <a:p>
-            <a:pPr algn="ctr"/>
-            <a:r>
-              <a:rPr lang="es-CL" sz="1000" b="1" dirty="0">
-                <a:solidFill>
-                  <a:prstClr val="black">
-                    <a:lumMod val="65000"/>
-                    <a:lumOff val="35000"/>
-                  </a:prstClr>
-                </a:solidFill>
-              </a:rPr>
-              <a:t>Sistema de gestión de riesgos MP8 y MP21</a:t>
-            </a:r>
-            <a:endParaRPr lang="es-CL" sz="1000"/>
-          </a:p>
-        </p:txBody>
-      </p:sp>
-      <p:sp>
-        <p:nvSpPr>
-          <p:cNvPr id="4" name="3 CuadroTexto"/>
-          <p:cNvSpPr txBox="1"/>
-          <p:nvPr/>
-        </p:nvSpPr>
-        <p:spPr>
-          <a:xfrm>
-            <a:off x="5740803" y="1034218"/>
-            <a:ext cx="2207735" cy="221341"/>
-          </a:xfrm>
-          <a:prstGeom prst="rect">
-            <a:avLst/>
-          </a:prstGeom>
-          <a:noFill/>
-        </p:spPr>
-        <p:txBody>
-          <a:bodyPr wrap="square" lIns="82014" tIns="45697" rIns="82014" bIns="45697" rtlCol="0">
-            <a:spAutoFit/>
-          </a:bodyPr>
-          <a:lstStyle/>
-          <a:p>
-            <a:pPr algn="ctr"/>
-            <a:r>
-              <a:rPr lang="es-CL" sz="900" dirty="0">
-                <a:solidFill>
-                  <a:prstClr val="white">
-                    <a:lumMod val="50000"/>
-                  </a:prstClr>
-                </a:solidFill>
-              </a:rPr>
-              <a:t>| </a:t>
-            </a:r>
-            <a:r>
-              <a:rPr lang="es-CL" sz="900" b="1" dirty="0">
-                <a:solidFill>
-                  <a:srgbClr val="1F497D">
-                    <a:lumMod val="75000"/>
-                  </a:srgbClr>
-                </a:solidFill>
-              </a:rPr>
-              <a:t>Estudiante: </a:t>
-            </a:r>
-            <a:r>
-              <a:rPr lang="es-CL" sz="900" dirty="0">
-                <a:solidFill>
-                  <a:srgbClr val="1F497D">
-                    <a:lumMod val="75000"/>
-                  </a:srgbClr>
-                </a:solidFill>
-              </a:rPr>
-              <a:t>Bastián Darwit Vera</a:t>
-            </a:r>
-            <a:r>
-              <a:rPr lang="es-CL" sz="900" dirty="0">
-                <a:solidFill>
-                  <a:prstClr val="white">
-                    <a:lumMod val="50000"/>
-                  </a:prstClr>
-                </a:solidFill>
-              </a:rPr>
-              <a:t> |</a:t>
-            </a:r>
-          </a:p>
-        </p:txBody>
-      </p:sp>
-      <p:sp>
-        <p:nvSpPr>
-          <p:cNvPr id="6" name="5 CuadroTexto"/>
-          <p:cNvSpPr txBox="1"/>
-          <p:nvPr/>
-        </p:nvSpPr>
-        <p:spPr>
-          <a:xfrm>
-            <a:off x="805865" y="1538381"/>
-            <a:ext cx="7077739" cy="852256"/>
-          </a:xfrm>
-          <a:prstGeom prst="rect">
-            <a:avLst/>
-          </a:prstGeom>
-          <a:noFill/>
-        </p:spPr>
-        <p:txBody>
-          <a:bodyPr wrap="square" lIns="82014" tIns="45697" rIns="82014" bIns="45697" rtlCol="0">
-            <a:spAutoFit/>
-          </a:bodyPr>
-          <a:lstStyle/>
-          <a:p>
-            <a:r>
-              <a:rPr lang="es-CL" sz="2000" b="1" dirty="0">
-                <a:solidFill>
-                  <a:prstClr val="black">
-                    <a:lumMod val="65000"/>
-                    <a:lumOff val="35000"/>
-                  </a:prstClr>
-                </a:solidFill>
-              </a:rPr>
-              <a:t>Resultados · El flujo único de información de MP8</a:t>
-            </a:r>
-            <a:endParaRPr lang="es-CL" sz="2000"/>
-          </a:p>
-        </p:txBody>
-      </p:sp>
-      <p:sp>
-        <p:nvSpPr>
-          <p:cNvPr id="8" name="7 CuadroTexto"/>
-          <p:cNvSpPr txBox="1"/>
-          <p:nvPr/>
-        </p:nvSpPr>
-        <p:spPr>
-          <a:xfrm>
-            <a:off x="323528" y="2450000"/>
-            <a:ext cx="4000000" cy="2600000"/>
-          </a:xfrm>
-          <a:prstGeom prst="rect">
-            <a:avLst/>
-          </a:prstGeom>
-          <a:noFill/>
-        </p:spPr>
-        <p:txBody>
-          <a:bodyPr wrap="square" lIns="91396" tIns="45697" rIns="91396" bIns="45697" rtlCol="0">
-            <a:spAutoFit/>
-          </a:bodyPr>
-          <a:lstStyle/>
-          <a:p>
-            <a:r>
-              <a:rPr lang="es-CL" sz="1400" b="1" dirty="0">
-                <a:solidFill>
-                  <a:srgbClr val="1F497D">
-                    <a:lumMod val="75000"/>
-                  </a:srgbClr>
-                </a:solidFill>
-              </a:rPr>
-              <a:t>Qué se levantó</a:t>
-            </a:r>
-            <a:endParaRPr lang="es-CL" sz="1400"/>
-          </a:p>
-          <a:p>
-            <a:pPr marL="228600" indent="-228600">
-              <a:spcBef>
-                <a:spcPts val="300"/>
-              </a:spcBef>
-              <a:buFont typeface="Wingdings" pitchFamily="2" charset="2"/>
-              <a:buChar char="q"/>
-            </a:pPr>
-            <a:r>
-              <a:rPr lang="es-CL" sz="1250" dirty="0">
-                <a:solidFill>
-                  <a:schemeClr val="tx2"/>
-                </a:solidFill>
-              </a:rPr>
-              <a:t>Una </a:t>
-            </a:r>
-            <a:r>
-              <a:rPr lang="es-CL" sz="1250" b="1" dirty="0">
-                <a:solidFill>
-                  <a:schemeClr val="tx2"/>
-                </a:solidFill>
-              </a:rPr>
-              <a:t>sola cadena continua</a:t>
-            </a:r>
-            <a:r>
-              <a:rPr lang="es-CL" sz="1250" dirty="0">
-                <a:solidFill>
-                  <a:schemeClr val="tx2"/>
-                </a:solidFill>
-              </a:rPr>
-              <a:t>, de 5 proveedores iniciales a 6 clientes finales, organizada en </a:t>
-            </a:r>
-            <a:r>
-              <a:rPr lang="es-CL" sz="1250" b="1" dirty="0">
-                <a:solidFill>
-                  <a:schemeClr val="tx2"/>
-                </a:solidFill>
-              </a:rPr>
-              <a:t>18 fases</a:t>
-            </a:r>
-            <a:r>
-              <a:rPr lang="es-CL" sz="1250" dirty="0">
-                <a:solidFill>
-                  <a:schemeClr val="tx2"/>
-                </a:solidFill>
-              </a:rPr>
-              <a:t>: 17 del ciclo de vida del trabajador y una banda transversal de datos y gobernanza.</a:t>
-            </a:r>
-            <a:endParaRPr lang="es-CL" sz="1250"/>
-          </a:p>
-          <a:p>
-            <a:pPr marL="228600" indent="-228600">
-              <a:spcBef>
-                <a:spcPts val="300"/>
-              </a:spcBef>
-              <a:buFont typeface="Wingdings" pitchFamily="2" charset="2"/>
-              <a:buChar char="q"/>
-            </a:pPr>
-            <a:r>
-              <a:rPr lang="es-CL" sz="1250" dirty="0">
-                <a:solidFill>
-                  <a:schemeClr val="tx2"/>
-                </a:solidFill>
-              </a:rPr>
-              <a:t>El flujo </a:t>
-            </a:r>
-            <a:r>
-              <a:rPr lang="es-CL" sz="1250" b="1" dirty="0">
-                <a:solidFill>
-                  <a:schemeClr val="tx2"/>
-                </a:solidFill>
-              </a:rPr>
-              <a:t>no arranca en la vacante</a:t>
-            </a:r>
-            <a:r>
-              <a:rPr lang="es-CL" sz="1250" dirty="0">
-                <a:solidFill>
-                  <a:schemeClr val="tx2"/>
-                </a:solidFill>
-              </a:rPr>
-              <a:t>, sino en la necesidad estratégica de dotación, según el orden del APQC PCF.</a:t>
-            </a:r>
-            <a:endParaRPr lang="es-CL" sz="1250"/>
-          </a:p>
-          <a:p>
-            <a:pPr marL="228600" indent="-228600">
-              <a:spcBef>
-                <a:spcPts val="300"/>
-              </a:spcBef>
-              <a:buFont typeface="Wingdings" pitchFamily="2" charset="2"/>
-              <a:buChar char="q"/>
-            </a:pPr>
-            <a:r>
-              <a:rPr lang="es-CL" sz="1250" b="1" dirty="0">
-                <a:solidFill>
-                  <a:schemeClr val="tx2"/>
-                </a:solidFill>
-              </a:rPr>
-              <a:t>198 elementos</a:t>
-            </a:r>
-            <a:r>
-              <a:rPr lang="es-CL" sz="1250" dirty="0">
-                <a:solidFill>
-                  <a:schemeClr val="tx2"/>
-                </a:solidFill>
-              </a:rPr>
-              <a:t> quedaron asociados a </a:t>
-            </a:r>
-            <a:r>
-              <a:rPr lang="es-CL" sz="1250" b="1" dirty="0">
-                <a:solidFill>
-                  <a:schemeClr val="tx2"/>
-                </a:solidFill>
-              </a:rPr>
-              <a:t>86 códigos</a:t>
-            </a:r>
-            <a:r>
-              <a:rPr lang="es-CL" sz="1250" dirty="0">
-                <a:solidFill>
-                  <a:schemeClr val="tx2"/>
-                </a:solidFill>
-              </a:rPr>
-              <a:t> del PCF, y 85 tienen responsable identificado.</a:t>
-            </a:r>
-            <a:endParaRPr lang="es-CL" sz="1250"/>
-          </a:p>
-        </p:txBody>
-      </p:sp>
-      <p:graphicFrame>
-        <p:nvGraphicFramePr>
-          <p:cNvPr id="20" name="Tabla 20"/>
-          <p:cNvGraphicFramePr>
-            <a:graphicFrameLocks noGrp="1"/>
-          </p:cNvGraphicFramePr>
-          <p:nvPr/>
-        </p:nvGraphicFramePr>
-        <p:xfrm>
-          <a:off x="4676456" y="2500000"/>
-          <a:ext cx="4000000" cy="2500000"/>
-        </p:xfrm>
-        <a:graphic>
-          <a:graphicData uri="http://schemas.openxmlformats.org/drawingml/2006/table">
-            <a:tbl>
-              <a:tblPr firstRow="1" bandRow="1"/>
-              <a:tblGrid>
-                <a:gridCol w="2500000"/>
-                <a:gridCol w="800000"/>
-                <a:gridCol w="700000"/>
-              </a:tblGrid>
-              <a:tr h="350">
-                <a:tc>
-                  <a:txBody>
-                    <a:bodyPr/>
-                    <a:lstStyle/>
-                    <a:p>
-                      <a:pPr/>
-                      <a:r>
-                        <a:rPr lang="es-CL" sz="950" b="1" dirty="0">
-                          <a:solidFill>
-                            <a:srgbClr val="FFFFFF"/>
-                          </a:solidFill>
-                        </a:rPr>
-                        <a:t>Procedencia</a:t>
-                      </a:r>
-                    </a:p>
-                  </a:txBody>
-                  <a:tcPr marL="45720" marR="45720" marT="27432" marB="27432" anchor="ctr">
-                    <a:solidFill>
-                      <a:srgbClr val="1F497D"/>
-                    </a:solidFill>
-                  </a:tcPr>
-                </a:tc>
-                <a:tc>
-                  <a:txBody>
-                    <a:bodyPr/>
-                    <a:lstStyle/>
-                    <a:p>
-                      <a:pPr algn="ctr"/>
-                      <a:r>
-                        <a:rPr lang="es-CL" sz="950" b="1" dirty="0">
-                          <a:solidFill>
-                            <a:srgbClr val="FFFFFF"/>
-                          </a:solidFill>
-                        </a:rPr>
-                        <a:t>N.º</a:t>
-                      </a:r>
-                    </a:p>
-                  </a:txBody>
-                  <a:tcPr marL="45720" marR="45720" marT="27432" marB="27432" anchor="ctr">
-                    <a:solidFill>
-                      <a:srgbClr val="1F497D"/>
-                    </a:solidFill>
-                  </a:tcPr>
-                </a:tc>
-                <a:tc>
-                  <a:txBody>
-                    <a:bodyPr/>
-                    <a:lstStyle/>
-                    <a:p>
-                      <a:pPr algn="ctr"/>
-                      <a:r>
-                        <a:rPr lang="es-CL" sz="950" b="1" dirty="0">
-                          <a:solidFill>
-                            <a:srgbClr val="FFFFFF"/>
-                          </a:solidFill>
-                        </a:rPr>
-                        <a:t>%</a:t>
-                      </a:r>
-                    </a:p>
-                  </a:txBody>
-                  <a:tcPr marL="45720" marR="45720" marT="27432" marB="27432" anchor="ctr">
-                    <a:solidFill>
-                      <a:srgbClr val="1F497D"/>
-                    </a:solidFill>
-                  </a:tcPr>
-                </a:tc>
-              </a:tr>
-              <a:tr h="355">
-                <a:tc>
-                  <a:txBody>
-                    <a:bodyPr/>
-                    <a:lstStyle/>
-                    <a:p>
-                      <a:pPr/>
-                      <a:r>
-                        <a:rPr lang="es-CL" sz="1000" dirty="0">
-                          <a:solidFill>
-                            <a:schemeClr val="tx2"/>
-                          </a:solidFill>
-                        </a:rPr>
-                        <a:t>Procedimiento vigente</a:t>
-                      </a:r>
-                    </a:p>
-                  </a:txBody>
-                  <a:tcPr marL="45720" marR="45720" marT="27432" marB="27432" anchor="ctr">
-                    <a:solidFill>
-                      <a:srgbClr val="F2F2F2"/>
-                    </a:solidFill>
-                  </a:tcPr>
-                </a:tc>
-                <a:tc>
-                  <a:txBody>
-                    <a:bodyPr/>
-                    <a:lstStyle/>
-                    <a:p>
-                      <a:pPr algn="ctr"/>
-                      <a:r>
-                        <a:rPr lang="es-CL" sz="1000" dirty="0">
-                          <a:solidFill>
-                            <a:schemeClr val="tx2"/>
-                          </a:solidFill>
-                        </a:rPr>
-                        <a:t>94</a:t>
-                      </a:r>
-                    </a:p>
-                  </a:txBody>
-                  <a:tcPr marL="45720" marR="45720" marT="27432" marB="27432" anchor="ctr">
-                    <a:solidFill>
-                      <a:srgbClr val="F2F2F2"/>
-                    </a:solidFill>
-                  </a:tcPr>
-                </a:tc>
-                <a:tc>
-                  <a:txBody>
-                    <a:bodyPr/>
-                    <a:lstStyle/>
-                    <a:p>
-                      <a:pPr algn="ctr"/>
-                      <a:r>
-                        <a:rPr lang="es-CL" sz="1000" dirty="0">
-                          <a:solidFill>
-                            <a:schemeClr val="tx2"/>
-                          </a:solidFill>
-                        </a:rPr>
-                        <a:t>36,0</a:t>
-                      </a:r>
-                    </a:p>
-                  </a:txBody>
-                  <a:tcPr marL="45720" marR="45720" marT="27432" marB="27432" anchor="ctr">
-                    <a:solidFill>
-                      <a:srgbClr val="F2F2F2"/>
-                    </a:solidFill>
-                  </a:tcPr>
-                </a:tc>
-              </a:tr>
-              <a:tr h="355">
-                <a:tc>
-                  <a:txBody>
-                    <a:bodyPr/>
-                    <a:lstStyle/>
-                    <a:p>
-                      <a:pPr/>
-                      <a:r>
-                        <a:rPr lang="es-CL" sz="1000" dirty="0">
-                          <a:solidFill>
-                            <a:schemeClr val="tx2"/>
-                          </a:solidFill>
-                        </a:rPr>
-                        <a:t>Insumo interno o PCF</a:t>
-                      </a:r>
-                    </a:p>
-                  </a:txBody>
-                  <a:tcPr marL="45720" marR="45720" marT="27432" marB="27432" anchor="ctr"/>
-                </a:tc>
-                <a:tc>
-                  <a:txBody>
-                    <a:bodyPr/>
-                    <a:lstStyle/>
-                    <a:p>
-                      <a:pPr algn="ctr"/>
-                      <a:r>
-                        <a:rPr lang="es-CL" sz="1000" dirty="0">
-                          <a:solidFill>
-                            <a:schemeClr val="tx2"/>
-                          </a:solidFill>
-                        </a:rPr>
-                        <a:t>92</a:t>
-                      </a:r>
-                    </a:p>
-                  </a:txBody>
-                  <a:tcPr marL="45720" marR="45720" marT="27432" marB="27432" anchor="ctr"/>
-                </a:tc>
-                <a:tc>
-                  <a:txBody>
-                    <a:bodyPr/>
-                    <a:lstStyle/>
-                    <a:p>
-                      <a:pPr algn="ctr"/>
-                      <a:r>
-                        <a:rPr lang="es-CL" sz="1000" dirty="0">
-                          <a:solidFill>
-                            <a:schemeClr val="tx2"/>
-                          </a:solidFill>
-                        </a:rPr>
-                        <a:t>35,2</a:t>
-                      </a:r>
-                    </a:p>
-                  </a:txBody>
-                  <a:tcPr marL="45720" marR="45720" marT="27432" marB="27432" anchor="ctr"/>
-                </a:tc>
-              </a:tr>
-              <a:tr h="355">
-                <a:tc>
-                  <a:txBody>
-                    <a:bodyPr/>
-                    <a:lstStyle/>
-                    <a:p>
-                      <a:pPr/>
-                      <a:r>
-                        <a:rPr lang="es-CL" sz="1000" dirty="0">
-                          <a:solidFill>
-                            <a:schemeClr val="tx2"/>
-                          </a:solidFill>
-                        </a:rPr>
-                        <a:t>Entrevista, sin documentar</a:t>
-                      </a:r>
-                    </a:p>
-                  </a:txBody>
-                  <a:tcPr marL="45720" marR="45720" marT="27432" marB="27432" anchor="ctr">
-                    <a:solidFill>
-                      <a:srgbClr val="F2F2F2"/>
-                    </a:solidFill>
-                  </a:tcPr>
-                </a:tc>
-                <a:tc>
-                  <a:txBody>
-                    <a:bodyPr/>
-                    <a:lstStyle/>
-                    <a:p>
-                      <a:pPr algn="ctr"/>
-                      <a:r>
-                        <a:rPr lang="es-CL" sz="1000" dirty="0">
-                          <a:solidFill>
-                            <a:schemeClr val="tx2"/>
-                          </a:solidFill>
-                        </a:rPr>
-                        <a:t>36</a:t>
-                      </a:r>
-                    </a:p>
-                  </a:txBody>
-                  <a:tcPr marL="45720" marR="45720" marT="27432" marB="27432" anchor="ctr">
-                    <a:solidFill>
-                      <a:srgbClr val="F2F2F2"/>
-                    </a:solidFill>
-                  </a:tcPr>
-                </a:tc>
-                <a:tc>
-                  <a:txBody>
-                    <a:bodyPr/>
-                    <a:lstStyle/>
-                    <a:p>
-                      <a:pPr algn="ctr"/>
-                      <a:r>
-                        <a:rPr lang="es-CL" sz="1000" dirty="0">
-                          <a:solidFill>
-                            <a:schemeClr val="tx2"/>
-                          </a:solidFill>
-                        </a:rPr>
-                        <a:t>13,8</a:t>
-                      </a:r>
-                    </a:p>
-                  </a:txBody>
-                  <a:tcPr marL="45720" marR="45720" marT="27432" marB="27432" anchor="ctr">
-                    <a:solidFill>
-                      <a:srgbClr val="F2F2F2"/>
-                    </a:solidFill>
-                  </a:tcPr>
-                </a:tc>
-              </a:tr>
-              <a:tr h="355">
-                <a:tc>
-                  <a:txBody>
-                    <a:bodyPr/>
-                    <a:lstStyle/>
-                    <a:p>
-                      <a:pPr/>
-                      <a:r>
-                        <a:rPr lang="es-CL" sz="1000" dirty="0">
-                          <a:solidFill>
-                            <a:schemeClr val="tx2"/>
-                          </a:solidFill>
-                        </a:rPr>
-                        <a:t>Brecha declarada</a:t>
-                      </a:r>
-                    </a:p>
-                  </a:txBody>
-                  <a:tcPr marL="45720" marR="45720" marT="27432" marB="27432" anchor="ctr"/>
-                </a:tc>
-                <a:tc>
-                  <a:txBody>
-                    <a:bodyPr/>
-                    <a:lstStyle/>
-                    <a:p>
-                      <a:pPr algn="ctr"/>
-                      <a:r>
-                        <a:rPr lang="es-CL" sz="1000" dirty="0">
-                          <a:solidFill>
-                            <a:schemeClr val="tx2"/>
-                          </a:solidFill>
-                        </a:rPr>
-                        <a:t>12</a:t>
-                      </a:r>
-                    </a:p>
-                  </a:txBody>
-                  <a:tcPr marL="45720" marR="45720" marT="27432" marB="27432" anchor="ctr"/>
-                </a:tc>
-                <a:tc>
-                  <a:txBody>
-                    <a:bodyPr/>
-                    <a:lstStyle/>
-                    <a:p>
-                      <a:pPr algn="ctr"/>
-                      <a:r>
-                        <a:rPr lang="es-CL" sz="1000" dirty="0">
-                          <a:solidFill>
-                            <a:schemeClr val="tx2"/>
-                          </a:solidFill>
-                        </a:rPr>
-                        <a:t>4,6</a:t>
-                      </a:r>
-                    </a:p>
-                  </a:txBody>
-                  <a:tcPr marL="45720" marR="45720" marT="27432" marB="27432" anchor="ctr"/>
-                </a:tc>
-              </a:tr>
-              <a:tr h="355">
-                <a:tc>
-                  <a:txBody>
-                    <a:bodyPr/>
-                    <a:lstStyle/>
-                    <a:p>
-                      <a:pPr/>
-                      <a:r>
-                        <a:rPr lang="es-CL" sz="1000" dirty="0">
-                          <a:solidFill>
-                            <a:schemeClr val="tx2"/>
-                          </a:solidFill>
-                        </a:rPr>
-                        <a:t>Auxiliares de notación</a:t>
-                      </a:r>
-                    </a:p>
-                  </a:txBody>
-                  <a:tcPr marL="45720" marR="45720" marT="27432" marB="27432" anchor="ctr">
-                    <a:solidFill>
-                      <a:srgbClr val="F2F2F2"/>
-                    </a:solidFill>
-                  </a:tcPr>
-                </a:tc>
-                <a:tc>
-                  <a:txBody>
-                    <a:bodyPr/>
-                    <a:lstStyle/>
-                    <a:p>
-                      <a:pPr algn="ctr"/>
-                      <a:r>
-                        <a:rPr lang="es-CL" sz="1000" dirty="0">
-                          <a:solidFill>
-                            <a:schemeClr val="tx2"/>
-                          </a:solidFill>
-                        </a:rPr>
-                        <a:t>27</a:t>
-                      </a:r>
-                    </a:p>
-                  </a:txBody>
-                  <a:tcPr marL="45720" marR="45720" marT="27432" marB="27432" anchor="ctr">
-                    <a:solidFill>
-                      <a:srgbClr val="F2F2F2"/>
-                    </a:solidFill>
-                  </a:tcPr>
-                </a:tc>
-                <a:tc>
-                  <a:txBody>
-                    <a:bodyPr/>
-                    <a:lstStyle/>
-                    <a:p>
-                      <a:pPr algn="ctr"/>
-                      <a:r>
-                        <a:rPr lang="es-CL" sz="1000" dirty="0">
-                          <a:solidFill>
-                            <a:schemeClr val="tx2"/>
-                          </a:solidFill>
-                        </a:rPr>
-                        <a:t>10,4</a:t>
-                      </a:r>
-                    </a:p>
-                  </a:txBody>
-                  <a:tcPr marL="45720" marR="45720" marT="27432" marB="27432" anchor="ctr">
-                    <a:solidFill>
-                      <a:srgbClr val="F2F2F2"/>
-                    </a:solidFill>
-                  </a:tcPr>
-                </a:tc>
-              </a:tr>
-              <a:tr h="355">
-                <a:tc>
-                  <a:txBody>
-                    <a:bodyPr/>
-                    <a:lstStyle/>
-                    <a:p>
-                      <a:pPr/>
-                      <a:r>
-                        <a:rPr lang="es-CL" sz="1000" b="1" dirty="0">
-                          <a:solidFill>
-                            <a:schemeClr val="tx2"/>
-                          </a:solidFill>
-                        </a:rPr>
-                        <a:t>Total</a:t>
-                      </a:r>
-                    </a:p>
-                  </a:txBody>
-                  <a:tcPr marL="45720" marR="45720" marT="27432" marB="27432" anchor="ctr">
-                    <a:solidFill>
-                      <a:srgbClr val="D9D9D9"/>
-                    </a:solidFill>
-                  </a:tcPr>
-                </a:tc>
-                <a:tc>
-                  <a:txBody>
-                    <a:bodyPr/>
-                    <a:lstStyle/>
-                    <a:p>
-                      <a:pPr algn="ctr"/>
-                      <a:r>
-                        <a:rPr lang="es-CL" sz="1000" b="1" dirty="0">
-                          <a:solidFill>
-                            <a:schemeClr val="tx2"/>
-                          </a:solidFill>
-                        </a:rPr>
-                        <a:t>261</a:t>
-                      </a:r>
-                    </a:p>
-                  </a:txBody>
-                  <a:tcPr marL="45720" marR="45720" marT="27432" marB="27432" anchor="ctr">
-                    <a:solidFill>
-                      <a:srgbClr val="D9D9D9"/>
-                    </a:solidFill>
-                  </a:tcPr>
-                </a:tc>
-                <a:tc>
-                  <a:txBody>
-                    <a:bodyPr/>
-                    <a:lstStyle/>
-                    <a:p>
-                      <a:pPr algn="ctr"/>
-                      <a:r>
-                        <a:rPr lang="es-CL" sz="1000" b="1" dirty="0">
-                          <a:solidFill>
-                            <a:schemeClr val="tx2"/>
-                          </a:solidFill>
-                        </a:rPr>
-                        <a:t>100</a:t>
-                      </a:r>
-                    </a:p>
-                  </a:txBody>
-                  <a:tcPr marL="45720" marR="45720" marT="27432" marB="27432" anchor="ctr">
-                    <a:solidFill>
-                      <a:srgbClr val="D9D9D9"/>
-                    </a:solidFill>
-                  </a:tcPr>
-                </a:tc>
-              </a:tr>
-            </a:tbl>
-          </a:graphicData>
-        </a:graphic>
-      </p:graphicFrame>
-      <p:sp>
-        <p:nvSpPr>
-          <p:cNvPr id="11" name="10 CuadroTexto"/>
-          <p:cNvSpPr txBox="1"/>
-          <p:nvPr/>
-        </p:nvSpPr>
-        <p:spPr>
-          <a:xfrm>
-            <a:off x="323528" y="6200000"/>
-            <a:ext cx="8352928" cy="450000"/>
-          </a:xfrm>
-          <a:prstGeom prst="rect">
-            <a:avLst/>
-          </a:prstGeom>
-          <a:noFill/>
-        </p:spPr>
-        <p:txBody>
-          <a:bodyPr wrap="square" lIns="91396" tIns="45697" rIns="91396" bIns="45697" rtlCol="0">
-            <a:spAutoFit/>
-          </a:bodyPr>
-          <a:lstStyle/>
-          <a:p>
-            <a:r>
-              <a:rPr lang="es-CL" sz="1000" i="1" dirty="0">
-                <a:solidFill>
-                  <a:prstClr val="black">
-                    <a:lumMod val="65000"/>
-                    <a:lumOff val="35000"/>
-                  </a:prstClr>
-                </a:solidFill>
-              </a:rPr>
-              <a:t>De los 261 elementos, 234 son pasos del proceso y 27 son auxiliares de la notación: decisiones, proveedores, clientes y sistemas.</a:t>
-            </a:r>
-            <a:endParaRPr lang="es-CL" sz="1000"/>
-          </a:p>
-        </p:txBody>
-      </p:sp>
-    </p:spTree>
-  </p:cSld>
-  <p:clrMapOvr>
-    <a:masterClrMapping/>
-  </p:clrMapOvr>
-</p:sld>
-</file>
-
-<file path=ppt/slides/slide11.xml><?xml version="1.0" encoding="utf-8"?>
-<p:sld xmlns:a="http://schemas.openxmlformats.org/drawingml/2006/main" xmlns:r="http://schemas.openxmlformats.org/officeDocument/2006/relationships" xmlns:p="http://schemas.openxmlformats.org/presentationml/2006/main">
-  <p:cSld>
-    <p:spTree>
-      <p:nvGrpSpPr>
-        <p:cNvPr id="1" name=""/>
-        <p:cNvGrpSpPr/>
-        <p:nvPr/>
-      </p:nvGrpSpPr>
-      <p:grpSpPr>
-        <a:xfrm>
-          <a:off x="0" y="0"/>
-          <a:ext cx="0" cy="0"/>
-          <a:chOff x="0" y="0"/>
-          <a:chExt cx="0" cy="0"/>
-        </a:xfrm>
-      </p:grpSpPr>
-      <p:sp>
-        <p:nvSpPr>
-          <p:cNvPr id="5" name="4 CuadroTexto"/>
-          <p:cNvSpPr txBox="1"/>
-          <p:nvPr/>
-        </p:nvSpPr>
-        <p:spPr>
-          <a:xfrm>
-            <a:off x="5675867" y="340990"/>
-            <a:ext cx="2337602" cy="252106"/>
-          </a:xfrm>
-          <a:prstGeom prst="rect">
-            <a:avLst/>
-          </a:prstGeom>
-          <a:noFill/>
-        </p:spPr>
-        <p:txBody>
-          <a:bodyPr wrap="square" lIns="82014" tIns="45697" rIns="82014" bIns="45697" rtlCol="0">
-            <a:spAutoFit/>
-          </a:bodyPr>
-          <a:lstStyle/>
-          <a:p>
-            <a:pPr algn="ctr"/>
-            <a:r>
-              <a:rPr lang="es-CL" sz="1000" b="1" dirty="0">
-                <a:solidFill>
-                  <a:prstClr val="black">
-                    <a:lumMod val="65000"/>
-                    <a:lumOff val="35000"/>
-                  </a:prstClr>
-                </a:solidFill>
-              </a:rPr>
-              <a:t>Sistema de gestión de riesgos MP8 y MP21</a:t>
-            </a:r>
-            <a:endParaRPr lang="es-CL" sz="1000"/>
-          </a:p>
-        </p:txBody>
-      </p:sp>
-      <p:sp>
-        <p:nvSpPr>
-          <p:cNvPr id="4" name="3 CuadroTexto"/>
-          <p:cNvSpPr txBox="1"/>
-          <p:nvPr/>
-        </p:nvSpPr>
-        <p:spPr>
-          <a:xfrm>
-            <a:off x="5740803" y="1034218"/>
-            <a:ext cx="2207735" cy="221341"/>
-          </a:xfrm>
-          <a:prstGeom prst="rect">
-            <a:avLst/>
-          </a:prstGeom>
-          <a:noFill/>
-        </p:spPr>
-        <p:txBody>
-          <a:bodyPr wrap="square" lIns="82014" tIns="45697" rIns="82014" bIns="45697" rtlCol="0">
-            <a:spAutoFit/>
-          </a:bodyPr>
-          <a:lstStyle/>
-          <a:p>
-            <a:pPr algn="ctr"/>
-            <a:r>
-              <a:rPr lang="es-CL" sz="900" dirty="0">
-                <a:solidFill>
-                  <a:prstClr val="white">
-                    <a:lumMod val="50000"/>
-                  </a:prstClr>
-                </a:solidFill>
-              </a:rPr>
-              <a:t>| </a:t>
-            </a:r>
-            <a:r>
-              <a:rPr lang="es-CL" sz="900" b="1" dirty="0">
-                <a:solidFill>
-                  <a:srgbClr val="1F497D">
-                    <a:lumMod val="75000"/>
-                  </a:srgbClr>
-                </a:solidFill>
-              </a:rPr>
-              <a:t>Estudiante: </a:t>
-            </a:r>
-            <a:r>
-              <a:rPr lang="es-CL" sz="900" dirty="0">
-                <a:solidFill>
-                  <a:srgbClr val="1F497D">
-                    <a:lumMod val="75000"/>
-                  </a:srgbClr>
-                </a:solidFill>
-              </a:rPr>
-              <a:t>Bastián Darwit Vera</a:t>
-            </a:r>
-            <a:r>
-              <a:rPr lang="es-CL" sz="900" dirty="0">
-                <a:solidFill>
-                  <a:prstClr val="white">
-                    <a:lumMod val="50000"/>
-                  </a:prstClr>
-                </a:solidFill>
-              </a:rPr>
-              <a:t> |</a:t>
-            </a:r>
-          </a:p>
-        </p:txBody>
-      </p:sp>
-      <p:sp>
-        <p:nvSpPr>
-          <p:cNvPr id="6" name="5 CuadroTexto"/>
-          <p:cNvSpPr txBox="1"/>
-          <p:nvPr/>
-        </p:nvSpPr>
-        <p:spPr>
-          <a:xfrm>
-            <a:off x="805865" y="1538381"/>
-            <a:ext cx="7077739" cy="852256"/>
-          </a:xfrm>
-          <a:prstGeom prst="rect">
-            <a:avLst/>
-          </a:prstGeom>
-          <a:noFill/>
-        </p:spPr>
-        <p:txBody>
-          <a:bodyPr wrap="square" lIns="82014" tIns="45697" rIns="82014" bIns="45697" rtlCol="0">
-            <a:spAutoFit/>
-          </a:bodyPr>
-          <a:lstStyle/>
-          <a:p>
-            <a:r>
-              <a:rPr lang="es-CL" sz="2000" b="1" dirty="0">
-                <a:solidFill>
-                  <a:prstClr val="black">
-                    <a:lumMod val="65000"/>
-                    <a:lumOff val="35000"/>
-                  </a:prstClr>
-                </a:solidFill>
-              </a:rPr>
-              <a:t>Resultados · Cobertura del levantamiento por fase</a:t>
-            </a:r>
-            <a:endParaRPr lang="es-CL" sz="2000"/>
-          </a:p>
-        </p:txBody>
-      </p:sp>
-      <p:graphicFrame>
-        <p:nvGraphicFramePr>
-          <p:cNvPr id="20" name="Tabla 20"/>
-          <p:cNvGraphicFramePr>
-            <a:graphicFrameLocks noGrp="1"/>
-          </p:cNvGraphicFramePr>
-          <p:nvPr/>
-        </p:nvGraphicFramePr>
-        <p:xfrm>
-          <a:off x="323528" y="2450000"/>
-          <a:ext cx="4000000" cy="3300000"/>
-        </p:xfrm>
-        <a:graphic>
-          <a:graphicData uri="http://schemas.openxmlformats.org/drawingml/2006/table">
-            <a:tbl>
-              <a:tblPr firstRow="1" bandRow="1"/>
-              <a:tblGrid>
-                <a:gridCol w="2080000"/>
-                <a:gridCol w="480000"/>
-                <a:gridCol w="480000"/>
-                <a:gridCol w="480000"/>
-                <a:gridCol w="480000"/>
-              </a:tblGrid>
-              <a:tr h="300">
-                <a:tc>
-                  <a:txBody>
-                    <a:bodyPr/>
-                    <a:lstStyle/>
-                    <a:p>
-                      <a:pPr/>
-                      <a:r>
-                        <a:rPr lang="es-CL" sz="950" b="1" dirty="0">
-                          <a:solidFill>
-                            <a:srgbClr val="FFFFFF"/>
-                          </a:solidFill>
-                        </a:rPr>
-                        <a:t>Fase</a:t>
-                      </a:r>
-                    </a:p>
-                  </a:txBody>
-                  <a:tcPr marL="45720" marR="45720" marT="27432" marB="27432" anchor="ctr">
-                    <a:solidFill>
-                      <a:srgbClr val="1F497D"/>
-                    </a:solidFill>
-                  </a:tcPr>
-                </a:tc>
-                <a:tc>
-                  <a:txBody>
-                    <a:bodyPr/>
-                    <a:lstStyle/>
-                    <a:p>
-                      <a:pPr algn="ctr"/>
-                      <a:r>
-                        <a:rPr lang="es-CL" sz="950" b="1" dirty="0">
-                          <a:solidFill>
-                            <a:srgbClr val="FFFFFF"/>
-                          </a:solidFill>
-                        </a:rPr>
-                        <a:t>Doc</a:t>
-                      </a:r>
-                    </a:p>
-                  </a:txBody>
-                  <a:tcPr marL="45720" marR="45720" marT="27432" marB="27432" anchor="ctr">
-                    <a:solidFill>
-                      <a:srgbClr val="1F497D"/>
-                    </a:solidFill>
-                  </a:tcPr>
-                </a:tc>
-                <a:tc>
-                  <a:txBody>
-                    <a:bodyPr/>
-                    <a:lstStyle/>
-                    <a:p>
-                      <a:pPr algn="ctr"/>
-                      <a:r>
-                        <a:rPr lang="es-CL" sz="950" b="1" dirty="0">
-                          <a:solidFill>
-                            <a:srgbClr val="FFFFFF"/>
-                          </a:solidFill>
-                        </a:rPr>
-                        <a:t>Ent</a:t>
-                      </a:r>
-                    </a:p>
-                  </a:txBody>
-                  <a:tcPr marL="45720" marR="45720" marT="27432" marB="27432" anchor="ctr">
-                    <a:solidFill>
-                      <a:srgbClr val="1F497D"/>
-                    </a:solidFill>
-                  </a:tcPr>
-                </a:tc>
-                <a:tc>
-                  <a:txBody>
-                    <a:bodyPr/>
-                    <a:lstStyle/>
-                    <a:p>
-                      <a:pPr algn="ctr"/>
-                      <a:r>
-                        <a:rPr lang="es-CL" sz="950" b="1" dirty="0">
-                          <a:solidFill>
-                            <a:srgbClr val="FFFFFF"/>
-                          </a:solidFill>
-                        </a:rPr>
-                        <a:t>Prop</a:t>
-                      </a:r>
-                    </a:p>
-                  </a:txBody>
-                  <a:tcPr marL="45720" marR="45720" marT="27432" marB="27432" anchor="ctr">
-                    <a:solidFill>
-                      <a:srgbClr val="1F497D"/>
-                    </a:solidFill>
-                  </a:tcPr>
-                </a:tc>
-                <a:tc>
-                  <a:txBody>
-                    <a:bodyPr/>
-                    <a:lstStyle/>
-                    <a:p>
-                      <a:pPr algn="ctr"/>
-                      <a:r>
-                        <a:rPr lang="es-CL" sz="950" b="1" dirty="0">
-                          <a:solidFill>
-                            <a:srgbClr val="FFFFFF"/>
-                          </a:solidFill>
-                        </a:rPr>
-                        <a:t>Bre</a:t>
-                      </a:r>
-                    </a:p>
-                  </a:txBody>
-                  <a:tcPr marL="45720" marR="45720" marT="27432" marB="27432" anchor="ctr">
-                    <a:solidFill>
-                      <a:srgbClr val="1F497D"/>
-                    </a:solidFill>
-                  </a:tcPr>
-                </a:tc>
-              </a:tr>
-              <a:tr h="300">
-                <a:tc>
-                  <a:txBody>
-                    <a:bodyPr/>
-                    <a:lstStyle/>
-                    <a:p>
-                      <a:pPr/>
-                      <a:r>
-                        <a:rPr lang="es-CL" sz="850" dirty="0">
-                          <a:solidFill>
-                            <a:schemeClr val="tx2"/>
-                          </a:solidFill>
-                        </a:rPr>
-                        <a:t>F1 Necesidad y dotación</a:t>
-                      </a:r>
-                    </a:p>
-                  </a:txBody>
-                  <a:tcPr marL="45720" marR="45720" marT="27432" marB="27432" anchor="ctr">
-                    <a:solidFill>
-                      <a:srgbClr val="F2F2F2"/>
-                    </a:solidFill>
-                  </a:tcPr>
-                </a:tc>
-                <a:tc>
-                  <a:txBody>
-                    <a:bodyPr/>
-                    <a:lstStyle/>
-                    <a:p>
-                      <a:pPr algn="ctr"/>
-                      <a:r>
-                        <a:rPr lang="es-CL" sz="850" dirty="0">
-                          <a:solidFill>
-                            <a:schemeClr val="tx2"/>
-                          </a:solidFill>
-                        </a:rPr>
-                        <a:t>·</a:t>
-                      </a:r>
-                    </a:p>
-                  </a:txBody>
-                  <a:tcPr marL="45720" marR="45720" marT="27432" marB="27432" anchor="ctr">
-                    <a:solidFill>
-                      <a:srgbClr val="F2F2F2"/>
-                    </a:solidFill>
-                  </a:tcPr>
-                </a:tc>
-                <a:tc>
-                  <a:txBody>
-                    <a:bodyPr/>
-                    <a:lstStyle/>
-                    <a:p>
-                      <a:pPr algn="ctr"/>
-                      <a:r>
-                        <a:rPr lang="es-CL" sz="850" dirty="0">
-                          <a:solidFill>
-                            <a:schemeClr val="tx2"/>
-                          </a:solidFill>
-                        </a:rPr>
-                        <a:t>·</a:t>
-                      </a:r>
-                    </a:p>
-                  </a:txBody>
-                  <a:tcPr marL="45720" marR="45720" marT="27432" marB="27432" anchor="ctr">
-                    <a:solidFill>
-                      <a:srgbClr val="F2F2F2"/>
-                    </a:solidFill>
-                  </a:tcPr>
-                </a:tc>
-                <a:tc>
-                  <a:txBody>
-                    <a:bodyPr/>
-                    <a:lstStyle/>
-                    <a:p>
-                      <a:pPr algn="ctr"/>
-                      <a:r>
-                        <a:rPr lang="es-CL" sz="850" dirty="0">
-                          <a:solidFill>
-                            <a:schemeClr val="tx2"/>
-                          </a:solidFill>
-                        </a:rPr>
-                        <a:t>11</a:t>
-                      </a:r>
-                    </a:p>
-                  </a:txBody>
-                  <a:tcPr marL="45720" marR="45720" marT="27432" marB="27432" anchor="ctr">
-                    <a:solidFill>
-                      <a:srgbClr val="F2F2F2"/>
-                    </a:solidFill>
-                  </a:tcPr>
-                </a:tc>
-                <a:tc>
-                  <a:txBody>
-                    <a:bodyPr/>
-                    <a:lstStyle/>
-                    <a:p>
-                      <a:pPr algn="ctr"/>
-                      <a:r>
-                        <a:rPr lang="es-CL" sz="850" dirty="0">
-                          <a:solidFill>
-                            <a:schemeClr val="tx2"/>
-                          </a:solidFill>
-                        </a:rPr>
-                        <a:t>·</a:t>
-                      </a:r>
-                    </a:p>
-                  </a:txBody>
-                  <a:tcPr marL="45720" marR="45720" marT="27432" marB="27432" anchor="ctr">
-                    <a:solidFill>
-                      <a:srgbClr val="F2F2F2"/>
-                    </a:solidFill>
-                  </a:tcPr>
-                </a:tc>
-              </a:tr>
-              <a:tr h="300">
-                <a:tc>
-                  <a:txBody>
-                    <a:bodyPr/>
-                    <a:lstStyle/>
-                    <a:p>
-                      <a:pPr/>
-                      <a:r>
-                        <a:rPr lang="es-CL" sz="850" dirty="0">
-                          <a:solidFill>
-                            <a:schemeClr val="tx2"/>
-                          </a:solidFill>
-                        </a:rPr>
-                        <a:t>F2 Valoración de cargo</a:t>
-                      </a:r>
-                    </a:p>
-                  </a:txBody>
-                  <a:tcPr marL="45720" marR="45720" marT="27432" marB="27432" anchor="ctr"/>
-                </a:tc>
-                <a:tc>
-                  <a:txBody>
-                    <a:bodyPr/>
-                    <a:lstStyle/>
-                    <a:p>
-                      <a:pPr algn="ctr"/>
-                      <a:r>
-                        <a:rPr lang="es-CL" sz="850" dirty="0">
-                          <a:solidFill>
-                            <a:schemeClr val="tx2"/>
-                          </a:solidFill>
-                        </a:rPr>
-                        <a:t>·</a:t>
-                      </a:r>
-                    </a:p>
-                  </a:txBody>
-                  <a:tcPr marL="45720" marR="45720" marT="27432" marB="27432" anchor="ctr"/>
-                </a:tc>
-                <a:tc>
-                  <a:txBody>
-                    <a:bodyPr/>
-                    <a:lstStyle/>
-                    <a:p>
-                      <a:pPr algn="ctr"/>
-                      <a:r>
-                        <a:rPr lang="es-CL" sz="850" dirty="0">
-                          <a:solidFill>
-                            <a:schemeClr val="tx2"/>
-                          </a:solidFill>
-                        </a:rPr>
-                        <a:t>6</a:t>
-                      </a:r>
-                    </a:p>
-                  </a:txBody>
-                  <a:tcPr marL="45720" marR="45720" marT="27432" marB="27432" anchor="ctr"/>
-                </a:tc>
-                <a:tc>
-                  <a:txBody>
-                    <a:bodyPr/>
-                    <a:lstStyle/>
-                    <a:p>
-                      <a:pPr algn="ctr"/>
-                      <a:r>
-                        <a:rPr lang="es-CL" sz="850" dirty="0">
-                          <a:solidFill>
-                            <a:schemeClr val="tx2"/>
-                          </a:solidFill>
-                        </a:rPr>
-                        <a:t>7</a:t>
-                      </a:r>
-                    </a:p>
-                  </a:txBody>
-                  <a:tcPr marL="45720" marR="45720" marT="27432" marB="27432" anchor="ctr"/>
-                </a:tc>
-                <a:tc>
-                  <a:txBody>
-                    <a:bodyPr/>
-                    <a:lstStyle/>
-                    <a:p>
-                      <a:pPr algn="ctr"/>
-                      <a:r>
-                        <a:rPr lang="es-CL" sz="850" dirty="0">
-                          <a:solidFill>
-                            <a:schemeClr val="tx2"/>
-                          </a:solidFill>
-                        </a:rPr>
-                        <a:t>·</a:t>
-                      </a:r>
-                    </a:p>
-                  </a:txBody>
-                  <a:tcPr marL="45720" marR="45720" marT="27432" marB="27432" anchor="ctr"/>
-                </a:tc>
-              </a:tr>
-              <a:tr h="300">
-                <a:tc>
-                  <a:txBody>
-                    <a:bodyPr/>
-                    <a:lstStyle/>
-                    <a:p>
-                      <a:pPr/>
-                      <a:r>
-                        <a:rPr lang="es-CL" sz="850" dirty="0">
-                          <a:solidFill>
-                            <a:schemeClr val="tx2"/>
-                          </a:solidFill>
-                        </a:rPr>
-                        <a:t>F3 Requisición y vacante</a:t>
-                      </a:r>
-                    </a:p>
-                  </a:txBody>
-                  <a:tcPr marL="45720" marR="45720" marT="27432" marB="27432" anchor="ctr">
-                    <a:solidFill>
-                      <a:srgbClr val="F2F2F2"/>
-                    </a:solidFill>
-                  </a:tcPr>
-                </a:tc>
-                <a:tc>
-                  <a:txBody>
-                    <a:bodyPr/>
-                    <a:lstStyle/>
-                    <a:p>
-                      <a:pPr algn="ctr"/>
-                      <a:r>
-                        <a:rPr lang="es-CL" sz="850" dirty="0">
-                          <a:solidFill>
-                            <a:schemeClr val="tx2"/>
-                          </a:solidFill>
-                        </a:rPr>
-                        <a:t>12</a:t>
-                      </a:r>
-                    </a:p>
-                  </a:txBody>
-                  <a:tcPr marL="45720" marR="45720" marT="27432" marB="27432" anchor="ctr">
-                    <a:solidFill>
-                      <a:srgbClr val="F2F2F2"/>
-                    </a:solidFill>
-                  </a:tcPr>
-                </a:tc>
-                <a:tc>
-                  <a:txBody>
-                    <a:bodyPr/>
-                    <a:lstStyle/>
-                    <a:p>
-                      <a:pPr algn="ctr"/>
-                      <a:r>
-                        <a:rPr lang="es-CL" sz="850" dirty="0">
-                          <a:solidFill>
-                            <a:schemeClr val="tx2"/>
-                          </a:solidFill>
-                        </a:rPr>
-                        <a:t>3</a:t>
-                      </a:r>
-                    </a:p>
-                  </a:txBody>
-                  <a:tcPr marL="45720" marR="45720" marT="27432" marB="27432" anchor="ctr">
-                    <a:solidFill>
-                      <a:srgbClr val="F2F2F2"/>
-                    </a:solidFill>
-                  </a:tcPr>
-                </a:tc>
-                <a:tc>
-                  <a:txBody>
-                    <a:bodyPr/>
-                    <a:lstStyle/>
-                    <a:p>
-                      <a:pPr algn="ctr"/>
-                      <a:r>
-                        <a:rPr lang="es-CL" sz="850" dirty="0">
-                          <a:solidFill>
-                            <a:schemeClr val="tx2"/>
-                          </a:solidFill>
-                        </a:rPr>
-                        <a:t>·</a:t>
-                      </a:r>
-                    </a:p>
-                  </a:txBody>
-                  <a:tcPr marL="45720" marR="45720" marT="27432" marB="27432" anchor="ctr">
-                    <a:solidFill>
-                      <a:srgbClr val="F2F2F2"/>
-                    </a:solidFill>
-                  </a:tcPr>
-                </a:tc>
-                <a:tc>
-                  <a:txBody>
-                    <a:bodyPr/>
-                    <a:lstStyle/>
-                    <a:p>
-                      <a:pPr algn="ctr"/>
-                      <a:r>
-                        <a:rPr lang="es-CL" sz="850" dirty="0">
-                          <a:solidFill>
-                            <a:schemeClr val="tx2"/>
-                          </a:solidFill>
-                        </a:rPr>
-                        <a:t>·</a:t>
-                      </a:r>
-                    </a:p>
-                  </a:txBody>
-                  <a:tcPr marL="45720" marR="45720" marT="27432" marB="27432" anchor="ctr">
-                    <a:solidFill>
-                      <a:srgbClr val="F2F2F2"/>
-                    </a:solidFill>
-                  </a:tcPr>
-                </a:tc>
-              </a:tr>
-              <a:tr h="300">
-                <a:tc>
-                  <a:txBody>
-                    <a:bodyPr/>
-                    <a:lstStyle/>
-                    <a:p>
-                      <a:pPr/>
-                      <a:r>
-                        <a:rPr lang="es-CL" sz="850" dirty="0">
-                          <a:solidFill>
-                            <a:schemeClr val="tx2"/>
-                          </a:solidFill>
-                        </a:rPr>
-                        <a:t>F4 Reclutamiento y CV</a:t>
-                      </a:r>
-                    </a:p>
-                  </a:txBody>
-                  <a:tcPr marL="45720" marR="45720" marT="27432" marB="27432" anchor="ctr"/>
-                </a:tc>
-                <a:tc>
-                  <a:txBody>
-                    <a:bodyPr/>
-                    <a:lstStyle/>
-                    <a:p>
-                      <a:pPr algn="ctr"/>
-                      <a:r>
-                        <a:rPr lang="es-CL" sz="850" dirty="0">
-                          <a:solidFill>
-                            <a:schemeClr val="tx2"/>
-                          </a:solidFill>
-                        </a:rPr>
-                        <a:t>7</a:t>
-                      </a:r>
-                    </a:p>
-                  </a:txBody>
-                  <a:tcPr marL="45720" marR="45720" marT="27432" marB="27432" anchor="ctr"/>
-                </a:tc>
-                <a:tc>
-                  <a:txBody>
-                    <a:bodyPr/>
-                    <a:lstStyle/>
-                    <a:p>
-                      <a:pPr algn="ctr"/>
-                      <a:r>
-                        <a:rPr lang="es-CL" sz="850" dirty="0">
-                          <a:solidFill>
-                            <a:schemeClr val="tx2"/>
-                          </a:solidFill>
-                        </a:rPr>
-                        <a:t>·</a:t>
-                      </a:r>
-                    </a:p>
-                  </a:txBody>
-                  <a:tcPr marL="45720" marR="45720" marT="27432" marB="27432" anchor="ctr"/>
-                </a:tc>
-                <a:tc>
-                  <a:txBody>
-                    <a:bodyPr/>
-                    <a:lstStyle/>
-                    <a:p>
-                      <a:pPr algn="ctr"/>
-                      <a:r>
-                        <a:rPr lang="es-CL" sz="850" dirty="0">
-                          <a:solidFill>
-                            <a:schemeClr val="tx2"/>
-                          </a:solidFill>
-                        </a:rPr>
-                        <a:t>2</a:t>
-                      </a:r>
-                    </a:p>
-                  </a:txBody>
-                  <a:tcPr marL="45720" marR="45720" marT="27432" marB="27432" anchor="ctr"/>
-                </a:tc>
-                <a:tc>
-                  <a:txBody>
-                    <a:bodyPr/>
-                    <a:lstStyle/>
-                    <a:p>
-                      <a:pPr algn="ctr"/>
-                      <a:r>
-                        <a:rPr lang="es-CL" sz="850" dirty="0">
-                          <a:solidFill>
-                            <a:schemeClr val="tx2"/>
-                          </a:solidFill>
-                        </a:rPr>
-                        <a:t>·</a:t>
-                      </a:r>
-                    </a:p>
-                  </a:txBody>
-                  <a:tcPr marL="45720" marR="45720" marT="27432" marB="27432" anchor="ctr"/>
-                </a:tc>
-              </a:tr>
-              <a:tr h="300">
-                <a:tc>
-                  <a:txBody>
-                    <a:bodyPr/>
-                    <a:lstStyle/>
-                    <a:p>
-                      <a:pPr/>
-                      <a:r>
-                        <a:rPr lang="es-CL" sz="850" dirty="0">
-                          <a:solidFill>
-                            <a:schemeClr val="tx2"/>
-                          </a:solidFill>
-                        </a:rPr>
-                        <a:t>F5 Revisión solicitante</a:t>
-                      </a:r>
-                    </a:p>
-                  </a:txBody>
-                  <a:tcPr marL="45720" marR="45720" marT="27432" marB="27432" anchor="ctr">
-                    <a:solidFill>
-                      <a:srgbClr val="F2F2F2"/>
-                    </a:solidFill>
-                  </a:tcPr>
-                </a:tc>
-                <a:tc>
-                  <a:txBody>
-                    <a:bodyPr/>
-                    <a:lstStyle/>
-                    <a:p>
-                      <a:pPr algn="ctr"/>
-                      <a:r>
-                        <a:rPr lang="es-CL" sz="850" dirty="0">
-                          <a:solidFill>
-                            <a:schemeClr val="tx2"/>
-                          </a:solidFill>
-                        </a:rPr>
-                        <a:t>6</a:t>
-                      </a:r>
-                    </a:p>
-                  </a:txBody>
-                  <a:tcPr marL="45720" marR="45720" marT="27432" marB="27432" anchor="ctr">
-                    <a:solidFill>
-                      <a:srgbClr val="F2F2F2"/>
-                    </a:solidFill>
-                  </a:tcPr>
-                </a:tc>
-                <a:tc>
-                  <a:txBody>
-                    <a:bodyPr/>
-                    <a:lstStyle/>
-                    <a:p>
-                      <a:pPr algn="ctr"/>
-                      <a:r>
-                        <a:rPr lang="es-CL" sz="850" dirty="0">
-                          <a:solidFill>
-                            <a:schemeClr val="tx2"/>
-                          </a:solidFill>
-                        </a:rPr>
-                        <a:t>1</a:t>
-                      </a:r>
-                    </a:p>
-                  </a:txBody>
-                  <a:tcPr marL="45720" marR="45720" marT="27432" marB="27432" anchor="ctr">
-                    <a:solidFill>
-                      <a:srgbClr val="F2F2F2"/>
-                    </a:solidFill>
-                  </a:tcPr>
-                </a:tc>
-                <a:tc>
-                  <a:txBody>
-                    <a:bodyPr/>
-                    <a:lstStyle/>
-                    <a:p>
-                      <a:pPr algn="ctr"/>
-                      <a:r>
-                        <a:rPr lang="es-CL" sz="850" dirty="0">
-                          <a:solidFill>
-                            <a:schemeClr val="tx2"/>
-                          </a:solidFill>
-                        </a:rPr>
-                        <a:t>·</a:t>
-                      </a:r>
-                    </a:p>
-                  </a:txBody>
-                  <a:tcPr marL="45720" marR="45720" marT="27432" marB="27432" anchor="ctr">
-                    <a:solidFill>
-                      <a:srgbClr val="F2F2F2"/>
-                    </a:solidFill>
-                  </a:tcPr>
-                </a:tc>
-                <a:tc>
-                  <a:txBody>
-                    <a:bodyPr/>
-                    <a:lstStyle/>
-                    <a:p>
-                      <a:pPr algn="ctr"/>
-                      <a:r>
-                        <a:rPr lang="es-CL" sz="850" dirty="0">
-                          <a:solidFill>
-                            <a:schemeClr val="tx2"/>
-                          </a:solidFill>
-                        </a:rPr>
-                        <a:t>·</a:t>
-                      </a:r>
-                    </a:p>
-                  </a:txBody>
-                  <a:tcPr marL="45720" marR="45720" marT="27432" marB="27432" anchor="ctr">
-                    <a:solidFill>
-                      <a:srgbClr val="F2F2F2"/>
-                    </a:solidFill>
-                  </a:tcPr>
-                </a:tc>
-              </a:tr>
-              <a:tr h="300">
-                <a:tc>
-                  <a:txBody>
-                    <a:bodyPr/>
-                    <a:lstStyle/>
-                    <a:p>
-                      <a:pPr/>
-                      <a:r>
-                        <a:rPr lang="es-CL" sz="850" dirty="0">
-                          <a:solidFill>
-                            <a:schemeClr val="tx2"/>
-                          </a:solidFill>
-                        </a:rPr>
-                        <a:t>F6 Evaluación psicolaboral</a:t>
-                      </a:r>
-                    </a:p>
-                  </a:txBody>
-                  <a:tcPr marL="45720" marR="45720" marT="27432" marB="27432" anchor="ctr"/>
-                </a:tc>
-                <a:tc>
-                  <a:txBody>
-                    <a:bodyPr/>
-                    <a:lstStyle/>
-                    <a:p>
-                      <a:pPr algn="ctr"/>
-                      <a:r>
-                        <a:rPr lang="es-CL" sz="850" dirty="0">
-                          <a:solidFill>
-                            <a:schemeClr val="tx2"/>
-                          </a:solidFill>
-                        </a:rPr>
-                        <a:t>9</a:t>
-                      </a:r>
-                    </a:p>
-                  </a:txBody>
-                  <a:tcPr marL="45720" marR="45720" marT="27432" marB="27432" anchor="ctr"/>
-                </a:tc>
-                <a:tc>
-                  <a:txBody>
-                    <a:bodyPr/>
-                    <a:lstStyle/>
-                    <a:p>
-                      <a:pPr algn="ctr"/>
-                      <a:r>
-                        <a:rPr lang="es-CL" sz="850" dirty="0">
-                          <a:solidFill>
-                            <a:schemeClr val="tx2"/>
-                          </a:solidFill>
-                        </a:rPr>
-                        <a:t>·</a:t>
-                      </a:r>
-                    </a:p>
-                  </a:txBody>
-                  <a:tcPr marL="45720" marR="45720" marT="27432" marB="27432" anchor="ctr"/>
-                </a:tc>
-                <a:tc>
-                  <a:txBody>
-                    <a:bodyPr/>
-                    <a:lstStyle/>
-                    <a:p>
-                      <a:pPr algn="ctr"/>
-                      <a:r>
-                        <a:rPr lang="es-CL" sz="850" dirty="0">
-                          <a:solidFill>
-                            <a:schemeClr val="tx2"/>
-                          </a:solidFill>
-                        </a:rPr>
-                        <a:t>2</a:t>
-                      </a:r>
-                    </a:p>
-                  </a:txBody>
-                  <a:tcPr marL="45720" marR="45720" marT="27432" marB="27432" anchor="ctr"/>
-                </a:tc>
-                <a:tc>
-                  <a:txBody>
-                    <a:bodyPr/>
-                    <a:lstStyle/>
-                    <a:p>
-                      <a:pPr algn="ctr"/>
-                      <a:r>
-                        <a:rPr lang="es-CL" sz="850" dirty="0">
-                          <a:solidFill>
-                            <a:schemeClr val="tx2"/>
-                          </a:solidFill>
-                        </a:rPr>
-                        <a:t>·</a:t>
-                      </a:r>
-                    </a:p>
-                  </a:txBody>
-                  <a:tcPr marL="45720" marR="45720" marT="27432" marB="27432" anchor="ctr"/>
-                </a:tc>
-              </a:tr>
-              <a:tr h="300">
-                <a:tc>
-                  <a:txBody>
-                    <a:bodyPr/>
-                    <a:lstStyle/>
-                    <a:p>
-                      <a:pPr/>
-                      <a:r>
-                        <a:rPr lang="es-CL" sz="850" dirty="0">
-                          <a:solidFill>
-                            <a:schemeClr val="tx2"/>
-                          </a:solidFill>
-                        </a:rPr>
-                        <a:t>F7 Entrevistas</a:t>
-                      </a:r>
-                    </a:p>
-                  </a:txBody>
-                  <a:tcPr marL="45720" marR="45720" marT="27432" marB="27432" anchor="ctr">
-                    <a:solidFill>
-                      <a:srgbClr val="F2F2F2"/>
-                    </a:solidFill>
-                  </a:tcPr>
-                </a:tc>
-                <a:tc>
-                  <a:txBody>
-                    <a:bodyPr/>
-                    <a:lstStyle/>
-                    <a:p>
-                      <a:pPr algn="ctr"/>
-                      <a:r>
-                        <a:rPr lang="es-CL" sz="850" dirty="0">
-                          <a:solidFill>
-                            <a:schemeClr val="tx2"/>
-                          </a:solidFill>
-                        </a:rPr>
-                        <a:t>6</a:t>
-                      </a:r>
-                    </a:p>
-                  </a:txBody>
-                  <a:tcPr marL="45720" marR="45720" marT="27432" marB="27432" anchor="ctr">
-                    <a:solidFill>
-                      <a:srgbClr val="F2F2F2"/>
-                    </a:solidFill>
-                  </a:tcPr>
-                </a:tc>
-                <a:tc>
-                  <a:txBody>
-                    <a:bodyPr/>
-                    <a:lstStyle/>
-                    <a:p>
-                      <a:pPr algn="ctr"/>
-                      <a:r>
-                        <a:rPr lang="es-CL" sz="850" dirty="0">
-                          <a:solidFill>
-                            <a:schemeClr val="tx2"/>
-                          </a:solidFill>
-                        </a:rPr>
-                        <a:t>2</a:t>
-                      </a:r>
-                    </a:p>
-                  </a:txBody>
-                  <a:tcPr marL="45720" marR="45720" marT="27432" marB="27432" anchor="ctr">
-                    <a:solidFill>
-                      <a:srgbClr val="F2F2F2"/>
-                    </a:solidFill>
-                  </a:tcPr>
-                </a:tc>
-                <a:tc>
-                  <a:txBody>
-                    <a:bodyPr/>
-                    <a:lstStyle/>
-                    <a:p>
-                      <a:pPr algn="ctr"/>
-                      <a:r>
-                        <a:rPr lang="es-CL" sz="850" dirty="0">
-                          <a:solidFill>
-                            <a:schemeClr val="tx2"/>
-                          </a:solidFill>
-                        </a:rPr>
-                        <a:t>2</a:t>
-                      </a:r>
-                    </a:p>
-                  </a:txBody>
-                  <a:tcPr marL="45720" marR="45720" marT="27432" marB="27432" anchor="ctr">
-                    <a:solidFill>
-                      <a:srgbClr val="F2F2F2"/>
-                    </a:solidFill>
-                  </a:tcPr>
-                </a:tc>
-                <a:tc>
-                  <a:txBody>
-                    <a:bodyPr/>
-                    <a:lstStyle/>
-                    <a:p>
-                      <a:pPr algn="ctr"/>
-                      <a:r>
-                        <a:rPr lang="es-CL" sz="850" dirty="0">
-                          <a:solidFill>
-                            <a:schemeClr val="tx2"/>
-                          </a:solidFill>
-                        </a:rPr>
-                        <a:t>·</a:t>
-                      </a:r>
-                    </a:p>
-                  </a:txBody>
-                  <a:tcPr marL="45720" marR="45720" marT="27432" marB="27432" anchor="ctr">
-                    <a:solidFill>
-                      <a:srgbClr val="F2F2F2"/>
-                    </a:solidFill>
-                  </a:tcPr>
-                </a:tc>
-              </a:tr>
-              <a:tr h="300">
-                <a:tc>
-                  <a:txBody>
-                    <a:bodyPr/>
-                    <a:lstStyle/>
-                    <a:p>
-                      <a:pPr/>
-                      <a:r>
-                        <a:rPr lang="es-CL" sz="850" dirty="0">
-                          <a:solidFill>
-                            <a:schemeClr val="tx2"/>
-                          </a:solidFill>
-                        </a:rPr>
-                        <a:t>F8 Examen preocupacional</a:t>
-                      </a:r>
-                    </a:p>
-                  </a:txBody>
-                  <a:tcPr marL="45720" marR="45720" marT="27432" marB="27432" anchor="ctr"/>
-                </a:tc>
-                <a:tc>
-                  <a:txBody>
-                    <a:bodyPr/>
-                    <a:lstStyle/>
-                    <a:p>
-                      <a:pPr algn="ctr"/>
-                      <a:r>
-                        <a:rPr lang="es-CL" sz="850" dirty="0">
-                          <a:solidFill>
-                            <a:schemeClr val="tx2"/>
-                          </a:solidFill>
-                        </a:rPr>
-                        <a:t>5</a:t>
-                      </a:r>
-                    </a:p>
-                  </a:txBody>
-                  <a:tcPr marL="45720" marR="45720" marT="27432" marB="27432" anchor="ctr"/>
-                </a:tc>
-                <a:tc>
-                  <a:txBody>
-                    <a:bodyPr/>
-                    <a:lstStyle/>
-                    <a:p>
-                      <a:pPr algn="ctr"/>
-                      <a:r>
-                        <a:rPr lang="es-CL" sz="850" dirty="0">
-                          <a:solidFill>
-                            <a:schemeClr val="tx2"/>
-                          </a:solidFill>
-                        </a:rPr>
-                        <a:t>5</a:t>
-                      </a:r>
-                    </a:p>
-                  </a:txBody>
-                  <a:tcPr marL="45720" marR="45720" marT="27432" marB="27432" anchor="ctr"/>
-                </a:tc>
-                <a:tc>
-                  <a:txBody>
-                    <a:bodyPr/>
-                    <a:lstStyle/>
-                    <a:p>
-                      <a:pPr algn="ctr"/>
-                      <a:r>
-                        <a:rPr lang="es-CL" sz="850" dirty="0">
-                          <a:solidFill>
-                            <a:schemeClr val="tx2"/>
-                          </a:solidFill>
-                        </a:rPr>
-                        <a:t>·</a:t>
-                      </a:r>
-                    </a:p>
-                  </a:txBody>
-                  <a:tcPr marL="45720" marR="45720" marT="27432" marB="27432" anchor="ctr"/>
-                </a:tc>
-                <a:tc>
-                  <a:txBody>
-                    <a:bodyPr/>
-                    <a:lstStyle/>
-                    <a:p>
-                      <a:pPr algn="ctr"/>
-                      <a:r>
-                        <a:rPr lang="es-CL" sz="850" dirty="0">
-                          <a:solidFill>
-                            <a:schemeClr val="tx2"/>
-                          </a:solidFill>
-                        </a:rPr>
-                        <a:t>·</a:t>
-                      </a:r>
-                    </a:p>
-                  </a:txBody>
-                  <a:tcPr marL="45720" marR="45720" marT="27432" marB="27432" anchor="ctr"/>
-                </a:tc>
-              </a:tr>
-              <a:tr h="300">
-                <a:tc>
-                  <a:txBody>
-                    <a:bodyPr/>
-                    <a:lstStyle/>
-                    <a:p>
-                      <a:pPr/>
-                      <a:r>
-                        <a:rPr lang="es-CL" sz="850" dirty="0">
-                          <a:solidFill>
-                            <a:schemeClr val="tx2"/>
-                          </a:solidFill>
-                        </a:rPr>
-                        <a:t>F9 Contratación</a:t>
-                      </a:r>
-                    </a:p>
-                  </a:txBody>
-                  <a:tcPr marL="45720" marR="45720" marT="27432" marB="27432" anchor="ctr">
-                    <a:solidFill>
-                      <a:srgbClr val="F2F2F2"/>
-                    </a:solidFill>
-                  </a:tcPr>
-                </a:tc>
-                <a:tc>
-                  <a:txBody>
-                    <a:bodyPr/>
-                    <a:lstStyle/>
-                    <a:p>
-                      <a:pPr algn="ctr"/>
-                      <a:r>
-                        <a:rPr lang="es-CL" sz="850" dirty="0">
-                          <a:solidFill>
-                            <a:schemeClr val="tx2"/>
-                          </a:solidFill>
-                        </a:rPr>
-                        <a:t>8</a:t>
-                      </a:r>
-                    </a:p>
-                  </a:txBody>
-                  <a:tcPr marL="45720" marR="45720" marT="27432" marB="27432" anchor="ctr">
-                    <a:solidFill>
-                      <a:srgbClr val="F2F2F2"/>
-                    </a:solidFill>
-                  </a:tcPr>
-                </a:tc>
-                <a:tc>
-                  <a:txBody>
-                    <a:bodyPr/>
-                    <a:lstStyle/>
-                    <a:p>
-                      <a:pPr algn="ctr"/>
-                      <a:r>
-                        <a:rPr lang="es-CL" sz="850" dirty="0">
-                          <a:solidFill>
-                            <a:schemeClr val="tx2"/>
-                          </a:solidFill>
-                        </a:rPr>
-                        <a:t>4</a:t>
-                      </a:r>
-                    </a:p>
-                  </a:txBody>
-                  <a:tcPr marL="45720" marR="45720" marT="27432" marB="27432" anchor="ctr">
-                    <a:solidFill>
-                      <a:srgbClr val="F2F2F2"/>
-                    </a:solidFill>
-                  </a:tcPr>
-                </a:tc>
-                <a:tc>
-                  <a:txBody>
-                    <a:bodyPr/>
-                    <a:lstStyle/>
-                    <a:p>
-                      <a:pPr algn="ctr"/>
-                      <a:r>
-                        <a:rPr lang="es-CL" sz="850" dirty="0">
-                          <a:solidFill>
-                            <a:schemeClr val="tx2"/>
-                          </a:solidFill>
-                        </a:rPr>
-                        <a:t>4</a:t>
-                      </a:r>
-                    </a:p>
-                  </a:txBody>
-                  <a:tcPr marL="45720" marR="45720" marT="27432" marB="27432" anchor="ctr">
-                    <a:solidFill>
-                      <a:srgbClr val="F2F2F2"/>
-                    </a:solidFill>
-                  </a:tcPr>
-                </a:tc>
-                <a:tc>
-                  <a:txBody>
-                    <a:bodyPr/>
-                    <a:lstStyle/>
-                    <a:p>
-                      <a:pPr algn="ctr"/>
-                      <a:r>
-                        <a:rPr lang="es-CL" sz="850" dirty="0">
-                          <a:solidFill>
-                            <a:schemeClr val="tx2"/>
-                          </a:solidFill>
-                        </a:rPr>
-                        <a:t>·</a:t>
-                      </a:r>
-                    </a:p>
-                  </a:txBody>
-                  <a:tcPr marL="45720" marR="45720" marT="27432" marB="27432" anchor="ctr">
-                    <a:solidFill>
-                      <a:srgbClr val="F2F2F2"/>
-                    </a:solidFill>
-                  </a:tcPr>
-                </a:tc>
-              </a:tr>
-            </a:tbl>
-          </a:graphicData>
-        </a:graphic>
-      </p:graphicFrame>
-      <p:graphicFrame>
-        <p:nvGraphicFramePr>
-          <p:cNvPr id="21" name="Tabla 21"/>
-          <p:cNvGraphicFramePr>
-            <a:graphicFrameLocks noGrp="1"/>
-          </p:cNvGraphicFramePr>
-          <p:nvPr/>
-        </p:nvGraphicFramePr>
-        <p:xfrm>
-          <a:off x="4676456" y="2450000"/>
-          <a:ext cx="4000000" cy="3300000"/>
-        </p:xfrm>
-        <a:graphic>
-          <a:graphicData uri="http://schemas.openxmlformats.org/drawingml/2006/table">
-            <a:tbl>
-              <a:tblPr firstRow="1" bandRow="1"/>
-              <a:tblGrid>
-                <a:gridCol w="2080000"/>
-                <a:gridCol w="480000"/>
-                <a:gridCol w="480000"/>
-                <a:gridCol w="480000"/>
-                <a:gridCol w="480000"/>
-              </a:tblGrid>
-              <a:tr h="300">
-                <a:tc>
-                  <a:txBody>
-                    <a:bodyPr/>
-                    <a:lstStyle/>
-                    <a:p>
-                      <a:pPr/>
-                      <a:r>
-                        <a:rPr lang="es-CL" sz="950" b="1" dirty="0">
-                          <a:solidFill>
-                            <a:srgbClr val="FFFFFF"/>
-                          </a:solidFill>
-                        </a:rPr>
-                        <a:t>Fase</a:t>
-                      </a:r>
-                    </a:p>
-                  </a:txBody>
-                  <a:tcPr marL="45720" marR="45720" marT="27432" marB="27432" anchor="ctr">
-                    <a:solidFill>
-                      <a:srgbClr val="1F497D"/>
-                    </a:solidFill>
-                  </a:tcPr>
-                </a:tc>
-                <a:tc>
-                  <a:txBody>
-                    <a:bodyPr/>
-                    <a:lstStyle/>
-                    <a:p>
-                      <a:pPr algn="ctr"/>
-                      <a:r>
-                        <a:rPr lang="es-CL" sz="950" b="1" dirty="0">
-                          <a:solidFill>
-                            <a:srgbClr val="FFFFFF"/>
-                          </a:solidFill>
-                        </a:rPr>
-                        <a:t>Doc</a:t>
-                      </a:r>
-                    </a:p>
-                  </a:txBody>
-                  <a:tcPr marL="45720" marR="45720" marT="27432" marB="27432" anchor="ctr">
-                    <a:solidFill>
-                      <a:srgbClr val="1F497D"/>
-                    </a:solidFill>
-                  </a:tcPr>
-                </a:tc>
-                <a:tc>
-                  <a:txBody>
-                    <a:bodyPr/>
-                    <a:lstStyle/>
-                    <a:p>
-                      <a:pPr algn="ctr"/>
-                      <a:r>
-                        <a:rPr lang="es-CL" sz="950" b="1" dirty="0">
-                          <a:solidFill>
-                            <a:srgbClr val="FFFFFF"/>
-                          </a:solidFill>
-                        </a:rPr>
-                        <a:t>Ent</a:t>
-                      </a:r>
-                    </a:p>
-                  </a:txBody>
-                  <a:tcPr marL="45720" marR="45720" marT="27432" marB="27432" anchor="ctr">
-                    <a:solidFill>
-                      <a:srgbClr val="1F497D"/>
-                    </a:solidFill>
-                  </a:tcPr>
-                </a:tc>
-                <a:tc>
-                  <a:txBody>
-                    <a:bodyPr/>
-                    <a:lstStyle/>
-                    <a:p>
-                      <a:pPr algn="ctr"/>
-                      <a:r>
-                        <a:rPr lang="es-CL" sz="950" b="1" dirty="0">
-                          <a:solidFill>
-                            <a:srgbClr val="FFFFFF"/>
-                          </a:solidFill>
-                        </a:rPr>
-                        <a:t>Prop</a:t>
-                      </a:r>
-                    </a:p>
-                  </a:txBody>
-                  <a:tcPr marL="45720" marR="45720" marT="27432" marB="27432" anchor="ctr">
-                    <a:solidFill>
-                      <a:srgbClr val="1F497D"/>
-                    </a:solidFill>
-                  </a:tcPr>
-                </a:tc>
-                <a:tc>
-                  <a:txBody>
-                    <a:bodyPr/>
-                    <a:lstStyle/>
-                    <a:p>
-                      <a:pPr algn="ctr"/>
-                      <a:r>
-                        <a:rPr lang="es-CL" sz="950" b="1" dirty="0">
-                          <a:solidFill>
-                            <a:srgbClr val="FFFFFF"/>
-                          </a:solidFill>
-                        </a:rPr>
-                        <a:t>Bre</a:t>
-                      </a:r>
-                    </a:p>
-                  </a:txBody>
-                  <a:tcPr marL="45720" marR="45720" marT="27432" marB="27432" anchor="ctr">
-                    <a:solidFill>
-                      <a:srgbClr val="1F497D"/>
-                    </a:solidFill>
-                  </a:tcPr>
-                </a:tc>
-              </a:tr>
-              <a:tr h="300">
-                <a:tc>
-                  <a:txBody>
-                    <a:bodyPr/>
-                    <a:lstStyle/>
-                    <a:p>
-                      <a:pPr/>
-                      <a:r>
-                        <a:rPr lang="es-CL" sz="850" dirty="0">
-                          <a:solidFill>
-                            <a:schemeClr val="tx2"/>
-                          </a:solidFill>
-                        </a:rPr>
-                        <a:t>F10 Onboarding</a:t>
-                      </a:r>
-                    </a:p>
-                  </a:txBody>
-                  <a:tcPr marL="45720" marR="45720" marT="27432" marB="27432" anchor="ctr">
-                    <a:solidFill>
-                      <a:srgbClr val="F2F2F2"/>
-                    </a:solidFill>
-                  </a:tcPr>
-                </a:tc>
-                <a:tc>
-                  <a:txBody>
-                    <a:bodyPr/>
-                    <a:lstStyle/>
-                    <a:p>
-                      <a:pPr algn="ctr"/>
-                      <a:r>
-                        <a:rPr lang="es-CL" sz="850" dirty="0">
-                          <a:solidFill>
-                            <a:schemeClr val="tx2"/>
-                          </a:solidFill>
-                        </a:rPr>
-                        <a:t>2</a:t>
-                      </a:r>
-                    </a:p>
-                  </a:txBody>
-                  <a:tcPr marL="45720" marR="45720" marT="27432" marB="27432" anchor="ctr">
-                    <a:solidFill>
-                      <a:srgbClr val="F2F2F2"/>
-                    </a:solidFill>
-                  </a:tcPr>
-                </a:tc>
-                <a:tc>
-                  <a:txBody>
-                    <a:bodyPr/>
-                    <a:lstStyle/>
-                    <a:p>
-                      <a:pPr algn="ctr"/>
-                      <a:r>
-                        <a:rPr lang="es-CL" sz="850" dirty="0">
-                          <a:solidFill>
-                            <a:schemeClr val="tx2"/>
-                          </a:solidFill>
-                        </a:rPr>
-                        <a:t>·</a:t>
-                      </a:r>
-                    </a:p>
-                  </a:txBody>
-                  <a:tcPr marL="45720" marR="45720" marT="27432" marB="27432" anchor="ctr">
-                    <a:solidFill>
-                      <a:srgbClr val="F2F2F2"/>
-                    </a:solidFill>
-                  </a:tcPr>
-                </a:tc>
-                <a:tc>
-                  <a:txBody>
-                    <a:bodyPr/>
-                    <a:lstStyle/>
-                    <a:p>
-                      <a:pPr algn="ctr"/>
-                      <a:r>
-                        <a:rPr lang="es-CL" sz="850" dirty="0">
-                          <a:solidFill>
-                            <a:schemeClr val="tx2"/>
-                          </a:solidFill>
-                        </a:rPr>
-                        <a:t>6</a:t>
-                      </a:r>
-                    </a:p>
-                  </a:txBody>
-                  <a:tcPr marL="45720" marR="45720" marT="27432" marB="27432" anchor="ctr">
-                    <a:solidFill>
-                      <a:srgbClr val="F2F2F2"/>
-                    </a:solidFill>
-                  </a:tcPr>
-                </a:tc>
-                <a:tc>
-                  <a:txBody>
-                    <a:bodyPr/>
-                    <a:lstStyle/>
-                    <a:p>
-                      <a:pPr algn="ctr"/>
-                      <a:r>
-                        <a:rPr lang="es-CL" sz="850" dirty="0">
-                          <a:solidFill>
-                            <a:schemeClr val="tx2"/>
-                          </a:solidFill>
-                        </a:rPr>
-                        <a:t>·</a:t>
-                      </a:r>
-                    </a:p>
-                  </a:txBody>
-                  <a:tcPr marL="45720" marR="45720" marT="27432" marB="27432" anchor="ctr">
-                    <a:solidFill>
-                      <a:srgbClr val="F2F2F2"/>
-                    </a:solidFill>
-                  </a:tcPr>
-                </a:tc>
-              </a:tr>
-              <a:tr h="300">
-                <a:tc>
-                  <a:txBody>
-                    <a:bodyPr/>
-                    <a:lstStyle/>
-                    <a:p>
-                      <a:pPr/>
-                      <a:r>
-                        <a:rPr lang="es-CL" sz="850" dirty="0">
-                          <a:solidFill>
-                            <a:schemeClr val="tx2"/>
-                          </a:solidFill>
-                        </a:rPr>
-                        <a:t>F11 Formación</a:t>
-                      </a:r>
-                    </a:p>
-                  </a:txBody>
-                  <a:tcPr marL="45720" marR="45720" marT="27432" marB="27432" anchor="ctr"/>
-                </a:tc>
-                <a:tc>
-                  <a:txBody>
-                    <a:bodyPr/>
-                    <a:lstStyle/>
-                    <a:p>
-                      <a:pPr algn="ctr"/>
-                      <a:r>
-                        <a:rPr lang="es-CL" sz="850" dirty="0">
-                          <a:solidFill>
-                            <a:schemeClr val="tx2"/>
-                          </a:solidFill>
-                        </a:rPr>
-                        <a:t>19</a:t>
-                      </a:r>
-                    </a:p>
-                  </a:txBody>
-                  <a:tcPr marL="45720" marR="45720" marT="27432" marB="27432" anchor="ctr"/>
-                </a:tc>
-                <a:tc>
-                  <a:txBody>
-                    <a:bodyPr/>
-                    <a:lstStyle/>
-                    <a:p>
-                      <a:pPr algn="ctr"/>
-                      <a:r>
-                        <a:rPr lang="es-CL" sz="850" dirty="0">
-                          <a:solidFill>
-                            <a:schemeClr val="tx2"/>
-                          </a:solidFill>
-                        </a:rPr>
-                        <a:t>·</a:t>
-                      </a:r>
-                    </a:p>
-                  </a:txBody>
-                  <a:tcPr marL="45720" marR="45720" marT="27432" marB="27432" anchor="ctr"/>
-                </a:tc>
-                <a:tc>
-                  <a:txBody>
-                    <a:bodyPr/>
-                    <a:lstStyle/>
-                    <a:p>
-                      <a:pPr algn="ctr"/>
-                      <a:r>
-                        <a:rPr lang="es-CL" sz="850" dirty="0">
-                          <a:solidFill>
-                            <a:schemeClr val="tx2"/>
-                          </a:solidFill>
-                        </a:rPr>
-                        <a:t>·</a:t>
-                      </a:r>
-                    </a:p>
-                  </a:txBody>
-                  <a:tcPr marL="45720" marR="45720" marT="27432" marB="27432" anchor="ctr"/>
-                </a:tc>
-                <a:tc>
-                  <a:txBody>
-                    <a:bodyPr/>
-                    <a:lstStyle/>
-                    <a:p>
-                      <a:pPr algn="ctr"/>
-                      <a:r>
-                        <a:rPr lang="es-CL" sz="850" dirty="0">
-                          <a:solidFill>
-                            <a:schemeClr val="tx2"/>
-                          </a:solidFill>
-                        </a:rPr>
-                        <a:t>·</a:t>
-                      </a:r>
-                    </a:p>
-                  </a:txBody>
-                  <a:tcPr marL="45720" marR="45720" marT="27432" marB="27432" anchor="ctr"/>
-                </a:tc>
-              </a:tr>
-              <a:tr h="300">
-                <a:tc>
-                  <a:txBody>
-                    <a:bodyPr/>
-                    <a:lstStyle/>
-                    <a:p>
-                      <a:pPr/>
-                      <a:r>
-                        <a:rPr lang="es-CL" sz="850" dirty="0">
-                          <a:solidFill>
-                            <a:schemeClr val="tx2"/>
-                          </a:solidFill>
-                        </a:rPr>
-                        <a:t>F12 Desempeño</a:t>
-                      </a:r>
-                    </a:p>
-                  </a:txBody>
-                  <a:tcPr marL="45720" marR="45720" marT="27432" marB="27432" anchor="ctr">
-                    <a:solidFill>
-                      <a:srgbClr val="F2F2F2"/>
-                    </a:solidFill>
-                  </a:tcPr>
-                </a:tc>
-                <a:tc>
-                  <a:txBody>
-                    <a:bodyPr/>
-                    <a:lstStyle/>
-                    <a:p>
-                      <a:pPr algn="ctr"/>
-                      <a:r>
-                        <a:rPr lang="es-CL" sz="850" dirty="0">
-                          <a:solidFill>
-                            <a:schemeClr val="tx2"/>
-                          </a:solidFill>
-                        </a:rPr>
-                        <a:t>19</a:t>
-                      </a:r>
-                    </a:p>
-                  </a:txBody>
-                  <a:tcPr marL="45720" marR="45720" marT="27432" marB="27432" anchor="ctr">
-                    <a:solidFill>
-                      <a:srgbClr val="F2F2F2"/>
-                    </a:solidFill>
-                  </a:tcPr>
-                </a:tc>
-                <a:tc>
-                  <a:txBody>
-                    <a:bodyPr/>
-                    <a:lstStyle/>
-                    <a:p>
-                      <a:pPr algn="ctr"/>
-                      <a:r>
-                        <a:rPr lang="es-CL" sz="850" dirty="0">
-                          <a:solidFill>
-                            <a:schemeClr val="tx2"/>
-                          </a:solidFill>
-                        </a:rPr>
-                        <a:t>11</a:t>
-                      </a:r>
-                    </a:p>
-                  </a:txBody>
-                  <a:tcPr marL="45720" marR="45720" marT="27432" marB="27432" anchor="ctr">
-                    <a:solidFill>
-                      <a:srgbClr val="F2F2F2"/>
-                    </a:solidFill>
-                  </a:tcPr>
-                </a:tc>
-                <a:tc>
-                  <a:txBody>
-                    <a:bodyPr/>
-                    <a:lstStyle/>
-                    <a:p>
-                      <a:pPr algn="ctr"/>
-                      <a:r>
-                        <a:rPr lang="es-CL" sz="850" dirty="0">
-                          <a:solidFill>
-                            <a:schemeClr val="tx2"/>
-                          </a:solidFill>
-                        </a:rPr>
-                        <a:t>·</a:t>
-                      </a:r>
-                    </a:p>
-                  </a:txBody>
-                  <a:tcPr marL="45720" marR="45720" marT="27432" marB="27432" anchor="ctr">
-                    <a:solidFill>
-                      <a:srgbClr val="F2F2F2"/>
-                    </a:solidFill>
-                  </a:tcPr>
-                </a:tc>
-                <a:tc>
-                  <a:txBody>
-                    <a:bodyPr/>
-                    <a:lstStyle/>
-                    <a:p>
-                      <a:pPr algn="ctr"/>
-                      <a:r>
-                        <a:rPr lang="es-CL" sz="850" dirty="0">
-                          <a:solidFill>
-                            <a:schemeClr val="tx2"/>
-                          </a:solidFill>
-                        </a:rPr>
-                        <a:t>·</a:t>
-                      </a:r>
-                    </a:p>
-                  </a:txBody>
-                  <a:tcPr marL="45720" marR="45720" marT="27432" marB="27432" anchor="ctr">
-                    <a:solidFill>
-                      <a:srgbClr val="F2F2F2"/>
-                    </a:solidFill>
-                  </a:tcPr>
-                </a:tc>
-              </a:tr>
-              <a:tr h="300">
-                <a:tc>
-                  <a:txBody>
-                    <a:bodyPr/>
-                    <a:lstStyle/>
-                    <a:p>
-                      <a:pPr/>
-                      <a:r>
-                        <a:rPr lang="es-CL" sz="850" dirty="0">
-                          <a:solidFill>
-                            <a:schemeClr val="tx2"/>
-                          </a:solidFill>
-                        </a:rPr>
-                        <a:t>F13 Carrera y sucesión</a:t>
-                      </a:r>
-                    </a:p>
-                  </a:txBody>
-                  <a:tcPr marL="45720" marR="45720" marT="27432" marB="27432" anchor="ctr"/>
-                </a:tc>
-                <a:tc>
-                  <a:txBody>
-                    <a:bodyPr/>
-                    <a:lstStyle/>
-                    <a:p>
-                      <a:pPr algn="ctr"/>
-                      <a:r>
-                        <a:rPr lang="es-CL" sz="850" dirty="0">
-                          <a:solidFill>
-                            <a:schemeClr val="tx2"/>
-                          </a:solidFill>
-                        </a:rPr>
-                        <a:t>1</a:t>
-                      </a:r>
-                    </a:p>
-                  </a:txBody>
-                  <a:tcPr marL="45720" marR="45720" marT="27432" marB="27432" anchor="ctr"/>
-                </a:tc>
-                <a:tc>
-                  <a:txBody>
-                    <a:bodyPr/>
-                    <a:lstStyle/>
-                    <a:p>
-                      <a:pPr algn="ctr"/>
-                      <a:r>
-                        <a:rPr lang="es-CL" sz="850" dirty="0">
-                          <a:solidFill>
-                            <a:schemeClr val="tx2"/>
-                          </a:solidFill>
-                        </a:rPr>
-                        <a:t>·</a:t>
-                      </a:r>
-                    </a:p>
-                  </a:txBody>
-                  <a:tcPr marL="45720" marR="45720" marT="27432" marB="27432" anchor="ctr"/>
-                </a:tc>
-                <a:tc>
-                  <a:txBody>
-                    <a:bodyPr/>
-                    <a:lstStyle/>
-                    <a:p>
-                      <a:pPr algn="ctr"/>
-                      <a:r>
-                        <a:rPr lang="es-CL" sz="850" dirty="0">
-                          <a:solidFill>
-                            <a:schemeClr val="tx2"/>
-                          </a:solidFill>
-                        </a:rPr>
-                        <a:t>9</a:t>
-                      </a:r>
-                    </a:p>
-                  </a:txBody>
-                  <a:tcPr marL="45720" marR="45720" marT="27432" marB="27432" anchor="ctr"/>
-                </a:tc>
-                <a:tc>
-                  <a:txBody>
-                    <a:bodyPr/>
-                    <a:lstStyle/>
-                    <a:p>
-                      <a:pPr algn="ctr"/>
-                      <a:r>
-                        <a:rPr lang="es-CL" sz="850" dirty="0">
-                          <a:solidFill>
-                            <a:schemeClr val="tx2"/>
-                          </a:solidFill>
-                        </a:rPr>
-                        <a:t>·</a:t>
-                      </a:r>
-                    </a:p>
-                  </a:txBody>
-                  <a:tcPr marL="45720" marR="45720" marT="27432" marB="27432" anchor="ctr"/>
-                </a:tc>
-              </a:tr>
-              <a:tr h="300">
-                <a:tc>
-                  <a:txBody>
-                    <a:bodyPr/>
-                    <a:lstStyle/>
-                    <a:p>
-                      <a:pPr/>
-                      <a:r>
-                        <a:rPr lang="es-CL" sz="850" dirty="0">
-                          <a:solidFill>
-                            <a:schemeClr val="tx2"/>
-                          </a:solidFill>
-                        </a:rPr>
-                        <a:t>F14 Renta y beneficios</a:t>
-                      </a:r>
-                    </a:p>
-                  </a:txBody>
-                  <a:tcPr marL="45720" marR="45720" marT="27432" marB="27432" anchor="ctr">
-                    <a:solidFill>
-                      <a:srgbClr val="F2F2F2"/>
-                    </a:solidFill>
-                  </a:tcPr>
-                </a:tc>
-                <a:tc>
-                  <a:txBody>
-                    <a:bodyPr/>
-                    <a:lstStyle/>
-                    <a:p>
-                      <a:pPr algn="ctr"/>
-                      <a:r>
-                        <a:rPr lang="es-CL" sz="850" dirty="0">
-                          <a:solidFill>
-                            <a:schemeClr val="tx2"/>
-                          </a:solidFill>
-                        </a:rPr>
-                        <a:t>·</a:t>
-                      </a:r>
-                    </a:p>
-                  </a:txBody>
-                  <a:tcPr marL="45720" marR="45720" marT="27432" marB="27432" anchor="ctr">
-                    <a:solidFill>
-                      <a:srgbClr val="F2F2F2"/>
-                    </a:solidFill>
-                  </a:tcPr>
-                </a:tc>
-                <a:tc>
-                  <a:txBody>
-                    <a:bodyPr/>
-                    <a:lstStyle/>
-                    <a:p>
-                      <a:pPr algn="ctr"/>
-                      <a:r>
-                        <a:rPr lang="es-CL" sz="850" dirty="0">
-                          <a:solidFill>
-                            <a:schemeClr val="tx2"/>
-                          </a:solidFill>
-                        </a:rPr>
-                        <a:t>·</a:t>
-                      </a:r>
-                    </a:p>
-                  </a:txBody>
-                  <a:tcPr marL="45720" marR="45720" marT="27432" marB="27432" anchor="ctr">
-                    <a:solidFill>
-                      <a:srgbClr val="F2F2F2"/>
-                    </a:solidFill>
-                  </a:tcPr>
-                </a:tc>
-                <a:tc>
-                  <a:txBody>
-                    <a:bodyPr/>
-                    <a:lstStyle/>
-                    <a:p>
-                      <a:pPr algn="ctr"/>
-                      <a:r>
-                        <a:rPr lang="es-CL" sz="850" dirty="0">
-                          <a:solidFill>
-                            <a:schemeClr val="tx2"/>
-                          </a:solidFill>
-                        </a:rPr>
-                        <a:t>22</a:t>
-                      </a:r>
-                    </a:p>
-                  </a:txBody>
-                  <a:tcPr marL="45720" marR="45720" marT="27432" marB="27432" anchor="ctr">
-                    <a:solidFill>
-                      <a:srgbClr val="F2F2F2"/>
-                    </a:solidFill>
-                  </a:tcPr>
-                </a:tc>
-                <a:tc>
-                  <a:txBody>
-                    <a:bodyPr/>
-                    <a:lstStyle/>
-                    <a:p>
-                      <a:pPr algn="ctr"/>
-                      <a:r>
-                        <a:rPr lang="es-CL" sz="850" dirty="0">
-                          <a:solidFill>
-                            <a:schemeClr val="tx2"/>
-                          </a:solidFill>
-                        </a:rPr>
-                        <a:t>·</a:t>
-                      </a:r>
-                    </a:p>
-                  </a:txBody>
-                  <a:tcPr marL="45720" marR="45720" marT="27432" marB="27432" anchor="ctr">
-                    <a:solidFill>
-                      <a:srgbClr val="F2F2F2"/>
-                    </a:solidFill>
-                  </a:tcPr>
-                </a:tc>
-              </a:tr>
-              <a:tr h="300">
-                <a:tc>
-                  <a:txBody>
-                    <a:bodyPr/>
-                    <a:lstStyle/>
-                    <a:p>
-                      <a:pPr/>
-                      <a:r>
-                        <a:rPr lang="es-CL" sz="850" dirty="0">
-                          <a:solidFill>
-                            <a:schemeClr val="tx2"/>
-                          </a:solidFill>
-                        </a:rPr>
-                        <a:t>F15 Nómina</a:t>
-                      </a:r>
-                    </a:p>
-                  </a:txBody>
-                  <a:tcPr marL="45720" marR="45720" marT="27432" marB="27432" anchor="ctr"/>
-                </a:tc>
-                <a:tc>
-                  <a:txBody>
-                    <a:bodyPr/>
-                    <a:lstStyle/>
-                    <a:p>
-                      <a:pPr algn="ctr"/>
-                      <a:r>
-                        <a:rPr lang="es-CL" sz="850" dirty="0">
-                          <a:solidFill>
-                            <a:schemeClr val="tx2"/>
-                          </a:solidFill>
-                        </a:rPr>
-                        <a:t>·</a:t>
-                      </a:r>
-                    </a:p>
-                  </a:txBody>
-                  <a:tcPr marL="45720" marR="45720" marT="27432" marB="27432" anchor="ctr"/>
-                </a:tc>
-                <a:tc>
-                  <a:txBody>
-                    <a:bodyPr/>
-                    <a:lstStyle/>
-                    <a:p>
-                      <a:pPr algn="ctr"/>
-                      <a:r>
-                        <a:rPr lang="es-CL" sz="850" dirty="0">
-                          <a:solidFill>
-                            <a:schemeClr val="tx2"/>
-                          </a:solidFill>
-                        </a:rPr>
-                        <a:t>·</a:t>
-                      </a:r>
-                    </a:p>
-                  </a:txBody>
-                  <a:tcPr marL="45720" marR="45720" marT="27432" marB="27432" anchor="ctr"/>
-                </a:tc>
-                <a:tc>
-                  <a:txBody>
-                    <a:bodyPr/>
-                    <a:lstStyle/>
-                    <a:p>
-                      <a:pPr algn="ctr"/>
-                      <a:r>
-                        <a:rPr lang="es-CL" sz="850" dirty="0">
-                          <a:solidFill>
-                            <a:schemeClr val="tx2"/>
-                          </a:solidFill>
-                        </a:rPr>
-                        <a:t>·</a:t>
-                      </a:r>
-                    </a:p>
-                  </a:txBody>
-                  <a:tcPr marL="45720" marR="45720" marT="27432" marB="27432" anchor="ctr"/>
-                </a:tc>
-                <a:tc>
-                  <a:txBody>
-                    <a:bodyPr/>
-                    <a:lstStyle/>
-                    <a:p>
-                      <a:pPr algn="ctr"/>
-                      <a:r>
-                        <a:rPr lang="es-CL" sz="850" b="1" dirty="0">
-                          <a:solidFill>
-                            <a:schemeClr val="tx2"/>
-                          </a:solidFill>
-                        </a:rPr>
-                        <a:t>2</a:t>
-                      </a:r>
-                    </a:p>
-                  </a:txBody>
-                  <a:tcPr marL="45720" marR="45720" marT="27432" marB="27432" anchor="ctr">
-                    <a:solidFill>
-                      <a:srgbClr val="FFD7D7"/>
-                    </a:solidFill>
-                  </a:tcPr>
-                </a:tc>
-              </a:tr>
-              <a:tr h="300">
-                <a:tc>
-                  <a:txBody>
-                    <a:bodyPr/>
-                    <a:lstStyle/>
-                    <a:p>
-                      <a:pPr/>
-                      <a:r>
-                        <a:rPr lang="es-CL" sz="850" dirty="0">
-                          <a:solidFill>
-                            <a:schemeClr val="tx2"/>
-                          </a:solidFill>
-                        </a:rPr>
-                        <a:t>F16 Clima y retención</a:t>
-                      </a:r>
-                    </a:p>
-                  </a:txBody>
-                  <a:tcPr marL="45720" marR="45720" marT="27432" marB="27432" anchor="ctr">
-                    <a:solidFill>
-                      <a:srgbClr val="F2F2F2"/>
-                    </a:solidFill>
-                  </a:tcPr>
-                </a:tc>
-                <a:tc>
-                  <a:txBody>
-                    <a:bodyPr/>
-                    <a:lstStyle/>
-                    <a:p>
-                      <a:pPr algn="ctr"/>
-                      <a:r>
-                        <a:rPr lang="es-CL" sz="850" dirty="0">
-                          <a:solidFill>
-                            <a:schemeClr val="tx2"/>
-                          </a:solidFill>
-                        </a:rPr>
-                        <a:t>·</a:t>
-                      </a:r>
-                    </a:p>
-                  </a:txBody>
-                  <a:tcPr marL="45720" marR="45720" marT="27432" marB="27432" anchor="ctr">
-                    <a:solidFill>
-                      <a:srgbClr val="F2F2F2"/>
-                    </a:solidFill>
-                  </a:tcPr>
-                </a:tc>
-                <a:tc>
-                  <a:txBody>
-                    <a:bodyPr/>
-                    <a:lstStyle/>
-                    <a:p>
-                      <a:pPr algn="ctr"/>
-                      <a:r>
-                        <a:rPr lang="es-CL" sz="850" dirty="0">
-                          <a:solidFill>
-                            <a:schemeClr val="tx2"/>
-                          </a:solidFill>
-                        </a:rPr>
-                        <a:t>·</a:t>
-                      </a:r>
-                    </a:p>
-                  </a:txBody>
-                  <a:tcPr marL="45720" marR="45720" marT="27432" marB="27432" anchor="ctr">
-                    <a:solidFill>
-                      <a:srgbClr val="F2F2F2"/>
-                    </a:solidFill>
-                  </a:tcPr>
-                </a:tc>
-                <a:tc>
-                  <a:txBody>
-                    <a:bodyPr/>
-                    <a:lstStyle/>
-                    <a:p>
-                      <a:pPr algn="ctr"/>
-                      <a:r>
-                        <a:rPr lang="es-CL" sz="850" dirty="0">
-                          <a:solidFill>
-                            <a:schemeClr val="tx2"/>
-                          </a:solidFill>
-                        </a:rPr>
-                        <a:t>12</a:t>
-                      </a:r>
-                    </a:p>
-                  </a:txBody>
-                  <a:tcPr marL="45720" marR="45720" marT="27432" marB="27432" anchor="ctr">
-                    <a:solidFill>
-                      <a:srgbClr val="F2F2F2"/>
-                    </a:solidFill>
-                  </a:tcPr>
-                </a:tc>
-                <a:tc>
-                  <a:txBody>
-                    <a:bodyPr/>
-                    <a:lstStyle/>
-                    <a:p>
-                      <a:pPr algn="ctr"/>
-                      <a:r>
-                        <a:rPr lang="es-CL" sz="850" dirty="0">
-                          <a:solidFill>
-                            <a:schemeClr val="tx2"/>
-                          </a:solidFill>
-                        </a:rPr>
-                        <a:t>·</a:t>
-                      </a:r>
-                    </a:p>
-                  </a:txBody>
-                  <a:tcPr marL="45720" marR="45720" marT="27432" marB="27432" anchor="ctr">
-                    <a:solidFill>
-                      <a:srgbClr val="F2F2F2"/>
-                    </a:solidFill>
-                  </a:tcPr>
-                </a:tc>
-              </a:tr>
-              <a:tr h="300">
-                <a:tc>
-                  <a:txBody>
-                    <a:bodyPr/>
-                    <a:lstStyle/>
-                    <a:p>
-                      <a:pPr/>
-                      <a:r>
-                        <a:rPr lang="es-CL" sz="850" dirty="0">
-                          <a:solidFill>
-                            <a:schemeClr val="tx2"/>
-                          </a:solidFill>
-                        </a:rPr>
-                        <a:t>F17 Desvinculación</a:t>
-                      </a:r>
-                    </a:p>
-                  </a:txBody>
-                  <a:tcPr marL="45720" marR="45720" marT="27432" marB="27432" anchor="ctr"/>
-                </a:tc>
-                <a:tc>
-                  <a:txBody>
-                    <a:bodyPr/>
-                    <a:lstStyle/>
-                    <a:p>
-                      <a:pPr algn="ctr"/>
-                      <a:r>
-                        <a:rPr lang="es-CL" sz="850" dirty="0">
-                          <a:solidFill>
-                            <a:schemeClr val="tx2"/>
-                          </a:solidFill>
-                        </a:rPr>
-                        <a:t>·</a:t>
-                      </a:r>
-                    </a:p>
-                  </a:txBody>
-                  <a:tcPr marL="45720" marR="45720" marT="27432" marB="27432" anchor="ctr"/>
-                </a:tc>
-                <a:tc>
-                  <a:txBody>
-                    <a:bodyPr/>
-                    <a:lstStyle/>
-                    <a:p>
-                      <a:pPr algn="ctr"/>
-                      <a:r>
-                        <a:rPr lang="es-CL" sz="850" dirty="0">
-                          <a:solidFill>
-                            <a:schemeClr val="tx2"/>
-                          </a:solidFill>
-                        </a:rPr>
-                        <a:t>1</a:t>
-                      </a:r>
-                    </a:p>
-                  </a:txBody>
-                  <a:tcPr marL="45720" marR="45720" marT="27432" marB="27432" anchor="ctr"/>
-                </a:tc>
-                <a:tc>
-                  <a:txBody>
-                    <a:bodyPr/>
-                    <a:lstStyle/>
-                    <a:p>
-                      <a:pPr algn="ctr"/>
-                      <a:r>
-                        <a:rPr lang="es-CL" sz="850" dirty="0">
-                          <a:solidFill>
-                            <a:schemeClr val="tx2"/>
-                          </a:solidFill>
-                        </a:rPr>
-                        <a:t>1</a:t>
-                      </a:r>
-                    </a:p>
-                  </a:txBody>
-                  <a:tcPr marL="45720" marR="45720" marT="27432" marB="27432" anchor="ctr"/>
-                </a:tc>
-                <a:tc>
-                  <a:txBody>
-                    <a:bodyPr/>
-                    <a:lstStyle/>
-                    <a:p>
-                      <a:pPr algn="ctr"/>
-                      <a:r>
-                        <a:rPr lang="es-CL" sz="850" b="1" dirty="0">
-                          <a:solidFill>
-                            <a:schemeClr val="tx2"/>
-                          </a:solidFill>
-                        </a:rPr>
-                        <a:t>8</a:t>
-                      </a:r>
-                    </a:p>
-                  </a:txBody>
-                  <a:tcPr marL="45720" marR="45720" marT="27432" marB="27432" anchor="ctr">
-                    <a:solidFill>
-                      <a:srgbClr val="FFD7D7"/>
-                    </a:solidFill>
-                  </a:tcPr>
-                </a:tc>
-              </a:tr>
-              <a:tr h="300">
-                <a:tc>
-                  <a:txBody>
-                    <a:bodyPr/>
-                    <a:lstStyle/>
-                    <a:p>
-                      <a:pPr/>
-                      <a:r>
-                        <a:rPr lang="es-CL" sz="850" dirty="0">
-                          <a:solidFill>
-                            <a:schemeClr val="tx2"/>
-                          </a:solidFill>
-                        </a:rPr>
-                        <a:t>F18 Datos y gobernanza</a:t>
-                      </a:r>
-                    </a:p>
-                  </a:txBody>
-                  <a:tcPr marL="45720" marR="45720" marT="27432" marB="27432" anchor="ctr">
-                    <a:solidFill>
-                      <a:srgbClr val="F2F2F2"/>
-                    </a:solidFill>
-                  </a:tcPr>
-                </a:tc>
-                <a:tc>
-                  <a:txBody>
-                    <a:bodyPr/>
-                    <a:lstStyle/>
-                    <a:p>
-                      <a:pPr algn="ctr"/>
-                      <a:r>
-                        <a:rPr lang="es-CL" sz="850" dirty="0">
-                          <a:solidFill>
-                            <a:schemeClr val="tx2"/>
-                          </a:solidFill>
-                        </a:rPr>
-                        <a:t>·</a:t>
-                      </a:r>
-                    </a:p>
-                  </a:txBody>
-                  <a:tcPr marL="45720" marR="45720" marT="27432" marB="27432" anchor="ctr">
-                    <a:solidFill>
-                      <a:srgbClr val="F2F2F2"/>
-                    </a:solidFill>
-                  </a:tcPr>
-                </a:tc>
-                <a:tc>
-                  <a:txBody>
-                    <a:bodyPr/>
-                    <a:lstStyle/>
-                    <a:p>
-                      <a:pPr algn="ctr"/>
-                      <a:r>
-                        <a:rPr lang="es-CL" sz="850" dirty="0">
-                          <a:solidFill>
-                            <a:schemeClr val="tx2"/>
-                          </a:solidFill>
-                        </a:rPr>
-                        <a:t>3</a:t>
-                      </a:r>
-                    </a:p>
-                  </a:txBody>
-                  <a:tcPr marL="45720" marR="45720" marT="27432" marB="27432" anchor="ctr">
-                    <a:solidFill>
-                      <a:srgbClr val="F2F2F2"/>
-                    </a:solidFill>
-                  </a:tcPr>
-                </a:tc>
-                <a:tc>
-                  <a:txBody>
-                    <a:bodyPr/>
-                    <a:lstStyle/>
-                    <a:p>
-                      <a:pPr algn="ctr"/>
-                      <a:r>
-                        <a:rPr lang="es-CL" sz="850" dirty="0">
-                          <a:solidFill>
-                            <a:schemeClr val="tx2"/>
-                          </a:solidFill>
-                        </a:rPr>
-                        <a:t>14</a:t>
-                      </a:r>
-                    </a:p>
-                  </a:txBody>
-                  <a:tcPr marL="45720" marR="45720" marT="27432" marB="27432" anchor="ctr">
-                    <a:solidFill>
-                      <a:srgbClr val="F2F2F2"/>
-                    </a:solidFill>
-                  </a:tcPr>
-                </a:tc>
-                <a:tc>
-                  <a:txBody>
-                    <a:bodyPr/>
-                    <a:lstStyle/>
-                    <a:p>
-                      <a:pPr algn="ctr"/>
-                      <a:r>
-                        <a:rPr lang="es-CL" sz="850" b="1" dirty="0">
-                          <a:solidFill>
-                            <a:schemeClr val="tx2"/>
-                          </a:solidFill>
-                        </a:rPr>
-                        <a:t>2</a:t>
-                      </a:r>
-                    </a:p>
-                  </a:txBody>
-                  <a:tcPr marL="45720" marR="45720" marT="27432" marB="27432" anchor="ctr">
-                    <a:solidFill>
-                      <a:srgbClr val="FFD7D7"/>
-                    </a:solidFill>
-                  </a:tcPr>
-                </a:tc>
-              </a:tr>
-            </a:tbl>
-          </a:graphicData>
-        </a:graphic>
-      </p:graphicFrame>
-      <p:sp>
-        <p:nvSpPr>
-          <p:cNvPr id="9" name="8 CuadroTexto"/>
-          <p:cNvSpPr txBox="1"/>
-          <p:nvPr/>
-        </p:nvSpPr>
-        <p:spPr>
-          <a:xfrm>
-            <a:off x="323528" y="5850000"/>
-            <a:ext cx="8352928" cy="800000"/>
-          </a:xfrm>
-          <a:prstGeom prst="rect">
-            <a:avLst/>
-          </a:prstGeom>
-          <a:noFill/>
-        </p:spPr>
-        <p:txBody>
-          <a:bodyPr wrap="square" lIns="91396" tIns="45697" rIns="91396" bIns="45697" rtlCol="0">
-            <a:spAutoFit/>
-          </a:bodyPr>
-          <a:lstStyle/>
-          <a:p>
-            <a:r>
-              <a:rPr lang="es-CL" sz="1150" dirty="0">
-                <a:solidFill>
-                  <a:prstClr val="black">
-                    <a:lumMod val="65000"/>
-                    <a:lumOff val="35000"/>
-                  </a:prstClr>
-                </a:solidFill>
-              </a:rPr>
-              <a:t>La madurez es </a:t>
-            </a:r>
-            <a:r>
-              <a:rPr lang="es-CL" sz="1150" b="1" dirty="0">
-                <a:solidFill>
-                  <a:prstClr val="black">
-                    <a:lumMod val="65000"/>
-                    <a:lumOff val="35000"/>
-                  </a:prstClr>
-                </a:solidFill>
-              </a:rPr>
-              <a:t>heterogénea por fase</a:t>
-            </a:r>
-            <a:r>
-              <a:rPr lang="es-CL" sz="1150" dirty="0">
-                <a:solidFill>
-                  <a:prstClr val="black">
-                    <a:lumMod val="65000"/>
-                    <a:lumOff val="35000"/>
-                  </a:prstClr>
-                </a:solidFill>
-              </a:rPr>
-              <a:t>: la selección y la formación están respaldadas en procedimientos vigentes, mientras que la valoración de cargos, los beneficios y el clima se sostienen en propuestas por validar. </a:t>
-            </a:r>
-            <a:r>
-              <a:rPr lang="es-CL" sz="1150" b="1" dirty="0">
-                <a:solidFill>
-                  <a:prstClr val="black">
-                    <a:lumMod val="65000"/>
-                    <a:lumOff val="35000"/>
-                  </a:prstClr>
-                </a:solidFill>
-              </a:rPr>
-              <a:t>Doc</a:t>
-            </a:r>
-            <a:r>
-              <a:rPr lang="es-CL" sz="1150" dirty="0">
-                <a:solidFill>
-                  <a:prstClr val="black">
-                    <a:lumMod val="65000"/>
-                    <a:lumOff val="35000"/>
-                  </a:prstClr>
-                </a:solidFill>
-              </a:rPr>
-              <a:t> documentado · </a:t>
-            </a:r>
-            <a:r>
-              <a:rPr lang="es-CL" sz="1150" b="1" dirty="0">
-                <a:solidFill>
-                  <a:prstClr val="black">
-                    <a:lumMod val="65000"/>
-                    <a:lumOff val="35000"/>
-                  </a:prstClr>
-                </a:solidFill>
-              </a:rPr>
-              <a:t>Ent</a:t>
-            </a:r>
-            <a:r>
-              <a:rPr lang="es-CL" sz="1150" dirty="0">
-                <a:solidFill>
-                  <a:prstClr val="black">
-                    <a:lumMod val="65000"/>
-                    <a:lumOff val="35000"/>
-                  </a:prstClr>
-                </a:solidFill>
-              </a:rPr>
-              <a:t> entrevista · </a:t>
-            </a:r>
-            <a:r>
-              <a:rPr lang="es-CL" sz="1150" b="1" dirty="0">
-                <a:solidFill>
-                  <a:prstClr val="black">
-                    <a:lumMod val="65000"/>
-                    <a:lumOff val="35000"/>
-                  </a:prstClr>
-                </a:solidFill>
-              </a:rPr>
-              <a:t>Prop</a:t>
-            </a:r>
-            <a:r>
-              <a:rPr lang="es-CL" sz="1150" dirty="0">
-                <a:solidFill>
-                  <a:prstClr val="black">
-                    <a:lumMod val="65000"/>
-                    <a:lumOff val="35000"/>
-                  </a:prstClr>
-                </a:solidFill>
-              </a:rPr>
-              <a:t> propuesto · </a:t>
-            </a:r>
-            <a:r>
-              <a:rPr lang="es-CL" sz="1150" b="1" dirty="0">
-                <a:solidFill>
-                  <a:prstClr val="black">
-                    <a:lumMod val="65000"/>
-                    <a:lumOff val="35000"/>
-                  </a:prstClr>
-                </a:solidFill>
-              </a:rPr>
-              <a:t>Bre</a:t>
-            </a:r>
-            <a:r>
-              <a:rPr lang="es-CL" sz="1150" dirty="0">
-                <a:solidFill>
-                  <a:prstClr val="black">
-                    <a:lumMod val="65000"/>
-                    <a:lumOff val="35000"/>
-                  </a:prstClr>
-                </a:solidFill>
-              </a:rPr>
-              <a:t> brecha.</a:t>
-            </a:r>
-            <a:endParaRPr lang="es-CL" sz="1150"/>
-          </a:p>
-        </p:txBody>
-      </p:sp>
-    </p:spTree>
-  </p:cSld>
-  <p:clrMapOvr>
-    <a:masterClrMapping/>
-  </p:clrMapOvr>
-</p:sld>
-</file>
-
-<file path=ppt/slides/slide12.xml><?xml version="1.0" encoding="utf-8"?>
-<p:sld xmlns:a="http://schemas.openxmlformats.org/drawingml/2006/main" xmlns:r="http://schemas.openxmlformats.org/officeDocument/2006/relationships" xmlns:p="http://schemas.openxmlformats.org/presentationml/2006/main">
-  <p:cSld>
-    <p:spTree>
-      <p:nvGrpSpPr>
-        <p:cNvPr id="1" name=""/>
-        <p:cNvGrpSpPr/>
-        <p:nvPr/>
-      </p:nvGrpSpPr>
-      <p:grpSpPr>
-        <a:xfrm>
-          <a:off x="0" y="0"/>
-          <a:ext cx="0" cy="0"/>
-          <a:chOff x="0" y="0"/>
-          <a:chExt cx="0" cy="0"/>
-        </a:xfrm>
-      </p:grpSpPr>
-      <p:sp>
-        <p:nvSpPr>
-          <p:cNvPr id="5" name="4 CuadroTexto"/>
-          <p:cNvSpPr txBox="1"/>
-          <p:nvPr/>
-        </p:nvSpPr>
-        <p:spPr>
-          <a:xfrm>
-            <a:off x="5675867" y="340990"/>
-            <a:ext cx="2337602" cy="252106"/>
-          </a:xfrm>
-          <a:prstGeom prst="rect">
-            <a:avLst/>
-          </a:prstGeom>
-          <a:noFill/>
-        </p:spPr>
-        <p:txBody>
-          <a:bodyPr wrap="square" lIns="82014" tIns="45697" rIns="82014" bIns="45697" rtlCol="0">
-            <a:spAutoFit/>
-          </a:bodyPr>
-          <a:lstStyle/>
-          <a:p>
-            <a:pPr algn="ctr"/>
-            <a:r>
-              <a:rPr lang="es-CL" sz="1000" b="1" dirty="0">
-                <a:solidFill>
-                  <a:prstClr val="black">
-                    <a:lumMod val="65000"/>
-                    <a:lumOff val="35000"/>
-                  </a:prstClr>
-                </a:solidFill>
-              </a:rPr>
-              <a:t>Sistema de gestión de riesgos MP8 y MP21</a:t>
-            </a:r>
-            <a:endParaRPr lang="es-CL" sz="1000"/>
-          </a:p>
-        </p:txBody>
-      </p:sp>
-      <p:sp>
-        <p:nvSpPr>
-          <p:cNvPr id="4" name="3 CuadroTexto"/>
-          <p:cNvSpPr txBox="1"/>
-          <p:nvPr/>
-        </p:nvSpPr>
-        <p:spPr>
-          <a:xfrm>
-            <a:off x="5740803" y="1034218"/>
-            <a:ext cx="2207735" cy="221341"/>
-          </a:xfrm>
-          <a:prstGeom prst="rect">
-            <a:avLst/>
-          </a:prstGeom>
-          <a:noFill/>
-        </p:spPr>
-        <p:txBody>
-          <a:bodyPr wrap="square" lIns="82014" tIns="45697" rIns="82014" bIns="45697" rtlCol="0">
-            <a:spAutoFit/>
-          </a:bodyPr>
-          <a:lstStyle/>
-          <a:p>
-            <a:pPr algn="ctr"/>
-            <a:r>
-              <a:rPr lang="es-CL" sz="900" dirty="0">
-                <a:solidFill>
-                  <a:prstClr val="white">
-                    <a:lumMod val="50000"/>
-                  </a:prstClr>
-                </a:solidFill>
-              </a:rPr>
-              <a:t>| </a:t>
-            </a:r>
-            <a:r>
-              <a:rPr lang="es-CL" sz="900" b="1" dirty="0">
-                <a:solidFill>
-                  <a:srgbClr val="1F497D">
-                    <a:lumMod val="75000"/>
-                  </a:srgbClr>
-                </a:solidFill>
-              </a:rPr>
-              <a:t>Estudiante: </a:t>
-            </a:r>
-            <a:r>
-              <a:rPr lang="es-CL" sz="900" dirty="0">
-                <a:solidFill>
-                  <a:srgbClr val="1F497D">
-                    <a:lumMod val="75000"/>
-                  </a:srgbClr>
-                </a:solidFill>
-              </a:rPr>
-              <a:t>Bastián Darwit Vera</a:t>
-            </a:r>
-            <a:r>
-              <a:rPr lang="es-CL" sz="900" dirty="0">
-                <a:solidFill>
-                  <a:prstClr val="white">
-                    <a:lumMod val="50000"/>
-                  </a:prstClr>
-                </a:solidFill>
-              </a:rPr>
-              <a:t> |</a:t>
-            </a:r>
-          </a:p>
-        </p:txBody>
-      </p:sp>
-      <p:sp>
-        <p:nvSpPr>
-          <p:cNvPr id="6" name="5 CuadroTexto"/>
-          <p:cNvSpPr txBox="1"/>
-          <p:nvPr/>
-        </p:nvSpPr>
-        <p:spPr>
-          <a:xfrm>
-            <a:off x="805865" y="1538381"/>
-            <a:ext cx="7077739" cy="852256"/>
-          </a:xfrm>
-          <a:prstGeom prst="rect">
-            <a:avLst/>
-          </a:prstGeom>
-          <a:noFill/>
-        </p:spPr>
-        <p:txBody>
-          <a:bodyPr wrap="square" lIns="82014" tIns="45697" rIns="82014" bIns="45697" rtlCol="0">
-            <a:spAutoFit/>
-          </a:bodyPr>
-          <a:lstStyle/>
-          <a:p>
-            <a:r>
-              <a:rPr lang="es-CL" sz="2000" b="1" dirty="0">
-                <a:solidFill>
-                  <a:prstClr val="black">
-                    <a:lumMod val="65000"/>
-                    <a:lumOff val="35000"/>
-                  </a:prstClr>
-                </a:solidFill>
-              </a:rPr>
-              <a:t>Resultados · Brechas de levantamiento declaradas</a:t>
-            </a:r>
-            <a:endParaRPr lang="es-CL" sz="2000"/>
-          </a:p>
-        </p:txBody>
-      </p:sp>
-      <p:sp>
-        <p:nvSpPr>
-          <p:cNvPr id="8" name="7 CuadroTexto"/>
-          <p:cNvSpPr txBox="1"/>
-          <p:nvPr/>
-        </p:nvSpPr>
-        <p:spPr>
-          <a:xfrm>
-            <a:off x="323528" y="2400000"/>
-            <a:ext cx="8352928" cy="500000"/>
-          </a:xfrm>
-          <a:prstGeom prst="rect">
-            <a:avLst/>
-          </a:prstGeom>
-          <a:noFill/>
-        </p:spPr>
-        <p:txBody>
-          <a:bodyPr wrap="square" lIns="91396" tIns="45697" rIns="91396" bIns="45697" rtlCol="0">
-            <a:spAutoFit/>
-          </a:bodyPr>
-          <a:lstStyle/>
-          <a:p>
-            <a:r>
-              <a:rPr lang="es-CL" sz="1250" dirty="0">
-                <a:solidFill>
-                  <a:schemeClr val="tx2"/>
-                </a:solidFill>
-              </a:rPr>
-              <a:t>12 brechas sobre 234 pasos, equivalentes al 5,1 %. </a:t>
-            </a:r>
-            <a:r>
-              <a:rPr lang="es-CL" sz="1250" b="1" dirty="0">
-                <a:solidFill>
-                  <a:schemeClr val="tx2"/>
-                </a:solidFill>
-              </a:rPr>
-              <a:t>10 de las 12 se concentran en el cierre del ciclo de vida del trabajador.</a:t>
-            </a:r>
-            <a:endParaRPr lang="es-CL" sz="1250"/>
-          </a:p>
-        </p:txBody>
-      </p:sp>
-      <p:graphicFrame>
-        <p:nvGraphicFramePr>
-          <p:cNvPr id="20" name="Tabla 20"/>
-          <p:cNvGraphicFramePr>
-            <a:graphicFrameLocks noGrp="1"/>
-          </p:cNvGraphicFramePr>
-          <p:nvPr/>
-        </p:nvGraphicFramePr>
-        <p:xfrm>
-          <a:off x="323528" y="2900000"/>
-          <a:ext cx="8352928" cy="2300000"/>
-        </p:xfrm>
-        <a:graphic>
-          <a:graphicData uri="http://schemas.openxmlformats.org/drawingml/2006/table">
-            <a:tbl>
-              <a:tblPr firstRow="1" bandRow="1"/>
-              <a:tblGrid>
-                <a:gridCol w="1900000"/>
-                <a:gridCol w="500000"/>
-                <a:gridCol w="2600000"/>
-                <a:gridCol w="3352928"/>
-              </a:tblGrid>
-              <a:tr h="380">
-                <a:tc>
-                  <a:txBody>
-                    <a:bodyPr/>
-                    <a:lstStyle/>
-                    <a:p>
-                      <a:pPr/>
-                      <a:r>
-                        <a:rPr lang="es-CL" sz="950" b="1" dirty="0">
-                          <a:solidFill>
-                            <a:srgbClr val="FFFFFF"/>
-                          </a:solidFill>
-                        </a:rPr>
-                        <a:t>Fase</a:t>
-                      </a:r>
-                    </a:p>
-                  </a:txBody>
-                  <a:tcPr marL="45720" marR="45720" marT="27432" marB="27432" anchor="ctr">
-                    <a:solidFill>
-                      <a:srgbClr val="1F497D"/>
-                    </a:solidFill>
-                  </a:tcPr>
-                </a:tc>
-                <a:tc>
-                  <a:txBody>
-                    <a:bodyPr/>
-                    <a:lstStyle/>
-                    <a:p>
-                      <a:pPr algn="ctr"/>
-                      <a:r>
-                        <a:rPr lang="es-CL" sz="950" b="1" dirty="0">
-                          <a:solidFill>
-                            <a:srgbClr val="FFFFFF"/>
-                          </a:solidFill>
-                        </a:rPr>
-                        <a:t>N.º</a:t>
-                      </a:r>
-                    </a:p>
-                  </a:txBody>
-                  <a:tcPr marL="45720" marR="45720" marT="27432" marB="27432" anchor="ctr">
-                    <a:solidFill>
-                      <a:srgbClr val="1F497D"/>
-                    </a:solidFill>
-                  </a:tcPr>
-                </a:tc>
-                <a:tc>
-                  <a:txBody>
-                    <a:bodyPr/>
-                    <a:lstStyle/>
-                    <a:p>
-                      <a:pPr/>
-                      <a:r>
-                        <a:rPr lang="es-CL" sz="950" b="1" dirty="0">
-                          <a:solidFill>
-                            <a:srgbClr val="FFFFFF"/>
-                          </a:solidFill>
-                        </a:rPr>
-                        <a:t>Códigos APQC</a:t>
-                      </a:r>
-                    </a:p>
-                  </a:txBody>
-                  <a:tcPr marL="45720" marR="45720" marT="27432" marB="27432" anchor="ctr">
-                    <a:solidFill>
-                      <a:srgbClr val="1F497D"/>
-                    </a:solidFill>
-                  </a:tcPr>
-                </a:tc>
-                <a:tc>
-                  <a:txBody>
-                    <a:bodyPr/>
-                    <a:lstStyle/>
-                    <a:p>
-                      <a:pPr/>
-                      <a:r>
-                        <a:rPr lang="es-CL" sz="950" b="1" dirty="0">
-                          <a:solidFill>
-                            <a:srgbClr val="FFFFFF"/>
-                          </a:solidFill>
-                        </a:rPr>
-                        <a:t>Rol con quien se cierra</a:t>
-                      </a:r>
-                    </a:p>
-                  </a:txBody>
-                  <a:tcPr marL="45720" marR="45720" marT="27432" marB="27432" anchor="ctr">
-                    <a:solidFill>
-                      <a:srgbClr val="1F497D"/>
-                    </a:solidFill>
-                  </a:tcPr>
-                </a:tc>
-              </a:tr>
-              <a:tr h="620">
-                <a:tc>
-                  <a:txBody>
-                    <a:bodyPr/>
-                    <a:lstStyle/>
-                    <a:p>
-                      <a:pPr/>
-                      <a:r>
-                        <a:rPr lang="es-CL" sz="1050" b="1" dirty="0">
-                          <a:solidFill>
-                            <a:schemeClr val="tx2"/>
-                          </a:solidFill>
-                        </a:rPr>
-                        <a:t>F15 Administración de nómina</a:t>
-                      </a:r>
-                    </a:p>
-                  </a:txBody>
-                  <a:tcPr marL="45720" marR="45720" marT="27432" marB="27432" anchor="ctr">
-                    <a:solidFill>
-                      <a:srgbClr val="F2F2F2"/>
-                    </a:solidFill>
-                  </a:tcPr>
-                </a:tc>
-                <a:tc>
-                  <a:txBody>
-                    <a:bodyPr/>
-                    <a:lstStyle/>
-                    <a:p>
-                      <a:pPr algn="ctr"/>
-                      <a:r>
-                        <a:rPr lang="es-CL" sz="1050" b="1" dirty="0">
-                          <a:solidFill>
-                            <a:schemeClr val="tx2"/>
-                          </a:solidFill>
-                        </a:rPr>
-                        <a:t>2</a:t>
-                      </a:r>
-                    </a:p>
-                  </a:txBody>
-                  <a:tcPr marL="45720" marR="45720" marT="27432" marB="27432" anchor="ctr">
-                    <a:solidFill>
-                      <a:srgbClr val="F2F2F2"/>
-                    </a:solidFill>
-                  </a:tcPr>
-                </a:tc>
-                <a:tc>
-                  <a:txBody>
-                    <a:bodyPr/>
-                    <a:lstStyle/>
-                    <a:p>
-                      <a:pPr/>
-                      <a:r>
-                        <a:rPr lang="es-CL" sz="1050" dirty="0">
-                          <a:solidFill>
-                            <a:schemeClr val="tx2"/>
-                          </a:solidFill>
-                        </a:rPr>
-                        <a:t>7.5.4 · 7.7.6</a:t>
-                      </a:r>
-                    </a:p>
-                  </a:txBody>
-                  <a:tcPr marL="45720" marR="45720" marT="27432" marB="27432" anchor="ctr">
-                    <a:solidFill>
-                      <a:srgbClr val="F2F2F2"/>
-                    </a:solidFill>
-                  </a:tcPr>
-                </a:tc>
-                <a:tc>
-                  <a:txBody>
-                    <a:bodyPr/>
-                    <a:lstStyle/>
-                    <a:p>
-                      <a:pPr/>
-                      <a:r>
-                        <a:rPr lang="es-CL" sz="1050" dirty="0">
-                          <a:solidFill>
-                            <a:schemeClr val="tx2"/>
-                          </a:solidFill>
-                        </a:rPr>
-                        <a:t>Remuneraciones · especialista en tecnología de compensaciones</a:t>
-                      </a:r>
-                    </a:p>
-                  </a:txBody>
-                  <a:tcPr marL="45720" marR="45720" marT="27432" marB="27432" anchor="ctr">
-                    <a:solidFill>
-                      <a:srgbClr val="F2F2F2"/>
-                    </a:solidFill>
-                  </a:tcPr>
-                </a:tc>
-              </a:tr>
-              <a:tr h="660">
-                <a:tc>
-                  <a:txBody>
-                    <a:bodyPr/>
-                    <a:lstStyle/>
-                    <a:p>
-                      <a:pPr/>
-                      <a:r>
-                        <a:rPr lang="es-CL" sz="1050" b="1" dirty="0">
-                          <a:solidFill>
-                            <a:schemeClr val="tx2"/>
-                          </a:solidFill>
-                        </a:rPr>
-                        <a:t>F17 Desvinculación y salida</a:t>
-                      </a:r>
-                    </a:p>
-                  </a:txBody>
-                  <a:tcPr marL="45720" marR="45720" marT="27432" marB="27432" anchor="ctr"/>
-                </a:tc>
-                <a:tc>
-                  <a:txBody>
-                    <a:bodyPr/>
-                    <a:lstStyle/>
-                    <a:p>
-                      <a:pPr algn="ctr"/>
-                      <a:r>
-                        <a:rPr lang="es-CL" sz="1050" b="1" dirty="0">
-                          <a:solidFill>
-                            <a:schemeClr val="tx2"/>
-                          </a:solidFill>
-                        </a:rPr>
-                        <a:t>8</a:t>
-                      </a:r>
-                    </a:p>
-                  </a:txBody>
-                  <a:tcPr marL="45720" marR="45720" marT="27432" marB="27432" anchor="ctr"/>
-                </a:tc>
-                <a:tc>
-                  <a:txBody>
-                    <a:bodyPr/>
-                    <a:lstStyle/>
-                    <a:p>
-                      <a:pPr/>
-                      <a:r>
-                        <a:rPr lang="es-CL" sz="1050" dirty="0">
-                          <a:solidFill>
-                            <a:schemeClr val="tx2"/>
-                          </a:solidFill>
-                        </a:rPr>
-                        <a:t>7.6.2 · 7.6.2.1 · 7.6.2.2 · 7.6.2.3 · 7.6.2.4 · 7.6.3 · 7.6.3.1 · 7.7.3</a:t>
-                      </a:r>
-                    </a:p>
-                  </a:txBody>
-                  <a:tcPr marL="45720" marR="45720" marT="27432" marB="27432" anchor="ctr"/>
-                </a:tc>
-                <a:tc>
-                  <a:txBody>
-                    <a:bodyPr/>
-                    <a:lstStyle/>
-                    <a:p>
-                      <a:pPr/>
-                      <a:r>
-                        <a:rPr lang="es-CL" sz="1050" dirty="0">
-                          <a:solidFill>
-                            <a:schemeClr val="tx2"/>
-                          </a:solidFill>
-                        </a:rPr>
-                        <a:t>Generalista de Personas y relaciones laborales · prevención de riesgos y tecnología · Gerencia de Personas</a:t>
-                      </a:r>
-                    </a:p>
-                  </a:txBody>
-                  <a:tcPr marL="45720" marR="45720" marT="27432" marB="27432" anchor="ctr"/>
-                </a:tc>
-              </a:tr>
-              <a:tr h="620">
-                <a:tc>
-                  <a:txBody>
-                    <a:bodyPr/>
-                    <a:lstStyle/>
-                    <a:p>
-                      <a:pPr/>
-                      <a:r>
-                        <a:rPr lang="es-CL" sz="1050" b="1" dirty="0">
-                          <a:solidFill>
-                            <a:schemeClr val="tx2"/>
-                          </a:solidFill>
-                        </a:rPr>
-                        <a:t>F18 Datos y gobernanza</a:t>
-                      </a:r>
-                    </a:p>
-                  </a:txBody>
-                  <a:tcPr marL="45720" marR="45720" marT="27432" marB="27432" anchor="ctr">
-                    <a:solidFill>
-                      <a:srgbClr val="F2F2F2"/>
-                    </a:solidFill>
-                  </a:tcPr>
-                </a:tc>
-                <a:tc>
-                  <a:txBody>
-                    <a:bodyPr/>
-                    <a:lstStyle/>
-                    <a:p>
-                      <a:pPr algn="ctr"/>
-                      <a:r>
-                        <a:rPr lang="es-CL" sz="1050" b="1" dirty="0">
-                          <a:solidFill>
-                            <a:schemeClr val="tx2"/>
-                          </a:solidFill>
-                        </a:rPr>
-                        <a:t>2</a:t>
-                      </a:r>
-                    </a:p>
-                  </a:txBody>
-                  <a:tcPr marL="45720" marR="45720" marT="27432" marB="27432" anchor="ctr">
-                    <a:solidFill>
-                      <a:srgbClr val="F2F2F2"/>
-                    </a:solidFill>
-                  </a:tcPr>
-                </a:tc>
-                <a:tc>
-                  <a:txBody>
-                    <a:bodyPr/>
-                    <a:lstStyle/>
-                    <a:p>
-                      <a:pPr/>
-                      <a:r>
-                        <a:rPr lang="es-CL" sz="1050" dirty="0">
-                          <a:solidFill>
-                            <a:schemeClr val="tx2"/>
-                          </a:solidFill>
-                        </a:rPr>
-                        <a:t>7.7.2 · 7.7.9</a:t>
-                      </a:r>
-                    </a:p>
-                  </a:txBody>
-                  <a:tcPr marL="45720" marR="45720" marT="27432" marB="27432" anchor="ctr">
-                    <a:solidFill>
-                      <a:srgbClr val="F2F2F2"/>
-                    </a:solidFill>
-                  </a:tcPr>
-                </a:tc>
-                <a:tc>
-                  <a:txBody>
-                    <a:bodyPr/>
-                    <a:lstStyle/>
-                    <a:p>
-                      <a:pPr/>
-                      <a:r>
-                        <a:rPr lang="es-CL" sz="1050" dirty="0">
-                          <a:solidFill>
-                            <a:schemeClr val="tx2"/>
-                          </a:solidFill>
-                        </a:rPr>
-                        <a:t>Por definir</a:t>
-                      </a:r>
-                    </a:p>
-                  </a:txBody>
-                  <a:tcPr marL="45720" marR="45720" marT="27432" marB="27432" anchor="ctr">
-                    <a:solidFill>
-                      <a:srgbClr val="F2F2F2"/>
-                    </a:solidFill>
-                  </a:tcPr>
-                </a:tc>
-              </a:tr>
-            </a:tbl>
-          </a:graphicData>
-        </a:graphic>
-      </p:graphicFrame>
-      <p:sp>
-        <p:nvSpPr>
-          <p:cNvPr id="9" name="8 CuadroTexto"/>
-          <p:cNvSpPr txBox="1"/>
-          <p:nvPr/>
-        </p:nvSpPr>
-        <p:spPr>
-          <a:xfrm>
-            <a:off x="323528" y="5300000"/>
-            <a:ext cx="8352928" cy="1000000"/>
-          </a:xfrm>
-          <a:prstGeom prst="rect">
-            <a:avLst/>
-          </a:prstGeom>
-          <a:noFill/>
-        </p:spPr>
-        <p:txBody>
-          <a:bodyPr wrap="square" lIns="91396" tIns="45697" rIns="91396" bIns="45697" rtlCol="0">
-            <a:spAutoFit/>
-          </a:bodyPr>
-          <a:lstStyle/>
-          <a:p>
-            <a:pPr marL="228600" indent="-228600">
-              <a:buFont typeface="Wingdings" pitchFamily="2" charset="2"/>
-              <a:buChar char="q"/>
-            </a:pPr>
-            <a:r>
-              <a:rPr lang="es-CL" sz="1250" dirty="0">
-                <a:solidFill>
-                  <a:schemeClr val="tx2"/>
-                </a:solidFill>
-              </a:rPr>
-              <a:t>Una brecha </a:t>
-            </a:r>
-            <a:r>
-              <a:rPr lang="es-CL" sz="1250" b="1" dirty="0">
-                <a:solidFill>
-                  <a:schemeClr val="tx2"/>
-                </a:solidFill>
-              </a:rPr>
-              <a:t>no significa que la compañía no ejecute la actividad</a:t>
-            </a:r>
-            <a:r>
-              <a:rPr lang="es-CL" sz="1250" dirty="0">
-                <a:solidFill>
-                  <a:schemeClr val="tx2"/>
-                </a:solidFill>
-              </a:rPr>
-              <a:t>, sino que todavía no está descrito cómo la ejecuta.</a:t>
-            </a:r>
-            <a:endParaRPr lang="es-CL" sz="1250"/>
-          </a:p>
-          <a:p>
-            <a:pPr marL="228600" indent="-228600">
-              <a:spcBef>
-                <a:spcPts val="300"/>
-              </a:spcBef>
-              <a:buFont typeface="Wingdings" pitchFamily="2" charset="2"/>
-              <a:buChar char="q"/>
-            </a:pPr>
-            <a:r>
-              <a:rPr lang="es-CL" sz="1250" dirty="0">
-                <a:solidFill>
-                  <a:schemeClr val="tx2"/>
-                </a:solidFill>
-              </a:rPr>
-              <a:t>En </a:t>
-            </a:r>
-            <a:r>
-              <a:rPr lang="es-CL" sz="1250" b="1" dirty="0">
-                <a:solidFill>
-                  <a:schemeClr val="tx2"/>
-                </a:solidFill>
-              </a:rPr>
-              <a:t>8 de las 12</a:t>
-            </a:r>
-            <a:r>
-              <a:rPr lang="es-CL" sz="1250" dirty="0">
-                <a:solidFill>
-                  <a:schemeClr val="tx2"/>
-                </a:solidFill>
-              </a:rPr>
-              <a:t> el APQC PCF no desciende a un nivel accionable: el marco de referencia </a:t>
-            </a:r>
-            <a:r>
-              <a:rPr lang="es-CL" sz="1250" b="1" dirty="0">
-                <a:solidFill>
-                  <a:schemeClr val="tx2"/>
-                </a:solidFill>
-              </a:rPr>
-              <a:t>no sustituye</a:t>
-            </a:r>
-            <a:r>
-              <a:rPr lang="es-CL" sz="1250" dirty="0">
-                <a:solidFill>
-                  <a:schemeClr val="tx2"/>
-                </a:solidFill>
-              </a:rPr>
-              <a:t> el levantamiento en terreno.</a:t>
-            </a:r>
-            <a:endParaRPr lang="es-CL" sz="1250"/>
-          </a:p>
-        </p:txBody>
-      </p:sp>
-    </p:spTree>
-  </p:cSld>
-  <p:clrMapOvr>
-    <a:masterClrMapping/>
-  </p:clrMapOvr>
-</p:sld>
-</file>
-
-<file path=ppt/slides/slide13.xml><?xml version="1.0" encoding="utf-8"?>
-<p:sld xmlns:a="http://schemas.openxmlformats.org/drawingml/2006/main" xmlns:r="http://schemas.openxmlformats.org/officeDocument/2006/relationships" xmlns:p="http://schemas.openxmlformats.org/presentationml/2006/main">
-  <p:cSld>
-    <p:spTree>
-      <p:nvGrpSpPr>
-        <p:cNvPr id="1" name=""/>
-        <p:cNvGrpSpPr/>
-        <p:nvPr/>
-      </p:nvGrpSpPr>
-      <p:grpSpPr>
-        <a:xfrm>
-          <a:off x="0" y="0"/>
-          <a:ext cx="0" cy="0"/>
-          <a:chOff x="0" y="0"/>
-          <a:chExt cx="0" cy="0"/>
-        </a:xfrm>
-      </p:grpSpPr>
-      <p:sp>
-        <p:nvSpPr>
-          <p:cNvPr id="5" name="4 CuadroTexto"/>
-          <p:cNvSpPr txBox="1"/>
-          <p:nvPr/>
-        </p:nvSpPr>
-        <p:spPr>
-          <a:xfrm>
-            <a:off x="5675867" y="340990"/>
-            <a:ext cx="2337602" cy="252106"/>
-          </a:xfrm>
-          <a:prstGeom prst="rect">
-            <a:avLst/>
-          </a:prstGeom>
-          <a:noFill/>
-        </p:spPr>
-        <p:txBody>
-          <a:bodyPr wrap="square" lIns="82014" tIns="45697" rIns="82014" bIns="45697" rtlCol="0">
-            <a:spAutoFit/>
-          </a:bodyPr>
-          <a:lstStyle/>
-          <a:p>
-            <a:pPr algn="ctr"/>
-            <a:r>
-              <a:rPr lang="es-CL" sz="1000" b="1" dirty="0">
-                <a:solidFill>
-                  <a:prstClr val="black">
-                    <a:lumMod val="65000"/>
-                    <a:lumOff val="35000"/>
-                  </a:prstClr>
-                </a:solidFill>
-              </a:rPr>
-              <a:t>Sistema de gestión de riesgos MP8 y MP21</a:t>
-            </a:r>
-            <a:endParaRPr lang="es-CL" sz="1000"/>
-          </a:p>
-        </p:txBody>
-      </p:sp>
-      <p:sp>
-        <p:nvSpPr>
-          <p:cNvPr id="4" name="3 CuadroTexto"/>
-          <p:cNvSpPr txBox="1"/>
-          <p:nvPr/>
-        </p:nvSpPr>
-        <p:spPr>
-          <a:xfrm>
-            <a:off x="5740803" y="1034218"/>
-            <a:ext cx="2207735" cy="221341"/>
-          </a:xfrm>
-          <a:prstGeom prst="rect">
-            <a:avLst/>
-          </a:prstGeom>
-          <a:noFill/>
-        </p:spPr>
-        <p:txBody>
-          <a:bodyPr wrap="square" lIns="82014" tIns="45697" rIns="82014" bIns="45697" rtlCol="0">
-            <a:spAutoFit/>
-          </a:bodyPr>
-          <a:lstStyle/>
-          <a:p>
-            <a:pPr algn="ctr"/>
-            <a:r>
-              <a:rPr lang="es-CL" sz="900" dirty="0">
-                <a:solidFill>
-                  <a:prstClr val="white">
-                    <a:lumMod val="50000"/>
-                  </a:prstClr>
-                </a:solidFill>
-              </a:rPr>
-              <a:t>| </a:t>
-            </a:r>
-            <a:r>
-              <a:rPr lang="es-CL" sz="900" b="1" dirty="0">
-                <a:solidFill>
-                  <a:srgbClr val="1F497D">
-                    <a:lumMod val="75000"/>
-                  </a:srgbClr>
-                </a:solidFill>
-              </a:rPr>
-              <a:t>Estudiante: </a:t>
-            </a:r>
-            <a:r>
-              <a:rPr lang="es-CL" sz="900" dirty="0">
-                <a:solidFill>
-                  <a:srgbClr val="1F497D">
-                    <a:lumMod val="75000"/>
-                  </a:srgbClr>
-                </a:solidFill>
-              </a:rPr>
-              <a:t>Bastián Darwit Vera</a:t>
-            </a:r>
-            <a:r>
-              <a:rPr lang="es-CL" sz="900" dirty="0">
-                <a:solidFill>
-                  <a:prstClr val="white">
-                    <a:lumMod val="50000"/>
-                  </a:prstClr>
-                </a:solidFill>
-              </a:rPr>
-              <a:t> |</a:t>
-            </a:r>
-          </a:p>
-        </p:txBody>
-      </p:sp>
-      <p:sp>
-        <p:nvSpPr>
-          <p:cNvPr id="6" name="5 CuadroTexto"/>
-          <p:cNvSpPr txBox="1"/>
-          <p:nvPr/>
-        </p:nvSpPr>
-        <p:spPr>
-          <a:xfrm>
-            <a:off x="805865" y="1538381"/>
-            <a:ext cx="7077739" cy="852256"/>
-          </a:xfrm>
-          <a:prstGeom prst="rect">
-            <a:avLst/>
-          </a:prstGeom>
-          <a:noFill/>
-        </p:spPr>
-        <p:txBody>
-          <a:bodyPr wrap="square" lIns="82014" tIns="45697" rIns="82014" bIns="45697" rtlCol="0">
-            <a:spAutoFit/>
-          </a:bodyPr>
-          <a:lstStyle/>
-          <a:p>
-            <a:r>
-              <a:rPr lang="es-CL" sz="2000" b="1" dirty="0">
-                <a:solidFill>
-                  <a:prstClr val="black">
-                    <a:lumMod val="65000"/>
-                    <a:lumOff val="35000"/>
-                  </a:prstClr>
-                </a:solidFill>
-              </a:rPr>
-              <a:t>Resultados · Hallazgos y estado de los indicadores</a:t>
-            </a:r>
-            <a:endParaRPr lang="es-CL" sz="2000"/>
-          </a:p>
-        </p:txBody>
-      </p:sp>
-      <p:sp>
-        <p:nvSpPr>
-          <p:cNvPr id="8" name="7 CuadroTexto"/>
-          <p:cNvSpPr txBox="1"/>
-          <p:nvPr/>
-        </p:nvSpPr>
-        <p:spPr>
-          <a:xfrm>
-            <a:off x="323528" y="2450000"/>
-            <a:ext cx="8352928" cy="2100000"/>
-          </a:xfrm>
-          <a:prstGeom prst="rect">
-            <a:avLst/>
-          </a:prstGeom>
-          <a:noFill/>
-        </p:spPr>
-        <p:txBody>
-          <a:bodyPr wrap="square" lIns="91396" tIns="45697" rIns="91396" bIns="45697" rtlCol="0">
-            <a:spAutoFit/>
-          </a:bodyPr>
-          <a:lstStyle/>
-          <a:p>
-            <a:r>
-              <a:rPr lang="es-CL" sz="1400" b="1" dirty="0">
-                <a:solidFill>
-                  <a:srgbClr val="1F497D">
-                    <a:lumMod val="75000"/>
-                  </a:srgbClr>
-                </a:solidFill>
-              </a:rPr>
-              <a:t>Hallazgos del contraste entre fuentes</a:t>
-            </a:r>
-            <a:endParaRPr lang="es-CL" sz="1400"/>
-          </a:p>
-          <a:p>
-            <a:pPr marL="228600" indent="-228600">
-              <a:buFont typeface="Wingdings" pitchFamily="2" charset="2"/>
-              <a:buChar char="q"/>
-            </a:pPr>
-            <a:r>
-              <a:rPr lang="es-CL" sz="1200" b="1" dirty="0">
-                <a:solidFill>
-                  <a:schemeClr val="tx2"/>
-                </a:solidFill>
-              </a:rPr>
-              <a:t>36 pasos que la organización ejecuta habitualmente no constan en ningún procedimiento vigente</a:t>
-            </a:r>
-            <a:r>
-              <a:rPr lang="es-CL" sz="1200" dirty="0">
-                <a:solidFill>
-                  <a:schemeClr val="tx2"/>
-                </a:solidFill>
-              </a:rPr>
-              <a:t>, entre ellos la priorización de necesidades de dotación, la coordinación del examen preocupacional, la validación de la propuesta de renta y la facilitación de los comités de calibración. Incorporarlos es un aporte directo del trabajo.</a:t>
-            </a:r>
-            <a:endParaRPr lang="es-CL" sz="1200"/>
-          </a:p>
-          <a:p>
-            <a:pPr marL="228600" indent="-228600">
-              <a:spcBef>
-                <a:spcPts val="350"/>
-              </a:spcBef>
-              <a:buFont typeface="Wingdings" pitchFamily="2" charset="2"/>
-              <a:buChar char="q"/>
-            </a:pPr>
-            <a:r>
-              <a:rPr lang="es-CL" sz="1200" b="1" dirty="0">
-                <a:solidFill>
-                  <a:schemeClr val="tx2"/>
-                </a:solidFill>
-              </a:rPr>
-              <a:t>Tensión detectada en gestión del desempeño:</a:t>
-            </a:r>
-            <a:r>
-              <a:rPr lang="es-CL" sz="1200" dirty="0">
-                <a:solidFill>
-                  <a:schemeClr val="tx2"/>
-                </a:solidFill>
-              </a:rPr>
-              <a:t> el procedimiento sitúa la fijación de objetivos en los primeros meses del año y el registro de entrevista distribuye el ciclo por rol a lo largo del año. Debe resolverse con el dueño de proceso antes de consolidar el manual.</a:t>
-            </a:r>
-            <a:endParaRPr lang="es-CL" sz="1200"/>
-          </a:p>
-        </p:txBody>
-      </p:sp>
-      <p:graphicFrame>
-        <p:nvGraphicFramePr>
-          <p:cNvPr id="20" name="Tabla 20"/>
-          <p:cNvGraphicFramePr>
-            <a:graphicFrameLocks noGrp="1"/>
-          </p:cNvGraphicFramePr>
-          <p:nvPr/>
-        </p:nvGraphicFramePr>
-        <p:xfrm>
-          <a:off x="323528" y="4700000"/>
-          <a:ext cx="8352928" cy="1400000"/>
-        </p:xfrm>
-        <a:graphic>
-          <a:graphicData uri="http://schemas.openxmlformats.org/drawingml/2006/table">
-            <a:tbl>
-              <a:tblPr firstRow="1" bandRow="1"/>
-              <a:tblGrid>
-                <a:gridCol w="3000000"/>
-                <a:gridCol w="2600000"/>
-                <a:gridCol w="1500000"/>
-                <a:gridCol w="1252928"/>
-              </a:tblGrid>
-              <a:tr h="380">
-                <a:tc>
-                  <a:txBody>
-                    <a:bodyPr/>
-                    <a:lstStyle/>
-                    <a:p>
-                      <a:pPr/>
-                      <a:r>
-                        <a:rPr lang="es-CL" sz="950" b="1" dirty="0">
-                          <a:solidFill>
-                            <a:srgbClr val="FFFFFF"/>
-                          </a:solidFill>
-                        </a:rPr>
-                        <a:t>Medición</a:t>
-                      </a:r>
-                    </a:p>
-                  </a:txBody>
-                  <a:tcPr marL="45720" marR="45720" marT="27432" marB="27432" anchor="ctr">
-                    <a:solidFill>
-                      <a:srgbClr val="1F497D"/>
-                    </a:solidFill>
-                  </a:tcPr>
-                </a:tc>
-                <a:tc>
-                  <a:txBody>
-                    <a:bodyPr/>
-                    <a:lstStyle/>
-                    <a:p>
-                      <a:pPr/>
-                      <a:r>
-                        <a:rPr lang="es-CL" sz="950" b="1" dirty="0">
-                          <a:solidFill>
-                            <a:srgbClr val="FFFFFF"/>
-                          </a:solidFill>
-                        </a:rPr>
-                        <a:t>Qué mide</a:t>
-                      </a:r>
-                    </a:p>
-                  </a:txBody>
-                  <a:tcPr marL="45720" marR="45720" marT="27432" marB="27432" anchor="ctr">
-                    <a:solidFill>
-                      <a:srgbClr val="1F497D"/>
-                    </a:solidFill>
-                  </a:tcPr>
-                </a:tc>
-                <a:tc>
-                  <a:txBody>
-                    <a:bodyPr/>
-                    <a:lstStyle/>
-                    <a:p>
-                      <a:pPr algn="ctr"/>
-                      <a:r>
-                        <a:rPr lang="es-CL" sz="950" b="1" dirty="0">
-                          <a:solidFill>
-                            <a:srgbClr val="FFFFFF"/>
-                          </a:solidFill>
-                        </a:rPr>
-                        <a:t>MP8</a:t>
-                      </a:r>
-                    </a:p>
-                  </a:txBody>
-                  <a:tcPr marL="45720" marR="45720" marT="27432" marB="27432" anchor="ctr">
-                    <a:solidFill>
-                      <a:srgbClr val="1F497D"/>
-                    </a:solidFill>
-                  </a:tcPr>
-                </a:tc>
-                <a:tc>
-                  <a:txBody>
-                    <a:bodyPr/>
-                    <a:lstStyle/>
-                    <a:p>
-                      <a:pPr algn="ctr"/>
-                      <a:r>
-                        <a:rPr lang="es-CL" sz="950" b="1" dirty="0">
-                          <a:solidFill>
-                            <a:srgbClr val="FFFFFF"/>
-                          </a:solidFill>
-                        </a:rPr>
-                        <a:t>Meta</a:t>
-                      </a:r>
-                    </a:p>
-                  </a:txBody>
-                  <a:tcPr marL="45720" marR="45720" marT="27432" marB="27432" anchor="ctr">
-                    <a:solidFill>
-                      <a:srgbClr val="1F497D"/>
-                    </a:solidFill>
-                  </a:tcPr>
-                </a:tc>
-              </a:tr>
-              <a:tr h="500">
-                <a:tc>
-                  <a:txBody>
-                    <a:bodyPr/>
-                    <a:lstStyle/>
-                    <a:p>
-                      <a:pPr/>
-                      <a:r>
-                        <a:rPr lang="es-CL" sz="1050" b="1" dirty="0">
-                          <a:solidFill>
-                            <a:schemeClr val="tx2"/>
-                          </a:solidFill>
-                        </a:rPr>
-                        <a:t>Cobertura de trazabilidad del flujo</a:t>
-                      </a:r>
-                    </a:p>
-                  </a:txBody>
-                  <a:tcPr marL="45720" marR="45720" marT="27432" marB="27432" anchor="ctr">
-                    <a:solidFill>
-                      <a:srgbClr val="F2F2F2"/>
-                    </a:solidFill>
-                  </a:tcPr>
-                </a:tc>
-                <a:tc>
-                  <a:txBody>
-                    <a:bodyPr/>
-                    <a:lstStyle/>
-                    <a:p>
-                      <a:pPr/>
-                      <a:r>
-                        <a:rPr lang="es-CL" sz="1050" dirty="0">
-                          <a:solidFill>
-                            <a:schemeClr val="tx2"/>
-                          </a:solidFill>
-                        </a:rPr>
-                        <a:t>Pasos con respaldo en documento, entrevista o PCF</a:t>
-                      </a:r>
-                    </a:p>
-                  </a:txBody>
-                  <a:tcPr marL="45720" marR="45720" marT="27432" marB="27432" anchor="ctr">
-                    <a:solidFill>
-                      <a:srgbClr val="F2F2F2"/>
-                    </a:solidFill>
-                  </a:tcPr>
-                </a:tc>
-                <a:tc>
-                  <a:txBody>
-                    <a:bodyPr/>
-                    <a:lstStyle/>
-                    <a:p>
-                      <a:pPr algn="ctr"/>
-                      <a:r>
-                        <a:rPr lang="es-CL" sz="1050" b="1" dirty="0">
-                          <a:solidFill>
-                            <a:schemeClr val="tx2"/>
-                          </a:solidFill>
-                        </a:rPr>
-                        <a:t>222 de 234 · 94,9 %</a:t>
-                      </a:r>
-                    </a:p>
-                  </a:txBody>
-                  <a:tcPr marL="45720" marR="45720" marT="27432" marB="27432" anchor="ctr">
-                    <a:solidFill>
-                      <a:srgbClr val="F2F2F2"/>
-                    </a:solidFill>
-                  </a:tcPr>
-                </a:tc>
-                <a:tc>
-                  <a:txBody>
-                    <a:bodyPr/>
-                    <a:lstStyle/>
-                    <a:p>
-                      <a:pPr algn="ctr"/>
-                      <a:r>
-                        <a:rPr lang="es-CL" sz="1050" dirty="0">
-                          <a:solidFill>
-                            <a:schemeClr val="tx2"/>
-                          </a:solidFill>
-                        </a:rPr>
-                        <a:t>100 %</a:t>
-                      </a:r>
-                    </a:p>
-                  </a:txBody>
-                  <a:tcPr marL="45720" marR="45720" marT="27432" marB="27432" anchor="ctr">
-                    <a:solidFill>
-                      <a:srgbClr val="F2F2F2"/>
-                    </a:solidFill>
-                  </a:tcPr>
-                </a:tc>
-              </a:tr>
-              <a:tr h="500">
-                <a:tc>
-                  <a:txBody>
-                    <a:bodyPr/>
-                    <a:lstStyle/>
-                    <a:p>
-                      <a:pPr/>
-                      <a:r>
-                        <a:rPr lang="es-CL" sz="1050" b="1" dirty="0">
-                          <a:solidFill>
-                            <a:schemeClr val="tx2"/>
-                          </a:solidFill>
-                        </a:rPr>
-                        <a:t>CAP · cobertura de arquitectura</a:t>
-                      </a:r>
-                    </a:p>
-                  </a:txBody>
-                  <a:tcPr marL="45720" marR="45720" marT="27432" marB="27432" anchor="ctr"/>
-                </a:tc>
-                <a:tc>
-                  <a:txBody>
-                    <a:bodyPr/>
-                    <a:lstStyle/>
-                    <a:p>
-                      <a:pPr/>
-                      <a:r>
-                        <a:rPr lang="es-CL" sz="1050" dirty="0">
-                          <a:solidFill>
-                            <a:schemeClr val="tx2"/>
-                          </a:solidFill>
-                        </a:rPr>
-                        <a:t>Elementos documentados en los cinco niveles del MGO</a:t>
-                      </a:r>
-                    </a:p>
-                  </a:txBody>
-                  <a:tcPr marL="45720" marR="45720" marT="27432" marB="27432" anchor="ctr"/>
-                </a:tc>
-                <a:tc>
-                  <a:txBody>
-                    <a:bodyPr/>
-                    <a:lstStyle/>
-                    <a:p>
-                      <a:pPr algn="ctr"/>
-                      <a:r>
-                        <a:rPr lang="es-CL" sz="1050" b="1" dirty="0">
-                          <a:solidFill>
-                            <a:schemeClr val="tx2"/>
-                          </a:solidFill>
-                        </a:rPr>
-                        <a:t>0 %</a:t>
-                      </a:r>
-                    </a:p>
-                  </a:txBody>
-                  <a:tcPr marL="45720" marR="45720" marT="27432" marB="27432" anchor="ctr"/>
-                </a:tc>
-                <a:tc>
-                  <a:txBody>
-                    <a:bodyPr/>
-                    <a:lstStyle/>
-                    <a:p>
-                      <a:pPr algn="ctr"/>
-                      <a:r>
-                        <a:rPr lang="es-CL" sz="1050" dirty="0">
-                          <a:solidFill>
-                            <a:schemeClr val="tx2"/>
-                          </a:solidFill>
-                        </a:rPr>
-                        <a:t>100 %</a:t>
-                      </a:r>
-                    </a:p>
-                  </a:txBody>
-                  <a:tcPr marL="45720" marR="45720" marT="27432" marB="27432" anchor="ctr"/>
-                </a:tc>
-              </a:tr>
-            </a:tbl>
-          </a:graphicData>
-        </a:graphic>
-      </p:graphicFrame>
-      <p:sp>
-        <p:nvSpPr>
-          <p:cNvPr id="11" name="10 CuadroTexto"/>
-          <p:cNvSpPr txBox="1"/>
-          <p:nvPr/>
-        </p:nvSpPr>
-        <p:spPr>
-          <a:xfrm>
-            <a:off x="323528" y="6200000"/>
-            <a:ext cx="8352928" cy="450000"/>
-          </a:xfrm>
-          <a:prstGeom prst="rect">
-            <a:avLst/>
-          </a:prstGeom>
-          <a:noFill/>
-        </p:spPr>
-        <p:txBody>
-          <a:bodyPr wrap="square" lIns="91396" tIns="45697" rIns="91396" bIns="45697" rtlCol="0">
-            <a:spAutoFit/>
-          </a:bodyPr>
-          <a:lstStyle/>
-          <a:p>
-            <a:r>
-              <a:rPr lang="es-CL" sz="1000" i="1" dirty="0">
-                <a:solidFill>
-                  <a:prstClr val="black">
-                    <a:lumMod val="65000"/>
-                    <a:lumOff val="35000"/>
-                  </a:prstClr>
-                </a:solidFill>
-              </a:rPr>
-              <a:t>El CAP en 0 % no expresa ausencia de avance: mide la segmentación jerárquica, que es la etapa siguiente.</a:t>
-            </a:r>
-            <a:endParaRPr lang="es-CL" sz="1000"/>
-          </a:p>
-        </p:txBody>
-      </p:sp>
-    </p:spTree>
-  </p:cSld>
-  <p:clrMapOvr>
-    <a:masterClrMapping/>
-  </p:clrMapOvr>
-</p:sld>
-</file>
-
-<file path=ppt/slides/slide14.xml><?xml version="1.0" encoding="utf-8"?>
-<p:sld xmlns:a="http://schemas.openxmlformats.org/drawingml/2006/main" xmlns:r="http://schemas.openxmlformats.org/officeDocument/2006/relationships" xmlns:p="http://schemas.openxmlformats.org/presentationml/2006/main">
-  <p:cSld>
-    <p:spTree>
-      <p:nvGrpSpPr>
-        <p:cNvPr id="1" name=""/>
-        <p:cNvGrpSpPr/>
-        <p:nvPr/>
-      </p:nvGrpSpPr>
-      <p:grpSpPr>
-        <a:xfrm>
-          <a:off x="0" y="0"/>
-          <a:ext cx="0" cy="0"/>
-          <a:chOff x="0" y="0"/>
-          <a:chExt cx="0" cy="0"/>
-        </a:xfrm>
-      </p:grpSpPr>
-      <p:sp>
-        <p:nvSpPr>
-          <p:cNvPr id="5" name="4 CuadroTexto"/>
-          <p:cNvSpPr txBox="1"/>
-          <p:nvPr/>
-        </p:nvSpPr>
-        <p:spPr>
-          <a:xfrm>
-            <a:off x="5675867" y="340990"/>
-            <a:ext cx="2337602" cy="252106"/>
-          </a:xfrm>
-          <a:prstGeom prst="rect">
-            <a:avLst/>
-          </a:prstGeom>
-          <a:noFill/>
-        </p:spPr>
-        <p:txBody>
-          <a:bodyPr wrap="square" lIns="82014" tIns="45697" rIns="82014" bIns="45697" rtlCol="0">
-            <a:spAutoFit/>
-          </a:bodyPr>
-          <a:lstStyle/>
-          <a:p>
-            <a:pPr algn="ctr"/>
-            <a:r>
-              <a:rPr lang="es-CL" sz="1000" b="1" dirty="0">
-                <a:solidFill>
-                  <a:prstClr val="black">
-                    <a:lumMod val="65000"/>
-                    <a:lumOff val="35000"/>
-                  </a:prstClr>
-                </a:solidFill>
-              </a:rPr>
-              <a:t>Sistema de gestión de riesgos MP8 y MP21</a:t>
-            </a:r>
-            <a:endParaRPr lang="es-CL" sz="1000"/>
-          </a:p>
-        </p:txBody>
-      </p:sp>
-      <p:sp>
-        <p:nvSpPr>
-          <p:cNvPr id="4" name="3 CuadroTexto"/>
-          <p:cNvSpPr txBox="1"/>
-          <p:nvPr/>
-        </p:nvSpPr>
-        <p:spPr>
-          <a:xfrm>
-            <a:off x="5740803" y="1034218"/>
-            <a:ext cx="2207735" cy="221341"/>
-          </a:xfrm>
-          <a:prstGeom prst="rect">
-            <a:avLst/>
-          </a:prstGeom>
-          <a:noFill/>
-        </p:spPr>
-        <p:txBody>
-          <a:bodyPr wrap="square" lIns="82014" tIns="45697" rIns="82014" bIns="45697" rtlCol="0">
-            <a:spAutoFit/>
-          </a:bodyPr>
-          <a:lstStyle/>
-          <a:p>
-            <a:pPr algn="ctr"/>
-            <a:r>
-              <a:rPr lang="es-CL" sz="900" dirty="0">
-                <a:solidFill>
-                  <a:prstClr val="white">
-                    <a:lumMod val="50000"/>
-                  </a:prstClr>
-                </a:solidFill>
-              </a:rPr>
-              <a:t>| </a:t>
-            </a:r>
-            <a:r>
-              <a:rPr lang="es-CL" sz="900" b="1" dirty="0">
-                <a:solidFill>
-                  <a:srgbClr val="1F497D">
-                    <a:lumMod val="75000"/>
-                  </a:srgbClr>
-                </a:solidFill>
-              </a:rPr>
-              <a:t>Estudiante: </a:t>
-            </a:r>
-            <a:r>
-              <a:rPr lang="es-CL" sz="900" dirty="0">
-                <a:solidFill>
-                  <a:srgbClr val="1F497D">
-                    <a:lumMod val="75000"/>
-                  </a:srgbClr>
-                </a:solidFill>
-              </a:rPr>
-              <a:t>Bastián Darwit Vera</a:t>
-            </a:r>
-            <a:r>
-              <a:rPr lang="es-CL" sz="900" dirty="0">
-                <a:solidFill>
-                  <a:prstClr val="white">
-                    <a:lumMod val="50000"/>
-                  </a:prstClr>
-                </a:solidFill>
-              </a:rPr>
-              <a:t> |</a:t>
-            </a:r>
-          </a:p>
-        </p:txBody>
-      </p:sp>
-      <p:sp>
-        <p:nvSpPr>
-          <p:cNvPr id="6" name="5 CuadroTexto"/>
-          <p:cNvSpPr txBox="1"/>
-          <p:nvPr/>
-        </p:nvSpPr>
-        <p:spPr>
-          <a:xfrm>
-            <a:off x="805865" y="1538381"/>
-            <a:ext cx="7077739" cy="852256"/>
-          </a:xfrm>
-          <a:prstGeom prst="rect">
-            <a:avLst/>
-          </a:prstGeom>
-          <a:noFill/>
-        </p:spPr>
-        <p:txBody>
-          <a:bodyPr wrap="square" lIns="82014" tIns="45697" rIns="82014" bIns="45697" rtlCol="0">
-            <a:spAutoFit/>
-          </a:bodyPr>
-          <a:lstStyle/>
-          <a:p>
-            <a:r>
-              <a:rPr lang="es-CL" sz="2200" b="1" dirty="0">
-                <a:solidFill>
-                  <a:prstClr val="black">
-                    <a:lumMod val="65000"/>
-                    <a:lumOff val="35000"/>
-                  </a:prstClr>
-                </a:solidFill>
-              </a:rPr>
-              <a:t>Próximos pasos</a:t>
-            </a:r>
-            <a:endParaRPr lang="es-CL" sz="2200"/>
-          </a:p>
-        </p:txBody>
-      </p:sp>
-      <p:sp>
-        <p:nvSpPr>
-          <p:cNvPr id="8" name="7 CuadroTexto"/>
-          <p:cNvSpPr txBox="1"/>
-          <p:nvPr/>
-        </p:nvSpPr>
-        <p:spPr>
-          <a:xfrm>
-            <a:off x="323528" y="2500000"/>
-            <a:ext cx="8352928" cy="3300000"/>
-          </a:xfrm>
-          <a:prstGeom prst="rect">
-            <a:avLst/>
-          </a:prstGeom>
-          <a:noFill/>
-        </p:spPr>
-        <p:txBody>
-          <a:bodyPr wrap="square" lIns="91396" tIns="45697" rIns="91396" bIns="45697" rtlCol="0">
-            <a:spAutoFit/>
-          </a:bodyPr>
-          <a:lstStyle/>
-          <a:p>
-            <a:pPr marL="228600" indent="-228600">
-              <a:buFont typeface="Wingdings" pitchFamily="2" charset="2"/>
-              <a:buChar char="q"/>
-            </a:pPr>
-            <a:r>
-              <a:rPr lang="es-CL" sz="1300" b="1" dirty="0">
-                <a:solidFill>
-                  <a:schemeClr val="tx2"/>
-                </a:solidFill>
-              </a:rPr>
-              <a:t>Semanas 6 y 7 · Segmentación jerárquica de MP8.</a:t>
-            </a:r>
-            <a:r>
-              <a:rPr lang="es-CL" sz="1300" dirty="0">
-                <a:solidFill>
-                  <a:schemeClr val="tx2"/>
-                </a:solidFill>
-              </a:rPr>
-              <a:t> Derivar del flujo levantado los cinco niveles del MGO, con lo que comienza a medirse el CAP.</a:t>
-            </a:r>
-            <a:endParaRPr lang="es-CL" sz="1300"/>
-          </a:p>
-          <a:p>
-            <a:pPr marL="228600" indent="-228600">
-              <a:spcBef>
-                <a:spcPts val="450"/>
-              </a:spcBef>
-              <a:buFont typeface="Wingdings" pitchFamily="2" charset="2"/>
-              <a:buChar char="q"/>
-            </a:pPr>
-            <a:r>
-              <a:rPr lang="es-CL" sz="1300" b="1" dirty="0">
-                <a:solidFill>
-                  <a:schemeClr val="tx2"/>
-                </a:solidFill>
-              </a:rPr>
-              <a:t>Semanas 6 a 11 · Levantamiento de MP21.</a:t>
-            </a:r>
-            <a:r>
-              <a:rPr lang="es-CL" sz="1300" dirty="0">
-                <a:solidFill>
-                  <a:schemeClr val="tx2"/>
-                </a:solidFill>
-              </a:rPr>
-              <a:t> Aplicar la misma secuencia y la misma regla de trazabilidad, para permitir la comparación entre ambos macroprocesos.</a:t>
-            </a:r>
-            <a:endParaRPr lang="es-CL" sz="1300"/>
-          </a:p>
-          <a:p>
-            <a:pPr marL="228600" indent="-228600">
-              <a:spcBef>
-                <a:spcPts val="450"/>
-              </a:spcBef>
-              <a:buFont typeface="Wingdings" pitchFamily="2" charset="2"/>
-              <a:buChar char="q"/>
-            </a:pPr>
-            <a:r>
-              <a:rPr lang="es-CL" sz="1300" b="1" dirty="0">
-                <a:solidFill>
-                  <a:schemeClr val="tx2"/>
-                </a:solidFill>
-              </a:rPr>
-              <a:t>En paralelo · Cierre de las 12 brechas.</a:t>
-            </a:r>
-            <a:r>
-              <a:rPr lang="es-CL" sz="1300" dirty="0">
-                <a:solidFill>
-                  <a:schemeClr val="tx2"/>
-                </a:solidFill>
-              </a:rPr>
-              <a:t> Reuniones con los roles ya identificados en nómina, desvinculación y gobernanza de datos.</a:t>
-            </a:r>
-            <a:endParaRPr lang="es-CL" sz="1300"/>
-          </a:p>
-          <a:p>
-            <a:pPr marL="228600" indent="-228600">
-              <a:spcBef>
-                <a:spcPts val="450"/>
-              </a:spcBef>
-              <a:buFont typeface="Wingdings" pitchFamily="2" charset="2"/>
-              <a:buChar char="q"/>
-            </a:pPr>
-            <a:r>
-              <a:rPr lang="es-CL" sz="1300" b="1" dirty="0">
-                <a:solidFill>
-                  <a:schemeClr val="tx2"/>
-                </a:solidFill>
-              </a:rPr>
-              <a:t>Semanas 11 a 13 · Manuales y acta de validación.</a:t>
-            </a:r>
-            <a:r>
-              <a:rPr lang="es-CL" sz="1300" dirty="0">
-                <a:solidFill>
-                  <a:schemeClr val="tx2"/>
-                </a:solidFill>
-              </a:rPr>
-              <a:t> Consolidación de los dos manuales bajo el formato del MGO y validación formal con los dueños de proceso.</a:t>
-            </a:r>
-            <a:endParaRPr lang="es-CL" sz="1300"/>
-          </a:p>
-          <a:p>
-            <a:pPr marL="228600" indent="-228600">
-              <a:spcBef>
-                <a:spcPts val="450"/>
-              </a:spcBef>
-              <a:buFont typeface="Wingdings" pitchFamily="2" charset="2"/>
-              <a:buChar char="q"/>
-            </a:pPr>
-            <a:r>
-              <a:rPr lang="es-CL" sz="1300" b="1" dirty="0">
-                <a:solidFill>
-                  <a:schemeClr val="tx2"/>
-                </a:solidFill>
-              </a:rPr>
-              <a:t>Desde la semana 12 · Inicio de OE2.</a:t>
-            </a:r>
-            <a:r>
-              <a:rPr lang="es-CL" sz="1300" dirty="0">
-                <a:solidFill>
-                  <a:schemeClr val="tx2"/>
-                </a:solidFill>
-              </a:rPr>
-              <a:t> Identificación de eventos de riesgo por tarea, en talleres con los dueños de proceso.</a:t>
-            </a:r>
-            <a:endParaRPr lang="es-CL" sz="1300"/>
-          </a:p>
-        </p:txBody>
-      </p:sp>
-      <p:sp>
-        <p:nvSpPr>
-          <p:cNvPr id="11" name="10 CuadroTexto"/>
-          <p:cNvSpPr txBox="1"/>
-          <p:nvPr/>
-        </p:nvSpPr>
-        <p:spPr>
-          <a:xfrm>
-            <a:off x="323528" y="6200000"/>
-            <a:ext cx="8352928" cy="450000"/>
-          </a:xfrm>
-          <a:prstGeom prst="rect">
-            <a:avLst/>
-          </a:prstGeom>
-          <a:noFill/>
-        </p:spPr>
-        <p:txBody>
-          <a:bodyPr wrap="square" lIns="91396" tIns="45697" rIns="91396" bIns="45697" rtlCol="0">
-            <a:spAutoFit/>
-          </a:bodyPr>
-          <a:lstStyle/>
-          <a:p>
-            <a:r>
-              <a:rPr lang="es-CL" sz="1000" i="1" dirty="0">
-                <a:solidFill>
-                  <a:prstClr val="black">
-                    <a:lumMod val="65000"/>
-                    <a:lumOff val="35000"/>
-                  </a:prstClr>
-                </a:solidFill>
-              </a:rPr>
-              <a:t>Segundo hito de avance: semana 13.</a:t>
-            </a:r>
-            <a:endParaRPr lang="es-CL" sz="1000"/>
-          </a:p>
-        </p:txBody>
-      </p:sp>
-    </p:spTree>
-  </p:cSld>
-  <p:clrMapOvr>
-    <a:masterClrMapping/>
-  </p:clrMapOvr>
-</p:sld>
-</file>
-
-<file path=ppt/slides/slide15.xml><?xml version="1.0" encoding="utf-8"?>
-<p:sld xmlns:a="http://schemas.openxmlformats.org/drawingml/2006/main" xmlns:r="http://schemas.openxmlformats.org/officeDocument/2006/relationships" xmlns:p="http://schemas.openxmlformats.org/presentationml/2006/main">
-  <p:cSld>
-    <p:spTree>
-      <p:nvGrpSpPr>
-        <p:cNvPr id="1" name=""/>
-        <p:cNvGrpSpPr/>
-        <p:nvPr/>
-      </p:nvGrpSpPr>
-      <p:grpSpPr>
-        <a:xfrm>
-          <a:off x="0" y="0"/>
-          <a:ext cx="0" cy="0"/>
-          <a:chOff x="0" y="0"/>
-          <a:chExt cx="0" cy="0"/>
-        </a:xfrm>
-      </p:grpSpPr>
-      <p:sp>
-        <p:nvSpPr>
-          <p:cNvPr id="4" name="3 CuadroTexto"/>
-          <p:cNvSpPr txBox="1"/>
-          <p:nvPr/>
-        </p:nvSpPr>
-        <p:spPr>
-          <a:xfrm>
-            <a:off x="1500000" y="2900000"/>
-            <a:ext cx="6144000" cy="900000"/>
-          </a:xfrm>
-          <a:prstGeom prst="rect">
-            <a:avLst/>
-          </a:prstGeom>
-          <a:noFill/>
-        </p:spPr>
-        <p:txBody>
-          <a:bodyPr wrap="square" lIns="82014" tIns="45697" rIns="82014" bIns="45697" rtlCol="0">
-            <a:spAutoFit/>
-          </a:bodyPr>
-          <a:lstStyle/>
-          <a:p>
-            <a:pPr algn="ctr"/>
-            <a:r>
-              <a:rPr lang="es-CL" sz="2800" b="1" dirty="0">
-                <a:solidFill>
-                  <a:prstClr val="black">
-                    <a:lumMod val="65000"/>
-                    <a:lumOff val="35000"/>
-                  </a:prstClr>
-                </a:solidFill>
-              </a:rPr>
-              <a:t>Gracias por su atención</a:t>
-            </a:r>
-            <a:endParaRPr lang="es-CL" sz="2800"/>
-          </a:p>
-        </p:txBody>
-      </p:sp>
-      <p:sp>
-        <p:nvSpPr>
-          <p:cNvPr id="3" name="2 CuadroTexto"/>
-          <p:cNvSpPr txBox="1"/>
-          <p:nvPr/>
-        </p:nvSpPr>
-        <p:spPr>
-          <a:xfrm>
-            <a:off x="1500000" y="4000000"/>
-            <a:ext cx="6144000" cy="1200000"/>
-          </a:xfrm>
-          <a:prstGeom prst="rect">
-            <a:avLst/>
-          </a:prstGeom>
-          <a:noFill/>
-        </p:spPr>
-        <p:txBody>
-          <a:bodyPr wrap="square" lIns="82014" tIns="45697" rIns="82014" bIns="45697" rtlCol="0">
-            <a:spAutoFit/>
-          </a:bodyPr>
-          <a:lstStyle/>
-          <a:p>
-            <a:pPr algn="ctr"/>
-            <a:r>
-              <a:rPr lang="es-CL" sz="1400" b="1" dirty="0">
-                <a:solidFill>
-                  <a:srgbClr val="1F497D">
-                    <a:lumMod val="75000"/>
-                  </a:srgbClr>
-                </a:solidFill>
-              </a:rPr>
-              <a:t>Bastián Darwit Vera</a:t>
-            </a:r>
-            <a:endParaRPr lang="es-CL" sz="1400"/>
-          </a:p>
-          <a:p>
-            <a:pPr algn="ctr"/>
-            <a:r>
-              <a:rPr lang="es-CL" sz="1200" dirty="0">
-                <a:solidFill>
-                  <a:srgbClr val="1F497D">
-                    <a:lumMod val="75000"/>
-                  </a:srgbClr>
-                </a:solidFill>
-              </a:rPr>
-              <a:t>Magíster en Sistemas de Gestión Integral de la Calidad · Universidad de La Frontera</a:t>
-            </a:r>
-            <a:endParaRPr lang="es-CL" sz="1200"/>
-          </a:p>
-          <a:p>
-            <a:pPr algn="ctr"/>
-            <a:r>
-              <a:rPr lang="es-CL" sz="1200" dirty="0">
-                <a:solidFill>
-                  <a:srgbClr val="1F497D">
-                    <a:lumMod val="75000"/>
-                  </a:srgbClr>
-                </a:solidFill>
-              </a:rPr>
-              <a:t>Temuco, 12 de septiembre de 2026</a:t>
-            </a:r>
-            <a:endParaRPr lang="es-CL" sz="1200"/>
-          </a:p>
-        </p:txBody>
-      </p:sp>
-    </p:spTree>
-  </p:cSld>
-  <p:clrMapOvr>
-    <a:masterClrMapping/>
-  </p:clrMapOvr>
-</p:sld>
-</file>
-
 <file path=ppt/slides/slide2.xml><?xml version="1.0" encoding="utf-8"?>
 <p:sld xmlns:a="http://schemas.openxmlformats.org/drawingml/2006/main" xmlns:r="http://schemas.openxmlformats.org/officeDocument/2006/relationships" xmlns:p="http://schemas.openxmlformats.org/presentationml/2006/main">
   <p:cSld>
@@ -16909,7 +10567,7 @@
         <p:spPr>
           <a:xfrm>
             <a:off x="323528" y="2450000"/>
-            <a:ext cx="8352928" cy="1500000"/>
+            <a:ext cx="8352928" cy="1800000"/>
           </a:xfrm>
           <a:prstGeom prst="rect">
             <a:avLst/>
@@ -16923,7 +10581,7 @@
           <a:lstStyle/>
           <a:p>
             <a:r>
-              <a:rPr lang="es-CL" sz="1900" b="1" dirty="0">
+              <a:rPr lang="es-CL" sz="2000" b="1" dirty="0">
                 <a:solidFill>
                   <a:srgbClr val="1F497D">
                     <a:lumMod val="75000"/>
@@ -16932,7 +10590,7 @@
               </a:rPr>
               <a:t>Propuesta de un sistema de gestión de riesgos para los macroprocesos de Gestión de Personas (MP8) y Servicios Generales (MP21) de Celulosa Arauco y Constitución S.A.</a:t>
             </a:r>
-            <a:endParaRPr lang="es-CL" sz="1900"/>
+            <a:endParaRPr lang="es-CL" sz="2000"/>
           </a:p>
         </p:txBody>
       </p:sp>
@@ -16944,8 +10602,8 @@
         </p:nvSpPr>
         <p:spPr>
           <a:xfrm>
-            <a:off x="323528" y="4150000"/>
-            <a:ext cx="8352928" cy="2000000"/>
+            <a:off x="323528" y="4500000"/>
+            <a:ext cx="8352928" cy="1600000"/>
           </a:xfrm>
           <a:prstGeom prst="rect">
             <a:avLst/>
@@ -16963,111 +10621,82 @@
               <a:buChar char="q"/>
             </a:pPr>
             <a:r>
-              <a:rPr lang="es-CL" sz="1300" b="1" dirty="0">
+              <a:rPr lang="es-CL" sz="1400" dirty="0">
                 <a:solidFill>
                   <a:schemeClr val="tx2"/>
                 </a:solidFill>
               </a:rPr>
-              <a:t>Qué se aborda.</a:t>
-            </a:r>
-            <a:r>
-              <a:rPr lang="es-CL" sz="1300" dirty="0">
-                <a:solidFill>
-                  <a:schemeClr val="tx2"/>
-                </a:solidFill>
-              </a:rPr>
-              <a:t> Dos macroprocesos de apoyo que sostienen la operación y que hoy no cuentan con una gestión de riesgos estructurada ni con una arquitectura de procesos formalizada.</a:t>
-            </a:r>
-            <a:endParaRPr lang="es-CL" sz="1300"/>
+              <a:t>El título se mantiene sin modificaciones respecto del anteproyecto aprobado.</a:t>
+            </a:r>
+            <a:endParaRPr lang="es-CL" sz="1400"/>
           </a:p>
           <a:p>
             <a:pPr marL="228600" indent="-228600">
               <a:spcBef>
-                <a:spcPts val="500"/>
+                <a:spcPts val="600"/>
               </a:spcBef>
               <a:buFont typeface="Wingdings" pitchFamily="2" charset="2"/>
               <a:buChar char="q"/>
             </a:pPr>
             <a:r>
-              <a:rPr lang="es-CL" sz="1300" b="1" dirty="0">
+              <a:rPr lang="es-CL" sz="1400" dirty="0">
                 <a:solidFill>
                   <a:schemeClr val="tx2"/>
                 </a:solidFill>
               </a:rPr>
-              <a:t>Caso.</a:t>
-            </a:r>
-            <a:r>
-              <a:rPr lang="es-CL" sz="1300" dirty="0">
+              <a:t>Se conserva el carácter de </a:t>
+            </a:r>
+            <a:r>
+              <a:rPr lang="es-CL" sz="1400" b="1" dirty="0">
                 <a:solidFill>
                   <a:schemeClr val="tx2"/>
                 </a:solidFill>
               </a:rPr>
-              <a:t> Celulosa Arauco y Constitución S.A. El trabajo se centra en el Negocio de Celulosa; MP8 es transversal a los negocios de celulosa, madera y forestal.</a:t>
-            </a:r>
-            <a:endParaRPr lang="es-CL" sz="1300"/>
+              <a:t>propuesta</a:t>
+            </a:r>
+            <a:r>
+              <a:rPr lang="es-CL" sz="1400" dirty="0">
+                <a:solidFill>
+                  <a:schemeClr val="tx2"/>
+                </a:solidFill>
+              </a:rPr>
+              <a:t>: el trabajo comprende el diseño del sistema de gestión de riesgos y no su implementación, que queda a decisión de la compañía.</a:t>
+            </a:r>
+            <a:endParaRPr lang="es-CL" sz="1400"/>
           </a:p>
           <a:p>
             <a:pPr marL="228600" indent="-228600">
               <a:spcBef>
-                <a:spcPts val="500"/>
+                <a:spcPts val="600"/>
               </a:spcBef>
               <a:buFont typeface="Wingdings" pitchFamily="2" charset="2"/>
               <a:buChar char="q"/>
             </a:pPr>
             <a:r>
-              <a:rPr lang="es-CL" sz="1300" b="1" dirty="0">
+              <a:rPr lang="es-CL" sz="1400" dirty="0">
                 <a:solidFill>
                   <a:schemeClr val="tx2"/>
                 </a:solidFill>
               </a:rPr>
-              <a:t>Carácter de propuesta.</a:t>
-            </a:r>
-            <a:r>
-              <a:rPr lang="es-CL" sz="1300" dirty="0">
+              <a:t>Precisión de alcance incorporada: el trabajo se centra en el </a:t>
+            </a:r>
+            <a:r>
+              <a:rPr lang="es-CL" sz="1400" b="1" dirty="0">
                 <a:solidFill>
                   <a:schemeClr val="tx2"/>
                 </a:solidFill>
               </a:rPr>
-              <a:t> El trabajo comprende el diseño del sistema, no su implementación.</a:t>
-            </a:r>
-            <a:endParaRPr lang="es-CL" sz="1300"/>
-          </a:p>
-        </p:txBody>
-      </p:sp>
-      <p:sp>
-        <p:nvSpPr>
-          <p:cNvPr id="11" name="10 CuadroTexto"/>
-          <p:cNvSpPr txBox="1"/>
-          <p:nvPr/>
-        </p:nvSpPr>
-        <p:spPr>
-          <a:xfrm>
-            <a:off x="323528" y="6200000"/>
-            <a:ext cx="8352928" cy="450000"/>
-          </a:xfrm>
-          <a:prstGeom prst="rect">
-            <a:avLst/>
-          </a:prstGeom>
-          <a:noFill/>
-        </p:spPr>
-        <p:txBody>
-          <a:bodyPr wrap="square" lIns="91396" tIns="45697" rIns="91396" bIns="45697" rtlCol="0">
-            <a:spAutoFit/>
-          </a:bodyPr>
-          <a:lstStyle/>
-          <a:p>
-            <a:r>
-              <a:rPr lang="es-CL" sz="1000" i="1" dirty="0">
-                <a:solidFill>
-                  <a:prstClr val="black">
-                    <a:lumMod val="65000"/>
-                    <a:lumOff val="35000"/>
-                  </a:prstClr>
+              <a:t>Negocio de Celulosa</a:t>
+            </a:r>
+            <a:r>
+              <a:rPr lang="es-CL" sz="1400" dirty="0">
+                <a:solidFill>
+                  <a:schemeClr val="tx2"/>
                 </a:solidFill>
               </a:rPr>
-              <a:t>Título sin modificaciones respecto del anteproyecto aprobado.</a:t>
-            </a:r>
-            <a:endParaRPr lang="es-CL" sz="1000"/>
+              <a:t>, y se explicita que MP8 es transversal a los negocios de celulosa, madera y forestal.</a:t>
+            </a:r>
+            <a:endParaRPr lang="es-CL" sz="1400"/>
           </a:p>
         </p:txBody>
       </p:sp>
@@ -17246,7 +10875,7 @@
         <p:spPr>
           <a:xfrm>
             <a:off x="323528" y="2450000"/>
-            <a:ext cx="8352928" cy="1100000"/>
+            <a:ext cx="8352928" cy="1000000"/>
           </a:xfrm>
           <a:prstGeom prst="rect">
             <a:avLst/>
@@ -17292,8 +10921,8 @@
         </p:nvSpPr>
         <p:spPr>
           <a:xfrm>
-            <a:off x="323528" y="3800000"/>
-            <a:ext cx="8352928" cy="2300000"/>
+            <a:off x="323528" y="3750000"/>
+            <a:ext cx="8352928" cy="2400000"/>
           </a:xfrm>
           <a:prstGeom prst="rect">
             <a:avLst/>
@@ -17327,7 +10956,7 @@
               <a:buChar char="q"/>
             </a:pPr>
             <a:r>
-              <a:rPr lang="es-CL" sz="1350" b="1" dirty="0">
+              <a:rPr lang="es-CL" sz="1400" b="1" dirty="0">
                 <a:solidFill>
                   <a:schemeClr val="tx2"/>
                 </a:solidFill>
@@ -17335,14 +10964,14 @@
               <a:t>OE1. Modelar</a:t>
             </a:r>
             <a:r>
-              <a:rPr lang="es-CL" sz="1350" dirty="0">
+              <a:rPr lang="es-CL" sz="1400" dirty="0">
                 <a:solidFill>
                   <a:schemeClr val="tx2"/>
                 </a:solidFill>
               </a:rPr>
               <a:t> la arquitectura de procesos de MP8 y MP21, desde sus procesos hasta sus tareas, según el marco del Modelo de Gestión Operacional.</a:t>
             </a:r>
-            <a:endParaRPr lang="es-CL" sz="1350"/>
+            <a:endParaRPr lang="es-CL" sz="1400"/>
           </a:p>
           <a:p>
             <a:pPr marL="228600" indent="-228600">
@@ -17353,7 +10982,7 @@
               <a:buChar char="q"/>
             </a:pPr>
             <a:r>
-              <a:rPr lang="es-CL" sz="1350" b="1" dirty="0">
+              <a:rPr lang="es-CL" sz="1400" b="1" dirty="0">
                 <a:solidFill>
                   <a:schemeClr val="tx2"/>
                 </a:solidFill>
@@ -17361,14 +10990,14 @@
               <a:t>OE2. Evaluar</a:t>
             </a:r>
             <a:r>
-              <a:rPr lang="es-CL" sz="1350" dirty="0">
+              <a:rPr lang="es-CL" sz="1400" dirty="0">
                 <a:solidFill>
                   <a:schemeClr val="tx2"/>
                 </a:solidFill>
               </a:rPr>
-              <a:t> los riesgos operacionales de las tareas modeladas mediante la metodología COSO II.</a:t>
-            </a:r>
-            <a:endParaRPr lang="es-CL" sz="1350"/>
+              <a:t> los riesgos operacionales asociados a las tareas modeladas de ambos macroprocesos mediante la metodología COSO II.</a:t>
+            </a:r>
+            <a:endParaRPr lang="es-CL" sz="1400"/>
           </a:p>
           <a:p>
             <a:pPr marL="228600" indent="-228600">
@@ -17379,7 +11008,7 @@
               <a:buChar char="q"/>
             </a:pPr>
             <a:r>
-              <a:rPr lang="es-CL" sz="1350" b="1" dirty="0">
+              <a:rPr lang="es-CL" sz="1400" b="1" dirty="0">
                 <a:solidFill>
                   <a:schemeClr val="tx2"/>
                 </a:solidFill>
@@ -17387,27 +11016,27 @@
               <a:t>OE3. Elaborar</a:t>
             </a:r>
             <a:r>
-              <a:rPr lang="es-CL" sz="1350" dirty="0">
+              <a:rPr lang="es-CL" sz="1400" dirty="0">
                 <a:solidFill>
                   <a:schemeClr val="tx2"/>
                 </a:solidFill>
               </a:rPr>
-              <a:t> el sistema de gestión de riesgos, integrando el catálogo de riesgos y sus planes de mitigación.</a:t>
-            </a:r>
-            <a:endParaRPr lang="es-CL" sz="1350"/>
-          </a:p>
-        </p:txBody>
-      </p:sp>
-      <p:sp>
-        <p:nvSpPr>
-          <p:cNvPr id="11" name="10 CuadroTexto"/>
+              <a:t> el sistema de gestión de riesgos, integrando el catálogo de riesgos evaluados y sus planes de mitigación.</a:t>
+            </a:r>
+            <a:endParaRPr lang="es-CL" sz="1400"/>
+          </a:p>
+        </p:txBody>
+      </p:sp>
+      <p:sp>
+        <p:nvSpPr>
+          <p:cNvPr id="10" name="9 CuadroTexto"/>
           <p:cNvSpPr txBox="1"/>
           <p:nvPr/>
         </p:nvSpPr>
         <p:spPr>
           <a:xfrm>
-            <a:off x="323528" y="6200000"/>
-            <a:ext cx="8352928" cy="450000"/>
+            <a:off x="323528" y="6180000"/>
+            <a:ext cx="8352928" cy="400000"/>
           </a:xfrm>
           <a:prstGeom prst="rect">
             <a:avLst/>
@@ -17421,7 +11050,7 @@
           <a:lstStyle/>
           <a:p>
             <a:r>
-              <a:rPr lang="es-CL" sz="1000" i="1" dirty="0">
+              <a:rPr lang="es-CL" sz="1100" i="1" dirty="0">
                 <a:solidFill>
                   <a:prstClr val="black">
                     <a:lumMod val="65000"/>
@@ -17429,9 +11058,9 @@
                   </a:prstClr>
                 </a:solidFill>
               </a:rPr>
-              <a:t>Objetivos sin modificaciones. Este avance reporta el objetivo específico 1.</a:t>
-            </a:r>
-            <a:endParaRPr lang="es-CL" sz="1000"/>
+              <a:t>Los objetivos no presentan modificaciones respecto del anteproyecto aprobado.</a:t>
+            </a:r>
+            <a:endParaRPr lang="es-CL" sz="1100"/>
           </a:p>
         </p:txBody>
       </p:sp>
@@ -17587,7 +11216,7 @@
           <a:lstStyle/>
           <a:p>
             <a:r>
-              <a:rPr lang="es-CL" sz="2100" b="1" dirty="0">
+              <a:rPr lang="es-CL" sz="2200" b="1" dirty="0">
                 <a:solidFill>
                   <a:prstClr val="black">
                     <a:lumMod val="65000"/>
@@ -17597,7 +11226,7 @@
               </a:rPr>
               <a:t>Metodología (1 de 3) · Diseño y objetivo específico 1</a:t>
             </a:r>
-            <a:endParaRPr lang="es-CL" sz="2100"/>
+            <a:endParaRPr lang="es-CL" sz="2200"/>
           </a:p>
         </p:txBody>
       </p:sp>
@@ -17610,7 +11239,7 @@
         <p:spPr>
           <a:xfrm>
             <a:off x="323528" y="2450000"/>
-            <a:ext cx="8352928" cy="900000"/>
+            <a:ext cx="8352928" cy="1100000"/>
           </a:xfrm>
           <a:prstGeom prst="rect">
             <a:avLst/>
@@ -17624,36 +11253,25 @@
           <a:lstStyle/>
           <a:p>
             <a:r>
-              <a:rPr lang="es-CL" sz="1300" b="1" dirty="0">
+              <a:rPr lang="es-CL" sz="1500" b="1" dirty="0">
+                <a:solidFill>
+                  <a:srgbClr val="1F497D">
+                    <a:lumMod val="75000"/>
+                  </a:srgbClr>
+                </a:solidFill>
+              </a:rPr>
+              <a:t>Diseño de investigación</a:t>
+            </a:r>
+            <a:endParaRPr lang="es-CL" sz="1500"/>
+          </a:p>
+          <a:p>
+            <a:r>
+              <a:rPr lang="es-CL" sz="1300" dirty="0">
                 <a:solidFill>
                   <a:schemeClr val="tx2"/>
                 </a:solidFill>
               </a:rPr>
-              <a:t>Diseño.</a:t>
-            </a:r>
-            <a:r>
-              <a:rPr lang="es-CL" sz="1300" dirty="0">
-                <a:solidFill>
-                  <a:schemeClr val="tx2"/>
-                </a:solidFill>
-              </a:rPr>
-              <a:t> Descriptivo-aplicado, observacional, caso único, no experimental. </a:t>
-            </a:r>
-            <a:r>
-              <a:rPr lang="es-CL" sz="1300" b="1" dirty="0">
-                <a:solidFill>
-                  <a:schemeClr val="tx2"/>
-                </a:solidFill>
-              </a:rPr>
-              <a:t>Unidad de análisis:</a:t>
-            </a:r>
-            <a:r>
-              <a:rPr lang="es-CL" sz="1300" dirty="0">
-                <a:solidFill>
-                  <a:schemeClr val="tx2"/>
-                </a:solidFill>
-              </a:rPr>
-              <a:t> el nivel corporativo que define ambos macroprocesos.</a:t>
+              <a:t>Descriptivo-aplicado, con estrategia descriptiva de tipo observacional, sobre un caso único de carácter no experimental (Ato et al., 2013). Unidad de análisis: el nivel corporativo que define ambos macroprocesos.</a:t>
             </a:r>
             <a:endParaRPr lang="es-CL" sz="1300"/>
           </a:p>
@@ -17667,8 +11285,8 @@
         </p:nvSpPr>
         <p:spPr>
           <a:xfrm>
-            <a:off x="323528" y="3350000"/>
-            <a:ext cx="8352928" cy="2700000"/>
+            <a:off x="323528" y="3700000"/>
+            <a:ext cx="8352928" cy="2450000"/>
           </a:xfrm>
           <a:prstGeom prst="rect">
             <a:avLst/>
@@ -17682,7 +11300,7 @@
           <a:lstStyle/>
           <a:p>
             <a:r>
-              <a:rPr lang="es-CL" sz="1450" b="1" dirty="0">
+              <a:rPr lang="es-CL" sz="1500" b="1" dirty="0">
                 <a:solidFill>
                   <a:srgbClr val="1F497D">
                     <a:lumMod val="75000"/>
@@ -17691,7 +11309,7 @@
               </a:rPr>
               <a:t>OE1 · El modelamiento se ejecuta en dos etapas por macroproceso</a:t>
             </a:r>
-            <a:endParaRPr lang="es-CL" sz="1450"/>
+            <a:endParaRPr lang="es-CL" sz="1500"/>
           </a:p>
           <a:p>
             <a:pPr marL="228600" indent="-228600">
@@ -17715,7 +11333,7 @@
                   <a:schemeClr val="tx2"/>
                 </a:solidFill>
               </a:rPr>
-              <a:t> Cadena SIPOC continua del primer proveedor al último cliente, con el orden y el arranque que fija el APQC PCF v8.0, categoría 7.</a:t>
+              <a:t> Se traza la cadena SIPOC continua del primer proveedor al último cliente, con el orden y el arranque que fija el APQC PCF v8.0.</a:t>
             </a:r>
             <a:endParaRPr lang="es-CL" sz="1300"/>
           </a:p>
@@ -17741,7 +11359,7 @@
                   <a:schemeClr val="tx2"/>
                 </a:solidFill>
               </a:rPr>
-              <a:t> Los cinco niveles del MGO se derivan del flujo levantado, no se imponen sobre él.</a:t>
+              <a:t> La arquitectura en cinco niveles se deriva del flujo levantado, bajo el formato del MGO.</a:t>
             </a:r>
             <a:endParaRPr lang="es-CL" sz="1300"/>
           </a:p>
@@ -17767,7 +11385,7 @@
                   <a:schemeClr val="tx2"/>
                 </a:solidFill>
               </a:rPr>
-              <a:t> Cada elemento se respalda en procedimiento vigente, entrevista o PCF. Si ninguna fuente lo sustenta, se declara brecha en lugar de completarse por estimación.</a:t>
+              <a:t> Cada elemento se respalda en procedimiento vigente, entrevista o PCF. Si ninguna fuente lo sustenta, se declara como brecha en lugar de completarse por estimación.</a:t>
             </a:r>
             <a:endParaRPr lang="es-CL" sz="1300"/>
           </a:p>
@@ -17775,14 +11393,14 @@
       </p:sp>
       <p:sp>
         <p:nvSpPr>
-          <p:cNvPr id="11" name="10 CuadroTexto"/>
+          <p:cNvPr id="10" name="9 CuadroTexto"/>
           <p:cNvSpPr txBox="1"/>
           <p:nvPr/>
         </p:nvSpPr>
         <p:spPr>
           <a:xfrm>
-            <a:off x="323528" y="6200000"/>
-            <a:ext cx="8352928" cy="450000"/>
+            <a:off x="323528" y="6180000"/>
+            <a:ext cx="8352928" cy="400000"/>
           </a:xfrm>
           <a:prstGeom prst="rect">
             <a:avLst/>
@@ -17796,7 +11414,7 @@
           <a:lstStyle/>
           <a:p>
             <a:r>
-              <a:rPr lang="es-CL" sz="1000" i="1" dirty="0">
+              <a:rPr lang="es-CL" sz="1100" b="1" dirty="0">
                 <a:solidFill>
                   <a:prstClr val="black">
                     <a:lumMod val="65000"/>
@@ -17806,7 +11424,7 @@
               </a:rPr>
               <a:t>Indicador de logro: CAP, cobertura de arquitectura de procesos.</a:t>
             </a:r>
-            <a:endParaRPr lang="es-CL" sz="1000"/>
+            <a:endParaRPr lang="es-CL" sz="1100"/>
           </a:p>
         </p:txBody>
       </p:sp>
@@ -17985,7 +11603,7 @@
         <p:spPr>
           <a:xfrm>
             <a:off x="323528" y="2450000"/>
-            <a:ext cx="8352928" cy="600000"/>
+            <a:ext cx="8352928" cy="700000"/>
           </a:xfrm>
           <a:prstGeom prst="rect">
             <a:avLst/>
@@ -18004,7 +11622,7 @@
                   <a:schemeClr val="tx2"/>
                 </a:solidFill>
               </a:rPr>
-              <a:t>Se evalúan los riesgos sobre la totalidad de las tareas modeladas, determinando siete atributos por tarea según COSO II.</a:t>
+              <a:t>Se evalúan los riesgos operacionales sobre la totalidad de las tareas modeladas y se determinan siete atributos para cada tarea, conforme a COSO II.</a:t>
             </a:r>
             <a:endParaRPr lang="es-CL" sz="1300"/>
           </a:p>
@@ -18019,18 +11637,18 @@
           <p:nvPr/>
         </p:nvGraphicFramePr>
         <p:xfrm>
-          <a:off x="323528" y="3050000"/>
-          <a:ext cx="8352928" cy="3000000"/>
+          <a:off x="323528" y="3150000"/>
+          <a:ext cx="8352928" cy="2900000"/>
         </p:xfrm>
         <a:graphic>
           <a:graphicData uri="http://schemas.openxmlformats.org/drawingml/2006/table">
             <a:tbl>
               <a:tblPr firstRow="1" bandRow="1"/>
               <a:tblGrid>
-                <a:gridCol w="2500000"/>
-                <a:gridCol w="5852928"/>
+                <a:gridCol w="2600000"/>
+                <a:gridCol w="5752928"/>
               </a:tblGrid>
-              <a:tr h="350">
+              <a:tr h="330">
                 <a:tc>
                   <a:txBody>
                     <a:bodyPr/>
@@ -18038,7 +11656,7 @@
                     <a:p>
                       <a:pPr/>
                       <a:r>
-                        <a:rPr lang="es-CL" sz="950" b="1" dirty="0">
+                        <a:rPr lang="es-CL" sz="1100" b="1" dirty="0">
                           <a:solidFill>
                             <a:srgbClr val="FFFFFF"/>
                           </a:solidFill>
@@ -18060,7 +11678,7 @@
                     <a:p>
                       <a:pPr/>
                       <a:r>
-                        <a:rPr lang="es-CL" sz="950" b="1" dirty="0">
+                        <a:rPr lang="es-CL" sz="1100" b="1" dirty="0">
                           <a:solidFill>
                             <a:srgbClr val="FFFFFF"/>
                           </a:solidFill>
@@ -18076,7 +11694,7 @@
                   </a:tcPr>
                 </a:tc>
               </a:tr>
-              <a:tr h="370">
+              <a:tr h="330">
                 <a:tc>
                   <a:txBody>
                     <a:bodyPr/>
@@ -18122,7 +11740,7 @@
                   </a:tcPr>
                 </a:tc>
               </a:tr>
-              <a:tr h="370">
+              <a:tr h="330">
                 <a:tc>
                   <a:txBody>
                     <a:bodyPr/>
@@ -18160,7 +11778,7 @@
                   <a:tcPr marL="45720" marR="45720" marT="27432" marB="27432" anchor="ctr"/>
                 </a:tc>
               </a:tr>
-              <a:tr h="370">
+              <a:tr h="330">
                 <a:tc>
                   <a:txBody>
                     <a:bodyPr/>
@@ -18206,7 +11824,7 @@
                   </a:tcPr>
                 </a:tc>
               </a:tr>
-              <a:tr h="370">
+              <a:tr h="330">
                 <a:tc>
                   <a:txBody>
                     <a:bodyPr/>
@@ -18244,7 +11862,7 @@
                   <a:tcPr marL="45720" marR="45720" marT="27432" marB="27432" anchor="ctr"/>
                 </a:tc>
               </a:tr>
-              <a:tr h="370">
+              <a:tr h="330">
                 <a:tc>
                   <a:txBody>
                     <a:bodyPr/>
@@ -18290,7 +11908,7 @@
                   </a:tcPr>
                 </a:tc>
               </a:tr>
-              <a:tr h="370">
+              <a:tr h="330">
                 <a:tc>
                   <a:txBody>
                     <a:bodyPr/>
@@ -18328,7 +11946,7 @@
                   <a:tcPr marL="45720" marR="45720" marT="27432" marB="27432" anchor="ctr"/>
                 </a:tc>
               </a:tr>
-              <a:tr h="370">
+              <a:tr h="330">
                 <a:tc>
                   <a:txBody>
                     <a:bodyPr/>
@@ -18380,14 +11998,14 @@
       </p:graphicFrame>
       <p:sp>
         <p:nvSpPr>
-          <p:cNvPr id="11" name="10 CuadroTexto"/>
+          <p:cNvPr id="10" name="9 CuadroTexto"/>
           <p:cNvSpPr txBox="1"/>
           <p:nvPr/>
         </p:nvSpPr>
         <p:spPr>
           <a:xfrm>
-            <a:off x="323528" y="6200000"/>
-            <a:ext cx="8352928" cy="450000"/>
+            <a:off x="323528" y="6180000"/>
+            <a:ext cx="8352928" cy="400000"/>
           </a:xfrm>
           <a:prstGeom prst="rect">
             <a:avLst/>
@@ -18401,7 +12019,7 @@
           <a:lstStyle/>
           <a:p>
             <a:r>
-              <a:rPr lang="es-CL" sz="1000" i="1" dirty="0">
+              <a:rPr lang="es-CL" sz="1100" b="1" dirty="0">
                 <a:solidFill>
                   <a:prstClr val="black">
                     <a:lumMod val="65000"/>
@@ -18411,7 +12029,7 @@
               </a:rPr>
               <a:t>Indicador de logro: TCER, tasa de cobertura de evaluación de riesgos.</a:t>
             </a:r>
-            <a:endParaRPr lang="es-CL" sz="1000"/>
+            <a:endParaRPr lang="es-CL" sz="1100"/>
           </a:p>
         </p:txBody>
       </p:sp>
@@ -18567,7 +12185,7 @@
           <a:lstStyle/>
           <a:p>
             <a:r>
-              <a:rPr lang="es-CL" sz="2000" b="1" dirty="0">
+              <a:rPr lang="es-CL" sz="2200" b="1" dirty="0">
                 <a:solidFill>
                   <a:prstClr val="black">
                     <a:lumMod val="65000"/>
@@ -18577,7 +12195,7 @@
               </a:rPr>
               <a:t>Metodología (3 de 3) · Objetivo específico 3 e indicadores</a:t>
             </a:r>
-            <a:endParaRPr lang="es-CL" sz="2000"/>
+            <a:endParaRPr lang="es-CL" sz="2200"/>
           </a:p>
         </p:txBody>
       </p:sp>
@@ -18604,7 +12222,7 @@
           <a:lstStyle/>
           <a:p>
             <a:r>
-              <a:rPr lang="es-CL" sz="1450" b="1" dirty="0">
+              <a:rPr lang="es-CL" sz="1500" b="1" dirty="0">
                 <a:solidFill>
                   <a:srgbClr val="1F497D">
                     <a:lumMod val="75000"/>
@@ -18613,7 +12231,7 @@
               </a:rPr>
               <a:t>OE3 · Composición del sistema de gestión de riesgos</a:t>
             </a:r>
-            <a:endParaRPr lang="es-CL" sz="1450"/>
+            <a:endParaRPr lang="es-CL" sz="1500"/>
           </a:p>
           <a:p>
             <a:r>
@@ -18622,7 +12240,7 @@
                   <a:schemeClr val="tx2"/>
                 </a:solidFill>
               </a:rPr>
-              <a:t>Catálogo de riesgos evaluados, </a:t>
+              <a:t>Catálogo de riesgos evaluados, insumo de OE2, </a:t>
             </a:r>
             <a:r>
               <a:rPr lang="es-CL" sz="1300" b="1" dirty="0">
@@ -18670,17 +12288,17 @@
         </p:nvGraphicFramePr>
         <p:xfrm>
           <a:off x="323528" y="3900000"/>
-          <a:ext cx="8352928" cy="2100000"/>
+          <a:ext cx="8352928" cy="1900000"/>
         </p:xfrm>
         <a:graphic>
           <a:graphicData uri="http://schemas.openxmlformats.org/drawingml/2006/table">
             <a:tbl>
               <a:tblPr firstRow="1" bandRow="1"/>
               <a:tblGrid>
-                <a:gridCol w="900000"/>
-                <a:gridCol w="3200000"/>
-                <a:gridCol w="2500000"/>
-                <a:gridCol w="1752928"/>
+                <a:gridCol w="1000000"/>
+                <a:gridCol w="3300000"/>
+                <a:gridCol w="2400000"/>
+                <a:gridCol w="1652928"/>
               </a:tblGrid>
               <a:tr h="380">
                 <a:tc>
@@ -18690,7 +12308,7 @@
                     <a:p>
                       <a:pPr algn="ctr"/>
                       <a:r>
-                        <a:rPr lang="es-CL" sz="950" b="1" dirty="0">
+                        <a:rPr lang="es-CL" sz="1100" b="1" dirty="0">
                           <a:solidFill>
                             <a:srgbClr val="FFFFFF"/>
                           </a:solidFill>
@@ -18712,7 +12330,7 @@
                     <a:p>
                       <a:pPr/>
                       <a:r>
-                        <a:rPr lang="es-CL" sz="950" b="1" dirty="0">
+                        <a:rPr lang="es-CL" sz="1100" b="1" dirty="0">
                           <a:solidFill>
                             <a:srgbClr val="FFFFFF"/>
                           </a:solidFill>
@@ -18734,7 +12352,7 @@
                     <a:p>
                       <a:pPr/>
                       <a:r>
-                        <a:rPr lang="es-CL" sz="950" b="1" dirty="0">
+                        <a:rPr lang="es-CL" sz="1100" b="1" dirty="0">
                           <a:solidFill>
                             <a:srgbClr val="FFFFFF"/>
                           </a:solidFill>
@@ -18756,7 +12374,7 @@
                     <a:p>
                       <a:pPr algn="ctr"/>
                       <a:r>
-                        <a:rPr lang="es-CL" sz="950" b="1" dirty="0">
+                        <a:rPr lang="es-CL" sz="1100" b="1" dirty="0">
                           <a:solidFill>
                             <a:srgbClr val="FFFFFF"/>
                           </a:solidFill>
@@ -18772,7 +12390,7 @@
                   </a:tcPr>
                 </a:tc>
               </a:tr>
-              <a:tr h="480">
+              <a:tr h="440">
                 <a:tc>
                   <a:txBody>
                     <a:bodyPr/>
@@ -18862,7 +12480,7 @@
                   </a:tcPr>
                 </a:tc>
               </a:tr>
-              <a:tr h="480">
+              <a:tr h="440">
                 <a:tc>
                   <a:txBody>
                     <a:bodyPr/>
@@ -18936,7 +12554,7 @@
                   <a:tcPr marL="45720" marR="45720" marT="27432" marB="27432" anchor="ctr"/>
                 </a:tc>
               </a:tr>
-              <a:tr h="480">
+              <a:tr h="440">
                 <a:tc>
                   <a:txBody>
                     <a:bodyPr/>
@@ -19032,14 +12650,14 @@
       </p:graphicFrame>
       <p:sp>
         <p:nvSpPr>
-          <p:cNvPr id="11" name="10 CuadroTexto"/>
+          <p:cNvPr id="10" name="9 CuadroTexto"/>
           <p:cNvSpPr txBox="1"/>
           <p:nvPr/>
         </p:nvSpPr>
         <p:spPr>
           <a:xfrm>
-            <a:off x="323528" y="6200000"/>
-            <a:ext cx="8352928" cy="450000"/>
+            <a:off x="323528" y="6180000"/>
+            <a:ext cx="8352928" cy="400000"/>
           </a:xfrm>
           <a:prstGeom prst="rect">
             <a:avLst/>
@@ -19053,7 +12671,7 @@
           <a:lstStyle/>
           <a:p>
             <a:r>
-              <a:rPr lang="es-CL" sz="1000" i="1" dirty="0">
+              <a:rPr lang="es-CL" sz="1100" i="1" dirty="0">
                 <a:solidFill>
                   <a:prstClr val="black">
                     <a:lumMod val="65000"/>
@@ -19063,7 +12681,7 @@
               </a:rPr>
               <a:t>El sistema se valida con los dueños de proceso y se presenta a la alta gerencia.</a:t>
             </a:r>
-            <a:endParaRPr lang="es-CL" sz="1000"/>
+            <a:endParaRPr lang="es-CL" sz="1100"/>
           </a:p>
         </p:txBody>
       </p:sp>
@@ -19227,549 +12845,6 @@
                   </a:prstClr>
                 </a:solidFill>
               </a:rPr>
-              <a:t>Cambios respecto del anteproyecto</a:t>
-            </a:r>
-            <a:endParaRPr lang="es-CL" sz="2200"/>
-          </a:p>
-        </p:txBody>
-      </p:sp>
-      <p:graphicFrame>
-        <p:nvGraphicFramePr>
-          <p:cNvPr id="20" name="Tabla 20"/>
-          <p:cNvGraphicFramePr>
-            <a:graphicFrameLocks noGrp="1"/>
-          </p:cNvGraphicFramePr>
-          <p:nvPr/>
-        </p:nvGraphicFramePr>
-        <p:xfrm>
-          <a:off x="323528" y="2500000"/>
-          <a:ext cx="8352928" cy="2900000"/>
-        </p:xfrm>
-        <a:graphic>
-          <a:graphicData uri="http://schemas.openxmlformats.org/drawingml/2006/table">
-            <a:tbl>
-              <a:tblPr firstRow="1" bandRow="1"/>
-              <a:tblGrid>
-                <a:gridCol w="2100000"/>
-                <a:gridCol w="2900000"/>
-                <a:gridCol w="3352928"/>
-              </a:tblGrid>
-              <a:tr h="380">
-                <a:tc>
-                  <a:txBody>
-                    <a:bodyPr/>
-                    <a:lstStyle/>
-                    <a:p>
-                      <a:pPr/>
-                      <a:r>
-                        <a:rPr lang="es-CL" sz="950" b="1" dirty="0">
-                          <a:solidFill>
-                            <a:srgbClr val="FFFFFF"/>
-                          </a:solidFill>
-                        </a:rPr>
-                        <a:t>Ámbito</a:t>
-                      </a:r>
-                    </a:p>
-                  </a:txBody>
-                  <a:tcPr marL="45720" marR="45720" marT="27432" marB="27432" anchor="ctr">
-                    <a:solidFill>
-                      <a:srgbClr val="1F497D"/>
-                    </a:solidFill>
-                  </a:tcPr>
-                </a:tc>
-                <a:tc>
-                  <a:txBody>
-                    <a:bodyPr/>
-                    <a:lstStyle/>
-                    <a:p>
-                      <a:pPr/>
-                      <a:r>
-                        <a:rPr lang="es-CL" sz="950" b="1" dirty="0">
-                          <a:solidFill>
-                            <a:srgbClr val="FFFFFF"/>
-                          </a:solidFill>
-                        </a:rPr>
-                        <a:t>Qué cambió</a:t>
-                      </a:r>
-                    </a:p>
-                  </a:txBody>
-                  <a:tcPr marL="45720" marR="45720" marT="27432" marB="27432" anchor="ctr">
-                    <a:solidFill>
-                      <a:srgbClr val="1F497D"/>
-                    </a:solidFill>
-                  </a:tcPr>
-                </a:tc>
-                <a:tc>
-                  <a:txBody>
-                    <a:bodyPr/>
-                    <a:lstStyle/>
-                    <a:p>
-                      <a:pPr/>
-                      <a:r>
-                        <a:rPr lang="es-CL" sz="950" b="1" dirty="0">
-                          <a:solidFill>
-                            <a:srgbClr val="FFFFFF"/>
-                          </a:solidFill>
-                        </a:rPr>
-                        <a:t>Por qué</a:t>
-                      </a:r>
-                    </a:p>
-                  </a:txBody>
-                  <a:tcPr marL="45720" marR="45720" marT="27432" marB="27432" anchor="ctr">
-                    <a:solidFill>
-                      <a:srgbClr val="1F497D"/>
-                    </a:solidFill>
-                  </a:tcPr>
-                </a:tc>
-              </a:tr>
-              <a:tr h="620">
-                <a:tc>
-                  <a:txBody>
-                    <a:bodyPr/>
-                    <a:lstStyle/>
-                    <a:p>
-                      <a:pPr/>
-                      <a:r>
-                        <a:rPr lang="es-CL" sz="1100" b="1" dirty="0">
-                          <a:solidFill>
-                            <a:schemeClr val="tx2"/>
-                          </a:solidFill>
-                        </a:rPr>
-                        <a:t>Plan de trabajo</a:t>
-                      </a:r>
-                    </a:p>
-                  </a:txBody>
-                  <a:tcPr marL="45720" marR="45720" marT="27432" marB="27432" anchor="ctr">
-                    <a:solidFill>
-                      <a:srgbClr val="F2F2F2"/>
-                    </a:solidFill>
-                  </a:tcPr>
-                </a:tc>
-                <a:tc>
-                  <a:txBody>
-                    <a:bodyPr/>
-                    <a:lstStyle/>
-                    <a:p>
-                      <a:pPr/>
-                      <a:r>
-                        <a:rPr lang="es-CL" sz="1100" dirty="0">
-                          <a:solidFill>
-                            <a:schemeClr val="tx2"/>
-                          </a:solidFill>
-                        </a:rPr>
-                        <a:t>A1.3 y A1.4 se desdoblan en flujo único y segmentación jerárquica</a:t>
-                      </a:r>
-                    </a:p>
-                  </a:txBody>
-                  <a:tcPr marL="45720" marR="45720" marT="27432" marB="27432" anchor="ctr">
-                    <a:solidFill>
-                      <a:srgbClr val="F2F2F2"/>
-                    </a:solidFill>
-                  </a:tcPr>
-                </a:tc>
-                <a:tc>
-                  <a:txBody>
-                    <a:bodyPr/>
-                    <a:lstStyle/>
-                    <a:p>
-                      <a:pPr/>
-                      <a:r>
-                        <a:rPr lang="es-CL" sz="1100" dirty="0">
-                          <a:solidFill>
-                            <a:schemeClr val="tx2"/>
-                          </a:solidFill>
-                        </a:rPr>
-                        <a:t>El modelamiento requiere levantar primero la cadena de información; la jerarquía se deriva de ella</a:t>
-                      </a:r>
-                    </a:p>
-                  </a:txBody>
-                  <a:tcPr marL="45720" marR="45720" marT="27432" marB="27432" anchor="ctr">
-                    <a:solidFill>
-                      <a:srgbClr val="F2F2F2"/>
-                    </a:solidFill>
-                  </a:tcPr>
-                </a:tc>
-              </a:tr>
-              <a:tr h="620">
-                <a:tc>
-                  <a:txBody>
-                    <a:bodyPr/>
-                    <a:lstStyle/>
-                    <a:p>
-                      <a:pPr/>
-                      <a:r>
-                        <a:rPr lang="es-CL" sz="1100" b="1" dirty="0">
-                          <a:solidFill>
-                            <a:schemeClr val="tx2"/>
-                          </a:solidFill>
-                        </a:rPr>
-                        <a:t>Alcance</a:t>
-                      </a:r>
-                    </a:p>
-                  </a:txBody>
-                  <a:tcPr marL="45720" marR="45720" marT="27432" marB="27432" anchor="ctr"/>
-                </a:tc>
-                <a:tc>
-                  <a:txBody>
-                    <a:bodyPr/>
-                    <a:lstStyle/>
-                    <a:p>
-                      <a:pPr/>
-                      <a:r>
-                        <a:rPr lang="es-CL" sz="1100" dirty="0">
-                          <a:solidFill>
-                            <a:schemeClr val="tx2"/>
-                          </a:solidFill>
-                        </a:rPr>
-                        <a:t>Se precisa que el trabajo se centra en el Negocio de Celulosa</a:t>
-                      </a:r>
-                    </a:p>
-                  </a:txBody>
-                  <a:tcPr marL="45720" marR="45720" marT="27432" marB="27432" anchor="ctr"/>
-                </a:tc>
-                <a:tc>
-                  <a:txBody>
-                    <a:bodyPr/>
-                    <a:lstStyle/>
-                    <a:p>
-                      <a:pPr/>
-                      <a:r>
-                        <a:rPr lang="es-CL" sz="1100" dirty="0">
-                          <a:solidFill>
-                            <a:schemeClr val="tx2"/>
-                          </a:solidFill>
-                        </a:rPr>
-                        <a:t>MP8 es transversal a celulosa, madera y forestal, y se define a nivel corporativo</a:t>
-                      </a:r>
-                    </a:p>
-                  </a:txBody>
-                  <a:tcPr marL="45720" marR="45720" marT="27432" marB="27432" anchor="ctr"/>
-                </a:tc>
-              </a:tr>
-              <a:tr h="620">
-                <a:tc>
-                  <a:txBody>
-                    <a:bodyPr/>
-                    <a:lstStyle/>
-                    <a:p>
-                      <a:pPr/>
-                      <a:r>
-                        <a:rPr lang="es-CL" sz="1100" b="1" dirty="0">
-                          <a:solidFill>
-                            <a:schemeClr val="tx2"/>
-                          </a:solidFill>
-                        </a:rPr>
-                        <a:t>Carta Gantt</a:t>
-                      </a:r>
-                    </a:p>
-                  </a:txBody>
-                  <a:tcPr marL="45720" marR="45720" marT="27432" marB="27432" anchor="ctr">
-                    <a:solidFill>
-                      <a:srgbClr val="F2F2F2"/>
-                    </a:solidFill>
-                  </a:tcPr>
-                </a:tc>
-                <a:tc>
-                  <a:txBody>
-                    <a:bodyPr/>
-                    <a:lstStyle/>
-                    <a:p>
-                      <a:pPr/>
-                      <a:r>
-                        <a:rPr lang="es-CL" sz="1100" dirty="0">
-                          <a:solidFill>
-                            <a:schemeClr val="tx2"/>
-                          </a:solidFill>
-                        </a:rPr>
-                        <a:t>Replanificada; el primer hito pasa de la semana 10 a la semana 5</a:t>
-                      </a:r>
-                    </a:p>
-                  </a:txBody>
-                  <a:tcPr marL="45720" marR="45720" marT="27432" marB="27432" anchor="ctr">
-                    <a:solidFill>
-                      <a:srgbClr val="F2F2F2"/>
-                    </a:solidFill>
-                  </a:tcPr>
-                </a:tc>
-                <a:tc>
-                  <a:txBody>
-                    <a:bodyPr/>
-                    <a:lstStyle/>
-                    <a:p>
-                      <a:pPr/>
-                      <a:r>
-                        <a:rPr lang="es-CL" sz="1100" dirty="0">
-                          <a:solidFill>
-                            <a:schemeClr val="tx2"/>
-                          </a:solidFill>
-                        </a:rPr>
-                        <a:t>Ajuste a la fecha efectiva de esta presentación</a:t>
-                      </a:r>
-                    </a:p>
-                  </a:txBody>
-                  <a:tcPr marL="45720" marR="45720" marT="27432" marB="27432" anchor="ctr">
-                    <a:solidFill>
-                      <a:srgbClr val="F2F2F2"/>
-                    </a:solidFill>
-                  </a:tcPr>
-                </a:tc>
-              </a:tr>
-              <a:tr h="620">
-                <a:tc>
-                  <a:txBody>
-                    <a:bodyPr/>
-                    <a:lstStyle/>
-                    <a:p>
-                      <a:pPr/>
-                      <a:r>
-                        <a:rPr lang="es-CL" sz="1100" b="1" dirty="0">
-                          <a:solidFill>
-                            <a:schemeClr val="tx2"/>
-                          </a:solidFill>
-                        </a:rPr>
-                        <a:t>Medición</a:t>
-                      </a:r>
-                    </a:p>
-                  </a:txBody>
-                  <a:tcPr marL="45720" marR="45720" marT="27432" marB="27432" anchor="ctr"/>
-                </a:tc>
-                <a:tc>
-                  <a:txBody>
-                    <a:bodyPr/>
-                    <a:lstStyle/>
-                    <a:p>
-                      <a:pPr/>
-                      <a:r>
-                        <a:rPr lang="es-CL" sz="1100" dirty="0">
-                          <a:solidFill>
-                            <a:schemeClr val="tx2"/>
-                          </a:solidFill>
-                        </a:rPr>
-                        <a:t>Se agrega la cobertura de trazabilidad del flujo</a:t>
-                      </a:r>
-                    </a:p>
-                  </a:txBody>
-                  <a:tcPr marL="45720" marR="45720" marT="27432" marB="27432" anchor="ctr"/>
-                </a:tc>
-                <a:tc>
-                  <a:txBody>
-                    <a:bodyPr/>
-                    <a:lstStyle/>
-                    <a:p>
-                      <a:pPr/>
-                      <a:r>
-                        <a:rPr lang="es-CL" sz="1100" dirty="0">
-                          <a:solidFill>
-                            <a:schemeClr val="tx2"/>
-                          </a:solidFill>
-                        </a:rPr>
-                        <a:t>El CAP mide la segmentación final y no refleja el avance intermedio</a:t>
-                      </a:r>
-                    </a:p>
-                  </a:txBody>
-                  <a:tcPr marL="45720" marR="45720" marT="27432" marB="27432" anchor="ctr"/>
-                </a:tc>
-              </a:tr>
-            </a:tbl>
-          </a:graphicData>
-        </a:graphic>
-      </p:graphicFrame>
-      <p:sp>
-        <p:nvSpPr>
-          <p:cNvPr id="9" name="8 CuadroTexto"/>
-          <p:cNvSpPr txBox="1"/>
-          <p:nvPr/>
-        </p:nvSpPr>
-        <p:spPr>
-          <a:xfrm>
-            <a:off x="323528" y="5500000"/>
-            <a:ext cx="8352928" cy="700000"/>
-          </a:xfrm>
-          <a:prstGeom prst="rect">
-            <a:avLst/>
-          </a:prstGeom>
-          <a:noFill/>
-        </p:spPr>
-        <p:txBody>
-          <a:bodyPr wrap="square" lIns="91396" tIns="45697" rIns="91396" bIns="45697" rtlCol="0">
-            <a:spAutoFit/>
-          </a:bodyPr>
-          <a:lstStyle/>
-          <a:p>
-            <a:r>
-              <a:rPr lang="es-CL" sz="1300" b="1" dirty="0">
-                <a:solidFill>
-                  <a:srgbClr val="1F497D">
-                    <a:lumMod val="75000"/>
-                  </a:srgbClr>
-                </a:solidFill>
-              </a:rPr>
-              <a:t>No cambian el objetivo general, los objetivos específicos, los indicadores de logro ni los entregables comprometidos.</a:t>
-            </a:r>
-            <a:endParaRPr lang="es-CL" sz="1300"/>
-          </a:p>
-        </p:txBody>
-      </p:sp>
-    </p:spTree>
-  </p:cSld>
-  <p:clrMapOvr>
-    <a:masterClrMapping/>
-  </p:clrMapOvr>
-</p:sld>
-</file>
-
-<file path=ppt/slides/slide8.xml><?xml version="1.0" encoding="utf-8"?>
-<p:sld xmlns:a="http://schemas.openxmlformats.org/drawingml/2006/main" xmlns:r="http://schemas.openxmlformats.org/officeDocument/2006/relationships" xmlns:p="http://schemas.openxmlformats.org/presentationml/2006/main">
-  <p:cSld>
-    <p:spTree>
-      <p:nvGrpSpPr>
-        <p:cNvPr id="1" name=""/>
-        <p:cNvGrpSpPr/>
-        <p:nvPr/>
-      </p:nvGrpSpPr>
-      <p:grpSpPr>
-        <a:xfrm>
-          <a:off x="0" y="0"/>
-          <a:ext cx="0" cy="0"/>
-          <a:chOff x="0" y="0"/>
-          <a:chExt cx="0" cy="0"/>
-        </a:xfrm>
-      </p:grpSpPr>
-      <p:sp>
-        <p:nvSpPr>
-          <p:cNvPr id="5" name="4 CuadroTexto"/>
-          <p:cNvSpPr txBox="1"/>
-          <p:nvPr/>
-        </p:nvSpPr>
-        <p:spPr>
-          <a:xfrm>
-            <a:off x="5675867" y="340990"/>
-            <a:ext cx="2337602" cy="252106"/>
-          </a:xfrm>
-          <a:prstGeom prst="rect">
-            <a:avLst/>
-          </a:prstGeom>
-          <a:noFill/>
-        </p:spPr>
-        <p:txBody>
-          <a:bodyPr wrap="square" lIns="82014" tIns="45697" rIns="82014" bIns="45697" rtlCol="0">
-            <a:spAutoFit/>
-          </a:bodyPr>
-          <a:lstStyle/>
-          <a:p>
-            <a:pPr algn="ctr"/>
-            <a:r>
-              <a:rPr lang="es-CL" sz="1000" b="1" dirty="0">
-                <a:solidFill>
-                  <a:prstClr val="black">
-                    <a:lumMod val="65000"/>
-                    <a:lumOff val="35000"/>
-                  </a:prstClr>
-                </a:solidFill>
-              </a:rPr>
-              <a:t>Sistema de gestión de riesgos MP8 y MP21</a:t>
-            </a:r>
-            <a:endParaRPr lang="es-CL" sz="1000"/>
-          </a:p>
-        </p:txBody>
-      </p:sp>
-      <p:sp>
-        <p:nvSpPr>
-          <p:cNvPr id="4" name="3 CuadroTexto"/>
-          <p:cNvSpPr txBox="1"/>
-          <p:nvPr/>
-        </p:nvSpPr>
-        <p:spPr>
-          <a:xfrm>
-            <a:off x="5740803" y="1034218"/>
-            <a:ext cx="2207735" cy="221341"/>
-          </a:xfrm>
-          <a:prstGeom prst="rect">
-            <a:avLst/>
-          </a:prstGeom>
-          <a:noFill/>
-        </p:spPr>
-        <p:txBody>
-          <a:bodyPr wrap="square" lIns="82014" tIns="45697" rIns="82014" bIns="45697" rtlCol="0">
-            <a:spAutoFit/>
-          </a:bodyPr>
-          <a:lstStyle/>
-          <a:p>
-            <a:pPr algn="ctr"/>
-            <a:r>
-              <a:rPr lang="es-CL" sz="900" dirty="0">
-                <a:solidFill>
-                  <a:prstClr val="white">
-                    <a:lumMod val="50000"/>
-                  </a:prstClr>
-                </a:solidFill>
-              </a:rPr>
-              <a:t>| </a:t>
-            </a:r>
-            <a:r>
-              <a:rPr lang="es-CL" sz="900" b="1" dirty="0">
-                <a:solidFill>
-                  <a:srgbClr val="1F497D">
-                    <a:lumMod val="75000"/>
-                  </a:srgbClr>
-                </a:solidFill>
-              </a:rPr>
-              <a:t>Estudiante: </a:t>
-            </a:r>
-            <a:r>
-              <a:rPr lang="es-CL" sz="900" dirty="0">
-                <a:solidFill>
-                  <a:srgbClr val="1F497D">
-                    <a:lumMod val="75000"/>
-                  </a:srgbClr>
-                </a:solidFill>
-              </a:rPr>
-              <a:t>Bastián Darwit Vera</a:t>
-            </a:r>
-            <a:r>
-              <a:rPr lang="es-CL" sz="900" dirty="0">
-                <a:solidFill>
-                  <a:prstClr val="white">
-                    <a:lumMod val="50000"/>
-                  </a:prstClr>
-                </a:solidFill>
-              </a:rPr>
-              <a:t> |</a:t>
-            </a:r>
-          </a:p>
-        </p:txBody>
-      </p:sp>
-      <p:sp>
-        <p:nvSpPr>
-          <p:cNvPr id="6" name="5 CuadroTexto"/>
-          <p:cNvSpPr txBox="1"/>
-          <p:nvPr/>
-        </p:nvSpPr>
-        <p:spPr>
-          <a:xfrm>
-            <a:off x="805865" y="1538381"/>
-            <a:ext cx="7077739" cy="852256"/>
-          </a:xfrm>
-          <a:prstGeom prst="rect">
-            <a:avLst/>
-          </a:prstGeom>
-          <a:noFill/>
-        </p:spPr>
-        <p:txBody>
-          <a:bodyPr wrap="square" lIns="82014" tIns="45697" rIns="82014" bIns="45697" rtlCol="0">
-            <a:spAutoFit/>
-          </a:bodyPr>
-          <a:lstStyle/>
-          <a:p>
-            <a:r>
-              <a:rPr lang="es-CL" sz="2200" b="1" dirty="0">
-                <a:solidFill>
-                  <a:prstClr val="black">
-                    <a:lumMod val="65000"/>
-                    <a:lumOff val="35000"/>
-                  </a:prstClr>
-                </a:solidFill>
-              </a:rPr>
               <a:t>Carta Gantt actualizada</a:t>
             </a:r>
             <a:endParaRPr lang="es-CL" sz="2200"/>
@@ -19799,15 +12874,15 @@
           <a:lstStyle/>
           <a:p>
             <a:r>
-              <a:rPr lang="es-CL" sz="1250" dirty="0">
+              <a:rPr lang="es-CL" sz="1200" dirty="0">
                 <a:solidFill>
                   <a:schemeClr val="tx2"/>
                 </a:solidFill>
               </a:rPr>
-              <a:t>Horizonte de 20 semanas, agosto 2026 a enero 2027. Esta presentación corresponde a la </a:t>
-            </a:r>
-            <a:r>
-              <a:rPr lang="es-CL" sz="1250" b="1" dirty="0">
+              <a:t>Horizonte de 20 semanas, agosto 2026 a enero 2027. La presentación de este avance corresponde a la </a:t>
+            </a:r>
+            <a:r>
+              <a:rPr lang="es-CL" sz="1200" b="1" dirty="0">
                 <a:solidFill>
                   <a:schemeClr val="tx2"/>
                 </a:solidFill>
@@ -19815,14 +12890,14 @@
               <a:t>semana 5</a:t>
             </a:r>
             <a:r>
-              <a:rPr lang="es-CL" sz="1250" dirty="0">
+              <a:rPr lang="es-CL" sz="1200" dirty="0">
                 <a:solidFill>
                   <a:schemeClr val="tx2"/>
                 </a:solidFill>
               </a:rPr>
               <a:t>.</a:t>
             </a:r>
-            <a:endParaRPr lang="es-CL" sz="1250"/>
+            <a:endParaRPr lang="es-CL" sz="1200"/>
           </a:p>
         </p:txBody>
       </p:sp>
@@ -19873,7 +12948,7 @@
                     <a:p>
                       <a:pPr/>
                       <a:r>
-                        <a:rPr lang="es-CL" sz="950" b="1" dirty="0">
+                        <a:rPr lang="es-CL" sz="800" b="1" dirty="0">
                           <a:solidFill>
                             <a:srgbClr val="FFFFFF"/>
                           </a:solidFill>
@@ -19895,7 +12970,7 @@
                     <a:p>
                       <a:pPr algn="ctr"/>
                       <a:r>
-                        <a:rPr lang="es-CL" sz="950" b="1" dirty="0">
+                        <a:rPr lang="es-CL" sz="700" b="1" dirty="0">
                           <a:solidFill>
                             <a:srgbClr val="FFFFFF"/>
                           </a:solidFill>
@@ -19917,7 +12992,7 @@
                     <a:p>
                       <a:pPr algn="ctr"/>
                       <a:r>
-                        <a:rPr lang="es-CL" sz="950" b="1" dirty="0">
+                        <a:rPr lang="es-CL" sz="700" b="1" dirty="0">
                           <a:solidFill>
                             <a:srgbClr val="FFFFFF"/>
                           </a:solidFill>
@@ -19939,7 +13014,7 @@
                     <a:p>
                       <a:pPr algn="ctr"/>
                       <a:r>
-                        <a:rPr lang="es-CL" sz="950" b="1" dirty="0">
+                        <a:rPr lang="es-CL" sz="700" b="1" dirty="0">
                           <a:solidFill>
                             <a:srgbClr val="FFFFFF"/>
                           </a:solidFill>
@@ -19961,7 +13036,7 @@
                     <a:p>
                       <a:pPr algn="ctr"/>
                       <a:r>
-                        <a:rPr lang="es-CL" sz="950" b="1" dirty="0">
+                        <a:rPr lang="es-CL" sz="700" b="1" dirty="0">
                           <a:solidFill>
                             <a:srgbClr val="FFFFFF"/>
                           </a:solidFill>
@@ -19983,7 +13058,7 @@
                     <a:p>
                       <a:pPr algn="ctr"/>
                       <a:r>
-                        <a:rPr lang="es-CL" sz="950" b="1" dirty="0">
+                        <a:rPr lang="es-CL" sz="700" b="1" dirty="0">
                           <a:solidFill>
                             <a:srgbClr val="FFFFFF"/>
                           </a:solidFill>
@@ -20005,7 +13080,7 @@
                     <a:p>
                       <a:pPr algn="ctr"/>
                       <a:r>
-                        <a:rPr lang="es-CL" sz="950" b="1" dirty="0">
+                        <a:rPr lang="es-CL" sz="700" b="1" dirty="0">
                           <a:solidFill>
                             <a:srgbClr val="FFFFFF"/>
                           </a:solidFill>
@@ -20027,7 +13102,7 @@
                     <a:p>
                       <a:pPr algn="ctr"/>
                       <a:r>
-                        <a:rPr lang="es-CL" sz="950" b="1" dirty="0">
+                        <a:rPr lang="es-CL" sz="700" b="1" dirty="0">
                           <a:solidFill>
                             <a:srgbClr val="FFFFFF"/>
                           </a:solidFill>
@@ -20049,7 +13124,7 @@
                     <a:p>
                       <a:pPr algn="ctr"/>
                       <a:r>
-                        <a:rPr lang="es-CL" sz="950" b="1" dirty="0">
+                        <a:rPr lang="es-CL" sz="700" b="1" dirty="0">
                           <a:solidFill>
                             <a:srgbClr val="FFFFFF"/>
                           </a:solidFill>
@@ -20071,7 +13146,7 @@
                     <a:p>
                       <a:pPr algn="ctr"/>
                       <a:r>
-                        <a:rPr lang="es-CL" sz="950" b="1" dirty="0">
+                        <a:rPr lang="es-CL" sz="700" b="1" dirty="0">
                           <a:solidFill>
                             <a:srgbClr val="FFFFFF"/>
                           </a:solidFill>
@@ -20093,7 +13168,7 @@
                     <a:p>
                       <a:pPr algn="ctr"/>
                       <a:r>
-                        <a:rPr lang="es-CL" sz="950" b="1" dirty="0">
+                        <a:rPr lang="es-CL" sz="700" b="1" dirty="0">
                           <a:solidFill>
                             <a:srgbClr val="FFFFFF"/>
                           </a:solidFill>
@@ -20115,7 +13190,7 @@
                     <a:p>
                       <a:pPr algn="ctr"/>
                       <a:r>
-                        <a:rPr lang="es-CL" sz="950" b="1" dirty="0">
+                        <a:rPr lang="es-CL" sz="700" b="1" dirty="0">
                           <a:solidFill>
                             <a:srgbClr val="FFFFFF"/>
                           </a:solidFill>
@@ -20137,7 +13212,7 @@
                     <a:p>
                       <a:pPr algn="ctr"/>
                       <a:r>
-                        <a:rPr lang="es-CL" sz="950" b="1" dirty="0">
+                        <a:rPr lang="es-CL" sz="700" b="1" dirty="0">
                           <a:solidFill>
                             <a:srgbClr val="FFFFFF"/>
                           </a:solidFill>
@@ -20159,7 +13234,7 @@
                     <a:p>
                       <a:pPr algn="ctr"/>
                       <a:r>
-                        <a:rPr lang="es-CL" sz="950" b="1" dirty="0">
+                        <a:rPr lang="es-CL" sz="700" b="1" dirty="0">
                           <a:solidFill>
                             <a:srgbClr val="FFFFFF"/>
                           </a:solidFill>
@@ -20181,7 +13256,7 @@
                     <a:p>
                       <a:pPr algn="ctr"/>
                       <a:r>
-                        <a:rPr lang="es-CL" sz="950" b="1" dirty="0">
+                        <a:rPr lang="es-CL" sz="700" b="1" dirty="0">
                           <a:solidFill>
                             <a:srgbClr val="FFFFFF"/>
                           </a:solidFill>
@@ -20203,7 +13278,7 @@
                     <a:p>
                       <a:pPr algn="ctr"/>
                       <a:r>
-                        <a:rPr lang="es-CL" sz="950" b="1" dirty="0">
+                        <a:rPr lang="es-CL" sz="700" b="1" dirty="0">
                           <a:solidFill>
                             <a:srgbClr val="FFFFFF"/>
                           </a:solidFill>
@@ -20225,7 +13300,7 @@
                     <a:p>
                       <a:pPr algn="ctr"/>
                       <a:r>
-                        <a:rPr lang="es-CL" sz="950" b="1" dirty="0">
+                        <a:rPr lang="es-CL" sz="700" b="1" dirty="0">
                           <a:solidFill>
                             <a:srgbClr val="FFFFFF"/>
                           </a:solidFill>
@@ -20247,7 +13322,7 @@
                     <a:p>
                       <a:pPr algn="ctr"/>
                       <a:r>
-                        <a:rPr lang="es-CL" sz="950" b="1" dirty="0">
+                        <a:rPr lang="es-CL" sz="700" b="1" dirty="0">
                           <a:solidFill>
                             <a:srgbClr val="FFFFFF"/>
                           </a:solidFill>
@@ -20269,7 +13344,7 @@
                     <a:p>
                       <a:pPr algn="ctr"/>
                       <a:r>
-                        <a:rPr lang="es-CL" sz="950" b="1" dirty="0">
+                        <a:rPr lang="es-CL" sz="700" b="1" dirty="0">
                           <a:solidFill>
                             <a:srgbClr val="FFFFFF"/>
                           </a:solidFill>
@@ -20291,7 +13366,7 @@
                     <a:p>
                       <a:pPr algn="ctr"/>
                       <a:r>
-                        <a:rPr lang="es-CL" sz="950" b="1" dirty="0">
+                        <a:rPr lang="es-CL" sz="700" b="1" dirty="0">
                           <a:solidFill>
                             <a:srgbClr val="FFFFFF"/>
                           </a:solidFill>
@@ -20313,7 +13388,7 @@
                     <a:p>
                       <a:pPr algn="ctr"/>
                       <a:r>
-                        <a:rPr lang="es-CL" sz="950" b="1" dirty="0">
+                        <a:rPr lang="es-CL" sz="700" b="1" dirty="0">
                           <a:solidFill>
                             <a:srgbClr val="FFFFFF"/>
                           </a:solidFill>
@@ -23191,14 +16266,14 @@
       </p:graphicFrame>
       <p:sp>
         <p:nvSpPr>
-          <p:cNvPr id="11" name="10 CuadroTexto"/>
+          <p:cNvPr id="10" name="9 CuadroTexto"/>
           <p:cNvSpPr txBox="1"/>
           <p:nvPr/>
         </p:nvSpPr>
         <p:spPr>
           <a:xfrm>
-            <a:off x="323528" y="6200000"/>
-            <a:ext cx="8352928" cy="450000"/>
+            <a:off x="323528" y="6150000"/>
+            <a:ext cx="8352928" cy="500000"/>
           </a:xfrm>
           <a:prstGeom prst="rect">
             <a:avLst/>
@@ -23220,9 +16295,799 @@
                   </a:prstClr>
                 </a:solidFill>
               </a:rPr>
-              <a:t>Completada  ·  En ejecución  ·  Pendiente  ·  Hito.</a:t>
+              <a:t>Completada    ·    En ejecución    ·    Pendiente    ·    Hito. Ajustes respecto del anteproyecto: A1.3 y A1.4 se desdoblan en flujo único y segmentación jerárquica, y el primer hito se sitúa en la semana 5.</a:t>
             </a:r>
             <a:endParaRPr lang="es-CL" sz="1000"/>
+          </a:p>
+        </p:txBody>
+      </p:sp>
+    </p:spTree>
+  </p:cSld>
+  <p:clrMapOvr>
+    <a:masterClrMapping/>
+  </p:clrMapOvr>
+</p:sld>
+</file>
+
+<file path=ppt/slides/slide8.xml><?xml version="1.0" encoding="utf-8"?>
+<p:sld xmlns:a="http://schemas.openxmlformats.org/drawingml/2006/main" xmlns:r="http://schemas.openxmlformats.org/officeDocument/2006/relationships" xmlns:p="http://schemas.openxmlformats.org/presentationml/2006/main">
+  <p:cSld>
+    <p:spTree>
+      <p:nvGrpSpPr>
+        <p:cNvPr id="1" name=""/>
+        <p:cNvGrpSpPr/>
+        <p:nvPr/>
+      </p:nvGrpSpPr>
+      <p:grpSpPr>
+        <a:xfrm>
+          <a:off x="0" y="0"/>
+          <a:ext cx="0" cy="0"/>
+          <a:chOff x="0" y="0"/>
+          <a:chExt cx="0" cy="0"/>
+        </a:xfrm>
+      </p:grpSpPr>
+      <p:sp>
+        <p:nvSpPr>
+          <p:cNvPr id="5" name="4 CuadroTexto"/>
+          <p:cNvSpPr txBox="1"/>
+          <p:nvPr/>
+        </p:nvSpPr>
+        <p:spPr>
+          <a:xfrm>
+            <a:off x="5675867" y="340990"/>
+            <a:ext cx="2337602" cy="252106"/>
+          </a:xfrm>
+          <a:prstGeom prst="rect">
+            <a:avLst/>
+          </a:prstGeom>
+          <a:noFill/>
+        </p:spPr>
+        <p:txBody>
+          <a:bodyPr wrap="square" lIns="82014" tIns="45697" rIns="82014" bIns="45697" rtlCol="0">
+            <a:spAutoFit/>
+          </a:bodyPr>
+          <a:lstStyle/>
+          <a:p>
+            <a:pPr algn="ctr"/>
+            <a:r>
+              <a:rPr lang="es-CL" sz="1000" b="1" dirty="0">
+                <a:solidFill>
+                  <a:prstClr val="black">
+                    <a:lumMod val="65000"/>
+                    <a:lumOff val="35000"/>
+                  </a:prstClr>
+                </a:solidFill>
+              </a:rPr>
+              <a:t>Sistema de gestión de riesgos MP8 y MP21</a:t>
+            </a:r>
+            <a:endParaRPr lang="es-CL" sz="1000"/>
+          </a:p>
+        </p:txBody>
+      </p:sp>
+      <p:sp>
+        <p:nvSpPr>
+          <p:cNvPr id="4" name="3 CuadroTexto"/>
+          <p:cNvSpPr txBox="1"/>
+          <p:nvPr/>
+        </p:nvSpPr>
+        <p:spPr>
+          <a:xfrm>
+            <a:off x="5740803" y="1034218"/>
+            <a:ext cx="2207735" cy="221341"/>
+          </a:xfrm>
+          <a:prstGeom prst="rect">
+            <a:avLst/>
+          </a:prstGeom>
+          <a:noFill/>
+        </p:spPr>
+        <p:txBody>
+          <a:bodyPr wrap="square" lIns="82014" tIns="45697" rIns="82014" bIns="45697" rtlCol="0">
+            <a:spAutoFit/>
+          </a:bodyPr>
+          <a:lstStyle/>
+          <a:p>
+            <a:pPr algn="ctr"/>
+            <a:r>
+              <a:rPr lang="es-CL" sz="900" dirty="0">
+                <a:solidFill>
+                  <a:prstClr val="white">
+                    <a:lumMod val="50000"/>
+                  </a:prstClr>
+                </a:solidFill>
+              </a:rPr>
+              <a:t>| </a:t>
+            </a:r>
+            <a:r>
+              <a:rPr lang="es-CL" sz="900" b="1" dirty="0">
+                <a:solidFill>
+                  <a:srgbClr val="1F497D">
+                    <a:lumMod val="75000"/>
+                  </a:srgbClr>
+                </a:solidFill>
+              </a:rPr>
+              <a:t>Estudiante: </a:t>
+            </a:r>
+            <a:r>
+              <a:rPr lang="es-CL" sz="900" dirty="0">
+                <a:solidFill>
+                  <a:srgbClr val="1F497D">
+                    <a:lumMod val="75000"/>
+                  </a:srgbClr>
+                </a:solidFill>
+              </a:rPr>
+              <a:t>Bastián Darwit Vera</a:t>
+            </a:r>
+            <a:r>
+              <a:rPr lang="es-CL" sz="900" dirty="0">
+                <a:solidFill>
+                  <a:prstClr val="white">
+                    <a:lumMod val="50000"/>
+                  </a:prstClr>
+                </a:solidFill>
+              </a:rPr>
+              <a:t> |</a:t>
+            </a:r>
+          </a:p>
+        </p:txBody>
+      </p:sp>
+      <p:sp>
+        <p:nvSpPr>
+          <p:cNvPr id="6" name="5 CuadroTexto"/>
+          <p:cNvSpPr txBox="1"/>
+          <p:nvPr/>
+        </p:nvSpPr>
+        <p:spPr>
+          <a:xfrm>
+            <a:off x="805865" y="1538381"/>
+            <a:ext cx="7077739" cy="852256"/>
+          </a:xfrm>
+          <a:prstGeom prst="rect">
+            <a:avLst/>
+          </a:prstGeom>
+          <a:noFill/>
+        </p:spPr>
+        <p:txBody>
+          <a:bodyPr wrap="square" lIns="82014" tIns="45697" rIns="82014" bIns="45697" rtlCol="0">
+            <a:spAutoFit/>
+          </a:bodyPr>
+          <a:lstStyle/>
+          <a:p>
+            <a:r>
+              <a:rPr lang="es-CL" sz="2000" b="1" dirty="0">
+                <a:solidFill>
+                  <a:prstClr val="black">
+                    <a:lumMod val="65000"/>
+                    <a:lumOff val="35000"/>
+                  </a:prstClr>
+                </a:solidFill>
+              </a:rPr>
+              <a:t>Desarrollo y resultados del objetivo específico 1 (1 de 2)</a:t>
+            </a:r>
+            <a:endParaRPr lang="es-CL" sz="2000"/>
+          </a:p>
+        </p:txBody>
+      </p:sp>
+      <p:sp>
+        <p:nvSpPr>
+          <p:cNvPr id="8" name="7 CuadroTexto"/>
+          <p:cNvSpPr txBox="1"/>
+          <p:nvPr/>
+        </p:nvSpPr>
+        <p:spPr>
+          <a:xfrm>
+            <a:off x="323528" y="2400000"/>
+            <a:ext cx="8352928" cy="400000"/>
+          </a:xfrm>
+          <a:prstGeom prst="rect">
+            <a:avLst/>
+          </a:prstGeom>
+          <a:noFill/>
+        </p:spPr>
+        <p:txBody>
+          <a:bodyPr wrap="square" lIns="91396" tIns="45697" rIns="91396" bIns="45697" rtlCol="0">
+            <a:spAutoFit/>
+          </a:bodyPr>
+          <a:lstStyle/>
+          <a:p>
+            <a:r>
+              <a:rPr lang="es-CL" sz="1500" b="1" dirty="0">
+                <a:solidFill>
+                  <a:srgbClr val="1F497D">
+                    <a:lumMod val="75000"/>
+                  </a:srgbClr>
+                </a:solidFill>
+              </a:rPr>
+              <a:t>Actividades realizadas</a:t>
+            </a:r>
+            <a:endParaRPr lang="es-CL" sz="1500"/>
+          </a:p>
+        </p:txBody>
+      </p:sp>
+      <p:graphicFrame>
+        <p:nvGraphicFramePr>
+          <p:cNvPr id="20" name="Tabla 20"/>
+          <p:cNvGraphicFramePr>
+            <a:graphicFrameLocks noGrp="1"/>
+          </p:cNvGraphicFramePr>
+          <p:nvPr/>
+        </p:nvGraphicFramePr>
+        <p:xfrm>
+          <a:off x="323528" y="2830000"/>
+          <a:ext cx="8352928" cy="2400000"/>
+        </p:xfrm>
+        <a:graphic>
+          <a:graphicData uri="http://schemas.openxmlformats.org/drawingml/2006/table">
+            <a:tbl>
+              <a:tblPr firstRow="1" bandRow="1"/>
+              <a:tblGrid>
+                <a:gridCol w="900000"/>
+                <a:gridCol w="3300000"/>
+                <a:gridCol w="1300000"/>
+                <a:gridCol w="2852928"/>
+              </a:tblGrid>
+              <a:tr h="350">
+                <a:tc>
+                  <a:txBody>
+                    <a:bodyPr/>
+                    <a:lstStyle/>
+                    <a:p>
+                      <a:pPr algn="ctr"/>
+                      <a:r>
+                        <a:rPr lang="es-CL" sz="1000" b="1" dirty="0">
+                          <a:solidFill>
+                            <a:srgbClr val="FFFFFF"/>
+                          </a:solidFill>
+                        </a:rPr>
+                        <a:t>Código</a:t>
+                      </a:r>
+                    </a:p>
+                  </a:txBody>
+                  <a:tcPr marL="45720" marR="45720" marT="27432" marB="27432" anchor="ctr">
+                    <a:solidFill>
+                      <a:srgbClr val="1F497D"/>
+                    </a:solidFill>
+                  </a:tcPr>
+                </a:tc>
+                <a:tc>
+                  <a:txBody>
+                    <a:bodyPr/>
+                    <a:lstStyle/>
+                    <a:p>
+                      <a:pPr/>
+                      <a:r>
+                        <a:rPr lang="es-CL" sz="1000" b="1" dirty="0">
+                          <a:solidFill>
+                            <a:srgbClr val="FFFFFF"/>
+                          </a:solidFill>
+                        </a:rPr>
+                        <a:t>Actividad</a:t>
+                      </a:r>
+                    </a:p>
+                  </a:txBody>
+                  <a:tcPr marL="45720" marR="45720" marT="27432" marB="27432" anchor="ctr">
+                    <a:solidFill>
+                      <a:srgbClr val="1F497D"/>
+                    </a:solidFill>
+                  </a:tcPr>
+                </a:tc>
+                <a:tc>
+                  <a:txBody>
+                    <a:bodyPr/>
+                    <a:lstStyle/>
+                    <a:p>
+                      <a:pPr algn="ctr"/>
+                      <a:r>
+                        <a:rPr lang="es-CL" sz="1000" b="1" dirty="0">
+                          <a:solidFill>
+                            <a:srgbClr val="FFFFFF"/>
+                          </a:solidFill>
+                        </a:rPr>
+                        <a:t>Estado</a:t>
+                      </a:r>
+                    </a:p>
+                  </a:txBody>
+                  <a:tcPr marL="45720" marR="45720" marT="27432" marB="27432" anchor="ctr">
+                    <a:solidFill>
+                      <a:srgbClr val="1F497D"/>
+                    </a:solidFill>
+                  </a:tcPr>
+                </a:tc>
+                <a:tc>
+                  <a:txBody>
+                    <a:bodyPr/>
+                    <a:lstStyle/>
+                    <a:p>
+                      <a:pPr/>
+                      <a:r>
+                        <a:rPr lang="es-CL" sz="1000" b="1" dirty="0">
+                          <a:solidFill>
+                            <a:srgbClr val="FFFFFF"/>
+                          </a:solidFill>
+                        </a:rPr>
+                        <a:t>Evidencia</a:t>
+                      </a:r>
+                    </a:p>
+                  </a:txBody>
+                  <a:tcPr marL="45720" marR="45720" marT="27432" marB="27432" anchor="ctr">
+                    <a:solidFill>
+                      <a:srgbClr val="1F497D"/>
+                    </a:solidFill>
+                  </a:tcPr>
+                </a:tc>
+              </a:tr>
+              <a:tr h="380">
+                <a:tc>
+                  <a:txBody>
+                    <a:bodyPr/>
+                    <a:lstStyle/>
+                    <a:p>
+                      <a:pPr algn="ctr"/>
+                      <a:r>
+                        <a:rPr lang="es-CL" sz="1000" b="1" dirty="0">
+                          <a:solidFill>
+                            <a:schemeClr val="tx2"/>
+                          </a:solidFill>
+                        </a:rPr>
+                        <a:t>A1.1</a:t>
+                      </a:r>
+                    </a:p>
+                  </a:txBody>
+                  <a:tcPr marL="45720" marR="45720" marT="27432" marB="27432" anchor="ctr">
+                    <a:solidFill>
+                      <a:srgbClr val="F2F2F2"/>
+                    </a:solidFill>
+                  </a:tcPr>
+                </a:tc>
+                <a:tc>
+                  <a:txBody>
+                    <a:bodyPr/>
+                    <a:lstStyle/>
+                    <a:p>
+                      <a:pPr/>
+                      <a:r>
+                        <a:rPr lang="es-CL" sz="1000" dirty="0">
+                          <a:solidFill>
+                            <a:schemeClr val="tx2"/>
+                          </a:solidFill>
+                        </a:rPr>
+                        <a:t>Revisión documental y diagnóstico preliminar</a:t>
+                      </a:r>
+                    </a:p>
+                  </a:txBody>
+                  <a:tcPr marL="45720" marR="45720" marT="27432" marB="27432" anchor="ctr">
+                    <a:solidFill>
+                      <a:srgbClr val="F2F2F2"/>
+                    </a:solidFill>
+                  </a:tcPr>
+                </a:tc>
+                <a:tc>
+                  <a:txBody>
+                    <a:bodyPr/>
+                    <a:lstStyle/>
+                    <a:p>
+                      <a:pPr algn="ctr"/>
+                      <a:r>
+                        <a:rPr lang="es-CL" sz="1000" dirty="0">
+                          <a:solidFill>
+                            <a:schemeClr val="tx2"/>
+                          </a:solidFill>
+                        </a:rPr>
+                        <a:t>Completada</a:t>
+                      </a:r>
+                    </a:p>
+                  </a:txBody>
+                  <a:tcPr marL="45720" marR="45720" marT="27432" marB="27432" anchor="ctr">
+                    <a:solidFill>
+                      <a:srgbClr val="F2F2F2"/>
+                    </a:solidFill>
+                  </a:tcPr>
+                </a:tc>
+                <a:tc>
+                  <a:txBody>
+                    <a:bodyPr/>
+                    <a:lstStyle/>
+                    <a:p>
+                      <a:pPr/>
+                      <a:r>
+                        <a:rPr lang="es-CL" sz="1000" dirty="0">
+                          <a:solidFill>
+                            <a:schemeClr val="tx2"/>
+                          </a:solidFill>
+                        </a:rPr>
+                        <a:t>Inventario de fuentes y matriz de trazabilidad</a:t>
+                      </a:r>
+                    </a:p>
+                  </a:txBody>
+                  <a:tcPr marL="45720" marR="45720" marT="27432" marB="27432" anchor="ctr">
+                    <a:solidFill>
+                      <a:srgbClr val="F2F2F2"/>
+                    </a:solidFill>
+                  </a:tcPr>
+                </a:tc>
+              </a:tr>
+              <a:tr h="380">
+                <a:tc>
+                  <a:txBody>
+                    <a:bodyPr/>
+                    <a:lstStyle/>
+                    <a:p>
+                      <a:pPr algn="ctr"/>
+                      <a:r>
+                        <a:rPr lang="es-CL" sz="1000" b="1" dirty="0">
+                          <a:solidFill>
+                            <a:schemeClr val="tx2"/>
+                          </a:solidFill>
+                        </a:rPr>
+                        <a:t>A1.2</a:t>
+                      </a:r>
+                    </a:p>
+                  </a:txBody>
+                  <a:tcPr marL="45720" marR="45720" marT="27432" marB="27432" anchor="ctr"/>
+                </a:tc>
+                <a:tc>
+                  <a:txBody>
+                    <a:bodyPr/>
+                    <a:lstStyle/>
+                    <a:p>
+                      <a:pPr/>
+                      <a:r>
+                        <a:rPr lang="es-CL" sz="1000" dirty="0">
+                          <a:solidFill>
+                            <a:schemeClr val="tx2"/>
+                          </a:solidFill>
+                        </a:rPr>
+                        <a:t>Entrevistas con los dueños de proceso</a:t>
+                      </a:r>
+                    </a:p>
+                  </a:txBody>
+                  <a:tcPr marL="45720" marR="45720" marT="27432" marB="27432" anchor="ctr"/>
+                </a:tc>
+                <a:tc>
+                  <a:txBody>
+                    <a:bodyPr/>
+                    <a:lstStyle/>
+                    <a:p>
+                      <a:pPr algn="ctr"/>
+                      <a:r>
+                        <a:rPr lang="es-CL" sz="1000" dirty="0">
+                          <a:solidFill>
+                            <a:schemeClr val="tx2"/>
+                          </a:solidFill>
+                        </a:rPr>
+                        <a:t>Completada</a:t>
+                      </a:r>
+                    </a:p>
+                  </a:txBody>
+                  <a:tcPr marL="45720" marR="45720" marT="27432" marB="27432" anchor="ctr"/>
+                </a:tc>
+                <a:tc>
+                  <a:txBody>
+                    <a:bodyPr/>
+                    <a:lstStyle/>
+                    <a:p>
+                      <a:pPr/>
+                      <a:r>
+                        <a:rPr lang="es-CL" sz="1000" dirty="0">
+                          <a:solidFill>
+                            <a:schemeClr val="tx2"/>
+                          </a:solidFill>
+                        </a:rPr>
+                        <a:t>Registros de tres áreas funcionales de MP8</a:t>
+                      </a:r>
+                    </a:p>
+                  </a:txBody>
+                  <a:tcPr marL="45720" marR="45720" marT="27432" marB="27432" anchor="ctr"/>
+                </a:tc>
+              </a:tr>
+              <a:tr h="380">
+                <a:tc>
+                  <a:txBody>
+                    <a:bodyPr/>
+                    <a:lstStyle/>
+                    <a:p>
+                      <a:pPr algn="ctr"/>
+                      <a:r>
+                        <a:rPr lang="es-CL" sz="1000" b="1" dirty="0">
+                          <a:solidFill>
+                            <a:schemeClr val="tx2"/>
+                          </a:solidFill>
+                        </a:rPr>
+                        <a:t>A1.3.1</a:t>
+                      </a:r>
+                    </a:p>
+                  </a:txBody>
+                  <a:tcPr marL="45720" marR="45720" marT="27432" marB="27432" anchor="ctr">
+                    <a:solidFill>
+                      <a:srgbClr val="F2F2F2"/>
+                    </a:solidFill>
+                  </a:tcPr>
+                </a:tc>
+                <a:tc>
+                  <a:txBody>
+                    <a:bodyPr/>
+                    <a:lstStyle/>
+                    <a:p>
+                      <a:pPr/>
+                      <a:r>
+                        <a:rPr lang="es-CL" sz="1000" dirty="0">
+                          <a:solidFill>
+                            <a:schemeClr val="tx2"/>
+                          </a:solidFill>
+                        </a:rPr>
+                        <a:t>Flujo único de información de MP8</a:t>
+                      </a:r>
+                    </a:p>
+                  </a:txBody>
+                  <a:tcPr marL="45720" marR="45720" marT="27432" marB="27432" anchor="ctr">
+                    <a:solidFill>
+                      <a:srgbClr val="F2F2F2"/>
+                    </a:solidFill>
+                  </a:tcPr>
+                </a:tc>
+                <a:tc>
+                  <a:txBody>
+                    <a:bodyPr/>
+                    <a:lstStyle/>
+                    <a:p>
+                      <a:pPr algn="ctr"/>
+                      <a:r>
+                        <a:rPr lang="es-CL" sz="1000" dirty="0">
+                          <a:solidFill>
+                            <a:schemeClr val="tx2"/>
+                          </a:solidFill>
+                        </a:rPr>
+                        <a:t>Completada</a:t>
+                      </a:r>
+                    </a:p>
+                  </a:txBody>
+                  <a:tcPr marL="45720" marR="45720" marT="27432" marB="27432" anchor="ctr">
+                    <a:solidFill>
+                      <a:srgbClr val="F2F2F2"/>
+                    </a:solidFill>
+                  </a:tcPr>
+                </a:tc>
+                <a:tc>
+                  <a:txBody>
+                    <a:bodyPr/>
+                    <a:lstStyle/>
+                    <a:p>
+                      <a:pPr/>
+                      <a:r>
+                        <a:rPr lang="es-CL" sz="1000" dirty="0">
+                          <a:solidFill>
+                            <a:schemeClr val="tx2"/>
+                          </a:solidFill>
+                        </a:rPr>
+                        <a:t>Flujo v3: 261 elementos y 318 conexiones</a:t>
+                      </a:r>
+                    </a:p>
+                  </a:txBody>
+                  <a:tcPr marL="45720" marR="45720" marT="27432" marB="27432" anchor="ctr">
+                    <a:solidFill>
+                      <a:srgbClr val="F2F2F2"/>
+                    </a:solidFill>
+                  </a:tcPr>
+                </a:tc>
+              </a:tr>
+              <a:tr h="380">
+                <a:tc>
+                  <a:txBody>
+                    <a:bodyPr/>
+                    <a:lstStyle/>
+                    <a:p>
+                      <a:pPr algn="ctr"/>
+                      <a:r>
+                        <a:rPr lang="es-CL" sz="1000" b="1" dirty="0">
+                          <a:solidFill>
+                            <a:schemeClr val="tx2"/>
+                          </a:solidFill>
+                        </a:rPr>
+                        <a:t>A1.3.2</a:t>
+                      </a:r>
+                    </a:p>
+                  </a:txBody>
+                  <a:tcPr marL="45720" marR="45720" marT="27432" marB="27432" anchor="ctr"/>
+                </a:tc>
+                <a:tc>
+                  <a:txBody>
+                    <a:bodyPr/>
+                    <a:lstStyle/>
+                    <a:p>
+                      <a:pPr/>
+                      <a:r>
+                        <a:rPr lang="es-CL" sz="1000" dirty="0">
+                          <a:solidFill>
+                            <a:schemeClr val="tx2"/>
+                          </a:solidFill>
+                        </a:rPr>
+                        <a:t>Segmentación jerárquica de MP8</a:t>
+                      </a:r>
+                    </a:p>
+                  </a:txBody>
+                  <a:tcPr marL="45720" marR="45720" marT="27432" marB="27432" anchor="ctr"/>
+                </a:tc>
+                <a:tc>
+                  <a:txBody>
+                    <a:bodyPr/>
+                    <a:lstStyle/>
+                    <a:p>
+                      <a:pPr algn="ctr"/>
+                      <a:r>
+                        <a:rPr lang="es-CL" sz="1000" dirty="0">
+                          <a:solidFill>
+                            <a:schemeClr val="tx2"/>
+                          </a:solidFill>
+                        </a:rPr>
+                        <a:t>No iniciada</a:t>
+                      </a:r>
+                    </a:p>
+                  </a:txBody>
+                  <a:tcPr marL="45720" marR="45720" marT="27432" marB="27432" anchor="ctr"/>
+                </a:tc>
+                <a:tc>
+                  <a:txBody>
+                    <a:bodyPr/>
+                    <a:lstStyle/>
+                    <a:p>
+                      <a:pPr/>
+                      <a:r>
+                        <a:rPr lang="es-CL" sz="1000" dirty="0">
+                          <a:solidFill>
+                            <a:schemeClr val="tx2"/>
+                          </a:solidFill>
+                        </a:rPr>
+                        <a:t>Programada en las semanas 6 y 7</a:t>
+                      </a:r>
+                    </a:p>
+                  </a:txBody>
+                  <a:tcPr marL="45720" marR="45720" marT="27432" marB="27432" anchor="ctr"/>
+                </a:tc>
+              </a:tr>
+              <a:tr h="380">
+                <a:tc>
+                  <a:txBody>
+                    <a:bodyPr/>
+                    <a:lstStyle/>
+                    <a:p>
+                      <a:pPr algn="ctr"/>
+                      <a:r>
+                        <a:rPr lang="es-CL" sz="1000" b="1" dirty="0">
+                          <a:solidFill>
+                            <a:schemeClr val="tx2"/>
+                          </a:solidFill>
+                        </a:rPr>
+                        <a:t>A1.4</a:t>
+                      </a:r>
+                    </a:p>
+                  </a:txBody>
+                  <a:tcPr marL="45720" marR="45720" marT="27432" marB="27432" anchor="ctr">
+                    <a:solidFill>
+                      <a:srgbClr val="F2F2F2"/>
+                    </a:solidFill>
+                  </a:tcPr>
+                </a:tc>
+                <a:tc>
+                  <a:txBody>
+                    <a:bodyPr/>
+                    <a:lstStyle/>
+                    <a:p>
+                      <a:pPr/>
+                      <a:r>
+                        <a:rPr lang="es-CL" sz="1000" dirty="0">
+                          <a:solidFill>
+                            <a:schemeClr val="tx2"/>
+                          </a:solidFill>
+                        </a:rPr>
+                        <a:t>Levantamiento de MP21</a:t>
+                      </a:r>
+                    </a:p>
+                  </a:txBody>
+                  <a:tcPr marL="45720" marR="45720" marT="27432" marB="27432" anchor="ctr">
+                    <a:solidFill>
+                      <a:srgbClr val="F2F2F2"/>
+                    </a:solidFill>
+                  </a:tcPr>
+                </a:tc>
+                <a:tc>
+                  <a:txBody>
+                    <a:bodyPr/>
+                    <a:lstStyle/>
+                    <a:p>
+                      <a:pPr algn="ctr"/>
+                      <a:r>
+                        <a:rPr lang="es-CL" sz="1000" dirty="0">
+                          <a:solidFill>
+                            <a:schemeClr val="tx2"/>
+                          </a:solidFill>
+                        </a:rPr>
+                        <a:t>No iniciada</a:t>
+                      </a:r>
+                    </a:p>
+                  </a:txBody>
+                  <a:tcPr marL="45720" marR="45720" marT="27432" marB="27432" anchor="ctr">
+                    <a:solidFill>
+                      <a:srgbClr val="F2F2F2"/>
+                    </a:solidFill>
+                  </a:tcPr>
+                </a:tc>
+                <a:tc>
+                  <a:txBody>
+                    <a:bodyPr/>
+                    <a:lstStyle/>
+                    <a:p>
+                      <a:pPr/>
+                      <a:r>
+                        <a:rPr lang="es-CL" sz="1000" dirty="0">
+                          <a:solidFill>
+                            <a:schemeClr val="tx2"/>
+                          </a:solidFill>
+                        </a:rPr>
+                        <a:t>Programada desde la semana 6</a:t>
+                      </a:r>
+                    </a:p>
+                  </a:txBody>
+                  <a:tcPr marL="45720" marR="45720" marT="27432" marB="27432" anchor="ctr">
+                    <a:solidFill>
+                      <a:srgbClr val="F2F2F2"/>
+                    </a:solidFill>
+                  </a:tcPr>
+                </a:tc>
+              </a:tr>
+            </a:tbl>
+          </a:graphicData>
+        </a:graphic>
+      </p:graphicFrame>
+      <p:sp>
+        <p:nvSpPr>
+          <p:cNvPr id="10" name="9 CuadroTexto"/>
+          <p:cNvSpPr txBox="1"/>
+          <p:nvPr/>
+        </p:nvSpPr>
+        <p:spPr>
+          <a:xfrm>
+            <a:off x="323528" y="5400000"/>
+            <a:ext cx="8352928" cy="1100000"/>
+          </a:xfrm>
+          <a:prstGeom prst="rect">
+            <a:avLst/>
+          </a:prstGeom>
+          <a:noFill/>
+        </p:spPr>
+        <p:txBody>
+          <a:bodyPr wrap="square" lIns="91396" tIns="45697" rIns="91396" bIns="45697" rtlCol="0">
+            <a:spAutoFit/>
+          </a:bodyPr>
+          <a:lstStyle/>
+          <a:p>
+            <a:pPr marL="228600" indent="-228600">
+              <a:buFont typeface="Wingdings" pitchFamily="2" charset="2"/>
+              <a:buChar char="q"/>
+            </a:pPr>
+            <a:r>
+              <a:rPr lang="es-CL" sz="1200" dirty="0">
+                <a:solidFill>
+                  <a:schemeClr val="tx2"/>
+                </a:solidFill>
+              </a:rPr>
+              <a:t>El flujo levantado fue revisado con el </a:t>
+            </a:r>
+            <a:r>
+              <a:rPr lang="es-CL" sz="1200" b="1" dirty="0">
+                <a:solidFill>
+                  <a:schemeClr val="tx2"/>
+                </a:solidFill>
+              </a:rPr>
+              <a:t>líder de mejora continua</a:t>
+            </a:r>
+            <a:r>
+              <a:rPr lang="es-CL" sz="1200" dirty="0">
+                <a:solidFill>
+                  <a:schemeClr val="tx2"/>
+                </a:solidFill>
+              </a:rPr>
+              <a:t>, verificando la continuidad de la cadena y la consistencia de la secuencia entre áreas. La validación formal mediante acta de los dueños de proceso corresponde a A1.6 y está pendiente.</a:t>
+            </a:r>
+            <a:endParaRPr lang="es-CL" sz="1200"/>
           </a:p>
         </p:txBody>
       </p:sp>
@@ -23378,7 +17243,7 @@
           <a:lstStyle/>
           <a:p>
             <a:r>
-              <a:rPr lang="es-CL" sz="2200" b="1" dirty="0">
+              <a:rPr lang="es-CL" sz="2000" b="1" dirty="0">
                 <a:solidFill>
                   <a:prstClr val="black">
                     <a:lumMod val="65000"/>
@@ -23386,9 +17251,45 @@
                   </a:prstClr>
                 </a:solidFill>
               </a:rPr>
-              <a:t>Resultados · Actividades realizadas</a:t>
-            </a:r>
-            <a:endParaRPr lang="es-CL" sz="2200"/>
+              <a:t>Desarrollo y resultados del objetivo específico 1 (2 de 2)</a:t>
+            </a:r>
+            <a:endParaRPr lang="es-CL" sz="2000"/>
+          </a:p>
+        </p:txBody>
+      </p:sp>
+      <p:sp>
+        <p:nvSpPr>
+          <p:cNvPr id="8" name="7 CuadroTexto"/>
+          <p:cNvSpPr txBox="1"/>
+          <p:nvPr/>
+        </p:nvSpPr>
+        <p:spPr>
+          <a:xfrm>
+            <a:off x="323528" y="2400000"/>
+            <a:ext cx="8352928" cy="400000"/>
+          </a:xfrm>
+          <a:prstGeom prst="rect">
+            <a:avLst/>
+          </a:prstGeom>
+          <a:noFill/>
+        </p:spPr>
+        <p:txBody>
+          <a:bodyPr wrap="square" lIns="91396" tIns="45697" rIns="91396" bIns="45697" rtlCol="0">
+            <a:spAutoFit/>
+          </a:bodyPr>
+          <a:lstStyle/>
+          <a:p>
+            <a:r>
+              <a:rPr lang="es-CL" sz="1400" b="1" dirty="0">
+                <a:solidFill>
+                  <a:srgbClr val="1F497D">
+                    <a:lumMod val="75000"/>
+                  </a:srgbClr>
+                </a:solidFill>
+              </a:rPr>
+              <a:t>Resultados obtenidos · Flujo único de MP8: 18 fases, 261 elementos, 318 conexiones</a:t>
+            </a:r>
+            <a:endParaRPr lang="es-CL" sz="1400"/>
           </a:p>
         </p:txBody>
       </p:sp>
@@ -23401,33 +17302,32 @@
           <p:nvPr/>
         </p:nvGraphicFramePr>
         <p:xfrm>
-          <a:off x="323528" y="2500000"/>
-          <a:ext cx="8352928" cy="2600000"/>
+          <a:off x="323528" y="2830000"/>
+          <a:ext cx="4100000" cy="2100000"/>
         </p:xfrm>
         <a:graphic>
           <a:graphicData uri="http://schemas.openxmlformats.org/drawingml/2006/table">
             <a:tbl>
               <a:tblPr firstRow="1" bandRow="1"/>
               <a:tblGrid>
-                <a:gridCol w="900000"/>
-                <a:gridCol w="3100000"/>
-                <a:gridCol w="1300000"/>
-                <a:gridCol w="3052928"/>
+                <a:gridCol w="2900000"/>
+                <a:gridCol w="700000"/>
+                <a:gridCol w="500000"/>
               </a:tblGrid>
-              <a:tr h="350">
-                <a:tc>
-                  <a:txBody>
-                    <a:bodyPr/>
-                    <a:lstStyle/>
-                    <a:p>
-                      <a:pPr algn="ctr"/>
+              <a:tr h="330">
+                <a:tc>
+                  <a:txBody>
+                    <a:bodyPr/>
+                    <a:lstStyle/>
+                    <a:p>
+                      <a:pPr/>
                       <a:r>
-                        <a:rPr lang="es-CL" sz="950" b="1" dirty="0">
+                        <a:rPr lang="es-CL" sz="1000" b="1" dirty="0">
                           <a:solidFill>
                             <a:srgbClr val="FFFFFF"/>
                           </a:solidFill>
                         </a:rPr>
-                        <a:t>Código</a:t>
+                        <a:t>Procedencia del elemento</a:t>
                       </a:r>
                     </a:p>
                   </a:txBody>
@@ -23442,14 +17342,14 @@
                     <a:bodyPr/>
                     <a:lstStyle/>
                     <a:p>
-                      <a:pPr/>
+                      <a:pPr algn="ctr"/>
                       <a:r>
-                        <a:rPr lang="es-CL" sz="950" b="1" dirty="0">
+                        <a:rPr lang="es-CL" sz="1000" b="1" dirty="0">
                           <a:solidFill>
                             <a:srgbClr val="FFFFFF"/>
                           </a:solidFill>
                         </a:rPr>
-                        <a:t>Actividad</a:t>
+                        <a:t>N.º</a:t>
                       </a:r>
                     </a:p>
                   </a:txBody>
@@ -23466,12 +17366,12 @@
                     <a:p>
                       <a:pPr algn="ctr"/>
                       <a:r>
-                        <a:rPr lang="es-CL" sz="950" b="1" dirty="0">
+                        <a:rPr lang="es-CL" sz="1000" b="1" dirty="0">
                           <a:solidFill>
                             <a:srgbClr val="FFFFFF"/>
                           </a:solidFill>
                         </a:rPr>
-                        <a:t>Estado</a:t>
+                        <a:t>%</a:t>
                       </a:r>
                     </a:p>
                   </a:txBody>
@@ -23481,6 +17381,8 @@
                     </a:solidFill>
                   </a:tcPr>
                 </a:tc>
+              </a:tr>
+              <a:tr h="330">
                 <a:tc>
                   <a:txBody>
                     <a:bodyPr/>
@@ -23488,36 +17390,12 @@
                     <a:p>
                       <a:pPr/>
                       <a:r>
-                        <a:rPr lang="es-CL" sz="950" b="1" dirty="0">
-                          <a:solidFill>
-                            <a:srgbClr val="FFFFFF"/>
-                          </a:solidFill>
-                        </a:rPr>
-                        <a:t>Evidencia</a:t>
-                      </a:r>
-                    </a:p>
-                  </a:txBody>
-                  <a:tcPr marL="45720" marR="45720" marT="27432" marB="27432" anchor="ctr">
-                    <a:solidFill>
-                      <a:srgbClr val="1F497D"/>
-                    </a:solidFill>
-                  </a:tcPr>
-                </a:tc>
-              </a:tr>
-              <a:tr h="420">
-                <a:tc>
-                  <a:txBody>
-                    <a:bodyPr/>
-                    <a:lstStyle/>
-                    <a:p>
-                      <a:pPr algn="ctr"/>
-                      <a:r>
-                        <a:rPr lang="es-CL" sz="1050" b="1" dirty="0">
+                        <a:rPr lang="es-CL" sz="1000" dirty="0">
                           <a:solidFill>
                             <a:schemeClr val="tx2"/>
                           </a:solidFill>
                         </a:rPr>
-                        <a:t>A1.1</a:t>
+                        <a:t>Procedimiento vigente</a:t>
                       </a:r>
                     </a:p>
                   </a:txBody>
@@ -23532,14 +17410,14 @@
                     <a:bodyPr/>
                     <a:lstStyle/>
                     <a:p>
-                      <a:pPr/>
+                      <a:pPr algn="ctr"/>
                       <a:r>
-                        <a:rPr lang="es-CL" sz="1050" dirty="0">
+                        <a:rPr lang="es-CL" sz="1000" dirty="0">
                           <a:solidFill>
                             <a:schemeClr val="tx2"/>
                           </a:solidFill>
                         </a:rPr>
-                        <a:t>Revisión documental y diagnóstico preliminar</a:t>
+                        <a:t>94</a:t>
                       </a:r>
                     </a:p>
                   </a:txBody>
@@ -23556,12 +17434,12 @@
                     <a:p>
                       <a:pPr algn="ctr"/>
                       <a:r>
-                        <a:rPr lang="es-CL" sz="1050" dirty="0">
+                        <a:rPr lang="es-CL" sz="1000" dirty="0">
                           <a:solidFill>
                             <a:schemeClr val="tx2"/>
                           </a:solidFill>
                         </a:rPr>
-                        <a:t>Completada</a:t>
+                        <a:t>36,0</a:t>
                       </a:r>
                     </a:p>
                   </a:txBody>
@@ -23571,6 +17449,8 @@
                     </a:solidFill>
                   </a:tcPr>
                 </a:tc>
+              </a:tr>
+              <a:tr h="330">
                 <a:tc>
                   <a:txBody>
                     <a:bodyPr/>
@@ -23578,12 +17458,68 @@
                     <a:p>
                       <a:pPr/>
                       <a:r>
-                        <a:rPr lang="es-CL" sz="1050" dirty="0">
+                        <a:rPr lang="es-CL" sz="1000" dirty="0">
                           <a:solidFill>
                             <a:schemeClr val="tx2"/>
                           </a:solidFill>
                         </a:rPr>
-                        <a:t>Inventario de fuentes y matriz de trazabilidad</a:t>
+                        <a:t>Insumo interno o marco de referencia</a:t>
+                      </a:r>
+                    </a:p>
+                  </a:txBody>
+                  <a:tcPr marL="45720" marR="45720" marT="27432" marB="27432" anchor="ctr"/>
+                </a:tc>
+                <a:tc>
+                  <a:txBody>
+                    <a:bodyPr/>
+                    <a:lstStyle/>
+                    <a:p>
+                      <a:pPr algn="ctr"/>
+                      <a:r>
+                        <a:rPr lang="es-CL" sz="1000" dirty="0">
+                          <a:solidFill>
+                            <a:schemeClr val="tx2"/>
+                          </a:solidFill>
+                        </a:rPr>
+                        <a:t>92</a:t>
+                      </a:r>
+                    </a:p>
+                  </a:txBody>
+                  <a:tcPr marL="45720" marR="45720" marT="27432" marB="27432" anchor="ctr"/>
+                </a:tc>
+                <a:tc>
+                  <a:txBody>
+                    <a:bodyPr/>
+                    <a:lstStyle/>
+                    <a:p>
+                      <a:pPr algn="ctr"/>
+                      <a:r>
+                        <a:rPr lang="es-CL" sz="1000" dirty="0">
+                          <a:solidFill>
+                            <a:schemeClr val="tx2"/>
+                          </a:solidFill>
+                        </a:rPr>
+                        <a:t>35,2</a:t>
+                      </a:r>
+                    </a:p>
+                  </a:txBody>
+                  <a:tcPr marL="45720" marR="45720" marT="27432" marB="27432" anchor="ctr"/>
+                </a:tc>
+              </a:tr>
+              <a:tr h="330">
+                <a:tc>
+                  <a:txBody>
+                    <a:bodyPr/>
+                    <a:lstStyle/>
+                    <a:p>
+                      <a:pPr/>
+                      <a:r>
+                        <a:rPr lang="es-CL" sz="1000" dirty="0">
+                          <a:solidFill>
+                            <a:schemeClr val="tx2"/>
+                          </a:solidFill>
+                        </a:rPr>
+                        <a:t>Entrevista, sin documentación previa</a:t>
                       </a:r>
                     </a:p>
                   </a:txBody>
@@ -23593,8 +17529,6 @@
                     </a:solidFill>
                   </a:tcPr>
                 </a:tc>
-              </a:tr>
-              <a:tr h="420">
                 <a:tc>
                   <a:txBody>
                     <a:bodyPr/>
@@ -23602,86 +17536,12 @@
                     <a:p>
                       <a:pPr algn="ctr"/>
                       <a:r>
-                        <a:rPr lang="es-CL" sz="1050" b="1" dirty="0">
+                        <a:rPr lang="es-CL" sz="1000" dirty="0">
                           <a:solidFill>
                             <a:schemeClr val="tx2"/>
                           </a:solidFill>
                         </a:rPr>
-                        <a:t>A1.2</a:t>
-                      </a:r>
-                    </a:p>
-                  </a:txBody>
-                  <a:tcPr marL="45720" marR="45720" marT="27432" marB="27432" anchor="ctr"/>
-                </a:tc>
-                <a:tc>
-                  <a:txBody>
-                    <a:bodyPr/>
-                    <a:lstStyle/>
-                    <a:p>
-                      <a:pPr/>
-                      <a:r>
-                        <a:rPr lang="es-CL" sz="1050" dirty="0">
-                          <a:solidFill>
-                            <a:schemeClr val="tx2"/>
-                          </a:solidFill>
-                        </a:rPr>
-                        <a:t>Entrevistas con los dueños de proceso</a:t>
-                      </a:r>
-                    </a:p>
-                  </a:txBody>
-                  <a:tcPr marL="45720" marR="45720" marT="27432" marB="27432" anchor="ctr"/>
-                </a:tc>
-                <a:tc>
-                  <a:txBody>
-                    <a:bodyPr/>
-                    <a:lstStyle/>
-                    <a:p>
-                      <a:pPr algn="ctr"/>
-                      <a:r>
-                        <a:rPr lang="es-CL" sz="1050" dirty="0">
-                          <a:solidFill>
-                            <a:schemeClr val="tx2"/>
-                          </a:solidFill>
-                        </a:rPr>
-                        <a:t>Completada</a:t>
-                      </a:r>
-                    </a:p>
-                  </a:txBody>
-                  <a:tcPr marL="45720" marR="45720" marT="27432" marB="27432" anchor="ctr"/>
-                </a:tc>
-                <a:tc>
-                  <a:txBody>
-                    <a:bodyPr/>
-                    <a:lstStyle/>
-                    <a:p>
-                      <a:pPr/>
-                      <a:r>
-                        <a:rPr lang="es-CL" sz="1050" dirty="0">
-                          <a:solidFill>
-                            <a:schemeClr val="tx2"/>
-                          </a:solidFill>
-                        </a:rPr>
-                        <a:t>Registros de tres áreas funcionales de MP8</a:t>
-                      </a:r>
-                    </a:p>
-                  </a:txBody>
-                  <a:tcPr marL="45720" marR="45720" marT="27432" marB="27432" anchor="ctr"/>
-                </a:tc>
-              </a:tr>
-              <a:tr h="420">
-                <a:tc>
-                  <a:txBody>
-                    <a:bodyPr/>
-                    <a:lstStyle/>
-                    <a:p>
-                      <a:pPr algn="ctr"/>
-                      <a:r>
-                        <a:rPr lang="es-CL" sz="1050" b="1" dirty="0">
-                          <a:solidFill>
-                            <a:schemeClr val="tx2"/>
-                          </a:solidFill>
-                        </a:rPr>
-                        <a:t>A1.3.1</a:t>
+                        <a:t>36</a:t>
                       </a:r>
                     </a:p>
                   </a:txBody>
@@ -23696,14 +17556,14 @@
                     <a:bodyPr/>
                     <a:lstStyle/>
                     <a:p>
-                      <a:pPr/>
+                      <a:pPr algn="ctr"/>
                       <a:r>
-                        <a:rPr lang="es-CL" sz="1050" dirty="0">
+                        <a:rPr lang="es-CL" sz="1000" dirty="0">
                           <a:solidFill>
                             <a:schemeClr val="tx2"/>
                           </a:solidFill>
                         </a:rPr>
-                        <a:t>Flujo único de información de MP8</a:t>
+                        <a:t>13,8</a:t>
                       </a:r>
                     </a:p>
                   </a:txBody>
@@ -23713,19 +17573,77 @@
                     </a:solidFill>
                   </a:tcPr>
                 </a:tc>
-                <a:tc>
-                  <a:txBody>
-                    <a:bodyPr/>
-                    <a:lstStyle/>
-                    <a:p>
-                      <a:pPr algn="ctr"/>
+              </a:tr>
+              <a:tr h="330">
+                <a:tc>
+                  <a:txBody>
+                    <a:bodyPr/>
+                    <a:lstStyle/>
+                    <a:p>
+                      <a:pPr/>
                       <a:r>
-                        <a:rPr lang="es-CL" sz="1050" dirty="0">
+                        <a:rPr lang="es-CL" sz="1000" dirty="0">
                           <a:solidFill>
                             <a:schemeClr val="tx2"/>
                           </a:solidFill>
                         </a:rPr>
-                        <a:t>Completada</a:t>
+                        <a:t>Brecha declarada</a:t>
+                      </a:r>
+                    </a:p>
+                  </a:txBody>
+                  <a:tcPr marL="45720" marR="45720" marT="27432" marB="27432" anchor="ctr"/>
+                </a:tc>
+                <a:tc>
+                  <a:txBody>
+                    <a:bodyPr/>
+                    <a:lstStyle/>
+                    <a:p>
+                      <a:pPr algn="ctr"/>
+                      <a:r>
+                        <a:rPr lang="es-CL" sz="1000" dirty="0">
+                          <a:solidFill>
+                            <a:schemeClr val="tx2"/>
+                          </a:solidFill>
+                        </a:rPr>
+                        <a:t>12</a:t>
+                      </a:r>
+                    </a:p>
+                  </a:txBody>
+                  <a:tcPr marL="45720" marR="45720" marT="27432" marB="27432" anchor="ctr"/>
+                </a:tc>
+                <a:tc>
+                  <a:txBody>
+                    <a:bodyPr/>
+                    <a:lstStyle/>
+                    <a:p>
+                      <a:pPr algn="ctr"/>
+                      <a:r>
+                        <a:rPr lang="es-CL" sz="1000" dirty="0">
+                          <a:solidFill>
+                            <a:schemeClr val="tx2"/>
+                          </a:solidFill>
+                        </a:rPr>
+                        <a:t>4,6</a:t>
+                      </a:r>
+                    </a:p>
+                  </a:txBody>
+                  <a:tcPr marL="45720" marR="45720" marT="27432" marB="27432" anchor="ctr"/>
+                </a:tc>
+              </a:tr>
+              <a:tr h="330">
+                <a:tc>
+                  <a:txBody>
+                    <a:bodyPr/>
+                    <a:lstStyle/>
+                    <a:p>
+                      <a:pPr/>
+                      <a:r>
+                        <a:rPr lang="es-CL" sz="1000" dirty="0">
+                          <a:solidFill>
+                            <a:schemeClr val="tx2"/>
+                          </a:solidFill>
+                        </a:rPr>
+                        <a:t>Elementos auxiliares de notación</a:t>
                       </a:r>
                     </a:p>
                   </a:txBody>
@@ -23740,14 +17658,14 @@
                     <a:bodyPr/>
                     <a:lstStyle/>
                     <a:p>
-                      <a:pPr/>
+                      <a:pPr algn="ctr"/>
                       <a:r>
-                        <a:rPr lang="es-CL" sz="1050" dirty="0">
+                        <a:rPr lang="es-CL" sz="1000" dirty="0">
                           <a:solidFill>
                             <a:schemeClr val="tx2"/>
                           </a:solidFill>
                         </a:rPr>
-                        <a:t>261 elementos, 318 conexiones, 18 fases</a:t>
+                        <a:t>27</a:t>
                       </a:r>
                     </a:p>
                   </a:txBody>
@@ -23757,8 +17675,6 @@
                     </a:solidFill>
                   </a:tcPr>
                 </a:tc>
-              </a:tr>
-              <a:tr h="420">
                 <a:tc>
                   <a:txBody>
                     <a:bodyPr/>
@@ -23766,86 +17682,12 @@
                     <a:p>
                       <a:pPr algn="ctr"/>
                       <a:r>
-                        <a:rPr lang="es-CL" sz="1050" b="1" dirty="0">
+                        <a:rPr lang="es-CL" sz="1000" dirty="0">
                           <a:solidFill>
                             <a:schemeClr val="tx2"/>
                           </a:solidFill>
                         </a:rPr>
-                        <a:t>A1.3.2</a:t>
-                      </a:r>
-                    </a:p>
-                  </a:txBody>
-                  <a:tcPr marL="45720" marR="45720" marT="27432" marB="27432" anchor="ctr"/>
-                </a:tc>
-                <a:tc>
-                  <a:txBody>
-                    <a:bodyPr/>
-                    <a:lstStyle/>
-                    <a:p>
-                      <a:pPr/>
-                      <a:r>
-                        <a:rPr lang="es-CL" sz="1050" dirty="0">
-                          <a:solidFill>
-                            <a:schemeClr val="tx2"/>
-                          </a:solidFill>
-                        </a:rPr>
-                        <a:t>Segmentación jerárquica de MP8</a:t>
-                      </a:r>
-                    </a:p>
-                  </a:txBody>
-                  <a:tcPr marL="45720" marR="45720" marT="27432" marB="27432" anchor="ctr"/>
-                </a:tc>
-                <a:tc>
-                  <a:txBody>
-                    <a:bodyPr/>
-                    <a:lstStyle/>
-                    <a:p>
-                      <a:pPr algn="ctr"/>
-                      <a:r>
-                        <a:rPr lang="es-CL" sz="1050" dirty="0">
-                          <a:solidFill>
-                            <a:schemeClr val="tx2"/>
-                          </a:solidFill>
-                        </a:rPr>
-                        <a:t>No iniciada</a:t>
-                      </a:r>
-                    </a:p>
-                  </a:txBody>
-                  <a:tcPr marL="45720" marR="45720" marT="27432" marB="27432" anchor="ctr"/>
-                </a:tc>
-                <a:tc>
-                  <a:txBody>
-                    <a:bodyPr/>
-                    <a:lstStyle/>
-                    <a:p>
-                      <a:pPr/>
-                      <a:r>
-                        <a:rPr lang="es-CL" sz="1050" dirty="0">
-                          <a:solidFill>
-                            <a:schemeClr val="tx2"/>
-                          </a:solidFill>
-                        </a:rPr>
-                        <a:t>Programada en las semanas 6 y 7</a:t>
-                      </a:r>
-                    </a:p>
-                  </a:txBody>
-                  <a:tcPr marL="45720" marR="45720" marT="27432" marB="27432" anchor="ctr"/>
-                </a:tc>
-              </a:tr>
-              <a:tr h="420">
-                <a:tc>
-                  <a:txBody>
-                    <a:bodyPr/>
-                    <a:lstStyle/>
-                    <a:p>
-                      <a:pPr algn="ctr"/>
-                      <a:r>
-                        <a:rPr lang="es-CL" sz="1050" b="1" dirty="0">
-                          <a:solidFill>
-                            <a:schemeClr val="tx2"/>
-                          </a:solidFill>
-                        </a:rPr>
-                        <a:t>A1.4</a:t>
+                        <a:t>10,4</a:t>
                       </a:r>
                     </a:p>
                   </a:txBody>
@@ -23855,6 +17697,8 @@
                     </a:solidFill>
                   </a:tcPr>
                 </a:tc>
+              </a:tr>
+              <a:tr h="330">
                 <a:tc>
                   <a:txBody>
                     <a:bodyPr/>
@@ -23862,18 +17706,18 @@
                     <a:p>
                       <a:pPr/>
                       <a:r>
-                        <a:rPr lang="es-CL" sz="1050" dirty="0">
+                        <a:rPr lang="es-CL" sz="1000" b="1" dirty="0">
                           <a:solidFill>
                             <a:schemeClr val="tx2"/>
                           </a:solidFill>
                         </a:rPr>
-                        <a:t>Levantamiento de MP21</a:t>
+                        <a:t>Total</a:t>
                       </a:r>
                     </a:p>
                   </a:txBody>
                   <a:tcPr marL="45720" marR="45720" marT="27432" marB="27432" anchor="ctr">
                     <a:solidFill>
-                      <a:srgbClr val="F2F2F2"/>
+                      <a:srgbClr val="D9D9D9"/>
                     </a:solidFill>
                   </a:tcPr>
                 </a:tc>
@@ -23884,18 +17728,18 @@
                     <a:p>
                       <a:pPr algn="ctr"/>
                       <a:r>
-                        <a:rPr lang="es-CL" sz="1050" dirty="0">
+                        <a:rPr lang="es-CL" sz="1000" b="1" dirty="0">
                           <a:solidFill>
                             <a:schemeClr val="tx2"/>
                           </a:solidFill>
                         </a:rPr>
-                        <a:t>No iniciada</a:t>
+                        <a:t>261</a:t>
                       </a:r>
                     </a:p>
                   </a:txBody>
                   <a:tcPr marL="45720" marR="45720" marT="27432" marB="27432" anchor="ctr">
                     <a:solidFill>
-                      <a:srgbClr val="F2F2F2"/>
+                      <a:srgbClr val="D9D9D9"/>
                     </a:solidFill>
                   </a:tcPr>
                 </a:tc>
@@ -23904,20 +17748,20 @@
                     <a:bodyPr/>
                     <a:lstStyle/>
                     <a:p>
-                      <a:pPr/>
+                      <a:pPr algn="ctr"/>
                       <a:r>
-                        <a:rPr lang="es-CL" sz="1050" dirty="0">
+                        <a:rPr lang="es-CL" sz="1000" b="1" dirty="0">
                           <a:solidFill>
                             <a:schemeClr val="tx2"/>
                           </a:solidFill>
                         </a:rPr>
-                        <a:t>Programada desde la semana 6</a:t>
+                        <a:t>100</a:t>
                       </a:r>
                     </a:p>
                   </a:txBody>
                   <a:tcPr marL="45720" marR="45720" marT="27432" marB="27432" anchor="ctr">
                     <a:solidFill>
-                      <a:srgbClr val="F2F2F2"/>
+                      <a:srgbClr val="D9D9D9"/>
                     </a:solidFill>
                   </a:tcPr>
                 </a:tc>
@@ -23934,8 +17778,8 @@
         </p:nvSpPr>
         <p:spPr>
           <a:xfrm>
-            <a:off x="323528" y="5250000"/>
-            <a:ext cx="8352928" cy="1000000"/>
+            <a:off x="4576456" y="2800000"/>
+            <a:ext cx="4100000" cy="2200000"/>
           </a:xfrm>
           <a:prstGeom prst="rect">
             <a:avLst/>
@@ -23953,46 +17797,241 @@
               <a:buChar char="q"/>
             </a:pPr>
             <a:r>
-              <a:rPr lang="es-CL" sz="1250" dirty="0">
+              <a:rPr lang="es-CL" sz="1150" b="1" dirty="0">
                 <a:solidFill>
                   <a:schemeClr val="tx2"/>
                 </a:solidFill>
               </a:rPr>
-              <a:t>El flujo levantado fue revisado con el </a:t>
-            </a:r>
-            <a:r>
-              <a:rPr lang="es-CL" sz="1250" b="1" dirty="0">
+              <a:t>Cobertura de trazabilidad: 222 de 234 pasos, 94,9 %.</a:t>
+            </a:r>
+            <a:r>
+              <a:rPr lang="es-CL" sz="1150" dirty="0">
                 <a:solidFill>
                   <a:schemeClr val="tx2"/>
                 </a:solidFill>
               </a:rPr>
-              <a:t>líder de mejora continua</a:t>
-            </a:r>
-            <a:r>
-              <a:rPr lang="es-CL" sz="1250" dirty="0">
+              <a:t> El remanente son brechas identificadas y asignadas a un rol, no tramos desconocidos.</a:t>
+            </a:r>
+            <a:endParaRPr lang="es-CL" sz="1150"/>
+          </a:p>
+          <a:p>
+            <a:pPr marL="228600" indent="-228600">
+              <a:spcBef>
+                <a:spcPts val="400"/>
+              </a:spcBef>
+              <a:buFont typeface="Wingdings" pitchFamily="2" charset="2"/>
+              <a:buChar char="q"/>
+            </a:pPr>
+            <a:r>
+              <a:rPr lang="es-CL" sz="1150" b="1" dirty="0">
                 <a:solidFill>
                   <a:schemeClr val="tx2"/>
                 </a:solidFill>
               </a:rPr>
-              <a:t>: se verificó la continuidad de la cadena y la consistencia de la secuencia entre áreas. La </a:t>
-            </a:r>
-            <a:r>
-              <a:rPr lang="es-CL" sz="1250" b="1" dirty="0">
+              <a:t>CAP: 0 %.</a:t>
+            </a:r>
+            <a:r>
+              <a:rPr lang="es-CL" sz="1150" dirty="0">
                 <a:solidFill>
                   <a:schemeClr val="tx2"/>
                 </a:solidFill>
               </a:rPr>
-              <a:t>validación formal mediante acta</a:t>
-            </a:r>
-            <a:r>
-              <a:rPr lang="es-CL" sz="1250" dirty="0">
+              <a:t> El indicador mide la segmentación en cinco niveles, etapa aún no iniciada.</a:t>
+            </a:r>
+            <a:endParaRPr lang="es-CL" sz="1150"/>
+          </a:p>
+          <a:p>
+            <a:pPr marL="228600" indent="-228600">
+              <a:spcBef>
+                <a:spcPts val="400"/>
+              </a:spcBef>
+              <a:buFont typeface="Wingdings" pitchFamily="2" charset="2"/>
+              <a:buChar char="q"/>
+            </a:pPr>
+            <a:r>
+              <a:rPr lang="es-CL" sz="1150" b="1" dirty="0">
                 <a:solidFill>
                   <a:schemeClr val="tx2"/>
                 </a:solidFill>
               </a:rPr>
-              <a:t> de los dueños de proceso corresponde a A1.6 y está pendiente.</a:t>
-            </a:r>
-            <a:endParaRPr lang="es-CL" sz="1250"/>
+              <a:t>198 elementos</a:t>
+            </a:r>
+            <a:r>
+              <a:rPr lang="es-CL" sz="1150" dirty="0">
+                <a:solidFill>
+                  <a:schemeClr val="tx2"/>
+                </a:solidFill>
+              </a:rPr>
+              <a:t> quedaron asociados a </a:t>
+            </a:r>
+            <a:r>
+              <a:rPr lang="es-CL" sz="1150" b="1" dirty="0">
+                <a:solidFill>
+                  <a:schemeClr val="tx2"/>
+                </a:solidFill>
+              </a:rPr>
+              <a:t>86 códigos</a:t>
+            </a:r>
+            <a:r>
+              <a:rPr lang="es-CL" sz="1150" dirty="0">
+                <a:solidFill>
+                  <a:schemeClr val="tx2"/>
+                </a:solidFill>
+              </a:rPr>
+              <a:t> del APQC PCF, categoría 7.</a:t>
+            </a:r>
+            <a:endParaRPr lang="es-CL" sz="1150"/>
+          </a:p>
+        </p:txBody>
+      </p:sp>
+      <p:sp>
+        <p:nvSpPr>
+          <p:cNvPr id="10" name="9 CuadroTexto"/>
+          <p:cNvSpPr txBox="1"/>
+          <p:nvPr/>
+        </p:nvSpPr>
+        <p:spPr>
+          <a:xfrm>
+            <a:off x="323528" y="5100000"/>
+            <a:ext cx="8352928" cy="1500000"/>
+          </a:xfrm>
+          <a:prstGeom prst="rect">
+            <a:avLst/>
+          </a:prstGeom>
+          <a:noFill/>
+        </p:spPr>
+        <p:txBody>
+          <a:bodyPr wrap="square" lIns="91396" tIns="45697" rIns="91396" bIns="45697" rtlCol="0">
+            <a:spAutoFit/>
+          </a:bodyPr>
+          <a:lstStyle/>
+          <a:p>
+            <a:r>
+              <a:rPr lang="es-CL" sz="1300" b="1" dirty="0">
+                <a:solidFill>
+                  <a:srgbClr val="1F497D">
+                    <a:lumMod val="75000"/>
+                  </a:srgbClr>
+                </a:solidFill>
+              </a:rPr>
+              <a:t>Hallazgos</a:t>
+            </a:r>
+            <a:endParaRPr lang="es-CL" sz="1300"/>
+          </a:p>
+          <a:p>
+            <a:pPr marL="228600" indent="-228600">
+              <a:buFont typeface="Wingdings" pitchFamily="2" charset="2"/>
+              <a:buChar char="q"/>
+            </a:pPr>
+            <a:r>
+              <a:rPr lang="es-CL" sz="1150" b="1" dirty="0">
+                <a:solidFill>
+                  <a:schemeClr val="tx2"/>
+                </a:solidFill>
+              </a:rPr>
+              <a:t>36 pasos</a:t>
+            </a:r>
+            <a:r>
+              <a:rPr lang="es-CL" sz="1150" dirty="0">
+                <a:solidFill>
+                  <a:schemeClr val="tx2"/>
+                </a:solidFill>
+              </a:rPr>
+              <a:t> que la organización ejecuta habitualmente </a:t>
+            </a:r>
+            <a:r>
+              <a:rPr lang="es-CL" sz="1150" b="1" dirty="0">
+                <a:solidFill>
+                  <a:schemeClr val="tx2"/>
+                </a:solidFill>
+              </a:rPr>
+              <a:t>no constan en ningún procedimiento vigente</a:t>
+            </a:r>
+            <a:r>
+              <a:rPr lang="es-CL" sz="1150" dirty="0">
+                <a:solidFill>
+                  <a:schemeClr val="tx2"/>
+                </a:solidFill>
+              </a:rPr>
+              <a:t>; su incorporación es un aporte directo del trabajo.</a:t>
+            </a:r>
+            <a:endParaRPr lang="es-CL" sz="1150"/>
+          </a:p>
+          <a:p>
+            <a:pPr marL="228600" indent="-228600">
+              <a:spcBef>
+                <a:spcPts val="300"/>
+              </a:spcBef>
+              <a:buFont typeface="Wingdings" pitchFamily="2" charset="2"/>
+              <a:buChar char="q"/>
+            </a:pPr>
+            <a:r>
+              <a:rPr lang="es-CL" sz="1150" b="1" dirty="0">
+                <a:solidFill>
+                  <a:schemeClr val="tx2"/>
+                </a:solidFill>
+              </a:rPr>
+              <a:t>12 brechas declaradas</a:t>
+            </a:r>
+            <a:r>
+              <a:rPr lang="es-CL" sz="1150" dirty="0">
+                <a:solidFill>
+                  <a:schemeClr val="tx2"/>
+                </a:solidFill>
+              </a:rPr>
+              <a:t>, de las cuales </a:t>
+            </a:r>
+            <a:r>
+              <a:rPr lang="es-CL" sz="1150" b="1" dirty="0">
+                <a:solidFill>
+                  <a:schemeClr val="tx2"/>
+                </a:solidFill>
+              </a:rPr>
+              <a:t>10 se concentran</a:t>
+            </a:r>
+            <a:r>
+              <a:rPr lang="es-CL" sz="1150" dirty="0">
+                <a:solidFill>
+                  <a:schemeClr val="tx2"/>
+                </a:solidFill>
+              </a:rPr>
+              <a:t> en administración de nómina y desvinculación: el cierre del ciclo de vida del trabajador es el tramo menos documentado.</a:t>
+            </a:r>
+            <a:endParaRPr lang="es-CL" sz="1150"/>
+          </a:p>
+          <a:p>
+            <a:pPr marL="228600" indent="-228600">
+              <a:spcBef>
+                <a:spcPts val="300"/>
+              </a:spcBef>
+              <a:buFont typeface="Wingdings" pitchFamily="2" charset="2"/>
+              <a:buChar char="q"/>
+            </a:pPr>
+            <a:r>
+              <a:rPr lang="es-CL" sz="1150" dirty="0">
+                <a:solidFill>
+                  <a:schemeClr val="tx2"/>
+                </a:solidFill>
+              </a:rPr>
+              <a:t>En </a:t>
+            </a:r>
+            <a:r>
+              <a:rPr lang="es-CL" sz="1150" b="1" dirty="0">
+                <a:solidFill>
+                  <a:schemeClr val="tx2"/>
+                </a:solidFill>
+              </a:rPr>
+              <a:t>8 de las 12</a:t>
+            </a:r>
+            <a:r>
+              <a:rPr lang="es-CL" sz="1150" dirty="0">
+                <a:solidFill>
+                  <a:schemeClr val="tx2"/>
+                </a:solidFill>
+              </a:rPr>
+              <a:t> brechas el APQC PCF no desciende a un nivel accionable, de modo que el marco no sustituye el levantamiento en terreno.</a:t>
+            </a:r>
+            <a:endParaRPr lang="es-CL" sz="1150"/>
           </a:p>
         </p:txBody>
       </p:sp>
